--- a/static/manuali/presentazione-struttura-sito.pptx
+++ b/static/manuali/presentazione-struttura-sito.pptx
@@ -6762,7 +6762,7 @@
         <p:spPr>
           <a:xfrm>
             <a:off x="777240" y="1965960"/>
-            <a:ext cx="5221224" cy="1792223"/>
+            <a:ext cx="10607040" cy="603503"/>
           </a:xfrm>
           <a:prstGeom prst="roundRect">
             <a:avLst/>
@@ -6813,8 +6813,8 @@
         </p:nvSpPr>
         <p:spPr>
           <a:xfrm>
-            <a:off x="960120" y="3063239"/>
-            <a:ext cx="4855464" cy="512063"/>
+            <a:off x="1856231" y="1965960"/>
+            <a:ext cx="9372600" cy="603503"/>
           </a:xfrm>
           <a:prstGeom prst="rect">
             <a:avLst/>
@@ -6822,18 +6822,18 @@
           <a:noFill/>
         </p:spPr>
         <p:txBody>
-          <a:bodyPr wrap="square" anchor="t" lIns="45720" rIns="45720" tIns="18288" bIns="18288">
+          <a:bodyPr wrap="square" anchor="ctr" lIns="45720" rIns="45720" tIns="18288" bIns="18288">
             <a:spAutoFit/>
           </a:bodyPr>
           <a:lstStyle/>
           <a:p>
-            <a:pPr algn="ctr">
+            <a:pPr algn="l">
               <a:lnSpc>
-                <a:spcPct val="112000"/>
+                <a:spcPct val="110000"/>
               </a:lnSpc>
             </a:pPr>
             <a:r>
-              <a:rPr sz="1400" b="0" i="0">
+              <a:rPr sz="1550" b="0" i="0">
                 <a:solidFill>
                   <a:srgbClr val="1A1A1A"/>
                 </a:solidFill>
@@ -6852,8 +6852,8 @@
         </p:nvSpPr>
         <p:spPr>
           <a:xfrm>
-            <a:off x="3086100" y="2231136"/>
-            <a:ext cx="603504" cy="603504"/>
+            <a:off x="1069848" y="2011680"/>
+            <a:ext cx="512064" cy="512064"/>
           </a:xfrm>
           <a:prstGeom prst="ellipse">
             <a:avLst/>
@@ -6904,8 +6904,8 @@
         </p:blipFill>
         <p:spPr>
           <a:xfrm>
-            <a:off x="3218870" y="2363906"/>
-            <a:ext cx="337962" cy="337962"/>
+            <a:off x="1182502" y="2124334"/>
+            <a:ext cx="286755" cy="286755"/>
           </a:xfrm>
           <a:prstGeom prst="rect">
             <a:avLst/>
@@ -6920,8 +6920,8 @@
         </p:nvSpPr>
         <p:spPr>
           <a:xfrm>
-            <a:off x="6163055" y="1965960"/>
-            <a:ext cx="5221224" cy="1792223"/>
+            <a:off x="777240" y="2752344"/>
+            <a:ext cx="10607040" cy="603503"/>
           </a:xfrm>
           <a:prstGeom prst="roundRect">
             <a:avLst/>
@@ -6972,8 +6972,8 @@
         </p:nvSpPr>
         <p:spPr>
           <a:xfrm>
-            <a:off x="6345936" y="3063239"/>
-            <a:ext cx="4855464" cy="512063"/>
+            <a:off x="1856231" y="2752344"/>
+            <a:ext cx="9372600" cy="603503"/>
           </a:xfrm>
           <a:prstGeom prst="rect">
             <a:avLst/>
@@ -6981,18 +6981,18 @@
           <a:noFill/>
         </p:spPr>
         <p:txBody>
-          <a:bodyPr wrap="square" anchor="t" lIns="45720" rIns="45720" tIns="18288" bIns="18288">
+          <a:bodyPr wrap="square" anchor="ctr" lIns="45720" rIns="45720" tIns="18288" bIns="18288">
             <a:spAutoFit/>
           </a:bodyPr>
           <a:lstStyle/>
           <a:p>
-            <a:pPr algn="ctr">
+            <a:pPr algn="l">
               <a:lnSpc>
-                <a:spcPct val="112000"/>
+                <a:spcPct val="110000"/>
               </a:lnSpc>
             </a:pPr>
             <a:r>
-              <a:rPr sz="1400" b="0" i="0">
+              <a:rPr sz="1550" b="0" i="0">
                 <a:solidFill>
                   <a:srgbClr val="1A1A1A"/>
                 </a:solidFill>
@@ -7011,8 +7011,8 @@
         </p:nvSpPr>
         <p:spPr>
           <a:xfrm>
-            <a:off x="8471915" y="2231136"/>
-            <a:ext cx="603504" cy="603504"/>
+            <a:off x="1069848" y="2798063"/>
+            <a:ext cx="512064" cy="512064"/>
           </a:xfrm>
           <a:prstGeom prst="ellipse">
             <a:avLst/>
@@ -7063,8 +7063,8 @@
         </p:blipFill>
         <p:spPr>
           <a:xfrm>
-            <a:off x="8604686" y="2363906"/>
-            <a:ext cx="337962" cy="337962"/>
+            <a:off x="1182502" y="2910718"/>
+            <a:ext cx="286755" cy="286755"/>
           </a:xfrm>
           <a:prstGeom prst="rect">
             <a:avLst/>
@@ -7079,8 +7079,8 @@
         </p:nvSpPr>
         <p:spPr>
           <a:xfrm>
-            <a:off x="777240" y="3922775"/>
-            <a:ext cx="5221224" cy="1792223"/>
+            <a:off x="777240" y="3538727"/>
+            <a:ext cx="10607040" cy="603503"/>
           </a:xfrm>
           <a:prstGeom prst="roundRect">
             <a:avLst/>
@@ -7131,8 +7131,8 @@
         </p:nvSpPr>
         <p:spPr>
           <a:xfrm>
-            <a:off x="960120" y="5020055"/>
-            <a:ext cx="4855464" cy="512063"/>
+            <a:off x="1856231" y="3538727"/>
+            <a:ext cx="9372600" cy="603503"/>
           </a:xfrm>
           <a:prstGeom prst="rect">
             <a:avLst/>
@@ -7140,24 +7140,24 @@
           <a:noFill/>
         </p:spPr>
         <p:txBody>
-          <a:bodyPr wrap="square" anchor="t" lIns="45720" rIns="45720" tIns="18288" bIns="18288">
+          <a:bodyPr wrap="square" anchor="ctr" lIns="45720" rIns="45720" tIns="18288" bIns="18288">
             <a:spAutoFit/>
           </a:bodyPr>
           <a:lstStyle/>
           <a:p>
-            <a:pPr algn="ctr">
+            <a:pPr algn="l">
               <a:lnSpc>
-                <a:spcPct val="112000"/>
+                <a:spcPct val="110000"/>
               </a:lnSpc>
             </a:pPr>
             <a:r>
-              <a:rPr sz="1400" b="0" i="0">
+              <a:rPr sz="1550" b="0" i="0">
                 <a:solidFill>
                   <a:srgbClr val="1A1A1A"/>
                 </a:solidFill>
                 <a:latin typeface="Calibri"/>
               </a:rPr>
-              <a:t>EFFIS / Copernicus per gli incendi; ARPA Lazio per la qualità dell'aria.</a:t>
+              <a:t>EFFIS / Copernicus per gli incendi; ARPA Lazio per la qualità dell'aria regionale; Copernicus CAMS per la qualità dell'aria su scala europea.</a:t>
             </a:r>
           </a:p>
         </p:txBody>
@@ -7170,8 +7170,8 @@
         </p:nvSpPr>
         <p:spPr>
           <a:xfrm>
-            <a:off x="3086100" y="4187951"/>
-            <a:ext cx="603504" cy="603504"/>
+            <a:off x="1069848" y="3584447"/>
+            <a:ext cx="512064" cy="512064"/>
           </a:xfrm>
           <a:prstGeom prst="ellipse">
             <a:avLst/>
@@ -7222,8 +7222,8 @@
         </p:blipFill>
         <p:spPr>
           <a:xfrm>
-            <a:off x="3218870" y="4320722"/>
-            <a:ext cx="337962" cy="337962"/>
+            <a:off x="1182502" y="3697102"/>
+            <a:ext cx="286755" cy="286755"/>
           </a:xfrm>
           <a:prstGeom prst="rect">
             <a:avLst/>
@@ -7238,8 +7238,8 @@
         </p:nvSpPr>
         <p:spPr>
           <a:xfrm>
-            <a:off x="6163055" y="3922775"/>
-            <a:ext cx="5221224" cy="1792223"/>
+            <a:off x="777240" y="4325112"/>
+            <a:ext cx="10607040" cy="603503"/>
           </a:xfrm>
           <a:prstGeom prst="roundRect">
             <a:avLst/>
@@ -7290,8 +7290,8 @@
         </p:nvSpPr>
         <p:spPr>
           <a:xfrm>
-            <a:off x="6345936" y="5020055"/>
-            <a:ext cx="4855464" cy="512063"/>
+            <a:off x="1856231" y="4325112"/>
+            <a:ext cx="9372600" cy="603503"/>
           </a:xfrm>
           <a:prstGeom prst="rect">
             <a:avLst/>
@@ -7299,24 +7299,24 @@
           <a:noFill/>
         </p:spPr>
         <p:txBody>
-          <a:bodyPr wrap="square" anchor="t" lIns="45720" rIns="45720" tIns="18288" bIns="18288">
+          <a:bodyPr wrap="square" anchor="ctr" lIns="45720" rIns="45720" tIns="18288" bIns="18288">
             <a:spAutoFit/>
           </a:bodyPr>
           <a:lstStyle/>
           <a:p>
-            <a:pPr algn="ctr">
+            <a:pPr algn="l">
               <a:lnSpc>
-                <a:spcPct val="112000"/>
+                <a:spcPct val="110000"/>
               </a:lnSpc>
             </a:pPr>
             <a:r>
-              <a:rPr sz="1400" b="0" i="0">
+              <a:rPr sz="1550" b="0" i="0">
                 <a:solidFill>
                   <a:srgbClr val="1A1A1A"/>
                 </a:solidFill>
                 <a:latin typeface="Calibri"/>
               </a:rPr>
-              <a:t>Rischio sismico comunale dalla piattaforma SicuroPiù.</a:t>
+              <a:t>Copernicus EMS Rapid Mapping per le attivazioni di mappatura emergenze in Europa.</a:t>
             </a:r>
           </a:p>
         </p:txBody>
@@ -7329,8 +7329,8 @@
         </p:nvSpPr>
         <p:spPr>
           <a:xfrm>
-            <a:off x="8471915" y="4187951"/>
-            <a:ext cx="603504" cy="603504"/>
+            <a:off x="1069848" y="4370831"/>
+            <a:ext cx="512064" cy="512064"/>
           </a:xfrm>
           <a:prstGeom prst="ellipse">
             <a:avLst/>
@@ -7381,8 +7381,8 @@
         </p:blipFill>
         <p:spPr>
           <a:xfrm>
-            <a:off x="8604686" y="4320722"/>
-            <a:ext cx="337962" cy="337962"/>
+            <a:off x="1182502" y="4483486"/>
+            <a:ext cx="286755" cy="286755"/>
           </a:xfrm>
           <a:prstGeom prst="rect">
             <a:avLst/>
@@ -7391,7 +7391,166 @@
       </p:pic>
       <p:sp>
         <p:nvSpPr>
-          <p:cNvPr id="27" name="TextBox 26"/>
+          <p:cNvPr id="27" name="Rounded Rectangle 26"/>
+          <p:cNvSpPr/>
+          <p:nvPr/>
+        </p:nvSpPr>
+        <p:spPr>
+          <a:xfrm>
+            <a:off x="777240" y="5111496"/>
+            <a:ext cx="10607040" cy="603503"/>
+          </a:xfrm>
+          <a:prstGeom prst="roundRect">
+            <a:avLst/>
+          </a:prstGeom>
+          <a:solidFill>
+            <a:srgbClr val="F4F7FB"/>
+          </a:solidFill>
+          <a:ln w="12700">
+            <a:solidFill>
+              <a:srgbClr val="D8DEE4"/>
+            </a:solidFill>
+          </a:ln>
+          <a:effectLst>
+            <a:outerShdw blurRad="50800" dist="25400" dir="5400000" rotWithShape="0">
+              <a:srgbClr val="001A33">
+                <a:alpha val="42000"/>
+              </a:srgbClr>
+            </a:outerShdw>
+          </a:effectLst>
+        </p:spPr>
+        <p:style>
+          <a:lnRef idx="1">
+            <a:schemeClr val="accent1"/>
+          </a:lnRef>
+          <a:fillRef idx="3">
+            <a:schemeClr val="accent1"/>
+          </a:fillRef>
+          <a:effectRef idx="2">
+            <a:schemeClr val="accent1"/>
+          </a:effectRef>
+          <a:fontRef idx="minor">
+            <a:schemeClr val="lt1"/>
+          </a:fontRef>
+        </p:style>
+        <p:txBody>
+          <a:bodyPr rtlCol="0" anchor="ctr" wrap="square" lIns="109728" rIns="109728" tIns="36576" bIns="36576"/>
+          <a:lstStyle/>
+          <a:p>
+            <a:pPr algn="ctr"/>
+          </a:p>
+        </p:txBody>
+      </p:sp>
+      <p:sp>
+        <p:nvSpPr>
+          <p:cNvPr id="28" name="TextBox 27"/>
+          <p:cNvSpPr txBox="1"/>
+          <p:nvPr/>
+        </p:nvSpPr>
+        <p:spPr>
+          <a:xfrm>
+            <a:off x="1856231" y="5111496"/>
+            <a:ext cx="9372600" cy="603503"/>
+          </a:xfrm>
+          <a:prstGeom prst="rect">
+            <a:avLst/>
+          </a:prstGeom>
+          <a:noFill/>
+        </p:spPr>
+        <p:txBody>
+          <a:bodyPr wrap="square" anchor="ctr" lIns="45720" rIns="45720" tIns="18288" bIns="18288">
+            <a:spAutoFit/>
+          </a:bodyPr>
+          <a:lstStyle/>
+          <a:p>
+            <a:pPr algn="l">
+              <a:lnSpc>
+                <a:spcPct val="110000"/>
+              </a:lnSpc>
+            </a:pPr>
+            <a:r>
+              <a:rPr sz="1550" b="0" i="0">
+                <a:solidFill>
+                  <a:srgbClr val="1A1A1A"/>
+                </a:solidFill>
+                <a:latin typeface="Calibri"/>
+              </a:rPr>
+              <a:t>Rischio sismico comunale dalla piattaforma SicuroPiù.</a:t>
+            </a:r>
+          </a:p>
+        </p:txBody>
+      </p:sp>
+      <p:sp>
+        <p:nvSpPr>
+          <p:cNvPr id="29" name="Oval 28"/>
+          <p:cNvSpPr/>
+          <p:nvPr/>
+        </p:nvSpPr>
+        <p:spPr>
+          <a:xfrm>
+            <a:off x="1069848" y="5157216"/>
+            <a:ext cx="512064" cy="512064"/>
+          </a:xfrm>
+          <a:prstGeom prst="ellipse">
+            <a:avLst/>
+          </a:prstGeom>
+          <a:solidFill>
+            <a:srgbClr val="7C3AED"/>
+          </a:solidFill>
+          <a:ln>
+            <a:noFill/>
+          </a:ln>
+          <a:effectLst/>
+        </p:spPr>
+        <p:style>
+          <a:lnRef idx="1">
+            <a:schemeClr val="accent1"/>
+          </a:lnRef>
+          <a:fillRef idx="3">
+            <a:schemeClr val="accent1"/>
+          </a:fillRef>
+          <a:effectRef idx="2">
+            <a:schemeClr val="accent1"/>
+          </a:effectRef>
+          <a:fontRef idx="minor">
+            <a:schemeClr val="lt1"/>
+          </a:fontRef>
+        </p:style>
+        <p:txBody>
+          <a:bodyPr rtlCol="0" anchor="ctr" wrap="square" lIns="109728" rIns="109728" tIns="36576" bIns="36576"/>
+          <a:lstStyle/>
+          <a:p>
+            <a:pPr algn="ctr"/>
+          </a:p>
+        </p:txBody>
+      </p:sp>
+      <p:pic>
+        <p:nvPicPr>
+          <p:cNvPr id="30" name="Picture 29" descr="database-fill-gear_ffffff.png"/>
+          <p:cNvPicPr>
+            <a:picLocks noChangeAspect="1"/>
+          </p:cNvPicPr>
+          <p:nvPr/>
+        </p:nvPicPr>
+        <p:blipFill>
+          <a:blip r:embed="rId4"/>
+          <a:stretch>
+            <a:fillRect/>
+          </a:stretch>
+        </p:blipFill>
+        <p:spPr>
+          <a:xfrm>
+            <a:off x="1182502" y="5269870"/>
+            <a:ext cx="286755" cy="286755"/>
+          </a:xfrm>
+          <a:prstGeom prst="rect">
+            <a:avLst/>
+          </a:prstGeom>
+        </p:spPr>
+      </p:pic>
+      <p:sp>
+        <p:nvSpPr>
+          <p:cNvPr id="31" name="TextBox 30"/>
           <p:cNvSpPr txBox="1"/>
           <p:nvPr/>
         </p:nvSpPr>
@@ -7427,14 +7586,14 @@
                 </a:solidFill>
                 <a:latin typeface="Calibri"/>
               </a:rPr>
-              <a:t>INGV · DPC · ItaliaMeteo · EUMETSAT · Copernicus · ARPA Lazio · EUCENTRE/ReLUIS</a:t>
-            </a:r>
-          </a:p>
-        </p:txBody>
-      </p:sp>
-      <p:sp>
-        <p:nvSpPr>
-          <p:cNvPr id="28" name="TextBox 27"/>
+              <a:t>INGV · DPC · ItaliaMeteo · EUMETSAT · Copernicus (CAMS · EMS · EFFIS) · ARPA Lazio · EUCENTRE/ReLUIS</a:t>
+            </a:r>
+          </a:p>
+        </p:txBody>
+      </p:sp>
+      <p:sp>
+        <p:nvSpPr>
+          <p:cNvPr id="32" name="TextBox 31"/>
           <p:cNvSpPr txBox="1"/>
           <p:nvPr/>
         </p:nvSpPr>
@@ -7470,7 +7629,7 @@
       </p:sp>
       <p:sp>
         <p:nvSpPr>
-          <p:cNvPr id="29" name="TextBox 28"/>
+          <p:cNvPr id="33" name="TextBox 32"/>
           <p:cNvSpPr txBox="1"/>
           <p:nvPr/>
         </p:nvSpPr>

--- a/static/manuali/presentazione-struttura-sito.pptx
+++ b/static/manuali/presentazione-struttura-sito.pptx
@@ -3281,7 +3281,7 @@
                 <a:solidFill>
                   <a:srgbClr val="FFBE2E"/>
                 </a:solidFill>
-                <a:latin typeface="Calibri"/>
+                <a:latin typeface="Liberation Sans"/>
               </a:rPr>
               <a:t>PROTEZIONE CIVILE — GENZANO DI ROMA</a:t>
             </a:r>
@@ -3315,7 +3315,7 @@
                 <a:solidFill>
                   <a:srgbClr val="FFFFFF"/>
                 </a:solidFill>
-                <a:latin typeface="Calibri"/>
+                <a:latin typeface="Liberation Sans"/>
               </a:rPr>
               <a:t>Il sito istituzionale:
 struttura e contenuti</a:t>
@@ -3394,7 +3394,7 @@
                 <a:solidFill>
                   <a:srgbClr val="CFDDEC"/>
                 </a:solidFill>
-                <a:latin typeface="Calibri"/>
+                <a:latin typeface="Liberation Sans"/>
               </a:rPr>
               <a:t>Gruppo Comunale Volontari di Protezione Civile di Genzano di Roma</a:t>
             </a:r>
@@ -3558,7 +3558,7 @@
                 <a:solidFill>
                   <a:srgbClr val="003366"/>
                 </a:solidFill>
-                <a:latin typeface="Calibri"/>
+                <a:latin typeface="Liberation Sans"/>
               </a:rPr>
               <a:t>Allerte meteo e codici colore</a:t>
             </a:r>
@@ -3680,7 +3680,7 @@
                 <a:solidFill>
                   <a:srgbClr val="5A6B7B"/>
                 </a:solidFill>
-                <a:latin typeface="Calibri"/>
+                <a:latin typeface="Liberation Sans"/>
               </a:rPr>
               <a:t>Gruppo Comunale Volontari di PC · Genzano di Roma</a:t>
             </a:r>
@@ -3715,7 +3715,7 @@
                 <a:solidFill>
                   <a:srgbClr val="5A6B7B"/>
                 </a:solidFill>
-                <a:latin typeface="Calibri"/>
+                <a:latin typeface="Liberation Sans"/>
               </a:rPr>
               <a:t>10</a:t>
             </a:r>
@@ -3750,7 +3750,7 @@
                 <a:solidFill>
                   <a:srgbClr val="003366"/>
                 </a:solidFill>
-                <a:latin typeface="Calibri"/>
+                <a:latin typeface="Liberation Sans"/>
                 <a:hlinkClick r:id="rId3" action="ppaction://hlinksldjump"/>
               </a:rPr>
               <a:t>« Torna all'agenda</a:t>
@@ -3785,7 +3785,7 @@
                 <a:solidFill>
                   <a:srgbClr val="1A1A1A"/>
                 </a:solidFill>
-                <a:latin typeface="Calibri"/>
+                <a:latin typeface="Liberation Sans"/>
               </a:rPr>
               <a:t>Quattro livelli ufficiali del Centro Funzionale Regionale del Lazio. La previsione (allerta) è distinta dall'evento in corso (emergenza).</a:t>
             </a:r>
@@ -3838,7 +3838,7 @@
                 <a:solidFill>
                   <a:srgbClr val="FFFFFF"/>
                 </a:solidFill>
-                <a:latin typeface="Calibri"/>
+                <a:latin typeface="Liberation Sans"/>
               </a:rPr>
               <a:t>VERDE    </a:t>
             </a:r>
@@ -3847,7 +3847,7 @@
                 <a:solidFill>
                   <a:srgbClr val="FFFFFF"/>
                 </a:solidFill>
-                <a:latin typeface="Calibri"/>
+                <a:latin typeface="Liberation Sans"/>
               </a:rPr>
               <a:t>Nessuna allerta — situazione ordinaria</a:t>
             </a:r>
@@ -3900,7 +3900,7 @@
                 <a:solidFill>
                   <a:srgbClr val="001A33"/>
                 </a:solidFill>
-                <a:latin typeface="Calibri"/>
+                <a:latin typeface="Liberation Sans"/>
               </a:rPr>
               <a:t>GIALLO    </a:t>
             </a:r>
@@ -3909,7 +3909,7 @@
                 <a:solidFill>
                   <a:srgbClr val="001A33"/>
                 </a:solidFill>
-                <a:latin typeface="Calibri"/>
+                <a:latin typeface="Liberation Sans"/>
               </a:rPr>
               <a:t>Allerta ordinaria — fenomeni di intensità moderata</a:t>
             </a:r>
@@ -3962,7 +3962,7 @@
                 <a:solidFill>
                   <a:srgbClr val="FFFFFF"/>
                 </a:solidFill>
-                <a:latin typeface="Calibri"/>
+                <a:latin typeface="Liberation Sans"/>
               </a:rPr>
               <a:t>ARANCIONE    </a:t>
             </a:r>
@@ -3971,7 +3971,7 @@
                 <a:solidFill>
                   <a:srgbClr val="FFFFFF"/>
                 </a:solidFill>
-                <a:latin typeface="Calibri"/>
+                <a:latin typeface="Liberation Sans"/>
               </a:rPr>
               <a:t>Allerta elevata — fenomeni intensi, effetti rilevanti</a:t>
             </a:r>
@@ -4024,7 +4024,7 @@
                 <a:solidFill>
                   <a:srgbClr val="FFFFFF"/>
                 </a:solidFill>
-                <a:latin typeface="Calibri"/>
+                <a:latin typeface="Liberation Sans"/>
               </a:rPr>
               <a:t>ROSSO    </a:t>
             </a:r>
@@ -4033,7 +4033,7 @@
                 <a:solidFill>
                   <a:srgbClr val="FFFFFF"/>
                 </a:solidFill>
-                <a:latin typeface="Calibri"/>
+                <a:latin typeface="Liberation Sans"/>
               </a:rPr>
               <a:t>Allerta massima — fenomeni molto intensi, rischio elevato</a:t>
             </a:r>
@@ -4067,7 +4067,7 @@
                 <a:solidFill>
                   <a:srgbClr val="5A6B7B"/>
                 </a:solidFill>
-                <a:latin typeface="Calibri"/>
+                <a:latin typeface="Liberation Sans"/>
               </a:rPr>
               <a:t>Fonte: Centro Funzionale Regionale del Lazio · standard ISO 22324.</a:t>
             </a:r>
@@ -4102,7 +4102,7 @@
                 <a:solidFill>
                   <a:srgbClr val="003366"/>
                 </a:solidFill>
-                <a:latin typeface="Calibri"/>
+                <a:latin typeface="Liberation Sans"/>
                 <a:hlinkClick r:id="rId4" action="ppaction://hlinksldjump"/>
               </a:rPr>
               <a:t>‹</a:t>
@@ -4138,7 +4138,7 @@
                 <a:solidFill>
                   <a:srgbClr val="003366"/>
                 </a:solidFill>
-                <a:latin typeface="Calibri"/>
+                <a:latin typeface="Liberation Sans"/>
                 <a:hlinkClick r:id="rId5" action="ppaction://hlinksldjump"/>
               </a:rPr>
               <a:t>›</a:t>
@@ -4303,7 +4303,7 @@
                 <a:solidFill>
                   <a:srgbClr val="003366"/>
                 </a:solidFill>
-                <a:latin typeface="Calibri"/>
+                <a:latin typeface="Liberation Sans"/>
               </a:rPr>
               <a:t>Modalità emergenza del sito</a:t>
             </a:r>
@@ -4425,7 +4425,7 @@
                 <a:solidFill>
                   <a:srgbClr val="5A6B7B"/>
                 </a:solidFill>
-                <a:latin typeface="Calibri"/>
+                <a:latin typeface="Liberation Sans"/>
               </a:rPr>
               <a:t>Gruppo Comunale Volontari di PC · Genzano di Roma</a:t>
             </a:r>
@@ -4460,7 +4460,7 @@
                 <a:solidFill>
                   <a:srgbClr val="5A6B7B"/>
                 </a:solidFill>
-                <a:latin typeface="Calibri"/>
+                <a:latin typeface="Liberation Sans"/>
               </a:rPr>
               <a:t>11</a:t>
             </a:r>
@@ -4495,7 +4495,7 @@
                 <a:solidFill>
                   <a:srgbClr val="003366"/>
                 </a:solidFill>
-                <a:latin typeface="Calibri"/>
+                <a:latin typeface="Liberation Sans"/>
                 <a:hlinkClick r:id="rId3" action="ppaction://hlinksldjump"/>
               </a:rPr>
               <a:t>« Torna all'agenda</a:t>
@@ -4587,7 +4587,7 @@
                 <a:solidFill>
                   <a:srgbClr val="1A1A1A"/>
                 </a:solidFill>
-                <a:latin typeface="Calibri"/>
+                <a:latin typeface="Liberation Sans"/>
               </a:rPr>
               <a:t>In emergenza il sito mostra un avviso ben visibile su ogni pagina.</a:t>
             </a:r>
@@ -4746,7 +4746,7 @@
                 <a:solidFill>
                   <a:srgbClr val="1A1A1A"/>
                 </a:solidFill>
-                <a:latin typeface="Calibri"/>
+                <a:latin typeface="Liberation Sans"/>
               </a:rPr>
               <a:t>Pagina di emergenza ultraleggera per rete debole o congestionata.</a:t>
             </a:r>
@@ -4905,7 +4905,7 @@
                 <a:solidFill>
                   <a:srgbClr val="1A1A1A"/>
                 </a:solidFill>
-                <a:latin typeface="Calibri"/>
+                <a:latin typeface="Liberation Sans"/>
               </a:rPr>
               <a:t>Informazioni essenziali e numeri utili messi in primo piano.</a:t>
             </a:r>
@@ -5064,7 +5064,7 @@
                 <a:solidFill>
                   <a:srgbClr val="1A1A1A"/>
                 </a:solidFill>
-                <a:latin typeface="Calibri"/>
+                <a:latin typeface="Liberation Sans"/>
               </a:rPr>
               <a:t>Progettata per i momenti di reale criticità.</a:t>
             </a:r>
@@ -5167,7 +5167,7 @@
                 <a:solidFill>
                   <a:srgbClr val="003366"/>
                 </a:solidFill>
-                <a:latin typeface="Calibri"/>
+                <a:latin typeface="Liberation Sans"/>
                 <a:hlinkClick r:id="rId5" action="ppaction://hlinksldjump"/>
               </a:rPr>
               <a:t>‹</a:t>
@@ -5203,7 +5203,7 @@
                 <a:solidFill>
                   <a:srgbClr val="003366"/>
                 </a:solidFill>
-                <a:latin typeface="Calibri"/>
+                <a:latin typeface="Liberation Sans"/>
                 <a:hlinkClick r:id="rId6" action="ppaction://hlinksldjump"/>
               </a:rPr>
               <a:t>›</a:t>
@@ -5368,7 +5368,7 @@
                 <a:solidFill>
                   <a:srgbClr val="003366"/>
                 </a:solidFill>
-                <a:latin typeface="Calibri"/>
+                <a:latin typeface="Liberation Sans"/>
               </a:rPr>
               <a:t>Cruscotto del territorio — dati in tempo reale</a:t>
             </a:r>
@@ -5490,7 +5490,7 @@
                 <a:solidFill>
                   <a:srgbClr val="5A6B7B"/>
                 </a:solidFill>
-                <a:latin typeface="Calibri"/>
+                <a:latin typeface="Liberation Sans"/>
               </a:rPr>
               <a:t>Gruppo Comunale Volontari di PC · Genzano di Roma</a:t>
             </a:r>
@@ -5525,7 +5525,7 @@
                 <a:solidFill>
                   <a:srgbClr val="5A6B7B"/>
                 </a:solidFill>
-                <a:latin typeface="Calibri"/>
+                <a:latin typeface="Liberation Sans"/>
               </a:rPr>
               <a:t>12</a:t>
             </a:r>
@@ -5560,7 +5560,7 @@
                 <a:solidFill>
                   <a:srgbClr val="003366"/>
                 </a:solidFill>
-                <a:latin typeface="Calibri"/>
+                <a:latin typeface="Liberation Sans"/>
                 <a:hlinkClick r:id="rId3" action="ppaction://hlinksldjump"/>
               </a:rPr>
               <a:t>« Torna all'agenda</a:t>
@@ -5620,7 +5620,7 @@
                 <a:solidFill>
                   <a:srgbClr val="003366"/>
                 </a:solidFill>
-                <a:latin typeface="Calibri"/>
+                <a:latin typeface="Liberation Sans"/>
               </a:rPr>
               <a:t>Scientifiche</a:t>
             </a:r>
@@ -5636,7 +5636,7 @@
                 <a:solidFill>
                   <a:srgbClr val="1A1A1A"/>
                 </a:solidFill>
-                <a:latin typeface="Calibri"/>
+                <a:latin typeface="Liberation Sans"/>
               </a:rPr>
               <a:t>INGV (sismica, vulcani)</a:t>
             </a:r>
@@ -5739,7 +5739,7 @@
                 <a:solidFill>
                   <a:srgbClr val="003366"/>
                 </a:solidFill>
-                <a:latin typeface="Calibri"/>
+                <a:latin typeface="Liberation Sans"/>
               </a:rPr>
               <a:t>Meteo e satellite</a:t>
             </a:r>
@@ -5755,7 +5755,7 @@
                 <a:solidFill>
                   <a:srgbClr val="1A1A1A"/>
                 </a:solidFill>
-                <a:latin typeface="Calibri"/>
+                <a:latin typeface="Liberation Sans"/>
               </a:rPr>
               <a:t>ItaliaMeteo, EUMETSAT, Copernicus</a:t>
             </a:r>
@@ -5858,7 +5858,7 @@
                 <a:solidFill>
                   <a:srgbClr val="003366"/>
                 </a:solidFill>
-                <a:latin typeface="Calibri"/>
+                <a:latin typeface="Liberation Sans"/>
               </a:rPr>
               <a:t>Istituzionali</a:t>
             </a:r>
@@ -5874,7 +5874,7 @@
                 <a:solidFill>
                   <a:srgbClr val="1A1A1A"/>
                 </a:solidFill>
-                <a:latin typeface="Calibri"/>
+                <a:latin typeface="Liberation Sans"/>
               </a:rPr>
               <a:t>DPC, ARPA Lazio</a:t>
             </a:r>
@@ -5981,7 +5981,7 @@
                 <a:solidFill>
                   <a:srgbClr val="FFFFFF"/>
                 </a:solidFill>
-                <a:latin typeface="Calibri"/>
+                <a:latin typeface="Liberation Sans"/>
               </a:rPr>
               <a:t>Cruscotto del territorio</a:t>
             </a:r>
@@ -5997,7 +5997,7 @@
                 <a:solidFill>
                   <a:srgbClr val="CFDDEC"/>
                 </a:solidFill>
-                <a:latin typeface="Calibri"/>
+                <a:latin typeface="Liberation Sans"/>
               </a:rPr>
               <a:t>Aggregazione privacy-first</a:t>
             </a:r>
@@ -6013,7 +6013,7 @@
                 <a:solidFill>
                   <a:srgbClr val="CFDDEC"/>
                 </a:solidFill>
-                <a:latin typeface="Calibri"/>
+                <a:latin typeface="Liberation Sans"/>
               </a:rPr>
               <a:t>Dati aperti (CC BY 4.0)</a:t>
             </a:r>
@@ -6114,7 +6114,7 @@
                 <a:solidFill>
                   <a:srgbClr val="FFFFFF"/>
                 </a:solidFill>
-                <a:latin typeface="Calibri"/>
+                <a:latin typeface="Liberation Sans"/>
               </a:rPr>
               <a:t>Verde — nessuna allerta</a:t>
             </a:r>
@@ -6171,7 +6171,7 @@
                 <a:solidFill>
                   <a:srgbClr val="001A33"/>
                 </a:solidFill>
-                <a:latin typeface="Calibri"/>
+                <a:latin typeface="Liberation Sans"/>
               </a:rPr>
               <a:t>Giallo — ordinaria</a:t>
             </a:r>
@@ -6228,7 +6228,7 @@
                 <a:solidFill>
                   <a:srgbClr val="FFFFFF"/>
                 </a:solidFill>
-                <a:latin typeface="Calibri"/>
+                <a:latin typeface="Liberation Sans"/>
               </a:rPr>
               <a:t>Arancione — elevata</a:t>
             </a:r>
@@ -6285,7 +6285,7 @@
                 <a:solidFill>
                   <a:srgbClr val="FFFFFF"/>
                 </a:solidFill>
-                <a:latin typeface="Calibri"/>
+                <a:latin typeface="Liberation Sans"/>
               </a:rPr>
               <a:t>Rosso — massima</a:t>
             </a:r>
@@ -6319,7 +6319,7 @@
                 <a:solidFill>
                   <a:srgbClr val="5A6B7B"/>
                 </a:solidFill>
-                <a:latin typeface="Calibri"/>
+                <a:latin typeface="Liberation Sans"/>
               </a:rPr>
               <a:t>Fonti: INGV · DPC · ItaliaMeteo · EUMETSAT · Copernicus · ARPA Lazio. Codici colore: Centro Funzionale Regionale del Lazio (ISO 22324).</a:t>
             </a:r>
@@ -6354,7 +6354,7 @@
                 <a:solidFill>
                   <a:srgbClr val="003366"/>
                 </a:solidFill>
-                <a:latin typeface="Calibri"/>
+                <a:latin typeface="Liberation Sans"/>
                 <a:hlinkClick r:id="rId4" action="ppaction://hlinksldjump"/>
               </a:rPr>
               <a:t>‹</a:t>
@@ -6390,7 +6390,7 @@
                 <a:solidFill>
                   <a:srgbClr val="003366"/>
                 </a:solidFill>
-                <a:latin typeface="Calibri"/>
+                <a:latin typeface="Liberation Sans"/>
                 <a:hlinkClick r:id="rId5" action="ppaction://hlinksldjump"/>
               </a:rPr>
               <a:t>›</a:t>
@@ -6555,7 +6555,7 @@
                 <a:solidFill>
                   <a:srgbClr val="003366"/>
                 </a:solidFill>
-                <a:latin typeface="Calibri"/>
+                <a:latin typeface="Liberation Sans"/>
               </a:rPr>
               <a:t>Cruscotto — le fonti dei dati</a:t>
             </a:r>
@@ -6677,7 +6677,7 @@
                 <a:solidFill>
                   <a:srgbClr val="5A6B7B"/>
                 </a:solidFill>
-                <a:latin typeface="Calibri"/>
+                <a:latin typeface="Liberation Sans"/>
               </a:rPr>
               <a:t>Gruppo Comunale Volontari di PC · Genzano di Roma</a:t>
             </a:r>
@@ -6712,7 +6712,7 @@
                 <a:solidFill>
                   <a:srgbClr val="5A6B7B"/>
                 </a:solidFill>
-                <a:latin typeface="Calibri"/>
+                <a:latin typeface="Liberation Sans"/>
               </a:rPr>
               <a:t>13</a:t>
             </a:r>
@@ -6747,7 +6747,7 @@
                 <a:solidFill>
                   <a:srgbClr val="003366"/>
                 </a:solidFill>
-                <a:latin typeface="Calibri"/>
+                <a:latin typeface="Liberation Sans"/>
                 <a:hlinkClick r:id="rId3" action="ppaction://hlinksldjump"/>
               </a:rPr>
               <a:t>« Torna all'agenda</a:t>
@@ -6839,7 +6839,7 @@
                 <a:solidFill>
                   <a:srgbClr val="1A1A1A"/>
                 </a:solidFill>
-                <a:latin typeface="Calibri"/>
+                <a:latin typeface="Liberation Sans"/>
               </a:rPr>
               <a:t>INGV per la sismicità e i vulcani; Dipartimento della Protezione Civile per il radar pioggia.</a:t>
             </a:r>
@@ -6998,7 +6998,7 @@
                 <a:solidFill>
                   <a:srgbClr val="1A1A1A"/>
                 </a:solidFill>
-                <a:latin typeface="Calibri"/>
+                <a:latin typeface="Liberation Sans"/>
               </a:rPr>
               <a:t>ItaliaMeteo (modello ICON-2I) ed EUMETSAT per previsioni e satellite.</a:t>
             </a:r>
@@ -7157,7 +7157,7 @@
                 <a:solidFill>
                   <a:srgbClr val="1A1A1A"/>
                 </a:solidFill>
-                <a:latin typeface="Calibri"/>
+                <a:latin typeface="Liberation Sans"/>
               </a:rPr>
               <a:t>EFFIS / Copernicus per gli incendi; ARPA Lazio per la qualità dell'aria regionale; Copernicus CAMS per la qualità dell'aria su scala europea.</a:t>
             </a:r>
@@ -7316,7 +7316,7 @@
                 <a:solidFill>
                   <a:srgbClr val="1A1A1A"/>
                 </a:solidFill>
-                <a:latin typeface="Calibri"/>
+                <a:latin typeface="Liberation Sans"/>
               </a:rPr>
               <a:t>Copernicus EMS Rapid Mapping per le attivazioni di mappatura emergenze in Europa.</a:t>
             </a:r>
@@ -7475,7 +7475,7 @@
                 <a:solidFill>
                   <a:srgbClr val="1A1A1A"/>
                 </a:solidFill>
-                <a:latin typeface="Calibri"/>
+                <a:latin typeface="Liberation Sans"/>
               </a:rPr>
               <a:t>Rischio sismico comunale dalla piattaforma SicuroPiù.</a:t>
             </a:r>
@@ -7577,7 +7577,7 @@
                 <a:solidFill>
                   <a:srgbClr val="003366"/>
                 </a:solidFill>
-                <a:latin typeface="Calibri"/>
+                <a:latin typeface="Liberation Sans"/>
               </a:rPr>
               <a:t>Fonti e standard: </a:t>
             </a:r>
@@ -7586,7 +7586,7 @@
                 <a:solidFill>
                   <a:srgbClr val="5A6B7B"/>
                 </a:solidFill>
-                <a:latin typeface="Calibri"/>
+                <a:latin typeface="Liberation Sans"/>
               </a:rPr>
               <a:t>INGV · DPC · ItaliaMeteo · EUMETSAT · Copernicus (CAMS · EMS · EFFIS) · ARPA Lazio · EUCENTRE/ReLUIS</a:t>
             </a:r>
@@ -7621,7 +7621,7 @@
                 <a:solidFill>
                   <a:srgbClr val="003366"/>
                 </a:solidFill>
-                <a:latin typeface="Calibri"/>
+                <a:latin typeface="Liberation Sans"/>
                 <a:hlinkClick r:id="rId5" action="ppaction://hlinksldjump"/>
               </a:rPr>
               <a:t>‹</a:t>
@@ -7657,7 +7657,7 @@
                 <a:solidFill>
                   <a:srgbClr val="003366"/>
                 </a:solidFill>
-                <a:latin typeface="Calibri"/>
+                <a:latin typeface="Liberation Sans"/>
                 <a:hlinkClick r:id="rId6" action="ppaction://hlinksldjump"/>
               </a:rPr>
               <a:t>›</a:t>
@@ -7822,7 +7822,7 @@
                 <a:solidFill>
                   <a:srgbClr val="003366"/>
                 </a:solidFill>
-                <a:latin typeface="Calibri"/>
+                <a:latin typeface="Liberation Sans"/>
               </a:rPr>
               <a:t>Rischi e prevenzione — copertura del territorio</a:t>
             </a:r>
@@ -7944,7 +7944,7 @@
                 <a:solidFill>
                   <a:srgbClr val="5A6B7B"/>
                 </a:solidFill>
-                <a:latin typeface="Calibri"/>
+                <a:latin typeface="Liberation Sans"/>
               </a:rPr>
               <a:t>Gruppo Comunale Volontari di PC · Genzano di Roma</a:t>
             </a:r>
@@ -7979,7 +7979,7 @@
                 <a:solidFill>
                   <a:srgbClr val="5A6B7B"/>
                 </a:solidFill>
-                <a:latin typeface="Calibri"/>
+                <a:latin typeface="Liberation Sans"/>
               </a:rPr>
               <a:t>14</a:t>
             </a:r>
@@ -8014,7 +8014,7 @@
                 <a:solidFill>
                   <a:srgbClr val="003366"/>
                 </a:solidFill>
-                <a:latin typeface="Calibri"/>
+                <a:latin typeface="Liberation Sans"/>
                 <a:hlinkClick r:id="rId3" action="ppaction://hlinksldjump"/>
               </a:rPr>
               <a:t>« Torna all'agenda</a:t>
@@ -8049,7 +8049,7 @@
                 <a:solidFill>
                   <a:srgbClr val="1A1A1A"/>
                 </a:solidFill>
-                <a:latin typeface="Calibri"/>
+                <a:latin typeface="Liberation Sans"/>
               </a:rPr>
               <a:t>Il sito tratta sistematicamente i rischi dei Castelli Romani. Ogni scheda segue la stessa struttura: prima, durante, dopo, cosa non fare, chi chiamare.</a:t>
             </a:r>
@@ -8112,7 +8112,7 @@
                 <a:solidFill>
                   <a:srgbClr val="FFFFFF"/>
                 </a:solidFill>
-                <a:latin typeface="Calibri"/>
+                <a:latin typeface="Liberation Sans"/>
               </a:rPr>
               <a:t>Sismico</a:t>
             </a:r>
@@ -8175,7 +8175,7 @@
                 <a:solidFill>
                   <a:srgbClr val="FFFFFF"/>
                 </a:solidFill>
-                <a:latin typeface="Calibri"/>
+                <a:latin typeface="Liberation Sans"/>
               </a:rPr>
               <a:t>Idrogeologico</a:t>
             </a:r>
@@ -8238,7 +8238,7 @@
                 <a:solidFill>
                   <a:srgbClr val="FFFFFF"/>
                 </a:solidFill>
-                <a:latin typeface="Calibri"/>
+                <a:latin typeface="Liberation Sans"/>
               </a:rPr>
               <a:t>Incendi boschivi</a:t>
             </a:r>
@@ -8301,7 +8301,7 @@
                 <a:solidFill>
                   <a:srgbClr val="FFFFFF"/>
                 </a:solidFill>
-                <a:latin typeface="Calibri"/>
+                <a:latin typeface="Liberation Sans"/>
               </a:rPr>
               <a:t>Ondate di calore</a:t>
             </a:r>
@@ -8364,7 +8364,7 @@
                 <a:solidFill>
                   <a:srgbClr val="FFFFFF"/>
                 </a:solidFill>
-                <a:latin typeface="Calibri"/>
+                <a:latin typeface="Liberation Sans"/>
               </a:rPr>
               <a:t>Vento forte</a:t>
             </a:r>
@@ -8427,7 +8427,7 @@
                 <a:solidFill>
                   <a:srgbClr val="FFFFFF"/>
                 </a:solidFill>
-                <a:latin typeface="Calibri"/>
+                <a:latin typeface="Liberation Sans"/>
               </a:rPr>
               <a:t>Temporali intensi</a:t>
             </a:r>
@@ -8490,7 +8490,7 @@
                 <a:solidFill>
                   <a:srgbClr val="FFFFFF"/>
                 </a:solidFill>
-                <a:latin typeface="Calibri"/>
+                <a:latin typeface="Liberation Sans"/>
               </a:rPr>
               <a:t>Blackout</a:t>
             </a:r>
@@ -8553,7 +8553,7 @@
                 <a:solidFill>
                   <a:srgbClr val="FFFFFF"/>
                 </a:solidFill>
-                <a:latin typeface="Calibri"/>
+                <a:latin typeface="Liberation Sans"/>
               </a:rPr>
               <a:t>Vulcanico (Colli Albani)</a:t>
             </a:r>
@@ -8587,7 +8587,7 @@
                 <a:solidFill>
                   <a:srgbClr val="5A6B7B"/>
                 </a:solidFill>
-                <a:latin typeface="Calibri"/>
+                <a:latin typeface="Liberation Sans"/>
               </a:rPr>
               <a:t>Fonti: DPC «Io non rischio» · INGV · ISPRA · CNR.</a:t>
             </a:r>
@@ -8622,7 +8622,7 @@
                 <a:solidFill>
                   <a:srgbClr val="003366"/>
                 </a:solidFill>
-                <a:latin typeface="Calibri"/>
+                <a:latin typeface="Liberation Sans"/>
                 <a:hlinkClick r:id="rId4" action="ppaction://hlinksldjump"/>
               </a:rPr>
               <a:t>‹</a:t>
@@ -8658,7 +8658,7 @@
                 <a:solidFill>
                   <a:srgbClr val="003366"/>
                 </a:solidFill>
-                <a:latin typeface="Calibri"/>
+                <a:latin typeface="Liberation Sans"/>
                 <a:hlinkClick r:id="rId5" action="ppaction://hlinksldjump"/>
               </a:rPr>
               <a:t>›</a:t>
@@ -8823,7 +8823,7 @@
                 <a:solidFill>
                   <a:srgbClr val="003366"/>
                 </a:solidFill>
-                <a:latin typeface="Calibri"/>
+                <a:latin typeface="Liberation Sans"/>
               </a:rPr>
               <a:t>Cartografia e aree di emergenza</a:t>
             </a:r>
@@ -8945,7 +8945,7 @@
                 <a:solidFill>
                   <a:srgbClr val="5A6B7B"/>
                 </a:solidFill>
-                <a:latin typeface="Calibri"/>
+                <a:latin typeface="Liberation Sans"/>
               </a:rPr>
               <a:t>Gruppo Comunale Volontari di PC · Genzano di Roma</a:t>
             </a:r>
@@ -8980,7 +8980,7 @@
                 <a:solidFill>
                   <a:srgbClr val="5A6B7B"/>
                 </a:solidFill>
-                <a:latin typeface="Calibri"/>
+                <a:latin typeface="Liberation Sans"/>
               </a:rPr>
               <a:t>15</a:t>
             </a:r>
@@ -9015,7 +9015,7 @@
                 <a:solidFill>
                   <a:srgbClr val="003366"/>
                 </a:solidFill>
-                <a:latin typeface="Calibri"/>
+                <a:latin typeface="Liberation Sans"/>
                 <a:hlinkClick r:id="rId3" action="ppaction://hlinksldjump"/>
               </a:rPr>
               <a:t>« Torna all'agenda</a:t>
@@ -9107,7 +9107,7 @@
                 <a:solidFill>
                   <a:srgbClr val="1A1A1A"/>
                 </a:solidFill>
-                <a:latin typeface="Calibri"/>
+                <a:latin typeface="Liberation Sans"/>
               </a:rPr>
               <a:t>Mappa delle aree di attesa e di emergenza comunali.</a:t>
             </a:r>
@@ -9266,7 +9266,7 @@
                 <a:solidFill>
                   <a:srgbClr val="1A1A1A"/>
                 </a:solidFill>
-                <a:latin typeface="Calibri"/>
+                <a:latin typeface="Liberation Sans"/>
               </a:rPr>
               <a:t>Riferimento diretto al Piano di Emergenza Comunale.</a:t>
             </a:r>
@@ -9425,7 +9425,7 @@
                 <a:solidFill>
                   <a:srgbClr val="1A1A1A"/>
                 </a:solidFill>
-                <a:latin typeface="Calibri"/>
+                <a:latin typeface="Liberation Sans"/>
               </a:rPr>
               <a:t>Orientamento immediato per il cittadino.</a:t>
             </a:r>
@@ -9528,7 +9528,7 @@
                 <a:solidFill>
                   <a:srgbClr val="003366"/>
                 </a:solidFill>
-                <a:latin typeface="Calibri"/>
+                <a:latin typeface="Liberation Sans"/>
                 <a:hlinkClick r:id="rId5" action="ppaction://hlinksldjump"/>
               </a:rPr>
               <a:t>‹</a:t>
@@ -9564,7 +9564,7 @@
                 <a:solidFill>
                   <a:srgbClr val="003366"/>
                 </a:solidFill>
-                <a:latin typeface="Calibri"/>
+                <a:latin typeface="Liberation Sans"/>
                 <a:hlinkClick r:id="rId6" action="ppaction://hlinksldjump"/>
               </a:rPr>
               <a:t>›</a:t>
@@ -9729,7 +9729,7 @@
                 <a:solidFill>
                   <a:srgbClr val="003366"/>
                 </a:solidFill>
-                <a:latin typeface="Calibri"/>
+                <a:latin typeface="Liberation Sans"/>
               </a:rPr>
               <a:t>Numeri utili</a:t>
             </a:r>
@@ -9851,7 +9851,7 @@
                 <a:solidFill>
                   <a:srgbClr val="5A6B7B"/>
                 </a:solidFill>
-                <a:latin typeface="Calibri"/>
+                <a:latin typeface="Liberation Sans"/>
               </a:rPr>
               <a:t>Gruppo Comunale Volontari di PC · Genzano di Roma</a:t>
             </a:r>
@@ -9886,7 +9886,7 @@
                 <a:solidFill>
                   <a:srgbClr val="5A6B7B"/>
                 </a:solidFill>
-                <a:latin typeface="Calibri"/>
+                <a:latin typeface="Liberation Sans"/>
               </a:rPr>
               <a:t>16</a:t>
             </a:r>
@@ -9921,7 +9921,7 @@
                 <a:solidFill>
                   <a:srgbClr val="003366"/>
                 </a:solidFill>
-                <a:latin typeface="Calibri"/>
+                <a:latin typeface="Liberation Sans"/>
                 <a:hlinkClick r:id="rId3" action="ppaction://hlinksldjump"/>
               </a:rPr>
               <a:t>« Torna all'agenda</a:t>
@@ -10013,7 +10013,7 @@
                 <a:solidFill>
                   <a:srgbClr val="1A1A1A"/>
                 </a:solidFill>
-                <a:latin typeface="Calibri"/>
+                <a:latin typeface="Liberation Sans"/>
               </a:rPr>
               <a:t>Numero Unico di Emergenza 112 sempre in evidenza.</a:t>
             </a:r>
@@ -10172,7 +10172,7 @@
                 <a:solidFill>
                   <a:srgbClr val="1A1A1A"/>
                 </a:solidFill>
-                <a:latin typeface="Calibri"/>
+                <a:latin typeface="Liberation Sans"/>
               </a:rPr>
               <a:t>Numeri di servizio per le segnalazioni non urgenti.</a:t>
             </a:r>
@@ -10331,7 +10331,7 @@
                 <a:solidFill>
                   <a:srgbClr val="1A1A1A"/>
                 </a:solidFill>
-                <a:latin typeface="Calibri"/>
+                <a:latin typeface="Liberation Sans"/>
               </a:rPr>
               <a:t>Indicazioni chiare su quando e chi chiamare.</a:t>
             </a:r>
@@ -10434,7 +10434,7 @@
                 <a:solidFill>
                   <a:srgbClr val="003366"/>
                 </a:solidFill>
-                <a:latin typeface="Calibri"/>
+                <a:latin typeface="Liberation Sans"/>
                 <a:hlinkClick r:id="rId5" action="ppaction://hlinksldjump"/>
               </a:rPr>
               <a:t>‹</a:t>
@@ -10470,7 +10470,7 @@
                 <a:solidFill>
                   <a:srgbClr val="003366"/>
                 </a:solidFill>
-                <a:latin typeface="Calibri"/>
+                <a:latin typeface="Liberation Sans"/>
                 <a:hlinkClick r:id="rId6" action="ppaction://hlinksldjump"/>
               </a:rPr>
               <a:t>›</a:t>
@@ -10635,7 +10635,7 @@
                 <a:solidFill>
                   <a:srgbClr val="003366"/>
                 </a:solidFill>
-                <a:latin typeface="Calibri"/>
+                <a:latin typeface="Liberation Sans"/>
               </a:rPr>
               <a:t>Piano familiare di emergenza</a:t>
             </a:r>
@@ -10757,7 +10757,7 @@
                 <a:solidFill>
                   <a:srgbClr val="5A6B7B"/>
                 </a:solidFill>
-                <a:latin typeface="Calibri"/>
+                <a:latin typeface="Liberation Sans"/>
               </a:rPr>
               <a:t>Gruppo Comunale Volontari di PC · Genzano di Roma</a:t>
             </a:r>
@@ -10792,7 +10792,7 @@
                 <a:solidFill>
                   <a:srgbClr val="5A6B7B"/>
                 </a:solidFill>
-                <a:latin typeface="Calibri"/>
+                <a:latin typeface="Liberation Sans"/>
               </a:rPr>
               <a:t>17</a:t>
             </a:r>
@@ -10827,7 +10827,7 @@
                 <a:solidFill>
                   <a:srgbClr val="003366"/>
                 </a:solidFill>
-                <a:latin typeface="Calibri"/>
+                <a:latin typeface="Liberation Sans"/>
                 <a:hlinkClick r:id="rId3" action="ppaction://hlinksldjump"/>
               </a:rPr>
               <a:t>« Torna all'agenda</a:t>
@@ -10919,7 +10919,7 @@
                 <a:solidFill>
                   <a:srgbClr val="1A1A1A"/>
                 </a:solidFill>
-                <a:latin typeface="Calibri"/>
+                <a:latin typeface="Liberation Sans"/>
               </a:rPr>
               <a:t>Guida passo-passo per preparare il nucleo domestico.</a:t>
             </a:r>
@@ -11078,7 +11078,7 @@
                 <a:solidFill>
                   <a:srgbClr val="1A1A1A"/>
                 </a:solidFill>
-                <a:latin typeface="Calibri"/>
+                <a:latin typeface="Liberation Sans"/>
               </a:rPr>
               <a:t>Versione compilabile e stampabile.</a:t>
             </a:r>
@@ -11237,7 +11237,7 @@
                 <a:solidFill>
                   <a:srgbClr val="1A1A1A"/>
                 </a:solidFill>
-                <a:latin typeface="Calibri"/>
+                <a:latin typeface="Liberation Sans"/>
               </a:rPr>
               <a:t>Punti di ritrovo, contatti e kit essenziale.</a:t>
             </a:r>
@@ -11340,7 +11340,7 @@
                 <a:solidFill>
                   <a:srgbClr val="003366"/>
                 </a:solidFill>
-                <a:latin typeface="Calibri"/>
+                <a:latin typeface="Liberation Sans"/>
                 <a:hlinkClick r:id="rId5" action="ppaction://hlinksldjump"/>
               </a:rPr>
               <a:t>‹</a:t>
@@ -11376,7 +11376,7 @@
                 <a:solidFill>
                   <a:srgbClr val="003366"/>
                 </a:solidFill>
-                <a:latin typeface="Calibri"/>
+                <a:latin typeface="Liberation Sans"/>
                 <a:hlinkClick r:id="rId6" action="ppaction://hlinksldjump"/>
               </a:rPr>
               <a:t>›</a:t>
@@ -11541,7 +11541,7 @@
                 <a:solidFill>
                   <a:srgbClr val="003366"/>
                 </a:solidFill>
-                <a:latin typeface="Calibri"/>
+                <a:latin typeface="Liberation Sans"/>
               </a:rPr>
               <a:t>Kit pronti per situazioni vulnerabili</a:t>
             </a:r>
@@ -11663,7 +11663,7 @@
                 <a:solidFill>
                   <a:srgbClr val="5A6B7B"/>
                 </a:solidFill>
-                <a:latin typeface="Calibri"/>
+                <a:latin typeface="Liberation Sans"/>
               </a:rPr>
               <a:t>Gruppo Comunale Volontari di PC · Genzano di Roma</a:t>
             </a:r>
@@ -11698,7 +11698,7 @@
                 <a:solidFill>
                   <a:srgbClr val="5A6B7B"/>
                 </a:solidFill>
-                <a:latin typeface="Calibri"/>
+                <a:latin typeface="Liberation Sans"/>
               </a:rPr>
               <a:t>18</a:t>
             </a:r>
@@ -11733,7 +11733,7 @@
                 <a:solidFill>
                   <a:srgbClr val="003366"/>
                 </a:solidFill>
-                <a:latin typeface="Calibri"/>
+                <a:latin typeface="Liberation Sans"/>
                 <a:hlinkClick r:id="rId3" action="ppaction://hlinksldjump"/>
               </a:rPr>
               <a:t>« Torna all'agenda</a:t>
@@ -11825,7 +11825,7 @@
                 <a:solidFill>
                   <a:srgbClr val="1A1A1A"/>
                 </a:solidFill>
-                <a:latin typeface="Calibri"/>
+                <a:latin typeface="Liberation Sans"/>
               </a:rPr>
               <a:t>Schede operative per le categorie fragili: anziani, bambini, persone con disabilità, caregiver e altre.</a:t>
             </a:r>
@@ -11984,7 +11984,7 @@
                 <a:solidFill>
                   <a:srgbClr val="1A1A1A"/>
                 </a:solidFill>
-                <a:latin typeface="Calibri"/>
+                <a:latin typeface="Liberation Sans"/>
               </a:rPr>
               <a:t>Materiali stampabili pronti all'uso.</a:t>
             </a:r>
@@ -12143,7 +12143,7 @@
                 <a:solidFill>
                   <a:srgbClr val="1A1A1A"/>
                 </a:solidFill>
-                <a:latin typeface="Calibri"/>
+                <a:latin typeface="Liberation Sans"/>
               </a:rPr>
               <a:t>Riferimenti a standard internazionali di assistenza umanitaria.</a:t>
             </a:r>
@@ -12245,7 +12245,7 @@
                 <a:solidFill>
                   <a:srgbClr val="003366"/>
                 </a:solidFill>
-                <a:latin typeface="Calibri"/>
+                <a:latin typeface="Liberation Sans"/>
               </a:rPr>
               <a:t>Fonti e standard: </a:t>
             </a:r>
@@ -12254,7 +12254,7 @@
                 <a:solidFill>
                   <a:srgbClr val="5A6B7B"/>
                 </a:solidFill>
-                <a:latin typeface="Calibri"/>
+                <a:latin typeface="Liberation Sans"/>
               </a:rPr>
               <a:t>IFRC · WHO · Sphere Handbook</a:t>
             </a:r>
@@ -12289,7 +12289,7 @@
                 <a:solidFill>
                   <a:srgbClr val="003366"/>
                 </a:solidFill>
-                <a:latin typeface="Calibri"/>
+                <a:latin typeface="Liberation Sans"/>
                 <a:hlinkClick r:id="rId5" action="ppaction://hlinksldjump"/>
               </a:rPr>
               <a:t>‹</a:t>
@@ -12325,7 +12325,7 @@
                 <a:solidFill>
                   <a:srgbClr val="003366"/>
                 </a:solidFill>
-                <a:latin typeface="Calibri"/>
+                <a:latin typeface="Liberation Sans"/>
                 <a:hlinkClick r:id="rId6" action="ppaction://hlinksldjump"/>
               </a:rPr>
               <a:t>›</a:t>
@@ -12490,7 +12490,7 @@
                 <a:solidFill>
                   <a:srgbClr val="003366"/>
                 </a:solidFill>
-                <a:latin typeface="Calibri"/>
+                <a:latin typeface="Liberation Sans"/>
               </a:rPr>
               <a:t>Storia del territorio</a:t>
             </a:r>
@@ -12612,7 +12612,7 @@
                 <a:solidFill>
                   <a:srgbClr val="5A6B7B"/>
                 </a:solidFill>
-                <a:latin typeface="Calibri"/>
+                <a:latin typeface="Liberation Sans"/>
               </a:rPr>
               <a:t>Gruppo Comunale Volontari di PC · Genzano di Roma</a:t>
             </a:r>
@@ -12647,7 +12647,7 @@
                 <a:solidFill>
                   <a:srgbClr val="5A6B7B"/>
                 </a:solidFill>
-                <a:latin typeface="Calibri"/>
+                <a:latin typeface="Liberation Sans"/>
               </a:rPr>
               <a:t>19</a:t>
             </a:r>
@@ -12682,7 +12682,7 @@
                 <a:solidFill>
                   <a:srgbClr val="003366"/>
                 </a:solidFill>
-                <a:latin typeface="Calibri"/>
+                <a:latin typeface="Liberation Sans"/>
                 <a:hlinkClick r:id="rId3" action="ppaction://hlinksldjump"/>
               </a:rPr>
               <a:t>« Torna all'agenda</a:t>
@@ -12774,7 +12774,7 @@
                 <a:solidFill>
                   <a:srgbClr val="1A1A1A"/>
                 </a:solidFill>
-                <a:latin typeface="Calibri"/>
+                <a:latin typeface="Liberation Sans"/>
               </a:rPr>
               <a:t>Cronologia degli eventi rilevanti dei Castelli Romani.</a:t>
             </a:r>
@@ -12933,7 +12933,7 @@
                 <a:solidFill>
                   <a:srgbClr val="1A1A1A"/>
                 </a:solidFill>
-                <a:latin typeface="Calibri"/>
+                <a:latin typeface="Liberation Sans"/>
               </a:rPr>
               <a:t>Ogni voce è corredata da fonte istituzionale.</a:t>
             </a:r>
@@ -13092,7 +13092,7 @@
                 <a:solidFill>
                   <a:srgbClr val="1A1A1A"/>
                 </a:solidFill>
-                <a:latin typeface="Calibri"/>
+                <a:latin typeface="Liberation Sans"/>
               </a:rPr>
               <a:t>La memoria come strumento di consapevolezza del rischio.</a:t>
             </a:r>
@@ -13195,7 +13195,7 @@
                 <a:solidFill>
                   <a:srgbClr val="003366"/>
                 </a:solidFill>
-                <a:latin typeface="Calibri"/>
+                <a:latin typeface="Liberation Sans"/>
                 <a:hlinkClick r:id="rId5" action="ppaction://hlinksldjump"/>
               </a:rPr>
               <a:t>‹</a:t>
@@ -13231,7 +13231,7 @@
                 <a:solidFill>
                   <a:srgbClr val="003366"/>
                 </a:solidFill>
-                <a:latin typeface="Calibri"/>
+                <a:latin typeface="Liberation Sans"/>
                 <a:hlinkClick r:id="rId6" action="ppaction://hlinksldjump"/>
               </a:rPr>
               <a:t>›</a:t>
@@ -13396,7 +13396,7 @@
                 <a:solidFill>
                   <a:srgbClr val="003366"/>
                 </a:solidFill>
-                <a:latin typeface="Calibri"/>
+                <a:latin typeface="Liberation Sans"/>
               </a:rPr>
               <a:t>Agenda</a:t>
             </a:r>
@@ -13474,7 +13474,7 @@
                 <a:solidFill>
                   <a:srgbClr val="5A6B7B"/>
                 </a:solidFill>
-                <a:latin typeface="Calibri"/>
+                <a:latin typeface="Liberation Sans"/>
               </a:rPr>
               <a:t>Le voci sono cliccabili: portano alla sezione corrispondente. Da ogni slide il piè di pagina riporta qui con «Torna all'agenda».</a:t>
             </a:r>
@@ -13552,7 +13552,7 @@
                 <a:solidFill>
                   <a:srgbClr val="5A6B7B"/>
                 </a:solidFill>
-                <a:latin typeface="Calibri"/>
+                <a:latin typeface="Liberation Sans"/>
               </a:rPr>
               <a:t>Gruppo Comunale Volontari di PC · Genzano di Roma</a:t>
             </a:r>
@@ -13587,7 +13587,7 @@
                 <a:solidFill>
                   <a:srgbClr val="5A6B7B"/>
                 </a:solidFill>
-                <a:latin typeface="Calibri"/>
+                <a:latin typeface="Liberation Sans"/>
               </a:rPr>
               <a:t>2</a:t>
             </a:r>
@@ -13650,7 +13650,7 @@
                 <a:solidFill>
                   <a:srgbClr val="FFBE2E"/>
                 </a:solidFill>
-                <a:latin typeface="Calibri"/>
+                <a:latin typeface="Liberation Sans"/>
               </a:rPr>
               <a:t>01   </a:t>
             </a:r>
@@ -13659,7 +13659,7 @@
                 <a:solidFill>
                   <a:srgbClr val="FFFFFF"/>
                 </a:solidFill>
-                <a:latin typeface="Calibri"/>
+                <a:latin typeface="Liberation Sans"/>
               </a:rPr>
               <a:t>Per il Cittadino</a:t>
             </a:r>
@@ -13722,7 +13722,7 @@
                 <a:solidFill>
                   <a:srgbClr val="FFBE2E"/>
                 </a:solidFill>
-                <a:latin typeface="Calibri"/>
+                <a:latin typeface="Liberation Sans"/>
               </a:rPr>
               <a:t>02   </a:t>
             </a:r>
@@ -13731,7 +13731,7 @@
                 <a:solidFill>
                   <a:srgbClr val="FFFFFF"/>
                 </a:solidFill>
-                <a:latin typeface="Calibri"/>
+                <a:latin typeface="Liberation Sans"/>
               </a:rPr>
               <a:t>Per le Scuole</a:t>
             </a:r>
@@ -13794,7 +13794,7 @@
                 <a:solidFill>
                   <a:srgbClr val="FFBE2E"/>
                 </a:solidFill>
-                <a:latin typeface="Calibri"/>
+                <a:latin typeface="Liberation Sans"/>
               </a:rPr>
               <a:t>03   </a:t>
             </a:r>
@@ -13803,7 +13803,7 @@
                 <a:solidFill>
                   <a:srgbClr val="FFFFFF"/>
                 </a:solidFill>
-                <a:latin typeface="Calibri"/>
+                <a:latin typeface="Liberation Sans"/>
               </a:rPr>
               <a:t>Accessibilità e inclusione</a:t>
             </a:r>
@@ -13866,7 +13866,7 @@
                 <a:solidFill>
                   <a:srgbClr val="FFBE2E"/>
                 </a:solidFill>
-                <a:latin typeface="Calibri"/>
+                <a:latin typeface="Liberation Sans"/>
               </a:rPr>
               <a:t>04   </a:t>
             </a:r>
@@ -13875,7 +13875,7 @@
                 <a:solidFill>
                   <a:srgbClr val="FFFFFF"/>
                 </a:solidFill>
-                <a:latin typeface="Calibri"/>
+                <a:latin typeface="Liberation Sans"/>
               </a:rPr>
               <a:t>Volontariato</a:t>
             </a:r>
@@ -13938,7 +13938,7 @@
                 <a:solidFill>
                   <a:srgbClr val="FFBE2E"/>
                 </a:solidFill>
-                <a:latin typeface="Calibri"/>
+                <a:latin typeface="Liberation Sans"/>
               </a:rPr>
               <a:t>05   </a:t>
             </a:r>
@@ -13947,7 +13947,7 @@
                 <a:solidFill>
                   <a:srgbClr val="FFFFFF"/>
                 </a:solidFill>
-                <a:latin typeface="Calibri"/>
+                <a:latin typeface="Liberation Sans"/>
               </a:rPr>
               <a:t>Risorse e trasparenza</a:t>
             </a:r>
@@ -14010,7 +14010,7 @@
                 <a:solidFill>
                   <a:srgbClr val="FFBE2E"/>
                 </a:solidFill>
-                <a:latin typeface="Calibri"/>
+                <a:latin typeface="Liberation Sans"/>
               </a:rPr>
               <a:t>06   </a:t>
             </a:r>
@@ -14019,7 +14019,7 @@
                 <a:solidFill>
                   <a:srgbClr val="FFFFFF"/>
                 </a:solidFill>
-                <a:latin typeface="Calibri"/>
+                <a:latin typeface="Liberation Sans"/>
               </a:rPr>
               <a:t>Comunicazione</a:t>
             </a:r>
@@ -14082,7 +14082,7 @@
                 <a:solidFill>
                   <a:srgbClr val="FFBE2E"/>
                 </a:solidFill>
-                <a:latin typeface="Calibri"/>
+                <a:latin typeface="Liberation Sans"/>
               </a:rPr>
               <a:t>07   </a:t>
             </a:r>
@@ -14091,7 +14091,7 @@
                 <a:solidFill>
                   <a:srgbClr val="FFFFFF"/>
                 </a:solidFill>
-                <a:latin typeface="Calibri"/>
+                <a:latin typeface="Liberation Sans"/>
               </a:rPr>
               <a:t>Infrastruttura, fonti e sicurezza</a:t>
             </a:r>
@@ -14172,7 +14172,7 @@
                 <a:solidFill>
                   <a:srgbClr val="003366"/>
                 </a:solidFill>
-                <a:latin typeface="Calibri"/>
+                <a:latin typeface="Liberation Sans"/>
                 <a:hlinkClick r:id="rId10" action="ppaction://hlinksldjump"/>
               </a:rPr>
               <a:t>‹</a:t>
@@ -14208,7 +14208,7 @@
                 <a:solidFill>
                   <a:srgbClr val="003366"/>
                 </a:solidFill>
-                <a:latin typeface="Calibri"/>
+                <a:latin typeface="Liberation Sans"/>
                 <a:hlinkClick r:id="rId11" action="ppaction://hlinksldjump"/>
               </a:rPr>
               <a:t>›</a:t>
@@ -14373,7 +14373,7 @@
                 <a:solidFill>
                   <a:srgbClr val="FFFFFF"/>
                 </a:solidFill>
-                <a:latin typeface="Calibri"/>
+                <a:latin typeface="Liberation Sans"/>
               </a:rPr>
               <a:t>Per le Scuole</a:t>
             </a:r>
@@ -14407,7 +14407,7 @@
                 <a:solidFill>
                   <a:srgbClr val="FFBE2E"/>
                 </a:solidFill>
-                <a:latin typeface="Calibri"/>
+                <a:latin typeface="Liberation Sans"/>
               </a:rPr>
               <a:t>SEZIONE</a:t>
             </a:r>
@@ -14485,7 +14485,7 @@
                 <a:solidFill>
                   <a:srgbClr val="9DB0C2"/>
                 </a:solidFill>
-                <a:latin typeface="Calibri"/>
+                <a:latin typeface="Liberation Sans"/>
               </a:rPr>
               <a:t>Gruppo Comunale Volontari di PC · Genzano di Roma</a:t>
             </a:r>
@@ -14520,7 +14520,7 @@
                 <a:solidFill>
                   <a:srgbClr val="9DB0C2"/>
                 </a:solidFill>
-                <a:latin typeface="Calibri"/>
+                <a:latin typeface="Liberation Sans"/>
               </a:rPr>
               <a:t>20</a:t>
             </a:r>
@@ -14555,7 +14555,7 @@
                 <a:solidFill>
                   <a:srgbClr val="FFBE2E"/>
                 </a:solidFill>
-                <a:latin typeface="Calibri"/>
+                <a:latin typeface="Liberation Sans"/>
                 <a:hlinkClick r:id="rId3" action="ppaction://hlinksldjump"/>
               </a:rPr>
               <a:t>« Torna all'agenda</a:t>
@@ -14613,7 +14613,7 @@
                 <a:solidFill>
                   <a:srgbClr val="FFBE2E"/>
                 </a:solidFill>
-                <a:latin typeface="Calibri"/>
+                <a:latin typeface="Liberation Sans"/>
               </a:rPr>
               <a:t>01  </a:t>
             </a:r>
@@ -14622,7 +14622,7 @@
                 <a:solidFill>
                   <a:srgbClr val="FFFFFF"/>
                 </a:solidFill>
-                <a:latin typeface="Calibri"/>
+                <a:latin typeface="Liberation Sans"/>
               </a:rPr>
               <a:t>Per il Cittadino</a:t>
             </a:r>
@@ -14675,7 +14675,7 @@
                 <a:solidFill>
                   <a:srgbClr val="001A33"/>
                 </a:solidFill>
-                <a:latin typeface="Calibri"/>
+                <a:latin typeface="Liberation Sans"/>
               </a:rPr>
               <a:t>02  </a:t>
             </a:r>
@@ -14684,7 +14684,7 @@
                 <a:solidFill>
                   <a:srgbClr val="001A33"/>
                 </a:solidFill>
-                <a:latin typeface="Calibri"/>
+                <a:latin typeface="Liberation Sans"/>
               </a:rPr>
               <a:t>Per le Scuole</a:t>
             </a:r>
@@ -14741,7 +14741,7 @@
                 <a:solidFill>
                   <a:srgbClr val="FFBE2E"/>
                 </a:solidFill>
-                <a:latin typeface="Calibri"/>
+                <a:latin typeface="Liberation Sans"/>
               </a:rPr>
               <a:t>03  </a:t>
             </a:r>
@@ -14750,7 +14750,7 @@
                 <a:solidFill>
                   <a:srgbClr val="FFFFFF"/>
                 </a:solidFill>
-                <a:latin typeface="Calibri"/>
+                <a:latin typeface="Liberation Sans"/>
               </a:rPr>
               <a:t>Accessibilità e inclusione</a:t>
             </a:r>
@@ -14807,7 +14807,7 @@
                 <a:solidFill>
                   <a:srgbClr val="FFBE2E"/>
                 </a:solidFill>
-                <a:latin typeface="Calibri"/>
+                <a:latin typeface="Liberation Sans"/>
               </a:rPr>
               <a:t>04  </a:t>
             </a:r>
@@ -14816,7 +14816,7 @@
                 <a:solidFill>
                   <a:srgbClr val="FFFFFF"/>
                 </a:solidFill>
-                <a:latin typeface="Calibri"/>
+                <a:latin typeface="Liberation Sans"/>
               </a:rPr>
               <a:t>Volontariato</a:t>
             </a:r>
@@ -14873,7 +14873,7 @@
                 <a:solidFill>
                   <a:srgbClr val="FFBE2E"/>
                 </a:solidFill>
-                <a:latin typeface="Calibri"/>
+                <a:latin typeface="Liberation Sans"/>
               </a:rPr>
               <a:t>05  </a:t>
             </a:r>
@@ -14882,7 +14882,7 @@
                 <a:solidFill>
                   <a:srgbClr val="FFFFFF"/>
                 </a:solidFill>
-                <a:latin typeface="Calibri"/>
+                <a:latin typeface="Liberation Sans"/>
               </a:rPr>
               <a:t>Risorse e trasparenza</a:t>
             </a:r>
@@ -14939,7 +14939,7 @@
                 <a:solidFill>
                   <a:srgbClr val="FFBE2E"/>
                 </a:solidFill>
-                <a:latin typeface="Calibri"/>
+                <a:latin typeface="Liberation Sans"/>
               </a:rPr>
               <a:t>06  </a:t>
             </a:r>
@@ -14948,7 +14948,7 @@
                 <a:solidFill>
                   <a:srgbClr val="FFFFFF"/>
                 </a:solidFill>
-                <a:latin typeface="Calibri"/>
+                <a:latin typeface="Liberation Sans"/>
               </a:rPr>
               <a:t>Comunicazione</a:t>
             </a:r>
@@ -15005,7 +15005,7 @@
                 <a:solidFill>
                   <a:srgbClr val="FFBE2E"/>
                 </a:solidFill>
-                <a:latin typeface="Calibri"/>
+                <a:latin typeface="Liberation Sans"/>
               </a:rPr>
               <a:t>07  </a:t>
             </a:r>
@@ -15014,7 +15014,7 @@
                 <a:solidFill>
                   <a:srgbClr val="FFFFFF"/>
                 </a:solidFill>
-                <a:latin typeface="Calibri"/>
+                <a:latin typeface="Liberation Sans"/>
               </a:rPr>
               <a:t>Infrastruttura, fonti e sicurezza</a:t>
             </a:r>
@@ -15049,7 +15049,7 @@
                 <a:solidFill>
                   <a:srgbClr val="FFBE2E"/>
                 </a:solidFill>
-                <a:latin typeface="Calibri"/>
+                <a:latin typeface="Liberation Sans"/>
                 <a:hlinkClick r:id="rId10" action="ppaction://hlinksldjump"/>
               </a:rPr>
               <a:t>‹</a:t>
@@ -15085,7 +15085,7 @@
                 <a:solidFill>
                   <a:srgbClr val="FFBE2E"/>
                 </a:solidFill>
-                <a:latin typeface="Calibri"/>
+                <a:latin typeface="Liberation Sans"/>
                 <a:hlinkClick r:id="rId11" action="ppaction://hlinksldjump"/>
               </a:rPr>
               <a:t>›</a:t>
@@ -15250,7 +15250,7 @@
                 <a:solidFill>
                   <a:srgbClr val="003366"/>
                 </a:solidFill>
-                <a:latin typeface="Calibri"/>
+                <a:latin typeface="Liberation Sans"/>
               </a:rPr>
               <a:t>Kit didattici per fascia scolastica</a:t>
             </a:r>
@@ -15372,7 +15372,7 @@
                 <a:solidFill>
                   <a:srgbClr val="5A6B7B"/>
                 </a:solidFill>
-                <a:latin typeface="Calibri"/>
+                <a:latin typeface="Liberation Sans"/>
               </a:rPr>
               <a:t>Gruppo Comunale Volontari di PC · Genzano di Roma</a:t>
             </a:r>
@@ -15407,7 +15407,7 @@
                 <a:solidFill>
                   <a:srgbClr val="5A6B7B"/>
                 </a:solidFill>
-                <a:latin typeface="Calibri"/>
+                <a:latin typeface="Liberation Sans"/>
               </a:rPr>
               <a:t>21</a:t>
             </a:r>
@@ -15442,7 +15442,7 @@
                 <a:solidFill>
                   <a:srgbClr val="003366"/>
                 </a:solidFill>
-                <a:latin typeface="Calibri"/>
+                <a:latin typeface="Liberation Sans"/>
                 <a:hlinkClick r:id="rId3" action="ppaction://hlinksldjump"/>
               </a:rPr>
               <a:t>« Torna all'agenda</a:t>
@@ -15534,7 +15534,7 @@
                 <a:solidFill>
                   <a:srgbClr val="1A1A1A"/>
                 </a:solidFill>
-                <a:latin typeface="Calibri"/>
+                <a:latin typeface="Liberation Sans"/>
               </a:rPr>
               <a:t>Materiali per infanzia, primaria, secondaria di primo e di secondo grado.</a:t>
             </a:r>
@@ -15693,7 +15693,7 @@
                 <a:solidFill>
                   <a:srgbClr val="1A1A1A"/>
                 </a:solidFill>
-                <a:latin typeface="Calibri"/>
+                <a:latin typeface="Liberation Sans"/>
               </a:rPr>
               <a:t>Linguaggio e attività calibrati per ogni età.</a:t>
             </a:r>
@@ -15852,7 +15852,7 @@
                 <a:solidFill>
                   <a:srgbClr val="1A1A1A"/>
                 </a:solidFill>
-                <a:latin typeface="Calibri"/>
+                <a:latin typeface="Liberation Sans"/>
               </a:rPr>
               <a:t>Coerenti con l'insegnamento dell'Educazione Civica.</a:t>
             </a:r>
@@ -15955,7 +15955,7 @@
                 <a:solidFill>
                   <a:srgbClr val="003366"/>
                 </a:solidFill>
-                <a:latin typeface="Calibri"/>
+                <a:latin typeface="Liberation Sans"/>
                 <a:hlinkClick r:id="rId5" action="ppaction://hlinksldjump"/>
               </a:rPr>
               <a:t>‹</a:t>
@@ -15991,7 +15991,7 @@
                 <a:solidFill>
                   <a:srgbClr val="003366"/>
                 </a:solidFill>
-                <a:latin typeface="Calibri"/>
+                <a:latin typeface="Liberation Sans"/>
                 <a:hlinkClick r:id="rId6" action="ppaction://hlinksldjump"/>
               </a:rPr>
               <a:t>›</a:t>
@@ -16156,7 +16156,7 @@
                 <a:solidFill>
                   <a:srgbClr val="003366"/>
                 </a:solidFill>
-                <a:latin typeface="Calibri"/>
+                <a:latin typeface="Liberation Sans"/>
               </a:rPr>
               <a:t>Percorsi didattici ed Educazione Civica</a:t>
             </a:r>
@@ -16278,7 +16278,7 @@
                 <a:solidFill>
                   <a:srgbClr val="5A6B7B"/>
                 </a:solidFill>
-                <a:latin typeface="Calibri"/>
+                <a:latin typeface="Liberation Sans"/>
               </a:rPr>
               <a:t>Gruppo Comunale Volontari di PC · Genzano di Roma</a:t>
             </a:r>
@@ -16313,7 +16313,7 @@
                 <a:solidFill>
                   <a:srgbClr val="5A6B7B"/>
                 </a:solidFill>
-                <a:latin typeface="Calibri"/>
+                <a:latin typeface="Liberation Sans"/>
               </a:rPr>
               <a:t>22</a:t>
             </a:r>
@@ -16348,7 +16348,7 @@
                 <a:solidFill>
                   <a:srgbClr val="003366"/>
                 </a:solidFill>
-                <a:latin typeface="Calibri"/>
+                <a:latin typeface="Liberation Sans"/>
                 <a:hlinkClick r:id="rId3" action="ppaction://hlinksldjump"/>
               </a:rPr>
               <a:t>« Torna all'agenda</a:t>
@@ -16440,7 +16440,7 @@
                 <a:solidFill>
                   <a:srgbClr val="1A1A1A"/>
                 </a:solidFill>
-                <a:latin typeface="Calibri"/>
+                <a:latin typeface="Liberation Sans"/>
               </a:rPr>
               <a:t>Percorsi pronti all'uso per i docenti.</a:t>
             </a:r>
@@ -16599,7 +16599,7 @@
                 <a:solidFill>
                   <a:srgbClr val="1A1A1A"/>
                 </a:solidFill>
-                <a:latin typeface="Calibri"/>
+                <a:latin typeface="Liberation Sans"/>
               </a:rPr>
               <a:t>Collegamento esplicito all'Educazione Civica.</a:t>
             </a:r>
@@ -16758,7 +16758,7 @@
                 <a:solidFill>
                   <a:srgbClr val="1A1A1A"/>
                 </a:solidFill>
-                <a:latin typeface="Calibri"/>
+                <a:latin typeface="Liberation Sans"/>
               </a:rPr>
               <a:t>Obiettivo: cultura della prevenzione fin da piccoli.</a:t>
             </a:r>
@@ -16861,7 +16861,7 @@
                 <a:solidFill>
                   <a:srgbClr val="003366"/>
                 </a:solidFill>
-                <a:latin typeface="Calibri"/>
+                <a:latin typeface="Liberation Sans"/>
                 <a:hlinkClick r:id="rId5" action="ppaction://hlinksldjump"/>
               </a:rPr>
               <a:t>‹</a:t>
@@ -16897,7 +16897,7 @@
                 <a:solidFill>
                   <a:srgbClr val="003366"/>
                 </a:solidFill>
-                <a:latin typeface="Calibri"/>
+                <a:latin typeface="Liberation Sans"/>
                 <a:hlinkClick r:id="rId6" action="ppaction://hlinksldjump"/>
               </a:rPr>
               <a:t>›</a:t>
@@ -17062,7 +17062,7 @@
                 <a:solidFill>
                   <a:srgbClr val="003366"/>
                 </a:solidFill>
-                <a:latin typeface="Calibri"/>
+                <a:latin typeface="Liberation Sans"/>
               </a:rPr>
               <a:t>Schede didattiche stampabili</a:t>
             </a:r>
@@ -17184,7 +17184,7 @@
                 <a:solidFill>
                   <a:srgbClr val="5A6B7B"/>
                 </a:solidFill>
-                <a:latin typeface="Calibri"/>
+                <a:latin typeface="Liberation Sans"/>
               </a:rPr>
               <a:t>Gruppo Comunale Volontari di PC · Genzano di Roma</a:t>
             </a:r>
@@ -17219,7 +17219,7 @@
                 <a:solidFill>
                   <a:srgbClr val="5A6B7B"/>
                 </a:solidFill>
-                <a:latin typeface="Calibri"/>
+                <a:latin typeface="Liberation Sans"/>
               </a:rPr>
               <a:t>23</a:t>
             </a:r>
@@ -17254,7 +17254,7 @@
                 <a:solidFill>
                   <a:srgbClr val="003366"/>
                 </a:solidFill>
-                <a:latin typeface="Calibri"/>
+                <a:latin typeface="Liberation Sans"/>
                 <a:hlinkClick r:id="rId3" action="ppaction://hlinksldjump"/>
               </a:rPr>
               <a:t>« Torna all'agenda</a:t>
@@ -17346,7 +17346,7 @@
                 <a:solidFill>
                   <a:srgbClr val="1A1A1A"/>
                 </a:solidFill>
-                <a:latin typeface="Calibri"/>
+                <a:latin typeface="Liberation Sans"/>
               </a:rPr>
               <a:t>Schede fotocopiabili per le attività in classe.</a:t>
             </a:r>
@@ -17505,7 +17505,7 @@
                 <a:solidFill>
                   <a:srgbClr val="1A1A1A"/>
                 </a:solidFill>
-                <a:latin typeface="Calibri"/>
+                <a:latin typeface="Liberation Sans"/>
               </a:rPr>
               <a:t>Organizzate per livello scolastico.</a:t>
             </a:r>
@@ -17664,7 +17664,7 @@
                 <a:solidFill>
                   <a:srgbClr val="1A1A1A"/>
                 </a:solidFill>
-                <a:latin typeface="Calibri"/>
+                <a:latin typeface="Liberation Sans"/>
               </a:rPr>
               <a:t>Pronte all'uso, scaricabili e riproducibili liberamente.</a:t>
             </a:r>
@@ -17767,7 +17767,7 @@
                 <a:solidFill>
                   <a:srgbClr val="003366"/>
                 </a:solidFill>
-                <a:latin typeface="Calibri"/>
+                <a:latin typeface="Liberation Sans"/>
                 <a:hlinkClick r:id="rId5" action="ppaction://hlinksldjump"/>
               </a:rPr>
               <a:t>‹</a:t>
@@ -17803,7 +17803,7 @@
                 <a:solidFill>
                   <a:srgbClr val="003366"/>
                 </a:solidFill>
-                <a:latin typeface="Calibri"/>
+                <a:latin typeface="Liberation Sans"/>
                 <a:hlinkClick r:id="rId6" action="ppaction://hlinksldjump"/>
               </a:rPr>
               <a:t>›</a:t>
@@ -17968,7 +17968,7 @@
                 <a:solidFill>
                   <a:srgbClr val="003366"/>
                 </a:solidFill>
-                <a:latin typeface="Calibri"/>
+                <a:latin typeface="Liberation Sans"/>
               </a:rPr>
               <a:t>Storie e racconti</a:t>
             </a:r>
@@ -18090,7 +18090,7 @@
                 <a:solidFill>
                   <a:srgbClr val="5A6B7B"/>
                 </a:solidFill>
-                <a:latin typeface="Calibri"/>
+                <a:latin typeface="Liberation Sans"/>
               </a:rPr>
               <a:t>Gruppo Comunale Volontari di PC · Genzano di Roma</a:t>
             </a:r>
@@ -18125,7 +18125,7 @@
                 <a:solidFill>
                   <a:srgbClr val="5A6B7B"/>
                 </a:solidFill>
-                <a:latin typeface="Calibri"/>
+                <a:latin typeface="Liberation Sans"/>
               </a:rPr>
               <a:t>24</a:t>
             </a:r>
@@ -18160,7 +18160,7 @@
                 <a:solidFill>
                   <a:srgbClr val="003366"/>
                 </a:solidFill>
-                <a:latin typeface="Calibri"/>
+                <a:latin typeface="Liberation Sans"/>
                 <a:hlinkClick r:id="rId3" action="ppaction://hlinksldjump"/>
               </a:rPr>
               <a:t>« Torna all'agenda</a:t>
@@ -18252,7 +18252,7 @@
                 <a:solidFill>
                   <a:srgbClr val="1A1A1A"/>
                 </a:solidFill>
-                <a:latin typeface="Calibri"/>
+                <a:latin typeface="Liberation Sans"/>
               </a:rPr>
               <a:t>Narrazioni illustrate sulla sicurezza per i più piccoli.</a:t>
             </a:r>
@@ -18411,7 +18411,7 @@
                 <a:solidFill>
                   <a:srgbClr val="1A1A1A"/>
                 </a:solidFill>
-                <a:latin typeface="Calibri"/>
+                <a:latin typeface="Liberation Sans"/>
               </a:rPr>
               <a:t>Disponibili in lettura accessibile e in ascolto.</a:t>
             </a:r>
@@ -18570,7 +18570,7 @@
                 <a:solidFill>
                   <a:srgbClr val="1A1A1A"/>
                 </a:solidFill>
-                <a:latin typeface="Calibri"/>
+                <a:latin typeface="Liberation Sans"/>
               </a:rPr>
               <a:t>Avvicinano i bambini ai comportamenti corretti con il racconto.</a:t>
             </a:r>
@@ -18673,7 +18673,7 @@
                 <a:solidFill>
                   <a:srgbClr val="003366"/>
                 </a:solidFill>
-                <a:latin typeface="Calibri"/>
+                <a:latin typeface="Liberation Sans"/>
                 <a:hlinkClick r:id="rId5" action="ppaction://hlinksldjump"/>
               </a:rPr>
               <a:t>‹</a:t>
@@ -18709,7 +18709,7 @@
                 <a:solidFill>
                   <a:srgbClr val="003366"/>
                 </a:solidFill>
-                <a:latin typeface="Calibri"/>
+                <a:latin typeface="Liberation Sans"/>
                 <a:hlinkClick r:id="rId6" action="ppaction://hlinksldjump"/>
               </a:rPr>
               <a:t>›</a:t>
@@ -18874,7 +18874,7 @@
                 <a:solidFill>
                   <a:srgbClr val="003366"/>
                 </a:solidFill>
-                <a:latin typeface="Calibri"/>
+                <a:latin typeface="Liberation Sans"/>
               </a:rPr>
               <a:t>Giochi della sicurezza</a:t>
             </a:r>
@@ -18996,7 +18996,7 @@
                 <a:solidFill>
                   <a:srgbClr val="5A6B7B"/>
                 </a:solidFill>
-                <a:latin typeface="Calibri"/>
+                <a:latin typeface="Liberation Sans"/>
               </a:rPr>
               <a:t>Gruppo Comunale Volontari di PC · Genzano di Roma</a:t>
             </a:r>
@@ -19031,7 +19031,7 @@
                 <a:solidFill>
                   <a:srgbClr val="5A6B7B"/>
                 </a:solidFill>
-                <a:latin typeface="Calibri"/>
+                <a:latin typeface="Liberation Sans"/>
               </a:rPr>
               <a:t>25</a:t>
             </a:r>
@@ -19066,7 +19066,7 @@
                 <a:solidFill>
                   <a:srgbClr val="003366"/>
                 </a:solidFill>
-                <a:latin typeface="Calibri"/>
+                <a:latin typeface="Liberation Sans"/>
                 <a:hlinkClick r:id="rId3" action="ppaction://hlinksldjump"/>
               </a:rPr>
               <a:t>« Torna all'agenda</a:t>
@@ -19158,7 +19158,7 @@
                 <a:solidFill>
                   <a:srgbClr val="1A1A1A"/>
                 </a:solidFill>
-                <a:latin typeface="Calibri"/>
+                <a:latin typeface="Liberation Sans"/>
               </a:rPr>
               <a:t>Giochi educativi divisi per fascia d'età.</a:t>
             </a:r>
@@ -19317,7 +19317,7 @@
                 <a:solidFill>
                   <a:srgbClr val="1A1A1A"/>
                 </a:solidFill>
-                <a:latin typeface="Calibri"/>
+                <a:latin typeface="Liberation Sans"/>
               </a:rPr>
               <a:t>I comportamenti corretti si imparano attraverso il gioco.</a:t>
             </a:r>
@@ -19476,7 +19476,7 @@
                 <a:solidFill>
                   <a:srgbClr val="1A1A1A"/>
                 </a:solidFill>
-                <a:latin typeface="Calibri"/>
+                <a:latin typeface="Liberation Sans"/>
               </a:rPr>
               <a:t>Supporto e teoria di rinforzo integrati.</a:t>
             </a:r>
@@ -19579,7 +19579,7 @@
                 <a:solidFill>
                   <a:srgbClr val="003366"/>
                 </a:solidFill>
-                <a:latin typeface="Calibri"/>
+                <a:latin typeface="Liberation Sans"/>
                 <a:hlinkClick r:id="rId5" action="ppaction://hlinksldjump"/>
               </a:rPr>
               <a:t>‹</a:t>
@@ -19615,7 +19615,7 @@
                 <a:solidFill>
                   <a:srgbClr val="003366"/>
                 </a:solidFill>
-                <a:latin typeface="Calibri"/>
+                <a:latin typeface="Liberation Sans"/>
                 <a:hlinkClick r:id="rId6" action="ppaction://hlinksldjump"/>
               </a:rPr>
               <a:t>›</a:t>
@@ -19780,7 +19780,7 @@
                 <a:solidFill>
                   <a:srgbClr val="003366"/>
                 </a:solidFill>
-                <a:latin typeface="Calibri"/>
+                <a:latin typeface="Liberation Sans"/>
               </a:rPr>
               <a:t>Catalogo informativo dei giochi</a:t>
             </a:r>
@@ -19902,7 +19902,7 @@
                 <a:solidFill>
                   <a:srgbClr val="5A6B7B"/>
                 </a:solidFill>
-                <a:latin typeface="Calibri"/>
+                <a:latin typeface="Liberation Sans"/>
               </a:rPr>
               <a:t>Gruppo Comunale Volontari di PC · Genzano di Roma</a:t>
             </a:r>
@@ -19937,7 +19937,7 @@
                 <a:solidFill>
                   <a:srgbClr val="5A6B7B"/>
                 </a:solidFill>
-                <a:latin typeface="Calibri"/>
+                <a:latin typeface="Liberation Sans"/>
               </a:rPr>
               <a:t>26</a:t>
             </a:r>
@@ -19972,7 +19972,7 @@
                 <a:solidFill>
                   <a:srgbClr val="003366"/>
                 </a:solidFill>
-                <a:latin typeface="Calibri"/>
+                <a:latin typeface="Liberation Sans"/>
                 <a:hlinkClick r:id="rId3" action="ppaction://hlinksldjump"/>
               </a:rPr>
               <a:t>« Torna all'agenda</a:t>
@@ -20064,7 +20064,7 @@
                 <a:solidFill>
                   <a:srgbClr val="1A1A1A"/>
                 </a:solidFill>
-                <a:latin typeface="Calibri"/>
+                <a:latin typeface="Liberation Sans"/>
               </a:rPr>
               <a:t>Una scheda dedicata per ogni gioco, divisa per fascia d'età.</a:t>
             </a:r>
@@ -20223,7 +20223,7 @@
                 <a:solidFill>
                   <a:srgbClr val="1A1A1A"/>
                 </a:solidFill>
-                <a:latin typeface="Calibri"/>
+                <a:latin typeface="Liberation Sans"/>
               </a:rPr>
               <a:t>Per ogni gioco: obiettivo didattico, durata, accessibilità e versione interattiva.</a:t>
             </a:r>
@@ -20382,7 +20382,7 @@
                 <a:solidFill>
                   <a:srgbClr val="1A1A1A"/>
                 </a:solidFill>
-                <a:latin typeface="Calibri"/>
+                <a:latin typeface="Liberation Sans"/>
               </a:rPr>
               <a:t>Pensato per docenti, genitori, motori di ricerca e lettori di schermo.</a:t>
             </a:r>
@@ -20484,7 +20484,7 @@
                 <a:solidFill>
                   <a:srgbClr val="003366"/>
                 </a:solidFill>
-                <a:latin typeface="Calibri"/>
+                <a:latin typeface="Liberation Sans"/>
               </a:rPr>
               <a:t>Fonti e standard: </a:t>
             </a:r>
@@ -20493,7 +20493,7 @@
                 <a:solidFill>
                   <a:srgbClr val="5A6B7B"/>
                 </a:solidFill>
-                <a:latin typeface="Calibri"/>
+                <a:latin typeface="Liberation Sans"/>
               </a:rPr>
               <a:t>D.M. 183/2024 (Educazione Civica) · WCAG 2.2 AA</a:t>
             </a:r>
@@ -20528,7 +20528,7 @@
                 <a:solidFill>
                   <a:srgbClr val="003366"/>
                 </a:solidFill>
-                <a:latin typeface="Calibri"/>
+                <a:latin typeface="Liberation Sans"/>
                 <a:hlinkClick r:id="rId5" action="ppaction://hlinksldjump"/>
               </a:rPr>
               <a:t>‹</a:t>
@@ -20564,7 +20564,7 @@
                 <a:solidFill>
                   <a:srgbClr val="003366"/>
                 </a:solidFill>
-                <a:latin typeface="Calibri"/>
+                <a:latin typeface="Liberation Sans"/>
                 <a:hlinkClick r:id="rId6" action="ppaction://hlinksldjump"/>
               </a:rPr>
               <a:t>›</a:t>
@@ -20729,7 +20729,7 @@
                 <a:solidFill>
                   <a:srgbClr val="FFFFFF"/>
                 </a:solidFill>
-                <a:latin typeface="Calibri"/>
+                <a:latin typeface="Liberation Sans"/>
               </a:rPr>
               <a:t>Accessibilità e inclusione</a:t>
             </a:r>
@@ -20763,7 +20763,7 @@
                 <a:solidFill>
                   <a:srgbClr val="FFBE2E"/>
                 </a:solidFill>
-                <a:latin typeface="Calibri"/>
+                <a:latin typeface="Liberation Sans"/>
               </a:rPr>
               <a:t>SEZIONE</a:t>
             </a:r>
@@ -20841,7 +20841,7 @@
                 <a:solidFill>
                   <a:srgbClr val="9DB0C2"/>
                 </a:solidFill>
-                <a:latin typeface="Calibri"/>
+                <a:latin typeface="Liberation Sans"/>
               </a:rPr>
               <a:t>Gruppo Comunale Volontari di PC · Genzano di Roma</a:t>
             </a:r>
@@ -20876,7 +20876,7 @@
                 <a:solidFill>
                   <a:srgbClr val="9DB0C2"/>
                 </a:solidFill>
-                <a:latin typeface="Calibri"/>
+                <a:latin typeface="Liberation Sans"/>
               </a:rPr>
               <a:t>27</a:t>
             </a:r>
@@ -20911,7 +20911,7 @@
                 <a:solidFill>
                   <a:srgbClr val="FFBE2E"/>
                 </a:solidFill>
-                <a:latin typeface="Calibri"/>
+                <a:latin typeface="Liberation Sans"/>
                 <a:hlinkClick r:id="rId3" action="ppaction://hlinksldjump"/>
               </a:rPr>
               <a:t>« Torna all'agenda</a:t>
@@ -20969,7 +20969,7 @@
                 <a:solidFill>
                   <a:srgbClr val="FFBE2E"/>
                 </a:solidFill>
-                <a:latin typeface="Calibri"/>
+                <a:latin typeface="Liberation Sans"/>
               </a:rPr>
               <a:t>01  </a:t>
             </a:r>
@@ -20978,7 +20978,7 @@
                 <a:solidFill>
                   <a:srgbClr val="FFFFFF"/>
                 </a:solidFill>
-                <a:latin typeface="Calibri"/>
+                <a:latin typeface="Liberation Sans"/>
               </a:rPr>
               <a:t>Per il Cittadino</a:t>
             </a:r>
@@ -21035,7 +21035,7 @@
                 <a:solidFill>
                   <a:srgbClr val="FFBE2E"/>
                 </a:solidFill>
-                <a:latin typeface="Calibri"/>
+                <a:latin typeface="Liberation Sans"/>
               </a:rPr>
               <a:t>02  </a:t>
             </a:r>
@@ -21044,7 +21044,7 @@
                 <a:solidFill>
                   <a:srgbClr val="FFFFFF"/>
                 </a:solidFill>
-                <a:latin typeface="Calibri"/>
+                <a:latin typeface="Liberation Sans"/>
               </a:rPr>
               <a:t>Per le Scuole</a:t>
             </a:r>
@@ -21097,7 +21097,7 @@
                 <a:solidFill>
                   <a:srgbClr val="001A33"/>
                 </a:solidFill>
-                <a:latin typeface="Calibri"/>
+                <a:latin typeface="Liberation Sans"/>
               </a:rPr>
               <a:t>03  </a:t>
             </a:r>
@@ -21106,7 +21106,7 @@
                 <a:solidFill>
                   <a:srgbClr val="001A33"/>
                 </a:solidFill>
-                <a:latin typeface="Calibri"/>
+                <a:latin typeface="Liberation Sans"/>
               </a:rPr>
               <a:t>Accessibilità e inclusione</a:t>
             </a:r>
@@ -21163,7 +21163,7 @@
                 <a:solidFill>
                   <a:srgbClr val="FFBE2E"/>
                 </a:solidFill>
-                <a:latin typeface="Calibri"/>
+                <a:latin typeface="Liberation Sans"/>
               </a:rPr>
               <a:t>04  </a:t>
             </a:r>
@@ -21172,7 +21172,7 @@
                 <a:solidFill>
                   <a:srgbClr val="FFFFFF"/>
                 </a:solidFill>
-                <a:latin typeface="Calibri"/>
+                <a:latin typeface="Liberation Sans"/>
               </a:rPr>
               <a:t>Volontariato</a:t>
             </a:r>
@@ -21229,7 +21229,7 @@
                 <a:solidFill>
                   <a:srgbClr val="FFBE2E"/>
                 </a:solidFill>
-                <a:latin typeface="Calibri"/>
+                <a:latin typeface="Liberation Sans"/>
               </a:rPr>
               <a:t>05  </a:t>
             </a:r>
@@ -21238,7 +21238,7 @@
                 <a:solidFill>
                   <a:srgbClr val="FFFFFF"/>
                 </a:solidFill>
-                <a:latin typeface="Calibri"/>
+                <a:latin typeface="Liberation Sans"/>
               </a:rPr>
               <a:t>Risorse e trasparenza</a:t>
             </a:r>
@@ -21295,7 +21295,7 @@
                 <a:solidFill>
                   <a:srgbClr val="FFBE2E"/>
                 </a:solidFill>
-                <a:latin typeface="Calibri"/>
+                <a:latin typeface="Liberation Sans"/>
               </a:rPr>
               <a:t>06  </a:t>
             </a:r>
@@ -21304,7 +21304,7 @@
                 <a:solidFill>
                   <a:srgbClr val="FFFFFF"/>
                 </a:solidFill>
-                <a:latin typeface="Calibri"/>
+                <a:latin typeface="Liberation Sans"/>
               </a:rPr>
               <a:t>Comunicazione</a:t>
             </a:r>
@@ -21361,7 +21361,7 @@
                 <a:solidFill>
                   <a:srgbClr val="FFBE2E"/>
                 </a:solidFill>
-                <a:latin typeface="Calibri"/>
+                <a:latin typeface="Liberation Sans"/>
               </a:rPr>
               <a:t>07  </a:t>
             </a:r>
@@ -21370,7 +21370,7 @@
                 <a:solidFill>
                   <a:srgbClr val="FFFFFF"/>
                 </a:solidFill>
-                <a:latin typeface="Calibri"/>
+                <a:latin typeface="Liberation Sans"/>
               </a:rPr>
               <a:t>Infrastruttura, fonti e sicurezza</a:t>
             </a:r>
@@ -21405,7 +21405,7 @@
                 <a:solidFill>
                   <a:srgbClr val="FFBE2E"/>
                 </a:solidFill>
-                <a:latin typeface="Calibri"/>
+                <a:latin typeface="Liberation Sans"/>
                 <a:hlinkClick r:id="rId10" action="ppaction://hlinksldjump"/>
               </a:rPr>
               <a:t>‹</a:t>
@@ -21441,7 +21441,7 @@
                 <a:solidFill>
                   <a:srgbClr val="FFBE2E"/>
                 </a:solidFill>
-                <a:latin typeface="Calibri"/>
+                <a:latin typeface="Liberation Sans"/>
                 <a:hlinkClick r:id="rId11" action="ppaction://hlinksldjump"/>
               </a:rPr>
               <a:t>›</a:t>
@@ -21606,7 +21606,7 @@
                 <a:solidFill>
                   <a:srgbClr val="003366"/>
                 </a:solidFill>
-                <a:latin typeface="Calibri"/>
+                <a:latin typeface="Liberation Sans"/>
               </a:rPr>
               <a:t>Conformità WCAG 2.2 AA e barra strumenti</a:t>
             </a:r>
@@ -21728,7 +21728,7 @@
                 <a:solidFill>
                   <a:srgbClr val="5A6B7B"/>
                 </a:solidFill>
-                <a:latin typeface="Calibri"/>
+                <a:latin typeface="Liberation Sans"/>
               </a:rPr>
               <a:t>Gruppo Comunale Volontari di PC · Genzano di Roma</a:t>
             </a:r>
@@ -21763,7 +21763,7 @@
                 <a:solidFill>
                   <a:srgbClr val="5A6B7B"/>
                 </a:solidFill>
-                <a:latin typeface="Calibri"/>
+                <a:latin typeface="Liberation Sans"/>
               </a:rPr>
               <a:t>28</a:t>
             </a:r>
@@ -21798,7 +21798,7 @@
                 <a:solidFill>
                   <a:srgbClr val="003366"/>
                 </a:solidFill>
-                <a:latin typeface="Calibri"/>
+                <a:latin typeface="Liberation Sans"/>
                 <a:hlinkClick r:id="rId3" action="ppaction://hlinksldjump"/>
               </a:rPr>
               <a:t>« Torna all'agenda</a:t>
@@ -21890,7 +21890,7 @@
                 <a:solidFill>
                   <a:srgbClr val="1A1A1A"/>
                 </a:solidFill>
-                <a:latin typeface="Calibri"/>
+                <a:latin typeface="Liberation Sans"/>
               </a:rPr>
               <a:t>Sito conforme alle WCAG 2.2 di livello AA.</a:t>
             </a:r>
@@ -22049,7 +22049,7 @@
                 <a:solidFill>
                   <a:srgbClr val="1A1A1A"/>
                 </a:solidFill>
-                <a:latin typeface="Calibri"/>
+                <a:latin typeface="Liberation Sans"/>
               </a:rPr>
               <a:t>Barra strumenti di lettura: dimensione del testo, contrasti, caratteri ad alta leggibilità.</a:t>
             </a:r>
@@ -22208,7 +22208,7 @@
                 <a:solidFill>
                   <a:srgbClr val="1A1A1A"/>
                 </a:solidFill>
-                <a:latin typeface="Calibri"/>
+                <a:latin typeface="Liberation Sans"/>
               </a:rPr>
               <a:t>Pausa delle animazioni, spaziatura ampia, modalità lettura.</a:t>
             </a:r>
@@ -22310,7 +22310,7 @@
                 <a:solidFill>
                   <a:srgbClr val="003366"/>
                 </a:solidFill>
-                <a:latin typeface="Calibri"/>
+                <a:latin typeface="Liberation Sans"/>
               </a:rPr>
               <a:t>Fonti e standard: </a:t>
             </a:r>
@@ -22319,7 +22319,7 @@
                 <a:solidFill>
                   <a:srgbClr val="5A6B7B"/>
                 </a:solidFill>
-                <a:latin typeface="Calibri"/>
+                <a:latin typeface="Liberation Sans"/>
               </a:rPr>
               <a:t>W3C WCAG 2.2 · Legge Stanca (L. 4/2004)</a:t>
             </a:r>
@@ -22354,7 +22354,7 @@
                 <a:solidFill>
                   <a:srgbClr val="003366"/>
                 </a:solidFill>
-                <a:latin typeface="Calibri"/>
+                <a:latin typeface="Liberation Sans"/>
                 <a:hlinkClick r:id="rId5" action="ppaction://hlinksldjump"/>
               </a:rPr>
               <a:t>‹</a:t>
@@ -22390,7 +22390,7 @@
                 <a:solidFill>
                   <a:srgbClr val="003366"/>
                 </a:solidFill>
-                <a:latin typeface="Calibri"/>
+                <a:latin typeface="Liberation Sans"/>
                 <a:hlinkClick r:id="rId6" action="ppaction://hlinksldjump"/>
               </a:rPr>
               <a:t>›</a:t>
@@ -22555,7 +22555,7 @@
                 <a:solidFill>
                   <a:srgbClr val="003366"/>
                 </a:solidFill>
-                <a:latin typeface="Calibri"/>
+                <a:latin typeface="Liberation Sans"/>
               </a:rPr>
               <a:t>Lettura facilitata</a:t>
             </a:r>
@@ -22677,7 +22677,7 @@
                 <a:solidFill>
                   <a:srgbClr val="5A6B7B"/>
                 </a:solidFill>
-                <a:latin typeface="Calibri"/>
+                <a:latin typeface="Liberation Sans"/>
               </a:rPr>
               <a:t>Gruppo Comunale Volontari di PC · Genzano di Roma</a:t>
             </a:r>
@@ -22712,7 +22712,7 @@
                 <a:solidFill>
                   <a:srgbClr val="5A6B7B"/>
                 </a:solidFill>
-                <a:latin typeface="Calibri"/>
+                <a:latin typeface="Liberation Sans"/>
               </a:rPr>
               <a:t>29</a:t>
             </a:r>
@@ -22747,7 +22747,7 @@
                 <a:solidFill>
                   <a:srgbClr val="003366"/>
                 </a:solidFill>
-                <a:latin typeface="Calibri"/>
+                <a:latin typeface="Liberation Sans"/>
                 <a:hlinkClick r:id="rId3" action="ppaction://hlinksldjump"/>
               </a:rPr>
               <a:t>« Torna all'agenda</a:t>
@@ -22839,7 +22839,7 @@
                 <a:solidFill>
                   <a:srgbClr val="1A1A1A"/>
                 </a:solidFill>
-                <a:latin typeface="Calibri"/>
+                <a:latin typeface="Liberation Sans"/>
               </a:rPr>
               <a:t>Lettura ad alta voce dei contenuti.</a:t>
             </a:r>
@@ -22998,7 +22998,7 @@
                 <a:solidFill>
                   <a:srgbClr val="1A1A1A"/>
                 </a:solidFill>
-                <a:latin typeface="Calibri"/>
+                <a:latin typeface="Liberation Sans"/>
               </a:rPr>
               <a:t>Tempo di lettura stimato e sillabazione automatica.</a:t>
             </a:r>
@@ -23157,7 +23157,7 @@
                 <a:solidFill>
                   <a:srgbClr val="1A1A1A"/>
                 </a:solidFill>
-                <a:latin typeface="Calibri"/>
+                <a:latin typeface="Liberation Sans"/>
               </a:rPr>
               <a:t>Glossario esplicativo a comparsa sui termini tecnici e le sigle.</a:t>
             </a:r>
@@ -23260,7 +23260,7 @@
                 <a:solidFill>
                   <a:srgbClr val="003366"/>
                 </a:solidFill>
-                <a:latin typeface="Calibri"/>
+                <a:latin typeface="Liberation Sans"/>
                 <a:hlinkClick r:id="rId5" action="ppaction://hlinksldjump"/>
               </a:rPr>
               <a:t>‹</a:t>
@@ -23296,7 +23296,7 @@
                 <a:solidFill>
                   <a:srgbClr val="003366"/>
                 </a:solidFill>
-                <a:latin typeface="Calibri"/>
+                <a:latin typeface="Liberation Sans"/>
                 <a:hlinkClick r:id="rId6" action="ppaction://hlinksldjump"/>
               </a:rPr>
               <a:t>›</a:t>
@@ -23461,7 +23461,7 @@
                 <a:solidFill>
                   <a:srgbClr val="003366"/>
                 </a:solidFill>
-                <a:latin typeface="Calibri"/>
+                <a:latin typeface="Liberation Sans"/>
               </a:rPr>
               <a:t>Un'estensione digitale del Servizio Nazionale</a:t>
             </a:r>
@@ -23583,7 +23583,7 @@
                 <a:solidFill>
                   <a:srgbClr val="5A6B7B"/>
                 </a:solidFill>
-                <a:latin typeface="Calibri"/>
+                <a:latin typeface="Liberation Sans"/>
               </a:rPr>
               <a:t>Gruppo Comunale Volontari di PC · Genzano di Roma</a:t>
             </a:r>
@@ -23618,7 +23618,7 @@
                 <a:solidFill>
                   <a:srgbClr val="5A6B7B"/>
                 </a:solidFill>
-                <a:latin typeface="Calibri"/>
+                <a:latin typeface="Liberation Sans"/>
               </a:rPr>
               <a:t>3</a:t>
             </a:r>
@@ -23653,7 +23653,7 @@
                 <a:solidFill>
                   <a:srgbClr val="003366"/>
                 </a:solidFill>
-                <a:latin typeface="Calibri"/>
+                <a:latin typeface="Liberation Sans"/>
                 <a:hlinkClick r:id="rId3" action="ppaction://hlinksldjump"/>
               </a:rPr>
               <a:t>« Torna all'agenda</a:t>
@@ -23688,7 +23688,7 @@
                 <a:solidFill>
                   <a:srgbClr val="1A1A1A"/>
                 </a:solidFill>
-                <a:latin typeface="Calibri"/>
+                <a:latin typeface="Liberation Sans"/>
               </a:rPr>
               <a:t>Il Gruppo opera nelle quattro funzioni del Servizio Nazionale della Protezione Civile (D.Lgs. 1/2018).</a:t>
             </a:r>
@@ -23837,7 +23837,7 @@
                 <a:solidFill>
                   <a:srgbClr val="003366"/>
                 </a:solidFill>
-                <a:latin typeface="Calibri"/>
+                <a:latin typeface="Liberation Sans"/>
               </a:rPr>
               <a:t>Previsione</a:t>
             </a:r>
@@ -23856,7 +23856,7 @@
                 <a:solidFill>
                   <a:srgbClr val="1A1A1A"/>
                 </a:solidFill>
-                <a:latin typeface="Calibri"/>
+                <a:latin typeface="Liberation Sans"/>
               </a:rPr>
               <a:t>Scenari e monitoraggio del rischio.</a:t>
             </a:r>
@@ -24005,7 +24005,7 @@
                 <a:solidFill>
                   <a:srgbClr val="15803D"/>
                 </a:solidFill>
-                <a:latin typeface="Calibri"/>
+                <a:latin typeface="Liberation Sans"/>
               </a:rPr>
               <a:t>Prevenzione</a:t>
             </a:r>
@@ -24024,7 +24024,7 @@
                 <a:solidFill>
                   <a:srgbClr val="1A1A1A"/>
                 </a:solidFill>
-                <a:latin typeface="Calibri"/>
+                <a:latin typeface="Liberation Sans"/>
               </a:rPr>
               <a:t>Riduzione del rischio e autoprotezione.</a:t>
             </a:r>
@@ -24173,7 +24173,7 @@
                 <a:solidFill>
                   <a:srgbClr val="B45309"/>
                 </a:solidFill>
-                <a:latin typeface="Calibri"/>
+                <a:latin typeface="Liberation Sans"/>
               </a:rPr>
               <a:t>Soccorso</a:t>
             </a:r>
@@ -24192,7 +24192,7 @@
                 <a:solidFill>
                   <a:srgbClr val="1A1A1A"/>
                 </a:solidFill>
-                <a:latin typeface="Calibri"/>
+                <a:latin typeface="Liberation Sans"/>
               </a:rPr>
               <a:t>Supporto alla popolazione durante l'evento.</a:t>
             </a:r>
@@ -24341,7 +24341,7 @@
                 <a:solidFill>
                   <a:srgbClr val="075985"/>
                 </a:solidFill>
-                <a:latin typeface="Calibri"/>
+                <a:latin typeface="Liberation Sans"/>
               </a:rPr>
               <a:t>Superamento</a:t>
             </a:r>
@@ -24360,7 +24360,7 @@
                 <a:solidFill>
                   <a:srgbClr val="1A1A1A"/>
                 </a:solidFill>
-                <a:latin typeface="Calibri"/>
+                <a:latin typeface="Liberation Sans"/>
               </a:rPr>
               <a:t>Assistenza e ripristino dopo l'evento.</a:t>
             </a:r>
@@ -24394,7 +24394,7 @@
                 <a:solidFill>
                   <a:srgbClr val="5A6B7B"/>
                 </a:solidFill>
-                <a:latin typeface="Calibri"/>
+                <a:latin typeface="Liberation Sans"/>
               </a:rPr>
               <a:t>Riferimenti: D.Lgs. 1/2018 · Direttiva PCM 30 aprile 2021.</a:t>
             </a:r>
@@ -24429,7 +24429,7 @@
                 <a:solidFill>
                   <a:srgbClr val="003366"/>
                 </a:solidFill>
-                <a:latin typeface="Calibri"/>
+                <a:latin typeface="Liberation Sans"/>
                 <a:hlinkClick r:id="rId3" action="ppaction://hlinksldjump"/>
               </a:rPr>
               <a:t>‹</a:t>
@@ -24465,7 +24465,7 @@
                 <a:solidFill>
                   <a:srgbClr val="003366"/>
                 </a:solidFill>
-                <a:latin typeface="Calibri"/>
+                <a:latin typeface="Liberation Sans"/>
                 <a:hlinkClick r:id="rId8" action="ppaction://hlinksldjump"/>
               </a:rPr>
               <a:t>›</a:t>
@@ -24630,7 +24630,7 @@
                 <a:solidFill>
                   <a:srgbClr val="003366"/>
                 </a:solidFill>
-                <a:latin typeface="Calibri"/>
+                <a:latin typeface="Liberation Sans"/>
               </a:rPr>
               <a:t>Pittogrammi standardizzati</a:t>
             </a:r>
@@ -24752,7 +24752,7 @@
                 <a:solidFill>
                   <a:srgbClr val="5A6B7B"/>
                 </a:solidFill>
-                <a:latin typeface="Calibri"/>
+                <a:latin typeface="Liberation Sans"/>
               </a:rPr>
               <a:t>Gruppo Comunale Volontari di PC · Genzano di Roma</a:t>
             </a:r>
@@ -24787,7 +24787,7 @@
                 <a:solidFill>
                   <a:srgbClr val="5A6B7B"/>
                 </a:solidFill>
-                <a:latin typeface="Calibri"/>
+                <a:latin typeface="Liberation Sans"/>
               </a:rPr>
               <a:t>30</a:t>
             </a:r>
@@ -24822,7 +24822,7 @@
                 <a:solidFill>
                   <a:srgbClr val="003366"/>
                 </a:solidFill>
-                <a:latin typeface="Calibri"/>
+                <a:latin typeface="Liberation Sans"/>
                 <a:hlinkClick r:id="rId3" action="ppaction://hlinksldjump"/>
               </a:rPr>
               <a:t>« Torna all'agenda</a:t>
@@ -24914,7 +24914,7 @@
                 <a:solidFill>
                   <a:srgbClr val="1A1A1A"/>
                 </a:solidFill>
-                <a:latin typeface="Calibri"/>
+                <a:latin typeface="Liberation Sans"/>
               </a:rPr>
               <a:t>Simboli ISO 7010 per la segnaletica di sicurezza.</a:t>
             </a:r>
@@ -25073,7 +25073,7 @@
                 <a:solidFill>
                   <a:srgbClr val="1A1A1A"/>
                 </a:solidFill>
-                <a:latin typeface="Calibri"/>
+                <a:latin typeface="Liberation Sans"/>
               </a:rPr>
               <a:t>Pittogrammi ARASAAC per la comprensione cognitiva.</a:t>
             </a:r>
@@ -25232,7 +25232,7 @@
                 <a:solidFill>
                   <a:srgbClr val="1A1A1A"/>
                 </a:solidFill>
-                <a:latin typeface="Calibri"/>
+                <a:latin typeface="Liberation Sans"/>
               </a:rPr>
               <a:t>Supporto a bambini, anziani e persone con difficoltà di lettura.</a:t>
             </a:r>
@@ -25334,7 +25334,7 @@
                 <a:solidFill>
                   <a:srgbClr val="003366"/>
                 </a:solidFill>
-                <a:latin typeface="Calibri"/>
+                <a:latin typeface="Liberation Sans"/>
               </a:rPr>
               <a:t>Fonti e standard: </a:t>
             </a:r>
@@ -25343,7 +25343,7 @@
                 <a:solidFill>
                   <a:srgbClr val="5A6B7B"/>
                 </a:solidFill>
-                <a:latin typeface="Calibri"/>
+                <a:latin typeface="Liberation Sans"/>
               </a:rPr>
               <a:t>ISO 7010 · ARASAAC</a:t>
             </a:r>
@@ -25378,7 +25378,7 @@
                 <a:solidFill>
                   <a:srgbClr val="003366"/>
                 </a:solidFill>
-                <a:latin typeface="Calibri"/>
+                <a:latin typeface="Liberation Sans"/>
                 <a:hlinkClick r:id="rId5" action="ppaction://hlinksldjump"/>
               </a:rPr>
               <a:t>‹</a:t>
@@ -25414,7 +25414,7 @@
                 <a:solidFill>
                   <a:srgbClr val="003366"/>
                 </a:solidFill>
-                <a:latin typeface="Calibri"/>
+                <a:latin typeface="Liberation Sans"/>
                 <a:hlinkClick r:id="rId6" action="ppaction://hlinksldjump"/>
               </a:rPr>
               <a:t>›</a:t>
@@ -25579,7 +25579,7 @@
                 <a:solidFill>
                   <a:srgbClr val="003366"/>
                 </a:solidFill>
-                <a:latin typeface="Calibri"/>
+                <a:latin typeface="Liberation Sans"/>
               </a:rPr>
               <a:t>Versione in italiano semplice</a:t>
             </a:r>
@@ -25701,7 +25701,7 @@
                 <a:solidFill>
                   <a:srgbClr val="5A6B7B"/>
                 </a:solidFill>
-                <a:latin typeface="Calibri"/>
+                <a:latin typeface="Liberation Sans"/>
               </a:rPr>
               <a:t>Gruppo Comunale Volontari di PC · Genzano di Roma</a:t>
             </a:r>
@@ -25736,7 +25736,7 @@
                 <a:solidFill>
                   <a:srgbClr val="5A6B7B"/>
                 </a:solidFill>
-                <a:latin typeface="Calibri"/>
+                <a:latin typeface="Liberation Sans"/>
               </a:rPr>
               <a:t>31</a:t>
             </a:r>
@@ -25771,7 +25771,7 @@
                 <a:solidFill>
                   <a:srgbClr val="003366"/>
                 </a:solidFill>
-                <a:latin typeface="Calibri"/>
+                <a:latin typeface="Liberation Sans"/>
                 <a:hlinkClick r:id="rId3" action="ppaction://hlinksldjump"/>
               </a:rPr>
               <a:t>« Torna all'agenda</a:t>
@@ -25863,7 +25863,7 @@
                 <a:solidFill>
                   <a:srgbClr val="1A1A1A"/>
                 </a:solidFill>
-                <a:latin typeface="Calibri"/>
+                <a:latin typeface="Liberation Sans"/>
               </a:rPr>
               <a:t>Riscrittura dei contenuti in linguaggio piano (livello A2).</a:t>
             </a:r>
@@ -26022,7 +26022,7 @@
                 <a:solidFill>
                   <a:srgbClr val="1A1A1A"/>
                 </a:solidFill>
-                <a:latin typeface="Calibri"/>
+                <a:latin typeface="Liberation Sans"/>
               </a:rPr>
               <a:t>Per parlanti italiano come seconda lingua e per la lettura facilitata.</a:t>
             </a:r>
@@ -26181,7 +26181,7 @@
                 <a:solidFill>
                   <a:srgbClr val="1A1A1A"/>
                 </a:solidFill>
-                <a:latin typeface="Calibri"/>
+                <a:latin typeface="Liberation Sans"/>
               </a:rPr>
               <a:t>Sempre affiancata all'articolo completo.</a:t>
             </a:r>
@@ -26284,7 +26284,7 @@
                 <a:solidFill>
                   <a:srgbClr val="003366"/>
                 </a:solidFill>
-                <a:latin typeface="Calibri"/>
+                <a:latin typeface="Liberation Sans"/>
                 <a:hlinkClick r:id="rId5" action="ppaction://hlinksldjump"/>
               </a:rPr>
               <a:t>‹</a:t>
@@ -26320,7 +26320,7 @@
                 <a:solidFill>
                   <a:srgbClr val="003366"/>
                 </a:solidFill>
-                <a:latin typeface="Calibri"/>
+                <a:latin typeface="Liberation Sans"/>
                 <a:hlinkClick r:id="rId6" action="ppaction://hlinksldjump"/>
               </a:rPr>
               <a:t>›</a:t>
@@ -26485,7 +26485,7 @@
                 <a:solidFill>
                   <a:srgbClr val="003366"/>
                 </a:solidFill>
-                <a:latin typeface="Calibri"/>
+                <a:latin typeface="Liberation Sans"/>
               </a:rPr>
               <a:t>Contenuti in Lingua dei Segni (LIS)</a:t>
             </a:r>
@@ -26607,7 +26607,7 @@
                 <a:solidFill>
                   <a:srgbClr val="5A6B7B"/>
                 </a:solidFill>
-                <a:latin typeface="Calibri"/>
+                <a:latin typeface="Liberation Sans"/>
               </a:rPr>
               <a:t>Gruppo Comunale Volontari di PC · Genzano di Roma</a:t>
             </a:r>
@@ -26642,7 +26642,7 @@
                 <a:solidFill>
                   <a:srgbClr val="5A6B7B"/>
                 </a:solidFill>
-                <a:latin typeface="Calibri"/>
+                <a:latin typeface="Liberation Sans"/>
               </a:rPr>
               <a:t>32</a:t>
             </a:r>
@@ -26677,7 +26677,7 @@
                 <a:solidFill>
                   <a:srgbClr val="003366"/>
                 </a:solidFill>
-                <a:latin typeface="Calibri"/>
+                <a:latin typeface="Liberation Sans"/>
                 <a:hlinkClick r:id="rId3" action="ppaction://hlinksldjump"/>
               </a:rPr>
               <a:t>« Torna all'agenda</a:t>
@@ -26769,7 +26769,7 @@
                 <a:solidFill>
                   <a:srgbClr val="1A1A1A"/>
                 </a:solidFill>
-                <a:latin typeface="Calibri"/>
+                <a:latin typeface="Liberation Sans"/>
               </a:rPr>
               <a:t>Glossari e contenuti in Lingua dei Segni Italiana.</a:t>
             </a:r>
@@ -26928,7 +26928,7 @@
                 <a:solidFill>
                   <a:srgbClr val="1A1A1A"/>
                 </a:solidFill>
-                <a:latin typeface="Calibri"/>
+                <a:latin typeface="Liberation Sans"/>
               </a:rPr>
               <a:t>Un canale di accesso dedicato alle persone sorde.</a:t>
             </a:r>
@@ -27087,7 +27087,7 @@
                 <a:solidFill>
                   <a:srgbClr val="1A1A1A"/>
                 </a:solidFill>
-                <a:latin typeface="Calibri"/>
+                <a:latin typeface="Liberation Sans"/>
               </a:rPr>
               <a:t>Termini chiave del rischio spiegati in forma visiva.</a:t>
             </a:r>
@@ -27190,7 +27190,7 @@
                 <a:solidFill>
                   <a:srgbClr val="003366"/>
                 </a:solidFill>
-                <a:latin typeface="Calibri"/>
+                <a:latin typeface="Liberation Sans"/>
                 <a:hlinkClick r:id="rId5" action="ppaction://hlinksldjump"/>
               </a:rPr>
               <a:t>‹</a:t>
@@ -27226,7 +27226,7 @@
                 <a:solidFill>
                   <a:srgbClr val="003366"/>
                 </a:solidFill>
-                <a:latin typeface="Calibri"/>
+                <a:latin typeface="Liberation Sans"/>
                 <a:hlinkClick r:id="rId6" action="ppaction://hlinksldjump"/>
               </a:rPr>
               <a:t>›</a:t>
@@ -27391,7 +27391,7 @@
                 <a:solidFill>
                   <a:srgbClr val="003366"/>
                 </a:solidFill>
-                <a:latin typeface="Calibri"/>
+                <a:latin typeface="Liberation Sans"/>
               </a:rPr>
               <a:t>Versione in Braille</a:t>
             </a:r>
@@ -27513,7 +27513,7 @@
                 <a:solidFill>
                   <a:srgbClr val="5A6B7B"/>
                 </a:solidFill>
-                <a:latin typeface="Calibri"/>
+                <a:latin typeface="Liberation Sans"/>
               </a:rPr>
               <a:t>Gruppo Comunale Volontari di PC · Genzano di Roma</a:t>
             </a:r>
@@ -27548,7 +27548,7 @@
                 <a:solidFill>
                   <a:srgbClr val="5A6B7B"/>
                 </a:solidFill>
-                <a:latin typeface="Calibri"/>
+                <a:latin typeface="Liberation Sans"/>
               </a:rPr>
               <a:t>33</a:t>
             </a:r>
@@ -27583,7 +27583,7 @@
                 <a:solidFill>
                   <a:srgbClr val="003366"/>
                 </a:solidFill>
-                <a:latin typeface="Calibri"/>
+                <a:latin typeface="Liberation Sans"/>
                 <a:hlinkClick r:id="rId3" action="ppaction://hlinksldjump"/>
               </a:rPr>
               <a:t>« Torna all'agenda</a:t>
@@ -27675,7 +27675,7 @@
                 <a:solidFill>
                   <a:srgbClr val="1A1A1A"/>
                 </a:solidFill>
-                <a:latin typeface="Calibri"/>
+                <a:latin typeface="Liberation Sans"/>
               </a:rPr>
               <a:t>Versione stampabile in Braille degli articoli.</a:t>
             </a:r>
@@ -27834,7 +27834,7 @@
                 <a:solidFill>
                   <a:srgbClr val="1A1A1A"/>
                 </a:solidFill>
-                <a:latin typeface="Calibri"/>
+                <a:latin typeface="Liberation Sans"/>
               </a:rPr>
               <a:t>Compatibile con le stampanti braille (formato BRF).</a:t>
             </a:r>
@@ -27993,7 +27993,7 @@
                 <a:solidFill>
                   <a:srgbClr val="1A1A1A"/>
                 </a:solidFill>
-                <a:latin typeface="Calibri"/>
+                <a:latin typeface="Liberation Sans"/>
               </a:rPr>
               <a:t>Un canale dedicato a persone cieche e ipovedenti.</a:t>
             </a:r>
@@ -28096,7 +28096,7 @@
                 <a:solidFill>
                   <a:srgbClr val="003366"/>
                 </a:solidFill>
-                <a:latin typeface="Calibri"/>
+                <a:latin typeface="Liberation Sans"/>
                 <a:hlinkClick r:id="rId5" action="ppaction://hlinksldjump"/>
               </a:rPr>
               <a:t>‹</a:t>
@@ -28132,7 +28132,7 @@
                 <a:solidFill>
                   <a:srgbClr val="003366"/>
                 </a:solidFill>
-                <a:latin typeface="Calibri"/>
+                <a:latin typeface="Liberation Sans"/>
                 <a:hlinkClick r:id="rId6" action="ppaction://hlinksldjump"/>
               </a:rPr>
               <a:t>›</a:t>
@@ -28297,7 +28297,7 @@
                 <a:solidFill>
                   <a:srgbClr val="003366"/>
                 </a:solidFill>
-                <a:latin typeface="Calibri"/>
+                <a:latin typeface="Liberation Sans"/>
               </a:rPr>
               <a:t>Versioni in più lingue</a:t>
             </a:r>
@@ -28419,7 +28419,7 @@
                 <a:solidFill>
                   <a:srgbClr val="5A6B7B"/>
                 </a:solidFill>
-                <a:latin typeface="Calibri"/>
+                <a:latin typeface="Liberation Sans"/>
               </a:rPr>
               <a:t>Gruppo Comunale Volontari di PC · Genzano di Roma</a:t>
             </a:r>
@@ -28454,7 +28454,7 @@
                 <a:solidFill>
                   <a:srgbClr val="5A6B7B"/>
                 </a:solidFill>
-                <a:latin typeface="Calibri"/>
+                <a:latin typeface="Liberation Sans"/>
               </a:rPr>
               <a:t>34</a:t>
             </a:r>
@@ -28489,7 +28489,7 @@
                 <a:solidFill>
                   <a:srgbClr val="003366"/>
                 </a:solidFill>
-                <a:latin typeface="Calibri"/>
+                <a:latin typeface="Liberation Sans"/>
                 <a:hlinkClick r:id="rId3" action="ppaction://hlinksldjump"/>
               </a:rPr>
               <a:t>« Torna all'agenda</a:t>
@@ -28581,7 +28581,7 @@
                 <a:solidFill>
                   <a:srgbClr val="1A1A1A"/>
                 </a:solidFill>
-                <a:latin typeface="Calibri"/>
+                <a:latin typeface="Liberation Sans"/>
               </a:rPr>
               <a:t>Contenuti chiave tradotti in più lingue.</a:t>
             </a:r>
@@ -28740,7 +28740,7 @@
                 <a:solidFill>
                   <a:srgbClr val="1A1A1A"/>
                 </a:solidFill>
-                <a:latin typeface="Calibri"/>
+                <a:latin typeface="Liberation Sans"/>
               </a:rPr>
               <a:t>Per residenti stranieri e visitatori.</a:t>
             </a:r>
@@ -28899,7 +28899,7 @@
                 <a:solidFill>
                   <a:srgbClr val="1A1A1A"/>
                 </a:solidFill>
-                <a:latin typeface="Calibri"/>
+                <a:latin typeface="Liberation Sans"/>
               </a:rPr>
               <a:t>Lingua dichiarata correttamente anche per gli assistenti vocali.</a:t>
             </a:r>
@@ -29002,7 +29002,7 @@
                 <a:solidFill>
                   <a:srgbClr val="003366"/>
                 </a:solidFill>
-                <a:latin typeface="Calibri"/>
+                <a:latin typeface="Liberation Sans"/>
                 <a:hlinkClick r:id="rId5" action="ppaction://hlinksldjump"/>
               </a:rPr>
               <a:t>‹</a:t>
@@ -29038,7 +29038,7 @@
                 <a:solidFill>
                   <a:srgbClr val="003366"/>
                 </a:solidFill>
-                <a:latin typeface="Calibri"/>
+                <a:latin typeface="Liberation Sans"/>
                 <a:hlinkClick r:id="rId6" action="ppaction://hlinksldjump"/>
               </a:rPr>
               <a:t>›</a:t>
@@ -29203,7 +29203,7 @@
                 <a:solidFill>
                   <a:srgbClr val="FFFFFF"/>
                 </a:solidFill>
-                <a:latin typeface="Calibri"/>
+                <a:latin typeface="Liberation Sans"/>
               </a:rPr>
               <a:t>Volontariato</a:t>
             </a:r>
@@ -29237,7 +29237,7 @@
                 <a:solidFill>
                   <a:srgbClr val="FFBE2E"/>
                 </a:solidFill>
-                <a:latin typeface="Calibri"/>
+                <a:latin typeface="Liberation Sans"/>
               </a:rPr>
               <a:t>SEZIONE</a:t>
             </a:r>
@@ -29315,7 +29315,7 @@
                 <a:solidFill>
                   <a:srgbClr val="9DB0C2"/>
                 </a:solidFill>
-                <a:latin typeface="Calibri"/>
+                <a:latin typeface="Liberation Sans"/>
               </a:rPr>
               <a:t>Gruppo Comunale Volontari di PC · Genzano di Roma</a:t>
             </a:r>
@@ -29350,7 +29350,7 @@
                 <a:solidFill>
                   <a:srgbClr val="9DB0C2"/>
                 </a:solidFill>
-                <a:latin typeface="Calibri"/>
+                <a:latin typeface="Liberation Sans"/>
               </a:rPr>
               <a:t>35</a:t>
             </a:r>
@@ -29385,7 +29385,7 @@
                 <a:solidFill>
                   <a:srgbClr val="FFBE2E"/>
                 </a:solidFill>
-                <a:latin typeface="Calibri"/>
+                <a:latin typeface="Liberation Sans"/>
                 <a:hlinkClick r:id="rId3" action="ppaction://hlinksldjump"/>
               </a:rPr>
               <a:t>« Torna all'agenda</a:t>
@@ -29443,7 +29443,7 @@
                 <a:solidFill>
                   <a:srgbClr val="FFBE2E"/>
                 </a:solidFill>
-                <a:latin typeface="Calibri"/>
+                <a:latin typeface="Liberation Sans"/>
               </a:rPr>
               <a:t>01  </a:t>
             </a:r>
@@ -29452,7 +29452,7 @@
                 <a:solidFill>
                   <a:srgbClr val="FFFFFF"/>
                 </a:solidFill>
-                <a:latin typeface="Calibri"/>
+                <a:latin typeface="Liberation Sans"/>
               </a:rPr>
               <a:t>Per il Cittadino</a:t>
             </a:r>
@@ -29509,7 +29509,7 @@
                 <a:solidFill>
                   <a:srgbClr val="FFBE2E"/>
                 </a:solidFill>
-                <a:latin typeface="Calibri"/>
+                <a:latin typeface="Liberation Sans"/>
               </a:rPr>
               <a:t>02  </a:t>
             </a:r>
@@ -29518,7 +29518,7 @@
                 <a:solidFill>
                   <a:srgbClr val="FFFFFF"/>
                 </a:solidFill>
-                <a:latin typeface="Calibri"/>
+                <a:latin typeface="Liberation Sans"/>
               </a:rPr>
               <a:t>Per le Scuole</a:t>
             </a:r>
@@ -29575,7 +29575,7 @@
                 <a:solidFill>
                   <a:srgbClr val="FFBE2E"/>
                 </a:solidFill>
-                <a:latin typeface="Calibri"/>
+                <a:latin typeface="Liberation Sans"/>
               </a:rPr>
               <a:t>03  </a:t>
             </a:r>
@@ -29584,7 +29584,7 @@
                 <a:solidFill>
                   <a:srgbClr val="FFFFFF"/>
                 </a:solidFill>
-                <a:latin typeface="Calibri"/>
+                <a:latin typeface="Liberation Sans"/>
               </a:rPr>
               <a:t>Accessibilità e inclusione</a:t>
             </a:r>
@@ -29637,7 +29637,7 @@
                 <a:solidFill>
                   <a:srgbClr val="001A33"/>
                 </a:solidFill>
-                <a:latin typeface="Calibri"/>
+                <a:latin typeface="Liberation Sans"/>
               </a:rPr>
               <a:t>04  </a:t>
             </a:r>
@@ -29646,7 +29646,7 @@
                 <a:solidFill>
                   <a:srgbClr val="001A33"/>
                 </a:solidFill>
-                <a:latin typeface="Calibri"/>
+                <a:latin typeface="Liberation Sans"/>
               </a:rPr>
               <a:t>Volontariato</a:t>
             </a:r>
@@ -29703,7 +29703,7 @@
                 <a:solidFill>
                   <a:srgbClr val="FFBE2E"/>
                 </a:solidFill>
-                <a:latin typeface="Calibri"/>
+                <a:latin typeface="Liberation Sans"/>
               </a:rPr>
               <a:t>05  </a:t>
             </a:r>
@@ -29712,7 +29712,7 @@
                 <a:solidFill>
                   <a:srgbClr val="FFFFFF"/>
                 </a:solidFill>
-                <a:latin typeface="Calibri"/>
+                <a:latin typeface="Liberation Sans"/>
               </a:rPr>
               <a:t>Risorse e trasparenza</a:t>
             </a:r>
@@ -29769,7 +29769,7 @@
                 <a:solidFill>
                   <a:srgbClr val="FFBE2E"/>
                 </a:solidFill>
-                <a:latin typeface="Calibri"/>
+                <a:latin typeface="Liberation Sans"/>
               </a:rPr>
               <a:t>06  </a:t>
             </a:r>
@@ -29778,7 +29778,7 @@
                 <a:solidFill>
                   <a:srgbClr val="FFFFFF"/>
                 </a:solidFill>
-                <a:latin typeface="Calibri"/>
+                <a:latin typeface="Liberation Sans"/>
               </a:rPr>
               <a:t>Comunicazione</a:t>
             </a:r>
@@ -29835,7 +29835,7 @@
                 <a:solidFill>
                   <a:srgbClr val="FFBE2E"/>
                 </a:solidFill>
-                <a:latin typeface="Calibri"/>
+                <a:latin typeface="Liberation Sans"/>
               </a:rPr>
               <a:t>07  </a:t>
             </a:r>
@@ -29844,7 +29844,7 @@
                 <a:solidFill>
                   <a:srgbClr val="FFFFFF"/>
                 </a:solidFill>
-                <a:latin typeface="Calibri"/>
+                <a:latin typeface="Liberation Sans"/>
               </a:rPr>
               <a:t>Infrastruttura, fonti e sicurezza</a:t>
             </a:r>
@@ -29879,7 +29879,7 @@
                 <a:solidFill>
                   <a:srgbClr val="FFBE2E"/>
                 </a:solidFill>
-                <a:latin typeface="Calibri"/>
+                <a:latin typeface="Liberation Sans"/>
                 <a:hlinkClick r:id="rId10" action="ppaction://hlinksldjump"/>
               </a:rPr>
               <a:t>‹</a:t>
@@ -29915,7 +29915,7 @@
                 <a:solidFill>
                   <a:srgbClr val="FFBE2E"/>
                 </a:solidFill>
-                <a:latin typeface="Calibri"/>
+                <a:latin typeface="Liberation Sans"/>
                 <a:hlinkClick r:id="rId11" action="ppaction://hlinksldjump"/>
               </a:rPr>
               <a:t>›</a:t>
@@ -30080,7 +30080,7 @@
                 <a:solidFill>
                   <a:srgbClr val="003366"/>
                 </a:solidFill>
-                <a:latin typeface="Calibri"/>
+                <a:latin typeface="Liberation Sans"/>
               </a:rPr>
               <a:t>Diventa volontario</a:t>
             </a:r>
@@ -30202,7 +30202,7 @@
                 <a:solidFill>
                   <a:srgbClr val="5A6B7B"/>
                 </a:solidFill>
-                <a:latin typeface="Calibri"/>
+                <a:latin typeface="Liberation Sans"/>
               </a:rPr>
               <a:t>Gruppo Comunale Volontari di PC · Genzano di Roma</a:t>
             </a:r>
@@ -30237,7 +30237,7 @@
                 <a:solidFill>
                   <a:srgbClr val="5A6B7B"/>
                 </a:solidFill>
-                <a:latin typeface="Calibri"/>
+                <a:latin typeface="Liberation Sans"/>
               </a:rPr>
               <a:t>36</a:t>
             </a:r>
@@ -30272,7 +30272,7 @@
                 <a:solidFill>
                   <a:srgbClr val="003366"/>
                 </a:solidFill>
-                <a:latin typeface="Calibri"/>
+                <a:latin typeface="Liberation Sans"/>
                 <a:hlinkClick r:id="rId3" action="ppaction://hlinksldjump"/>
               </a:rPr>
               <a:t>« Torna all'agenda</a:t>
@@ -30364,7 +30364,7 @@
                 <a:solidFill>
                   <a:srgbClr val="1A1A1A"/>
                 </a:solidFill>
-                <a:latin typeface="Calibri"/>
+                <a:latin typeface="Liberation Sans"/>
               </a:rPr>
               <a:t>Come unirsi al Gruppo Comunale.</a:t>
             </a:r>
@@ -30523,7 +30523,7 @@
                 <a:solidFill>
                   <a:srgbClr val="1A1A1A"/>
                 </a:solidFill>
-                <a:latin typeface="Calibri"/>
+                <a:latin typeface="Liberation Sans"/>
               </a:rPr>
               <a:t>Attività, formazione e impegno richiesto.</a:t>
             </a:r>
@@ -30682,7 +30682,7 @@
                 <a:solidFill>
                   <a:srgbClr val="1A1A1A"/>
                 </a:solidFill>
-                <a:latin typeface="Calibri"/>
+                <a:latin typeface="Liberation Sans"/>
               </a:rPr>
               <a:t>Il valore del volontariato per la comunità.</a:t>
             </a:r>
@@ -30785,7 +30785,7 @@
                 <a:solidFill>
                   <a:srgbClr val="003366"/>
                 </a:solidFill>
-                <a:latin typeface="Calibri"/>
+                <a:latin typeface="Liberation Sans"/>
                 <a:hlinkClick r:id="rId5" action="ppaction://hlinksldjump"/>
               </a:rPr>
               <a:t>‹</a:t>
@@ -30821,7 +30821,7 @@
                 <a:solidFill>
                   <a:srgbClr val="003366"/>
                 </a:solidFill>
-                <a:latin typeface="Calibri"/>
+                <a:latin typeface="Liberation Sans"/>
                 <a:hlinkClick r:id="rId6" action="ppaction://hlinksldjump"/>
               </a:rPr>
               <a:t>›</a:t>
@@ -30986,7 +30986,7 @@
                 <a:solidFill>
                   <a:srgbClr val="003366"/>
                 </a:solidFill>
-                <a:latin typeface="Calibri"/>
+                <a:latin typeface="Liberation Sans"/>
               </a:rPr>
               <a:t>Affiliazioni e riconoscimenti europei</a:t>
             </a:r>
@@ -31108,7 +31108,7 @@
                 <a:solidFill>
                   <a:srgbClr val="5A6B7B"/>
                 </a:solidFill>
-                <a:latin typeface="Calibri"/>
+                <a:latin typeface="Liberation Sans"/>
               </a:rPr>
               <a:t>Gruppo Comunale Volontari di PC · Genzano di Roma</a:t>
             </a:r>
@@ -31143,7 +31143,7 @@
                 <a:solidFill>
                   <a:srgbClr val="5A6B7B"/>
                 </a:solidFill>
-                <a:latin typeface="Calibri"/>
+                <a:latin typeface="Liberation Sans"/>
               </a:rPr>
               <a:t>37</a:t>
             </a:r>
@@ -31178,7 +31178,7 @@
                 <a:solidFill>
                   <a:srgbClr val="003366"/>
                 </a:solidFill>
-                <a:latin typeface="Calibri"/>
+                <a:latin typeface="Liberation Sans"/>
                 <a:hlinkClick r:id="rId3" action="ppaction://hlinksldjump"/>
               </a:rPr>
               <a:t>« Torna all'agenda</a:t>
@@ -31270,7 +31270,7 @@
                 <a:solidFill>
                   <a:srgbClr val="1A1A1A"/>
                 </a:solidFill>
-                <a:latin typeface="Calibri"/>
+                <a:latin typeface="Liberation Sans"/>
               </a:rPr>
               <a:t>Quality Label del Corpo europeo di solidarietà (European Solidarity Corps) — Commissione europea.</a:t>
             </a:r>
@@ -31429,7 +31429,7 @@
                 <a:solidFill>
                   <a:srgbClr val="1A1A1A"/>
                 </a:solidFill>
-                <a:latin typeface="Calibri"/>
+                <a:latin typeface="Liberation Sans"/>
               </a:rPr>
               <a:t>Codice di accreditamento dell'organizzazione: E10435833 (sempre accanto al logo, Reg. UE 2021/888).</a:t>
             </a:r>
@@ -31588,7 +31588,7 @@
                 <a:solidFill>
                   <a:srgbClr val="1A1A1A"/>
                 </a:solidFill>
-                <a:latin typeface="Calibri"/>
+                <a:latin typeface="Liberation Sans"/>
               </a:rPr>
               <a:t>Servizio Nazionale di Protezione Civile (D.Lgs. 1/2018) — iscrizione al Registro Regionale del Volontariato.</a:t>
             </a:r>
@@ -31747,7 +31747,7 @@
                 <a:solidFill>
                   <a:srgbClr val="1A1A1A"/>
                 </a:solidFill>
-                <a:latin typeface="Calibri"/>
+                <a:latin typeface="Liberation Sans"/>
               </a:rPr>
               <a:t>Coordinamento FEPIVOL — Federazione Pronto Intervento Volontariato ODV.</a:t>
             </a:r>
@@ -31849,7 +31849,7 @@
                 <a:solidFill>
                   <a:srgbClr val="003366"/>
                 </a:solidFill>
-                <a:latin typeface="Calibri"/>
+                <a:latin typeface="Liberation Sans"/>
               </a:rPr>
               <a:t>Fonti e standard: </a:t>
             </a:r>
@@ -31858,7 +31858,7 @@
                 <a:solidFill>
                   <a:srgbClr val="5A6B7B"/>
                 </a:solidFill>
-                <a:latin typeface="Calibri"/>
+                <a:latin typeface="Liberation Sans"/>
               </a:rPr>
               <a:t>European Solidarity Corps · DPC · Registro Regionale Lazio · FEPIVOL</a:t>
             </a:r>
@@ -31893,7 +31893,7 @@
                 <a:solidFill>
                   <a:srgbClr val="003366"/>
                 </a:solidFill>
-                <a:latin typeface="Calibri"/>
+                <a:latin typeface="Liberation Sans"/>
                 <a:hlinkClick r:id="rId5" action="ppaction://hlinksldjump"/>
               </a:rPr>
               <a:t>‹</a:t>
@@ -31929,7 +31929,7 @@
                 <a:solidFill>
                   <a:srgbClr val="003366"/>
                 </a:solidFill>
-                <a:latin typeface="Calibri"/>
+                <a:latin typeface="Liberation Sans"/>
                 <a:hlinkClick r:id="rId6" action="ppaction://hlinksldjump"/>
               </a:rPr>
               <a:t>›</a:t>
@@ -32094,7 +32094,7 @@
                 <a:solidFill>
                   <a:srgbClr val="003366"/>
                 </a:solidFill>
-                <a:latin typeface="Calibri"/>
+                <a:latin typeface="Liberation Sans"/>
               </a:rPr>
               <a:t>Chi siamo nel sistema di Protezione Civile</a:t>
             </a:r>
@@ -32216,7 +32216,7 @@
                 <a:solidFill>
                   <a:srgbClr val="5A6B7B"/>
                 </a:solidFill>
-                <a:latin typeface="Calibri"/>
+                <a:latin typeface="Liberation Sans"/>
               </a:rPr>
               <a:t>Gruppo Comunale Volontari di PC · Genzano di Roma</a:t>
             </a:r>
@@ -32251,7 +32251,7 @@
                 <a:solidFill>
                   <a:srgbClr val="5A6B7B"/>
                 </a:solidFill>
-                <a:latin typeface="Calibri"/>
+                <a:latin typeface="Liberation Sans"/>
               </a:rPr>
               <a:t>38</a:t>
             </a:r>
@@ -32286,7 +32286,7 @@
                 <a:solidFill>
                   <a:srgbClr val="003366"/>
                 </a:solidFill>
-                <a:latin typeface="Calibri"/>
+                <a:latin typeface="Liberation Sans"/>
                 <a:hlinkClick r:id="rId3" action="ppaction://hlinksldjump"/>
               </a:rPr>
               <a:t>« Torna all'agenda</a:t>
@@ -32350,7 +32350,7 @@
                 <a:solidFill>
                   <a:srgbClr val="FFFFFF"/>
                 </a:solidFill>
-                <a:latin typeface="Calibri"/>
+                <a:latin typeface="Liberation Sans"/>
               </a:rPr>
               <a:t>Servizio Nazionale della Protezione Civile</a:t>
             </a:r>
@@ -32366,7 +32366,7 @@
                 <a:solidFill>
                   <a:srgbClr val="CFDDEC"/>
                 </a:solidFill>
-                <a:latin typeface="Calibri"/>
+                <a:latin typeface="Liberation Sans"/>
               </a:rPr>
               <a:t>D.Lgs. 1/2018</a:t>
             </a:r>
@@ -32473,7 +32473,7 @@
                 <a:solidFill>
                   <a:srgbClr val="FFFFFF"/>
                 </a:solidFill>
-                <a:latin typeface="Calibri"/>
+                <a:latin typeface="Liberation Sans"/>
               </a:rPr>
               <a:t>Coordinamento Regionale FE.PI.VOL.</a:t>
             </a:r>
@@ -32489,7 +32489,7 @@
                 <a:solidFill>
                   <a:srgbClr val="CFDDEC"/>
                 </a:solidFill>
-                <a:latin typeface="Calibri"/>
+                <a:latin typeface="Liberation Sans"/>
               </a:rPr>
               <a:t>Federazione Pronto Intervento Volontariato ODV — volontariato di PC del Lazio</a:t>
             </a:r>
@@ -32620,7 +32620,7 @@
                 <a:solidFill>
                   <a:srgbClr val="FFFFFF"/>
                 </a:solidFill>
-                <a:latin typeface="Calibri"/>
+                <a:latin typeface="Liberation Sans"/>
               </a:rPr>
               <a:t>Gruppo Comunale Volontari di Protezione Civile di Genzano di Roma</a:t>
             </a:r>
@@ -32636,7 +32636,7 @@
                 <a:solidFill>
                   <a:srgbClr val="CFDDEC"/>
                 </a:solidFill>
-                <a:latin typeface="Calibri"/>
+                <a:latin typeface="Liberation Sans"/>
               </a:rPr>
               <a:t>Sede operativa: Via Sicilia 13-15</a:t>
             </a:r>
@@ -32695,7 +32695,7 @@
                 <a:solidFill>
                   <a:srgbClr val="003366"/>
                 </a:solidFill>
-                <a:latin typeface="Calibri"/>
+                <a:latin typeface="Liberation Sans"/>
                 <a:hlinkClick r:id="rId5" action="ppaction://hlinksldjump"/>
               </a:rPr>
               <a:t>‹</a:t>
@@ -32731,7 +32731,7 @@
                 <a:solidFill>
                   <a:srgbClr val="003366"/>
                 </a:solidFill>
-                <a:latin typeface="Calibri"/>
+                <a:latin typeface="Liberation Sans"/>
                 <a:hlinkClick r:id="rId6" action="ppaction://hlinksldjump"/>
               </a:rPr>
               <a:t>›</a:t>
@@ -32896,7 +32896,7 @@
                 <a:solidFill>
                   <a:srgbClr val="FFFFFF"/>
                 </a:solidFill>
-                <a:latin typeface="Calibri"/>
+                <a:latin typeface="Liberation Sans"/>
               </a:rPr>
               <a:t>Risorse e trasparenza</a:t>
             </a:r>
@@ -32930,7 +32930,7 @@
                 <a:solidFill>
                   <a:srgbClr val="FFBE2E"/>
                 </a:solidFill>
-                <a:latin typeface="Calibri"/>
+                <a:latin typeface="Liberation Sans"/>
               </a:rPr>
               <a:t>SEZIONE</a:t>
             </a:r>
@@ -33008,7 +33008,7 @@
                 <a:solidFill>
                   <a:srgbClr val="9DB0C2"/>
                 </a:solidFill>
-                <a:latin typeface="Calibri"/>
+                <a:latin typeface="Liberation Sans"/>
               </a:rPr>
               <a:t>Gruppo Comunale Volontari di PC · Genzano di Roma</a:t>
             </a:r>
@@ -33043,7 +33043,7 @@
                 <a:solidFill>
                   <a:srgbClr val="9DB0C2"/>
                 </a:solidFill>
-                <a:latin typeface="Calibri"/>
+                <a:latin typeface="Liberation Sans"/>
               </a:rPr>
               <a:t>39</a:t>
             </a:r>
@@ -33078,7 +33078,7 @@
                 <a:solidFill>
                   <a:srgbClr val="FFBE2E"/>
                 </a:solidFill>
-                <a:latin typeface="Calibri"/>
+                <a:latin typeface="Liberation Sans"/>
                 <a:hlinkClick r:id="rId3" action="ppaction://hlinksldjump"/>
               </a:rPr>
               <a:t>« Torna all'agenda</a:t>
@@ -33136,7 +33136,7 @@
                 <a:solidFill>
                   <a:srgbClr val="FFBE2E"/>
                 </a:solidFill>
-                <a:latin typeface="Calibri"/>
+                <a:latin typeface="Liberation Sans"/>
               </a:rPr>
               <a:t>01  </a:t>
             </a:r>
@@ -33145,7 +33145,7 @@
                 <a:solidFill>
                   <a:srgbClr val="FFFFFF"/>
                 </a:solidFill>
-                <a:latin typeface="Calibri"/>
+                <a:latin typeface="Liberation Sans"/>
               </a:rPr>
               <a:t>Per il Cittadino</a:t>
             </a:r>
@@ -33202,7 +33202,7 @@
                 <a:solidFill>
                   <a:srgbClr val="FFBE2E"/>
                 </a:solidFill>
-                <a:latin typeface="Calibri"/>
+                <a:latin typeface="Liberation Sans"/>
               </a:rPr>
               <a:t>02  </a:t>
             </a:r>
@@ -33211,7 +33211,7 @@
                 <a:solidFill>
                   <a:srgbClr val="FFFFFF"/>
                 </a:solidFill>
-                <a:latin typeface="Calibri"/>
+                <a:latin typeface="Liberation Sans"/>
               </a:rPr>
               <a:t>Per le Scuole</a:t>
             </a:r>
@@ -33268,7 +33268,7 @@
                 <a:solidFill>
                   <a:srgbClr val="FFBE2E"/>
                 </a:solidFill>
-                <a:latin typeface="Calibri"/>
+                <a:latin typeface="Liberation Sans"/>
               </a:rPr>
               <a:t>03  </a:t>
             </a:r>
@@ -33277,7 +33277,7 @@
                 <a:solidFill>
                   <a:srgbClr val="FFFFFF"/>
                 </a:solidFill>
-                <a:latin typeface="Calibri"/>
+                <a:latin typeface="Liberation Sans"/>
               </a:rPr>
               <a:t>Accessibilità e inclusione</a:t>
             </a:r>
@@ -33334,7 +33334,7 @@
                 <a:solidFill>
                   <a:srgbClr val="FFBE2E"/>
                 </a:solidFill>
-                <a:latin typeface="Calibri"/>
+                <a:latin typeface="Liberation Sans"/>
               </a:rPr>
               <a:t>04  </a:t>
             </a:r>
@@ -33343,7 +33343,7 @@
                 <a:solidFill>
                   <a:srgbClr val="FFFFFF"/>
                 </a:solidFill>
-                <a:latin typeface="Calibri"/>
+                <a:latin typeface="Liberation Sans"/>
               </a:rPr>
               <a:t>Volontariato</a:t>
             </a:r>
@@ -33396,7 +33396,7 @@
                 <a:solidFill>
                   <a:srgbClr val="001A33"/>
                 </a:solidFill>
-                <a:latin typeface="Calibri"/>
+                <a:latin typeface="Liberation Sans"/>
               </a:rPr>
               <a:t>05  </a:t>
             </a:r>
@@ -33405,7 +33405,7 @@
                 <a:solidFill>
                   <a:srgbClr val="001A33"/>
                 </a:solidFill>
-                <a:latin typeface="Calibri"/>
+                <a:latin typeface="Liberation Sans"/>
               </a:rPr>
               <a:t>Risorse e trasparenza</a:t>
             </a:r>
@@ -33462,7 +33462,7 @@
                 <a:solidFill>
                   <a:srgbClr val="FFBE2E"/>
                 </a:solidFill>
-                <a:latin typeface="Calibri"/>
+                <a:latin typeface="Liberation Sans"/>
               </a:rPr>
               <a:t>06  </a:t>
             </a:r>
@@ -33471,7 +33471,7 @@
                 <a:solidFill>
                   <a:srgbClr val="FFFFFF"/>
                 </a:solidFill>
-                <a:latin typeface="Calibri"/>
+                <a:latin typeface="Liberation Sans"/>
               </a:rPr>
               <a:t>Comunicazione</a:t>
             </a:r>
@@ -33528,7 +33528,7 @@
                 <a:solidFill>
                   <a:srgbClr val="FFBE2E"/>
                 </a:solidFill>
-                <a:latin typeface="Calibri"/>
+                <a:latin typeface="Liberation Sans"/>
               </a:rPr>
               <a:t>07  </a:t>
             </a:r>
@@ -33537,7 +33537,7 @@
                 <a:solidFill>
                   <a:srgbClr val="FFFFFF"/>
                 </a:solidFill>
-                <a:latin typeface="Calibri"/>
+                <a:latin typeface="Liberation Sans"/>
               </a:rPr>
               <a:t>Infrastruttura, fonti e sicurezza</a:t>
             </a:r>
@@ -33572,7 +33572,7 @@
                 <a:solidFill>
                   <a:srgbClr val="FFBE2E"/>
                 </a:solidFill>
-                <a:latin typeface="Calibri"/>
+                <a:latin typeface="Liberation Sans"/>
                 <a:hlinkClick r:id="rId10" action="ppaction://hlinksldjump"/>
               </a:rPr>
               <a:t>‹</a:t>
@@ -33608,7 +33608,7 @@
                 <a:solidFill>
                   <a:srgbClr val="FFBE2E"/>
                 </a:solidFill>
-                <a:latin typeface="Calibri"/>
+                <a:latin typeface="Liberation Sans"/>
                 <a:hlinkClick r:id="rId11" action="ppaction://hlinksldjump"/>
               </a:rPr>
               <a:t>›</a:t>
@@ -33773,7 +33773,7 @@
                 <a:solidFill>
                   <a:srgbClr val="003366"/>
                 </a:solidFill>
-                <a:latin typeface="Calibri"/>
+                <a:latin typeface="Liberation Sans"/>
               </a:rPr>
               <a:t>Una piattaforma per l'intera comunità</a:t>
             </a:r>
@@ -33895,7 +33895,7 @@
                 <a:solidFill>
                   <a:srgbClr val="5A6B7B"/>
                 </a:solidFill>
-                <a:latin typeface="Calibri"/>
+                <a:latin typeface="Liberation Sans"/>
               </a:rPr>
               <a:t>Gruppo Comunale Volontari di PC · Genzano di Roma</a:t>
             </a:r>
@@ -33930,7 +33930,7 @@
                 <a:solidFill>
                   <a:srgbClr val="5A6B7B"/>
                 </a:solidFill>
-                <a:latin typeface="Calibri"/>
+                <a:latin typeface="Liberation Sans"/>
               </a:rPr>
               <a:t>4</a:t>
             </a:r>
@@ -33965,7 +33965,7 @@
                 <a:solidFill>
                   <a:srgbClr val="003366"/>
                 </a:solidFill>
-                <a:latin typeface="Calibri"/>
+                <a:latin typeface="Liberation Sans"/>
                 <a:hlinkClick r:id="rId3" action="ppaction://hlinksldjump"/>
               </a:rPr>
               <a:t>« Torna all'agenda</a:t>
@@ -34057,7 +34057,7 @@
                 <a:solidFill>
                   <a:srgbClr val="1A1A1A"/>
                 </a:solidFill>
-                <a:latin typeface="Calibri"/>
+                <a:latin typeface="Liberation Sans"/>
               </a:rPr>
               <a:t>Famiglie e cittadini; anziani e persone fragili.</a:t>
             </a:r>
@@ -34216,7 +34216,7 @@
                 <a:solidFill>
                   <a:srgbClr val="1A1A1A"/>
                 </a:solidFill>
-                <a:latin typeface="Calibri"/>
+                <a:latin typeface="Liberation Sans"/>
               </a:rPr>
               <a:t>Persone con disabilità sensoriali, cognitive e motorie.</a:t>
             </a:r>
@@ -34375,7 +34375,7 @@
                 <a:solidFill>
                   <a:srgbClr val="1A1A1A"/>
                 </a:solidFill>
-                <a:latin typeface="Calibri"/>
+                <a:latin typeface="Liberation Sans"/>
               </a:rPr>
               <a:t>Scuole e studenti; volontari e operatori.</a:t>
             </a:r>
@@ -34534,7 +34534,7 @@
                 <a:solidFill>
                   <a:srgbClr val="1A1A1A"/>
                 </a:solidFill>
-                <a:latin typeface="Calibri"/>
+                <a:latin typeface="Liberation Sans"/>
               </a:rPr>
               <a:t>Progettazione mobile-first: consultabile in movimento e in condizioni critiche.</a:t>
             </a:r>
@@ -34637,7 +34637,7 @@
                 <a:solidFill>
                   <a:srgbClr val="003366"/>
                 </a:solidFill>
-                <a:latin typeface="Calibri"/>
+                <a:latin typeface="Liberation Sans"/>
                 <a:hlinkClick r:id="rId5" action="ppaction://hlinksldjump"/>
               </a:rPr>
               <a:t>‹</a:t>
@@ -34673,7 +34673,7 @@
                 <a:solidFill>
                   <a:srgbClr val="003366"/>
                 </a:solidFill>
-                <a:latin typeface="Calibri"/>
+                <a:latin typeface="Liberation Sans"/>
                 <a:hlinkClick r:id="rId6" action="ppaction://hlinksldjump"/>
               </a:rPr>
               <a:t>›</a:t>
@@ -34838,7 +34838,7 @@
                 <a:solidFill>
                   <a:srgbClr val="003366"/>
                 </a:solidFill>
-                <a:latin typeface="Calibri"/>
+                <a:latin typeface="Liberation Sans"/>
               </a:rPr>
               <a:t>FAQ e Glossario</a:t>
             </a:r>
@@ -34960,7 +34960,7 @@
                 <a:solidFill>
                   <a:srgbClr val="5A6B7B"/>
                 </a:solidFill>
-                <a:latin typeface="Calibri"/>
+                <a:latin typeface="Liberation Sans"/>
               </a:rPr>
               <a:t>Gruppo Comunale Volontari di PC · Genzano di Roma</a:t>
             </a:r>
@@ -34995,7 +34995,7 @@
                 <a:solidFill>
                   <a:srgbClr val="5A6B7B"/>
                 </a:solidFill>
-                <a:latin typeface="Calibri"/>
+                <a:latin typeface="Liberation Sans"/>
               </a:rPr>
               <a:t>40</a:t>
             </a:r>
@@ -35030,7 +35030,7 @@
                 <a:solidFill>
                   <a:srgbClr val="003366"/>
                 </a:solidFill>
-                <a:latin typeface="Calibri"/>
+                <a:latin typeface="Liberation Sans"/>
                 <a:hlinkClick r:id="rId3" action="ppaction://hlinksldjump"/>
               </a:rPr>
               <a:t>« Torna all'agenda</a:t>
@@ -35122,7 +35122,7 @@
                 <a:solidFill>
                   <a:srgbClr val="1A1A1A"/>
                 </a:solidFill>
-                <a:latin typeface="Calibri"/>
+                <a:latin typeface="Liberation Sans"/>
               </a:rPr>
               <a:t>Risposte alle domande frequenti dei cittadini.</a:t>
             </a:r>
@@ -35281,7 +35281,7 @@
                 <a:solidFill>
                   <a:srgbClr val="1A1A1A"/>
                 </a:solidFill>
-                <a:latin typeface="Calibri"/>
+                <a:latin typeface="Liberation Sans"/>
               </a:rPr>
               <a:t>Glossario dei termini e delle sigle della Protezione Civile.</a:t>
             </a:r>
@@ -35440,7 +35440,7 @@
                 <a:solidFill>
                   <a:srgbClr val="1A1A1A"/>
                 </a:solidFill>
-                <a:latin typeface="Calibri"/>
+                <a:latin typeface="Liberation Sans"/>
               </a:rPr>
               <a:t>Definizioni chiare, anche a comparsa sui termini tecnici nelle pagine.</a:t>
             </a:r>
@@ -35543,7 +35543,7 @@
                 <a:solidFill>
                   <a:srgbClr val="003366"/>
                 </a:solidFill>
-                <a:latin typeface="Calibri"/>
+                <a:latin typeface="Liberation Sans"/>
                 <a:hlinkClick r:id="rId5" action="ppaction://hlinksldjump"/>
               </a:rPr>
               <a:t>‹</a:t>
@@ -35579,7 +35579,7 @@
                 <a:solidFill>
                   <a:srgbClr val="003366"/>
                 </a:solidFill>
-                <a:latin typeface="Calibri"/>
+                <a:latin typeface="Liberation Sans"/>
                 <a:hlinkClick r:id="rId6" action="ppaction://hlinksldjump"/>
               </a:rPr>
               <a:t>›</a:t>
@@ -35744,7 +35744,7 @@
                 <a:solidFill>
                   <a:srgbClr val="003366"/>
                 </a:solidFill>
-                <a:latin typeface="Calibri"/>
+                <a:latin typeface="Liberation Sans"/>
               </a:rPr>
               <a:t>Normativa e Standard ISO</a:t>
             </a:r>
@@ -35866,7 +35866,7 @@
                 <a:solidFill>
                   <a:srgbClr val="5A6B7B"/>
                 </a:solidFill>
-                <a:latin typeface="Calibri"/>
+                <a:latin typeface="Liberation Sans"/>
               </a:rPr>
               <a:t>Gruppo Comunale Volontari di PC · Genzano di Roma</a:t>
             </a:r>
@@ -35901,7 +35901,7 @@
                 <a:solidFill>
                   <a:srgbClr val="5A6B7B"/>
                 </a:solidFill>
-                <a:latin typeface="Calibri"/>
+                <a:latin typeface="Liberation Sans"/>
               </a:rPr>
               <a:t>41</a:t>
             </a:r>
@@ -35936,7 +35936,7 @@
                 <a:solidFill>
                   <a:srgbClr val="003366"/>
                 </a:solidFill>
-                <a:latin typeface="Calibri"/>
+                <a:latin typeface="Liberation Sans"/>
                 <a:hlinkClick r:id="rId3" action="ppaction://hlinksldjump"/>
               </a:rPr>
               <a:t>« Torna all'agenda</a:t>
@@ -36028,7 +36028,7 @@
                 <a:solidFill>
                   <a:srgbClr val="1A1A1A"/>
                 </a:solidFill>
-                <a:latin typeface="Calibri"/>
+                <a:latin typeface="Liberation Sans"/>
               </a:rPr>
               <a:t>Raccolta della normativa nazionale, regionale e comunale.</a:t>
             </a:r>
@@ -36187,7 +36187,7 @@
                 <a:solidFill>
                   <a:srgbClr val="1A1A1A"/>
                 </a:solidFill>
-                <a:latin typeface="Calibri"/>
+                <a:latin typeface="Liberation Sans"/>
               </a:rPr>
               <a:t>Schede degli standard internazionali ISO rilevanti per la materia.</a:t>
             </a:r>
@@ -36346,7 +36346,7 @@
                 <a:solidFill>
                   <a:srgbClr val="1A1A1A"/>
                 </a:solidFill>
-                <a:latin typeface="Calibri"/>
+                <a:latin typeface="Liberation Sans"/>
               </a:rPr>
               <a:t>Dalla legge nazionale fino al livello comunale e internazionale.</a:t>
             </a:r>
@@ -36448,7 +36448,7 @@
                 <a:solidFill>
                   <a:srgbClr val="003366"/>
                 </a:solidFill>
-                <a:latin typeface="Calibri"/>
+                <a:latin typeface="Liberation Sans"/>
               </a:rPr>
               <a:t>Fonti e standard: </a:t>
             </a:r>
@@ -36457,7 +36457,7 @@
                 <a:solidFill>
                   <a:srgbClr val="5A6B7B"/>
                 </a:solidFill>
-                <a:latin typeface="Calibri"/>
+                <a:latin typeface="Liberation Sans"/>
               </a:rPr>
               <a:t>Normattiva · BURL Lazio · ISO</a:t>
             </a:r>
@@ -36492,7 +36492,7 @@
                 <a:solidFill>
                   <a:srgbClr val="003366"/>
                 </a:solidFill>
-                <a:latin typeface="Calibri"/>
+                <a:latin typeface="Liberation Sans"/>
                 <a:hlinkClick r:id="rId5" action="ppaction://hlinksldjump"/>
               </a:rPr>
               <a:t>‹</a:t>
@@ -36528,7 +36528,7 @@
                 <a:solidFill>
                   <a:srgbClr val="003366"/>
                 </a:solidFill>
-                <a:latin typeface="Calibri"/>
+                <a:latin typeface="Liberation Sans"/>
                 <a:hlinkClick r:id="rId6" action="ppaction://hlinksldjump"/>
               </a:rPr>
               <a:t>›</a:t>
@@ -36693,7 +36693,7 @@
                 <a:solidFill>
                   <a:srgbClr val="003366"/>
                 </a:solidFill>
-                <a:latin typeface="Calibri"/>
+                <a:latin typeface="Liberation Sans"/>
               </a:rPr>
               <a:t>Area download</a:t>
             </a:r>
@@ -36815,7 +36815,7 @@
                 <a:solidFill>
                   <a:srgbClr val="5A6B7B"/>
                 </a:solidFill>
-                <a:latin typeface="Calibri"/>
+                <a:latin typeface="Liberation Sans"/>
               </a:rPr>
               <a:t>Gruppo Comunale Volontari di PC · Genzano di Roma</a:t>
             </a:r>
@@ -36850,7 +36850,7 @@
                 <a:solidFill>
                   <a:srgbClr val="5A6B7B"/>
                 </a:solidFill>
-                <a:latin typeface="Calibri"/>
+                <a:latin typeface="Liberation Sans"/>
               </a:rPr>
               <a:t>42</a:t>
             </a:r>
@@ -36885,7 +36885,7 @@
                 <a:solidFill>
                   <a:srgbClr val="003366"/>
                 </a:solidFill>
-                <a:latin typeface="Calibri"/>
+                <a:latin typeface="Liberation Sans"/>
                 <a:hlinkClick r:id="rId3" action="ppaction://hlinksldjump"/>
               </a:rPr>
               <a:t>« Torna all'agenda</a:t>
@@ -36977,7 +36977,7 @@
                 <a:solidFill>
                   <a:srgbClr val="1A1A1A"/>
                 </a:solidFill>
-                <a:latin typeface="Calibri"/>
+                <a:latin typeface="Liberation Sans"/>
               </a:rPr>
               <a:t>Documenti ufficiali e modulistica scaricabili.</a:t>
             </a:r>
@@ -37136,7 +37136,7 @@
                 <a:solidFill>
                   <a:srgbClr val="1A1A1A"/>
                 </a:solidFill>
-                <a:latin typeface="Calibri"/>
+                <a:latin typeface="Liberation Sans"/>
               </a:rPr>
               <a:t>Per ogni file sono indicati formato e dimensione (accessibilità).</a:t>
             </a:r>
@@ -37295,7 +37295,7 @@
                 <a:solidFill>
                   <a:srgbClr val="1A1A1A"/>
                 </a:solidFill>
-                <a:latin typeface="Calibri"/>
+                <a:latin typeface="Liberation Sans"/>
               </a:rPr>
               <a:t>Un punto unico per atti, piani e materiali del Gruppo.</a:t>
             </a:r>
@@ -37398,7 +37398,7 @@
                 <a:solidFill>
                   <a:srgbClr val="003366"/>
                 </a:solidFill>
-                <a:latin typeface="Calibri"/>
+                <a:latin typeface="Liberation Sans"/>
                 <a:hlinkClick r:id="rId5" action="ppaction://hlinksldjump"/>
               </a:rPr>
               <a:t>‹</a:t>
@@ -37434,7 +37434,7 @@
                 <a:solidFill>
                   <a:srgbClr val="003366"/>
                 </a:solidFill>
-                <a:latin typeface="Calibri"/>
+                <a:latin typeface="Liberation Sans"/>
                 <a:hlinkClick r:id="rId6" action="ppaction://hlinksldjump"/>
               </a:rPr>
               <a:t>›</a:t>
@@ -37599,7 +37599,7 @@
                 <a:solidFill>
                   <a:srgbClr val="003366"/>
                 </a:solidFill>
-                <a:latin typeface="Calibri"/>
+                <a:latin typeface="Liberation Sans"/>
               </a:rPr>
               <a:t>Strumenti in tempo reale</a:t>
             </a:r>
@@ -37721,7 +37721,7 @@
                 <a:solidFill>
                   <a:srgbClr val="5A6B7B"/>
                 </a:solidFill>
-                <a:latin typeface="Calibri"/>
+                <a:latin typeface="Liberation Sans"/>
               </a:rPr>
               <a:t>Gruppo Comunale Volontari di PC · Genzano di Roma</a:t>
             </a:r>
@@ -37756,7 +37756,7 @@
                 <a:solidFill>
                   <a:srgbClr val="5A6B7B"/>
                 </a:solidFill>
-                <a:latin typeface="Calibri"/>
+                <a:latin typeface="Liberation Sans"/>
               </a:rPr>
               <a:t>43</a:t>
             </a:r>
@@ -37791,7 +37791,7 @@
                 <a:solidFill>
                   <a:srgbClr val="003366"/>
                 </a:solidFill>
-                <a:latin typeface="Calibri"/>
+                <a:latin typeface="Liberation Sans"/>
                 <a:hlinkClick r:id="rId3" action="ppaction://hlinksldjump"/>
               </a:rPr>
               <a:t>« Torna all'agenda</a:t>
@@ -37883,7 +37883,7 @@
                 <a:solidFill>
                   <a:srgbClr val="1A1A1A"/>
                 </a:solidFill>
-                <a:latin typeface="Calibri"/>
+                <a:latin typeface="Liberation Sans"/>
               </a:rPr>
               <a:t>Hub dei servizi di monitoraggio del territorio.</a:t>
             </a:r>
@@ -38042,7 +38042,7 @@
                 <a:solidFill>
                   <a:srgbClr val="1A1A1A"/>
                 </a:solidFill>
-                <a:latin typeface="Calibri"/>
+                <a:latin typeface="Liberation Sans"/>
               </a:rPr>
               <a:t>Meteo, sismico, idrogeologico, incendi, qualità dell'aria, viabilità.</a:t>
             </a:r>
@@ -38201,7 +38201,7 @@
                 <a:solidFill>
                   <a:srgbClr val="1A1A1A"/>
                 </a:solidFill>
-                <a:latin typeface="Calibri"/>
+                <a:latin typeface="Liberation Sans"/>
               </a:rPr>
               <a:t>Collegamenti diretti alle fonti ufficiali aggiornate.</a:t>
             </a:r>
@@ -38304,7 +38304,7 @@
                 <a:solidFill>
                   <a:srgbClr val="003366"/>
                 </a:solidFill>
-                <a:latin typeface="Calibri"/>
+                <a:latin typeface="Liberation Sans"/>
                 <a:hlinkClick r:id="rId5" action="ppaction://hlinksldjump"/>
               </a:rPr>
               <a:t>‹</a:t>
@@ -38340,7 +38340,7 @@
                 <a:solidFill>
                   <a:srgbClr val="003366"/>
                 </a:solidFill>
-                <a:latin typeface="Calibri"/>
+                <a:latin typeface="Liberation Sans"/>
                 <a:hlinkClick r:id="rId6" action="ppaction://hlinksldjump"/>
               </a:rPr>
               <a:t>›</a:t>
@@ -38505,7 +38505,7 @@
                 <a:solidFill>
                   <a:srgbClr val="003366"/>
                 </a:solidFill>
-                <a:latin typeface="Calibri"/>
+                <a:latin typeface="Liberation Sans"/>
               </a:rPr>
               <a:t>Audio e podcast</a:t>
             </a:r>
@@ -38627,7 +38627,7 @@
                 <a:solidFill>
                   <a:srgbClr val="5A6B7B"/>
                 </a:solidFill>
-                <a:latin typeface="Calibri"/>
+                <a:latin typeface="Liberation Sans"/>
               </a:rPr>
               <a:t>Gruppo Comunale Volontari di PC · Genzano di Roma</a:t>
             </a:r>
@@ -38662,7 +38662,7 @@
                 <a:solidFill>
                   <a:srgbClr val="5A6B7B"/>
                 </a:solidFill>
-                <a:latin typeface="Calibri"/>
+                <a:latin typeface="Liberation Sans"/>
               </a:rPr>
               <a:t>44</a:t>
             </a:r>
@@ -38697,7 +38697,7 @@
                 <a:solidFill>
                   <a:srgbClr val="003366"/>
                 </a:solidFill>
-                <a:latin typeface="Calibri"/>
+                <a:latin typeface="Liberation Sans"/>
                 <a:hlinkClick r:id="rId3" action="ppaction://hlinksldjump"/>
               </a:rPr>
               <a:t>« Torna all'agenda</a:t>
@@ -38789,7 +38789,7 @@
                 <a:solidFill>
                   <a:srgbClr val="1A1A1A"/>
                 </a:solidFill>
-                <a:latin typeface="Calibri"/>
+                <a:latin typeface="Liberation Sans"/>
               </a:rPr>
               <a:t>Contenuti ascoltabili per chi preferisce l'ascolto.</a:t>
             </a:r>
@@ -38948,7 +38948,7 @@
                 <a:solidFill>
                   <a:srgbClr val="1A1A1A"/>
                 </a:solidFill>
-                <a:latin typeface="Calibri"/>
+                <a:latin typeface="Liberation Sans"/>
               </a:rPr>
               <a:t>Maggiore accessibilità all'informazione.</a:t>
             </a:r>
@@ -39107,7 +39107,7 @@
                 <a:solidFill>
                   <a:srgbClr val="1A1A1A"/>
                 </a:solidFill>
-                <a:latin typeface="Calibri"/>
+                <a:latin typeface="Liberation Sans"/>
               </a:rPr>
               <a:t>Utili per anziani, ipovedenti e chi è in movimento.</a:t>
             </a:r>
@@ -39210,7 +39210,7 @@
                 <a:solidFill>
                   <a:srgbClr val="003366"/>
                 </a:solidFill>
-                <a:latin typeface="Calibri"/>
+                <a:latin typeface="Liberation Sans"/>
                 <a:hlinkClick r:id="rId5" action="ppaction://hlinksldjump"/>
               </a:rPr>
               <a:t>‹</a:t>
@@ -39246,7 +39246,7 @@
                 <a:solidFill>
                   <a:srgbClr val="003366"/>
                 </a:solidFill>
-                <a:latin typeface="Calibri"/>
+                <a:latin typeface="Liberation Sans"/>
                 <a:hlinkClick r:id="rId6" action="ppaction://hlinksldjump"/>
               </a:rPr>
               <a:t>›</a:t>
@@ -39411,7 +39411,7 @@
                 <a:solidFill>
                   <a:srgbClr val="003366"/>
                 </a:solidFill>
-                <a:latin typeface="Calibri"/>
+                <a:latin typeface="Liberation Sans"/>
               </a:rPr>
               <a:t>Open data e stato del sito</a:t>
             </a:r>
@@ -39533,7 +39533,7 @@
                 <a:solidFill>
                   <a:srgbClr val="5A6B7B"/>
                 </a:solidFill>
-                <a:latin typeface="Calibri"/>
+                <a:latin typeface="Liberation Sans"/>
               </a:rPr>
               <a:t>Gruppo Comunale Volontari di PC · Genzano di Roma</a:t>
             </a:r>
@@ -39568,7 +39568,7 @@
                 <a:solidFill>
                   <a:srgbClr val="5A6B7B"/>
                 </a:solidFill>
-                <a:latin typeface="Calibri"/>
+                <a:latin typeface="Liberation Sans"/>
               </a:rPr>
               <a:t>45</a:t>
             </a:r>
@@ -39603,7 +39603,7 @@
                 <a:solidFill>
                   <a:srgbClr val="003366"/>
                 </a:solidFill>
-                <a:latin typeface="Calibri"/>
+                <a:latin typeface="Liberation Sans"/>
                 <a:hlinkClick r:id="rId3" action="ppaction://hlinksldjump"/>
               </a:rPr>
               <a:t>« Torna all'agenda</a:t>
@@ -39695,7 +39695,7 @@
                 <a:solidFill>
                   <a:srgbClr val="1A1A1A"/>
                 </a:solidFill>
-                <a:latin typeface="Calibri"/>
+                <a:latin typeface="Liberation Sans"/>
               </a:rPr>
               <a:t>Dati aperti riutilizzabili dalla cittadinanza.</a:t>
             </a:r>
@@ -39854,7 +39854,7 @@
                 <a:solidFill>
                   <a:srgbClr val="1A1A1A"/>
                 </a:solidFill>
-                <a:latin typeface="Calibri"/>
+                <a:latin typeface="Liberation Sans"/>
               </a:rPr>
               <a:t>Pagina di trasparenza sullo stato tecnico del sito.</a:t>
             </a:r>
@@ -40013,7 +40013,7 @@
                 <a:solidFill>
                   <a:srgbClr val="1A1A1A"/>
                 </a:solidFill>
-                <a:latin typeface="Calibri"/>
+                <a:latin typeface="Liberation Sans"/>
               </a:rPr>
               <a:t>Riuso libero, secondo il principio di trasparenza della PA.</a:t>
             </a:r>
@@ -40116,7 +40116,7 @@
                 <a:solidFill>
                   <a:srgbClr val="003366"/>
                 </a:solidFill>
-                <a:latin typeface="Calibri"/>
+                <a:latin typeface="Liberation Sans"/>
                 <a:hlinkClick r:id="rId5" action="ppaction://hlinksldjump"/>
               </a:rPr>
               <a:t>‹</a:t>
@@ -40152,7 +40152,7 @@
                 <a:solidFill>
                   <a:srgbClr val="003366"/>
                 </a:solidFill>
-                <a:latin typeface="Calibri"/>
+                <a:latin typeface="Liberation Sans"/>
                 <a:hlinkClick r:id="rId6" action="ppaction://hlinksldjump"/>
               </a:rPr>
               <a:t>›</a:t>
@@ -40317,7 +40317,7 @@
                 <a:solidFill>
                   <a:srgbClr val="003366"/>
                 </a:solidFill>
-                <a:latin typeface="Calibri"/>
+                <a:latin typeface="Liberation Sans"/>
               </a:rPr>
               <a:t>Pagine legali e trasparenza</a:t>
             </a:r>
@@ -40439,7 +40439,7 @@
                 <a:solidFill>
                   <a:srgbClr val="5A6B7B"/>
                 </a:solidFill>
-                <a:latin typeface="Calibri"/>
+                <a:latin typeface="Liberation Sans"/>
               </a:rPr>
               <a:t>Gruppo Comunale Volontari di PC · Genzano di Roma</a:t>
             </a:r>
@@ -40474,7 +40474,7 @@
                 <a:solidFill>
                   <a:srgbClr val="5A6B7B"/>
                 </a:solidFill>
-                <a:latin typeface="Calibri"/>
+                <a:latin typeface="Liberation Sans"/>
               </a:rPr>
               <a:t>46</a:t>
             </a:r>
@@ -40509,7 +40509,7 @@
                 <a:solidFill>
                   <a:srgbClr val="003366"/>
                 </a:solidFill>
-                <a:latin typeface="Calibri"/>
+                <a:latin typeface="Liberation Sans"/>
                 <a:hlinkClick r:id="rId3" action="ppaction://hlinksldjump"/>
               </a:rPr>
               <a:t>« Torna all'agenda</a:t>
@@ -40601,7 +40601,7 @@
                 <a:solidFill>
                   <a:srgbClr val="1A1A1A"/>
                 </a:solidFill>
-                <a:latin typeface="Calibri"/>
+                <a:latin typeface="Liberation Sans"/>
               </a:rPr>
               <a:t>Privacy, note legali, dichiarazione di accessibilità, social media policy.</a:t>
             </a:r>
@@ -40760,7 +40760,7 @@
                 <a:solidFill>
                   <a:srgbClr val="1A1A1A"/>
                 </a:solidFill>
-                <a:latin typeface="Calibri"/>
+                <a:latin typeface="Liberation Sans"/>
               </a:rPr>
               <a:t>Data di revisione sempre indicata.</a:t>
             </a:r>
@@ -40919,7 +40919,7 @@
                 <a:solidFill>
                   <a:srgbClr val="1A1A1A"/>
                 </a:solidFill>
-                <a:latin typeface="Calibri"/>
+                <a:latin typeface="Liberation Sans"/>
               </a:rPr>
               <a:t>Conformità agli obblighi di trasparenza della Pubblica Amministrazione.</a:t>
             </a:r>
@@ -41022,7 +41022,7 @@
                 <a:solidFill>
                   <a:srgbClr val="003366"/>
                 </a:solidFill>
-                <a:latin typeface="Calibri"/>
+                <a:latin typeface="Liberation Sans"/>
                 <a:hlinkClick r:id="rId5" action="ppaction://hlinksldjump"/>
               </a:rPr>
               <a:t>‹</a:t>
@@ -41058,7 +41058,7 @@
                 <a:solidFill>
                   <a:srgbClr val="003366"/>
                 </a:solidFill>
-                <a:latin typeface="Calibri"/>
+                <a:latin typeface="Liberation Sans"/>
                 <a:hlinkClick r:id="rId6" action="ppaction://hlinksldjump"/>
               </a:rPr>
               <a:t>›</a:t>
@@ -41223,7 +41223,7 @@
                 <a:solidFill>
                   <a:srgbClr val="FFFFFF"/>
                 </a:solidFill>
-                <a:latin typeface="Calibri"/>
+                <a:latin typeface="Liberation Sans"/>
               </a:rPr>
               <a:t>Comunicazione</a:t>
             </a:r>
@@ -41257,7 +41257,7 @@
                 <a:solidFill>
                   <a:srgbClr val="FFBE2E"/>
                 </a:solidFill>
-                <a:latin typeface="Calibri"/>
+                <a:latin typeface="Liberation Sans"/>
               </a:rPr>
               <a:t>SEZIONE</a:t>
             </a:r>
@@ -41335,7 +41335,7 @@
                 <a:solidFill>
                   <a:srgbClr val="9DB0C2"/>
                 </a:solidFill>
-                <a:latin typeface="Calibri"/>
+                <a:latin typeface="Liberation Sans"/>
               </a:rPr>
               <a:t>Gruppo Comunale Volontari di PC · Genzano di Roma</a:t>
             </a:r>
@@ -41370,7 +41370,7 @@
                 <a:solidFill>
                   <a:srgbClr val="9DB0C2"/>
                 </a:solidFill>
-                <a:latin typeface="Calibri"/>
+                <a:latin typeface="Liberation Sans"/>
               </a:rPr>
               <a:t>47</a:t>
             </a:r>
@@ -41405,7 +41405,7 @@
                 <a:solidFill>
                   <a:srgbClr val="FFBE2E"/>
                 </a:solidFill>
-                <a:latin typeface="Calibri"/>
+                <a:latin typeface="Liberation Sans"/>
                 <a:hlinkClick r:id="rId3" action="ppaction://hlinksldjump"/>
               </a:rPr>
               <a:t>« Torna all'agenda</a:t>
@@ -41463,7 +41463,7 @@
                 <a:solidFill>
                   <a:srgbClr val="FFBE2E"/>
                 </a:solidFill>
-                <a:latin typeface="Calibri"/>
+                <a:latin typeface="Liberation Sans"/>
               </a:rPr>
               <a:t>01  </a:t>
             </a:r>
@@ -41472,7 +41472,7 @@
                 <a:solidFill>
                   <a:srgbClr val="FFFFFF"/>
                 </a:solidFill>
-                <a:latin typeface="Calibri"/>
+                <a:latin typeface="Liberation Sans"/>
               </a:rPr>
               <a:t>Per il Cittadino</a:t>
             </a:r>
@@ -41529,7 +41529,7 @@
                 <a:solidFill>
                   <a:srgbClr val="FFBE2E"/>
                 </a:solidFill>
-                <a:latin typeface="Calibri"/>
+                <a:latin typeface="Liberation Sans"/>
               </a:rPr>
               <a:t>02  </a:t>
             </a:r>
@@ -41538,7 +41538,7 @@
                 <a:solidFill>
                   <a:srgbClr val="FFFFFF"/>
                 </a:solidFill>
-                <a:latin typeface="Calibri"/>
+                <a:latin typeface="Liberation Sans"/>
               </a:rPr>
               <a:t>Per le Scuole</a:t>
             </a:r>
@@ -41595,7 +41595,7 @@
                 <a:solidFill>
                   <a:srgbClr val="FFBE2E"/>
                 </a:solidFill>
-                <a:latin typeface="Calibri"/>
+                <a:latin typeface="Liberation Sans"/>
               </a:rPr>
               <a:t>03  </a:t>
             </a:r>
@@ -41604,7 +41604,7 @@
                 <a:solidFill>
                   <a:srgbClr val="FFFFFF"/>
                 </a:solidFill>
-                <a:latin typeface="Calibri"/>
+                <a:latin typeface="Liberation Sans"/>
               </a:rPr>
               <a:t>Accessibilità e inclusione</a:t>
             </a:r>
@@ -41661,7 +41661,7 @@
                 <a:solidFill>
                   <a:srgbClr val="FFBE2E"/>
                 </a:solidFill>
-                <a:latin typeface="Calibri"/>
+                <a:latin typeface="Liberation Sans"/>
               </a:rPr>
               <a:t>04  </a:t>
             </a:r>
@@ -41670,7 +41670,7 @@
                 <a:solidFill>
                   <a:srgbClr val="FFFFFF"/>
                 </a:solidFill>
-                <a:latin typeface="Calibri"/>
+                <a:latin typeface="Liberation Sans"/>
               </a:rPr>
               <a:t>Volontariato</a:t>
             </a:r>
@@ -41727,7 +41727,7 @@
                 <a:solidFill>
                   <a:srgbClr val="FFBE2E"/>
                 </a:solidFill>
-                <a:latin typeface="Calibri"/>
+                <a:latin typeface="Liberation Sans"/>
               </a:rPr>
               <a:t>05  </a:t>
             </a:r>
@@ -41736,7 +41736,7 @@
                 <a:solidFill>
                   <a:srgbClr val="FFFFFF"/>
                 </a:solidFill>
-                <a:latin typeface="Calibri"/>
+                <a:latin typeface="Liberation Sans"/>
               </a:rPr>
               <a:t>Risorse e trasparenza</a:t>
             </a:r>
@@ -41789,7 +41789,7 @@
                 <a:solidFill>
                   <a:srgbClr val="001A33"/>
                 </a:solidFill>
-                <a:latin typeface="Calibri"/>
+                <a:latin typeface="Liberation Sans"/>
               </a:rPr>
               <a:t>06  </a:t>
             </a:r>
@@ -41798,7 +41798,7 @@
                 <a:solidFill>
                   <a:srgbClr val="001A33"/>
                 </a:solidFill>
-                <a:latin typeface="Calibri"/>
+                <a:latin typeface="Liberation Sans"/>
               </a:rPr>
               <a:t>Comunicazione</a:t>
             </a:r>
@@ -41855,7 +41855,7 @@
                 <a:solidFill>
                   <a:srgbClr val="FFBE2E"/>
                 </a:solidFill>
-                <a:latin typeface="Calibri"/>
+                <a:latin typeface="Liberation Sans"/>
               </a:rPr>
               <a:t>07  </a:t>
             </a:r>
@@ -41864,7 +41864,7 @@
                 <a:solidFill>
                   <a:srgbClr val="FFFFFF"/>
                 </a:solidFill>
-                <a:latin typeface="Calibri"/>
+                <a:latin typeface="Liberation Sans"/>
               </a:rPr>
               <a:t>Infrastruttura, fonti e sicurezza</a:t>
             </a:r>
@@ -41899,7 +41899,7 @@
                 <a:solidFill>
                   <a:srgbClr val="FFBE2E"/>
                 </a:solidFill>
-                <a:latin typeface="Calibri"/>
+                <a:latin typeface="Liberation Sans"/>
                 <a:hlinkClick r:id="rId10" action="ppaction://hlinksldjump"/>
               </a:rPr>
               <a:t>‹</a:t>
@@ -41935,7 +41935,7 @@
                 <a:solidFill>
                   <a:srgbClr val="FFBE2E"/>
                 </a:solidFill>
-                <a:latin typeface="Calibri"/>
+                <a:latin typeface="Liberation Sans"/>
                 <a:hlinkClick r:id="rId11" action="ppaction://hlinksldjump"/>
               </a:rPr>
               <a:t>›</a:t>
@@ -42100,7 +42100,7 @@
                 <a:solidFill>
                   <a:srgbClr val="003366"/>
                 </a:solidFill>
-                <a:latin typeface="Calibri"/>
+                <a:latin typeface="Liberation Sans"/>
               </a:rPr>
               <a:t>Comunicazioni e notizie</a:t>
             </a:r>
@@ -42222,7 +42222,7 @@
                 <a:solidFill>
                   <a:srgbClr val="5A6B7B"/>
                 </a:solidFill>
-                <a:latin typeface="Calibri"/>
+                <a:latin typeface="Liberation Sans"/>
               </a:rPr>
               <a:t>Gruppo Comunale Volontari di PC · Genzano di Roma</a:t>
             </a:r>
@@ -42257,7 +42257,7 @@
                 <a:solidFill>
                   <a:srgbClr val="5A6B7B"/>
                 </a:solidFill>
-                <a:latin typeface="Calibri"/>
+                <a:latin typeface="Liberation Sans"/>
               </a:rPr>
               <a:t>48</a:t>
             </a:r>
@@ -42292,7 +42292,7 @@
                 <a:solidFill>
                   <a:srgbClr val="003366"/>
                 </a:solidFill>
-                <a:latin typeface="Calibri"/>
+                <a:latin typeface="Liberation Sans"/>
                 <a:hlinkClick r:id="rId3" action="ppaction://hlinksldjump"/>
               </a:rPr>
               <a:t>« Torna all'agenda</a:t>
@@ -42384,7 +42384,7 @@
                 <a:solidFill>
                   <a:srgbClr val="1A1A1A"/>
                 </a:solidFill>
-                <a:latin typeface="Calibri"/>
+                <a:latin typeface="Liberation Sans"/>
               </a:rPr>
               <a:t>Sezione informativa costantemente aggiornata.</a:t>
             </a:r>
@@ -42543,7 +42543,7 @@
                 <a:solidFill>
                   <a:srgbClr val="1A1A1A"/>
                 </a:solidFill>
-                <a:latin typeface="Calibri"/>
+                <a:latin typeface="Liberation Sans"/>
               </a:rPr>
               <a:t>Distinzione chiara tra informazione, prevenzione, allerta ed emergenza.</a:t>
             </a:r>
@@ -42702,7 +42702,7 @@
                 <a:solidFill>
                   <a:srgbClr val="1A1A1A"/>
                 </a:solidFill>
-                <a:latin typeface="Calibri"/>
+                <a:latin typeface="Liberation Sans"/>
               </a:rPr>
               <a:t>Ogni avviso rimanda alla fonte ufficiale di riferimento.</a:t>
             </a:r>
@@ -42805,7 +42805,7 @@
                 <a:solidFill>
                   <a:srgbClr val="003366"/>
                 </a:solidFill>
-                <a:latin typeface="Calibri"/>
+                <a:latin typeface="Liberation Sans"/>
                 <a:hlinkClick r:id="rId5" action="ppaction://hlinksldjump"/>
               </a:rPr>
               <a:t>‹</a:t>
@@ -42841,7 +42841,7 @@
                 <a:solidFill>
                   <a:srgbClr val="003366"/>
                 </a:solidFill>
-                <a:latin typeface="Calibri"/>
+                <a:latin typeface="Liberation Sans"/>
                 <a:hlinkClick r:id="rId6" action="ppaction://hlinksldjump"/>
               </a:rPr>
               <a:t>›</a:t>
@@ -43006,7 +43006,7 @@
                 <a:solidFill>
                   <a:srgbClr val="003366"/>
                 </a:solidFill>
-                <a:latin typeface="Calibri"/>
+                <a:latin typeface="Liberation Sans"/>
               </a:rPr>
               <a:t>Comunicazione di crisi e social</a:t>
             </a:r>
@@ -43128,7 +43128,7 @@
                 <a:solidFill>
                   <a:srgbClr val="5A6B7B"/>
                 </a:solidFill>
-                <a:latin typeface="Calibri"/>
+                <a:latin typeface="Liberation Sans"/>
               </a:rPr>
               <a:t>Gruppo Comunale Volontari di PC · Genzano di Roma</a:t>
             </a:r>
@@ -43163,7 +43163,7 @@
                 <a:solidFill>
                   <a:srgbClr val="5A6B7B"/>
                 </a:solidFill>
-                <a:latin typeface="Calibri"/>
+                <a:latin typeface="Liberation Sans"/>
               </a:rPr>
               <a:t>49</a:t>
             </a:r>
@@ -43198,7 +43198,7 @@
                 <a:solidFill>
                   <a:srgbClr val="003366"/>
                 </a:solidFill>
-                <a:latin typeface="Calibri"/>
+                <a:latin typeface="Liberation Sans"/>
                 <a:hlinkClick r:id="rId3" action="ppaction://hlinksldjump"/>
               </a:rPr>
               <a:t>« Torna all'agenda</a:t>
@@ -43290,7 +43290,7 @@
                 <a:solidFill>
                   <a:srgbClr val="1A1A1A"/>
                 </a:solidFill>
-                <a:latin typeface="Calibri"/>
+                <a:latin typeface="Liberation Sans"/>
               </a:rPr>
               <a:t>Social media policy pubblica.</a:t>
             </a:r>
@@ -43449,7 +43449,7 @@
                 <a:solidFill>
                   <a:srgbClr val="1A1A1A"/>
                 </a:solidFill>
-                <a:latin typeface="Calibri"/>
+                <a:latin typeface="Liberation Sans"/>
               </a:rPr>
               <a:t>Struttura dei messaggi secondo standard internazionali.</a:t>
             </a:r>
@@ -43608,7 +43608,7 @@
                 <a:solidFill>
                   <a:srgbClr val="1A1A1A"/>
                 </a:solidFill>
-                <a:latin typeface="Calibri"/>
+                <a:latin typeface="Liberation Sans"/>
               </a:rPr>
               <a:t>Contrasto alla disinformazione con fonti ufficiali.</a:t>
             </a:r>
@@ -43710,7 +43710,7 @@
                 <a:solidFill>
                   <a:srgbClr val="003366"/>
                 </a:solidFill>
-                <a:latin typeface="Calibri"/>
+                <a:latin typeface="Liberation Sans"/>
               </a:rPr>
               <a:t>Fonti e standard: </a:t>
             </a:r>
@@ -43719,7 +43719,7 @@
                 <a:solidFill>
                   <a:srgbClr val="5A6B7B"/>
                 </a:solidFill>
-                <a:latin typeface="Calibri"/>
+                <a:latin typeface="Liberation Sans"/>
               </a:rPr>
               <a:t>ISO 22329 · CWA CEN/CENELEC · EENA (112)</a:t>
             </a:r>
@@ -43754,7 +43754,7 @@
                 <a:solidFill>
                   <a:srgbClr val="003366"/>
                 </a:solidFill>
-                <a:latin typeface="Calibri"/>
+                <a:latin typeface="Liberation Sans"/>
                 <a:hlinkClick r:id="rId5" action="ppaction://hlinksldjump"/>
               </a:rPr>
               <a:t>‹</a:t>
@@ -43790,7 +43790,7 @@
                 <a:solidFill>
                   <a:srgbClr val="003366"/>
                 </a:solidFill>
-                <a:latin typeface="Calibri"/>
+                <a:latin typeface="Liberation Sans"/>
                 <a:hlinkClick r:id="rId6" action="ppaction://hlinksldjump"/>
               </a:rPr>
               <a:t>›</a:t>
@@ -43955,7 +43955,7 @@
                 <a:solidFill>
                   <a:srgbClr val="003366"/>
                 </a:solidFill>
-                <a:latin typeface="Calibri"/>
+                <a:latin typeface="Liberation Sans"/>
               </a:rPr>
               <a:t>Principi guida</a:t>
             </a:r>
@@ -44077,7 +44077,7 @@
                 <a:solidFill>
                   <a:srgbClr val="5A6B7B"/>
                 </a:solidFill>
-                <a:latin typeface="Calibri"/>
+                <a:latin typeface="Liberation Sans"/>
               </a:rPr>
               <a:t>Gruppo Comunale Volontari di PC · Genzano di Roma</a:t>
             </a:r>
@@ -44112,7 +44112,7 @@
                 <a:solidFill>
                   <a:srgbClr val="5A6B7B"/>
                 </a:solidFill>
-                <a:latin typeface="Calibri"/>
+                <a:latin typeface="Liberation Sans"/>
               </a:rPr>
               <a:t>5</a:t>
             </a:r>
@@ -44147,7 +44147,7 @@
                 <a:solidFill>
                   <a:srgbClr val="003366"/>
                 </a:solidFill>
-                <a:latin typeface="Calibri"/>
+                <a:latin typeface="Liberation Sans"/>
                 <a:hlinkClick r:id="rId3" action="ppaction://hlinksldjump"/>
               </a:rPr>
               <a:t>« Torna all'agenda</a:t>
@@ -44239,7 +44239,7 @@
                 <a:solidFill>
                   <a:srgbClr val="1A1A1A"/>
                 </a:solidFill>
-                <a:latin typeface="Calibri"/>
+                <a:latin typeface="Liberation Sans"/>
               </a:rPr>
               <a:t>Affidabilità e correttezza istituzionale prima di tutto.</a:t>
             </a:r>
@@ -44398,7 +44398,7 @@
                 <a:solidFill>
                   <a:srgbClr val="1A1A1A"/>
                 </a:solidFill>
-                <a:latin typeface="Calibri"/>
+                <a:latin typeface="Liberation Sans"/>
               </a:rPr>
               <a:t>Accessibilità universale, con le WCAG 2.2 AA come soglia minima.</a:t>
             </a:r>
@@ -44557,7 +44557,7 @@
                 <a:solidFill>
                   <a:srgbClr val="1A1A1A"/>
                 </a:solidFill>
-                <a:latin typeface="Calibri"/>
+                <a:latin typeface="Liberation Sans"/>
               </a:rPr>
               <a:t>Chiarezza per il cittadino e sobrietà del linguaggio.</a:t>
             </a:r>
@@ -44716,7 +44716,7 @@
                 <a:solidFill>
                   <a:srgbClr val="1A1A1A"/>
                 </a:solidFill>
-                <a:latin typeface="Calibri"/>
+                <a:latin typeface="Liberation Sans"/>
               </a:rPr>
               <a:t>Ogni dato è verificato e accompagnato dalla sua fonte.</a:t>
             </a:r>
@@ -44819,7 +44819,7 @@
                 <a:solidFill>
                   <a:srgbClr val="003366"/>
                 </a:solidFill>
-                <a:latin typeface="Calibri"/>
+                <a:latin typeface="Liberation Sans"/>
                 <a:hlinkClick r:id="rId5" action="ppaction://hlinksldjump"/>
               </a:rPr>
               <a:t>‹</a:t>
@@ -44855,7 +44855,7 @@
                 <a:solidFill>
                   <a:srgbClr val="003366"/>
                 </a:solidFill>
-                <a:latin typeface="Calibri"/>
+                <a:latin typeface="Liberation Sans"/>
                 <a:hlinkClick r:id="rId6" action="ppaction://hlinksldjump"/>
               </a:rPr>
               <a:t>›</a:t>
@@ -45020,7 +45020,7 @@
                 <a:solidFill>
                   <a:srgbClr val="003366"/>
                 </a:solidFill>
-                <a:latin typeface="Calibri"/>
+                <a:latin typeface="Liberation Sans"/>
               </a:rPr>
               <a:t>Canali di aggiornamento</a:t>
             </a:r>
@@ -45142,7 +45142,7 @@
                 <a:solidFill>
                   <a:srgbClr val="5A6B7B"/>
                 </a:solidFill>
-                <a:latin typeface="Calibri"/>
+                <a:latin typeface="Liberation Sans"/>
               </a:rPr>
               <a:t>Gruppo Comunale Volontari di PC · Genzano di Roma</a:t>
             </a:r>
@@ -45177,7 +45177,7 @@
                 <a:solidFill>
                   <a:srgbClr val="5A6B7B"/>
                 </a:solidFill>
-                <a:latin typeface="Calibri"/>
+                <a:latin typeface="Liberation Sans"/>
               </a:rPr>
               <a:t>50</a:t>
             </a:r>
@@ -45212,7 +45212,7 @@
                 <a:solidFill>
                   <a:srgbClr val="003366"/>
                 </a:solidFill>
-                <a:latin typeface="Calibri"/>
+                <a:latin typeface="Liberation Sans"/>
                 <a:hlinkClick r:id="rId3" action="ppaction://hlinksldjump"/>
               </a:rPr>
               <a:t>« Torna all'agenda</a:t>
@@ -45304,7 +45304,7 @@
                 <a:solidFill>
                   <a:srgbClr val="1A1A1A"/>
                 </a:solidFill>
-                <a:latin typeface="Calibri"/>
+                <a:latin typeface="Liberation Sans"/>
               </a:rPr>
               <a:t>Feed RSS per ogni sezione.</a:t>
             </a:r>
@@ -45463,7 +45463,7 @@
                 <a:solidFill>
                   <a:srgbClr val="1A1A1A"/>
                 </a:solidFill>
-                <a:latin typeface="Calibri"/>
+                <a:latin typeface="Liberation Sans"/>
               </a:rPr>
               <a:t>Codici QR sugli articoli per l'accesso rapido.</a:t>
             </a:r>
@@ -45622,7 +45622,7 @@
                 <a:solidFill>
                   <a:srgbClr val="1A1A1A"/>
                 </a:solidFill>
-                <a:latin typeface="Calibri"/>
+                <a:latin typeface="Liberation Sans"/>
               </a:rPr>
               <a:t>Condivisione semplice e senza tracciamento.</a:t>
             </a:r>
@@ -45725,7 +45725,7 @@
                 <a:solidFill>
                   <a:srgbClr val="003366"/>
                 </a:solidFill>
-                <a:latin typeface="Calibri"/>
+                <a:latin typeface="Liberation Sans"/>
                 <a:hlinkClick r:id="rId5" action="ppaction://hlinksldjump"/>
               </a:rPr>
               <a:t>‹</a:t>
@@ -45761,7 +45761,7 @@
                 <a:solidFill>
                   <a:srgbClr val="003366"/>
                 </a:solidFill>
-                <a:latin typeface="Calibri"/>
+                <a:latin typeface="Liberation Sans"/>
                 <a:hlinkClick r:id="rId6" action="ppaction://hlinksldjump"/>
               </a:rPr>
               <a:t>›</a:t>
@@ -45926,7 +45926,7 @@
                 <a:solidFill>
                   <a:srgbClr val="FFFFFF"/>
                 </a:solidFill>
-                <a:latin typeface="Calibri"/>
+                <a:latin typeface="Liberation Sans"/>
               </a:rPr>
               <a:t>Infrastruttura, fonti e sicurezza</a:t>
             </a:r>
@@ -45960,7 +45960,7 @@
                 <a:solidFill>
                   <a:srgbClr val="FFBE2E"/>
                 </a:solidFill>
-                <a:latin typeface="Calibri"/>
+                <a:latin typeface="Liberation Sans"/>
               </a:rPr>
               <a:t>SEZIONE</a:t>
             </a:r>
@@ -46038,7 +46038,7 @@
                 <a:solidFill>
                   <a:srgbClr val="9DB0C2"/>
                 </a:solidFill>
-                <a:latin typeface="Calibri"/>
+                <a:latin typeface="Liberation Sans"/>
               </a:rPr>
               <a:t>Gruppo Comunale Volontari di PC · Genzano di Roma</a:t>
             </a:r>
@@ -46073,7 +46073,7 @@
                 <a:solidFill>
                   <a:srgbClr val="9DB0C2"/>
                 </a:solidFill>
-                <a:latin typeface="Calibri"/>
+                <a:latin typeface="Liberation Sans"/>
               </a:rPr>
               <a:t>51</a:t>
             </a:r>
@@ -46108,7 +46108,7 @@
                 <a:solidFill>
                   <a:srgbClr val="FFBE2E"/>
                 </a:solidFill>
-                <a:latin typeface="Calibri"/>
+                <a:latin typeface="Liberation Sans"/>
                 <a:hlinkClick r:id="rId3" action="ppaction://hlinksldjump"/>
               </a:rPr>
               <a:t>« Torna all'agenda</a:t>
@@ -46166,7 +46166,7 @@
                 <a:solidFill>
                   <a:srgbClr val="FFBE2E"/>
                 </a:solidFill>
-                <a:latin typeface="Calibri"/>
+                <a:latin typeface="Liberation Sans"/>
               </a:rPr>
               <a:t>01  </a:t>
             </a:r>
@@ -46175,7 +46175,7 @@
                 <a:solidFill>
                   <a:srgbClr val="FFFFFF"/>
                 </a:solidFill>
-                <a:latin typeface="Calibri"/>
+                <a:latin typeface="Liberation Sans"/>
               </a:rPr>
               <a:t>Per il Cittadino</a:t>
             </a:r>
@@ -46232,7 +46232,7 @@
                 <a:solidFill>
                   <a:srgbClr val="FFBE2E"/>
                 </a:solidFill>
-                <a:latin typeface="Calibri"/>
+                <a:latin typeface="Liberation Sans"/>
               </a:rPr>
               <a:t>02  </a:t>
             </a:r>
@@ -46241,7 +46241,7 @@
                 <a:solidFill>
                   <a:srgbClr val="FFFFFF"/>
                 </a:solidFill>
-                <a:latin typeface="Calibri"/>
+                <a:latin typeface="Liberation Sans"/>
               </a:rPr>
               <a:t>Per le Scuole</a:t>
             </a:r>
@@ -46298,7 +46298,7 @@
                 <a:solidFill>
                   <a:srgbClr val="FFBE2E"/>
                 </a:solidFill>
-                <a:latin typeface="Calibri"/>
+                <a:latin typeface="Liberation Sans"/>
               </a:rPr>
               <a:t>03  </a:t>
             </a:r>
@@ -46307,7 +46307,7 @@
                 <a:solidFill>
                   <a:srgbClr val="FFFFFF"/>
                 </a:solidFill>
-                <a:latin typeface="Calibri"/>
+                <a:latin typeface="Liberation Sans"/>
               </a:rPr>
               <a:t>Accessibilità e inclusione</a:t>
             </a:r>
@@ -46364,7 +46364,7 @@
                 <a:solidFill>
                   <a:srgbClr val="FFBE2E"/>
                 </a:solidFill>
-                <a:latin typeface="Calibri"/>
+                <a:latin typeface="Liberation Sans"/>
               </a:rPr>
               <a:t>04  </a:t>
             </a:r>
@@ -46373,7 +46373,7 @@
                 <a:solidFill>
                   <a:srgbClr val="FFFFFF"/>
                 </a:solidFill>
-                <a:latin typeface="Calibri"/>
+                <a:latin typeface="Liberation Sans"/>
               </a:rPr>
               <a:t>Volontariato</a:t>
             </a:r>
@@ -46430,7 +46430,7 @@
                 <a:solidFill>
                   <a:srgbClr val="FFBE2E"/>
                 </a:solidFill>
-                <a:latin typeface="Calibri"/>
+                <a:latin typeface="Liberation Sans"/>
               </a:rPr>
               <a:t>05  </a:t>
             </a:r>
@@ -46439,7 +46439,7 @@
                 <a:solidFill>
                   <a:srgbClr val="FFFFFF"/>
                 </a:solidFill>
-                <a:latin typeface="Calibri"/>
+                <a:latin typeface="Liberation Sans"/>
               </a:rPr>
               <a:t>Risorse e trasparenza</a:t>
             </a:r>
@@ -46496,7 +46496,7 @@
                 <a:solidFill>
                   <a:srgbClr val="FFBE2E"/>
                 </a:solidFill>
-                <a:latin typeface="Calibri"/>
+                <a:latin typeface="Liberation Sans"/>
               </a:rPr>
               <a:t>06  </a:t>
             </a:r>
@@ -46505,7 +46505,7 @@
                 <a:solidFill>
                   <a:srgbClr val="FFFFFF"/>
                 </a:solidFill>
-                <a:latin typeface="Calibri"/>
+                <a:latin typeface="Liberation Sans"/>
               </a:rPr>
               <a:t>Comunicazione</a:t>
             </a:r>
@@ -46558,7 +46558,7 @@
                 <a:solidFill>
                   <a:srgbClr val="001A33"/>
                 </a:solidFill>
-                <a:latin typeface="Calibri"/>
+                <a:latin typeface="Liberation Sans"/>
               </a:rPr>
               <a:t>07  </a:t>
             </a:r>
@@ -46567,7 +46567,7 @@
                 <a:solidFill>
                   <a:srgbClr val="001A33"/>
                 </a:solidFill>
-                <a:latin typeface="Calibri"/>
+                <a:latin typeface="Liberation Sans"/>
               </a:rPr>
               <a:t>Infrastruttura, fonti e sicurezza</a:t>
             </a:r>
@@ -46602,7 +46602,7 @@
                 <a:solidFill>
                   <a:srgbClr val="FFBE2E"/>
                 </a:solidFill>
-                <a:latin typeface="Calibri"/>
+                <a:latin typeface="Liberation Sans"/>
                 <a:hlinkClick r:id="rId10" action="ppaction://hlinksldjump"/>
               </a:rPr>
               <a:t>‹</a:t>
@@ -46638,7 +46638,7 @@
                 <a:solidFill>
                   <a:srgbClr val="FFBE2E"/>
                 </a:solidFill>
-                <a:latin typeface="Calibri"/>
+                <a:latin typeface="Liberation Sans"/>
                 <a:hlinkClick r:id="rId11" action="ppaction://hlinksldjump"/>
               </a:rPr>
               <a:t>›</a:t>
@@ -46803,7 +46803,7 @@
                 <a:solidFill>
                   <a:srgbClr val="003366"/>
                 </a:solidFill>
-                <a:latin typeface="Calibri"/>
+                <a:latin typeface="Liberation Sans"/>
               </a:rPr>
               <a:t>Infrastruttura, sicurezza e prestazioni</a:t>
             </a:r>
@@ -46925,7 +46925,7 @@
                 <a:solidFill>
                   <a:srgbClr val="5A6B7B"/>
                 </a:solidFill>
-                <a:latin typeface="Calibri"/>
+                <a:latin typeface="Liberation Sans"/>
               </a:rPr>
               <a:t>Gruppo Comunale Volontari di PC · Genzano di Roma</a:t>
             </a:r>
@@ -46960,7 +46960,7 @@
                 <a:solidFill>
                   <a:srgbClr val="5A6B7B"/>
                 </a:solidFill>
-                <a:latin typeface="Calibri"/>
+                <a:latin typeface="Liberation Sans"/>
               </a:rPr>
               <a:t>52</a:t>
             </a:r>
@@ -46995,7 +46995,7 @@
                 <a:solidFill>
                   <a:srgbClr val="003366"/>
                 </a:solidFill>
-                <a:latin typeface="Calibri"/>
+                <a:latin typeface="Liberation Sans"/>
                 <a:hlinkClick r:id="rId3" action="ppaction://hlinksldjump"/>
               </a:rPr>
               <a:t>« Torna all'agenda</a:t>
@@ -47087,7 +47087,7 @@
                 <a:solidFill>
                   <a:srgbClr val="1A1A1A"/>
                 </a:solidFill>
-                <a:latin typeface="Calibri"/>
+                <a:latin typeface="Liberation Sans"/>
               </a:rPr>
               <a:t>Sito statico ad alte prestazioni, servito in HTTPS.</a:t>
             </a:r>
@@ -47246,7 +47246,7 @@
                 <a:solidFill>
                   <a:srgbClr val="1A1A1A"/>
                 </a:solidFill>
-                <a:latin typeface="Calibri"/>
+                <a:latin typeface="Liberation Sans"/>
               </a:rPr>
               <a:t>Nessun cookie di profilazione: approccio privacy-first.</a:t>
             </a:r>
@@ -47405,7 +47405,7 @@
                 <a:solidFill>
                   <a:srgbClr val="1A1A1A"/>
                 </a:solidFill>
-                <a:latin typeface="Calibri"/>
+                <a:latin typeface="Liberation Sans"/>
               </a:rPr>
               <a:t>Pubblicazione su doppio ambiente per la continuità del servizio.</a:t>
             </a:r>
@@ -47564,7 +47564,7 @@
                 <a:solidFill>
                   <a:srgbClr val="1A1A1A"/>
                 </a:solidFill>
-                <a:latin typeface="Calibri"/>
+                <a:latin typeface="Liberation Sans"/>
               </a:rPr>
               <a:t>Contenuti documentabili anche in caso di audit esterno.</a:t>
             </a:r>
@@ -47667,7 +47667,7 @@
                 <a:solidFill>
                   <a:srgbClr val="003366"/>
                 </a:solidFill>
-                <a:latin typeface="Calibri"/>
+                <a:latin typeface="Liberation Sans"/>
                 <a:hlinkClick r:id="rId5" action="ppaction://hlinksldjump"/>
               </a:rPr>
               <a:t>‹</a:t>
@@ -47703,7 +47703,7 @@
                 <a:solidFill>
                   <a:srgbClr val="003366"/>
                 </a:solidFill>
-                <a:latin typeface="Calibri"/>
+                <a:latin typeface="Liberation Sans"/>
                 <a:hlinkClick r:id="rId6" action="ppaction://hlinksldjump"/>
               </a:rPr>
               <a:t>›</a:t>
@@ -47868,7 +47868,7 @@
                 <a:solidFill>
                   <a:srgbClr val="003366"/>
                 </a:solidFill>
-                <a:latin typeface="Calibri"/>
+                <a:latin typeface="Liberation Sans"/>
               </a:rPr>
               <a:t>Fonti e dati di riferimento</a:t>
             </a:r>
@@ -47990,7 +47990,7 @@
                 <a:solidFill>
                   <a:srgbClr val="5A6B7B"/>
                 </a:solidFill>
-                <a:latin typeface="Calibri"/>
+                <a:latin typeface="Liberation Sans"/>
               </a:rPr>
               <a:t>Gruppo Comunale Volontari di PC · Genzano di Roma</a:t>
             </a:r>
@@ -48025,7 +48025,7 @@
                 <a:solidFill>
                   <a:srgbClr val="5A6B7B"/>
                 </a:solidFill>
-                <a:latin typeface="Calibri"/>
+                <a:latin typeface="Liberation Sans"/>
               </a:rPr>
               <a:t>53</a:t>
             </a:r>
@@ -48060,7 +48060,7 @@
                 <a:solidFill>
                   <a:srgbClr val="003366"/>
                 </a:solidFill>
-                <a:latin typeface="Calibri"/>
+                <a:latin typeface="Liberation Sans"/>
                 <a:hlinkClick r:id="rId3" action="ppaction://hlinksldjump"/>
               </a:rPr>
               <a:t>« Torna all'agenda</a:t>
@@ -48152,7 +48152,7 @@
                 <a:solidFill>
                   <a:srgbClr val="1A1A1A"/>
                 </a:solidFill>
-                <a:latin typeface="Calibri"/>
+                <a:latin typeface="Liberation Sans"/>
               </a:rPr>
               <a:t>Istituzioni: DPC, INGV, ISPRA, CNR, ItaliaMeteo, EUMETSAT, Copernicus, ARPA Lazio, ASL Roma 6.</a:t>
             </a:r>
@@ -48311,7 +48311,7 @@
                 <a:solidFill>
                   <a:srgbClr val="1A1A1A"/>
                 </a:solidFill>
-                <a:latin typeface="Calibri"/>
+                <a:latin typeface="Liberation Sans"/>
               </a:rPr>
               <a:t>Standard: WCAG 2.2; ISO 22320, 22324, 22329, 31000, 7010, 14090.</a:t>
             </a:r>
@@ -48470,7 +48470,7 @@
                 <a:solidFill>
                   <a:srgbClr val="1A1A1A"/>
                 </a:solidFill>
-                <a:latin typeface="Calibri"/>
+                <a:latin typeface="Liberation Sans"/>
               </a:rPr>
               <a:t>Normativa: D.Lgs. 1/2018, Direttiva PCM 30/4/2021, Circolare DPC 6/8/2018, Legge Stanca.</a:t>
             </a:r>
@@ -48629,7 +48629,7 @@
                 <a:solidFill>
                   <a:srgbClr val="1A1A1A"/>
                 </a:solidFill>
-                <a:latin typeface="Calibri"/>
+                <a:latin typeface="Liberation Sans"/>
               </a:rPr>
               <a:t>Design e linguaggio: AgID, Designers Italia, Bootstrap Italia.</a:t>
             </a:r>
@@ -48732,7 +48732,7 @@
                 <a:solidFill>
                   <a:srgbClr val="003366"/>
                 </a:solidFill>
-                <a:latin typeface="Calibri"/>
+                <a:latin typeface="Liberation Sans"/>
                 <a:hlinkClick r:id="rId5" action="ppaction://hlinksldjump"/>
               </a:rPr>
               <a:t>‹</a:t>
@@ -48768,7 +48768,7 @@
                 <a:solidFill>
                   <a:srgbClr val="003366"/>
                 </a:solidFill>
-                <a:latin typeface="Calibri"/>
+                <a:latin typeface="Liberation Sans"/>
                 <a:hlinkClick r:id="rId6" action="ppaction://hlinksldjump"/>
               </a:rPr>
               <a:t>›</a:t>
@@ -48933,7 +48933,7 @@
                 <a:solidFill>
                   <a:srgbClr val="003366"/>
                 </a:solidFill>
-                <a:latin typeface="Calibri"/>
+                <a:latin typeface="Liberation Sans"/>
               </a:rPr>
               <a:t>Punti di forza in sintesi</a:t>
             </a:r>
@@ -49055,7 +49055,7 @@
                 <a:solidFill>
                   <a:srgbClr val="5A6B7B"/>
                 </a:solidFill>
-                <a:latin typeface="Calibri"/>
+                <a:latin typeface="Liberation Sans"/>
               </a:rPr>
               <a:t>Gruppo Comunale Volontari di PC · Genzano di Roma</a:t>
             </a:r>
@@ -49090,7 +49090,7 @@
                 <a:solidFill>
                   <a:srgbClr val="5A6B7B"/>
                 </a:solidFill>
-                <a:latin typeface="Calibri"/>
+                <a:latin typeface="Liberation Sans"/>
               </a:rPr>
               <a:t>54</a:t>
             </a:r>
@@ -49125,7 +49125,7 @@
                 <a:solidFill>
                   <a:srgbClr val="003366"/>
                 </a:solidFill>
-                <a:latin typeface="Calibri"/>
+                <a:latin typeface="Liberation Sans"/>
                 <a:hlinkClick r:id="rId3" action="ppaction://hlinksldjump"/>
               </a:rPr>
               <a:t>« Torna all'agenda</a:t>
@@ -49217,7 +49217,7 @@
                 <a:solidFill>
                   <a:srgbClr val="1A1A1A"/>
                 </a:solidFill>
-                <a:latin typeface="Calibri"/>
+                <a:latin typeface="Liberation Sans"/>
               </a:rPr>
               <a:t>Accessibilità reale e multicanale: vista, udito, lingua, cognizione.</a:t>
             </a:r>
@@ -49376,7 +49376,7 @@
                 <a:solidFill>
                   <a:srgbClr val="1A1A1A"/>
                 </a:solidFill>
-                <a:latin typeface="Calibri"/>
+                <a:latin typeface="Liberation Sans"/>
               </a:rPr>
               <a:t>Dati sempre verificati e con fonte dichiarata.</a:t>
             </a:r>
@@ -49535,7 +49535,7 @@
                 <a:solidFill>
                   <a:srgbClr val="1A1A1A"/>
                 </a:solidFill>
-                <a:latin typeface="Calibri"/>
+                <a:latin typeface="Liberation Sans"/>
               </a:rPr>
               <a:t>Coerenza con le prassi ufficiali della Pubblica Amministrazione.</a:t>
             </a:r>
@@ -49694,7 +49694,7 @@
                 <a:solidFill>
                   <a:srgbClr val="1A1A1A"/>
                 </a:solidFill>
-                <a:latin typeface="Calibri"/>
+                <a:latin typeface="Liberation Sans"/>
               </a:rPr>
               <a:t>Uno strumento di servizio pubblico, sobrio e affidabile.</a:t>
             </a:r>
@@ -49797,7 +49797,7 @@
                 <a:solidFill>
                   <a:srgbClr val="003366"/>
                 </a:solidFill>
-                <a:latin typeface="Calibri"/>
+                <a:latin typeface="Liberation Sans"/>
                 <a:hlinkClick r:id="rId5" action="ppaction://hlinksldjump"/>
               </a:rPr>
               <a:t>‹</a:t>
@@ -49833,7 +49833,7 @@
                 <a:solidFill>
                   <a:srgbClr val="003366"/>
                 </a:solidFill>
-                <a:latin typeface="Calibri"/>
+                <a:latin typeface="Liberation Sans"/>
                 <a:hlinkClick r:id="rId6" action="ppaction://hlinksldjump"/>
               </a:rPr>
               <a:t>›</a:t>
@@ -49998,7 +49998,7 @@
                 <a:solidFill>
                   <a:srgbClr val="FFFFFF"/>
                 </a:solidFill>
-                <a:latin typeface="Calibri"/>
+                <a:latin typeface="Liberation Sans"/>
               </a:rPr>
               <a:t>Grazie per l'attenzione</a:t>
             </a:r>
@@ -50076,7 +50076,7 @@
                 <a:solidFill>
                   <a:srgbClr val="FFFFFF"/>
                 </a:solidFill>
-                <a:latin typeface="Calibri"/>
+                <a:latin typeface="Liberation Sans"/>
               </a:rPr>
               <a:t>Gruppo Comunale Volontari di Protezione Civile di Genzano di Roma</a:t>
             </a:r>
@@ -50095,7 +50095,7 @@
                 <a:solidFill>
                   <a:srgbClr val="CFDDEC"/>
                 </a:solidFill>
-                <a:latin typeface="Calibri"/>
+                <a:latin typeface="Liberation Sans"/>
               </a:rPr>
               <a:t>Sede: Via Sicilia, 13-15 — 00045 Genzano di Roma (RM)</a:t>
             </a:r>
@@ -50114,7 +50114,7 @@
                 <a:solidFill>
                   <a:srgbClr val="CFDDEC"/>
                 </a:solidFill>
-                <a:latin typeface="Calibri"/>
+                <a:latin typeface="Liberation Sans"/>
               </a:rPr>
               <a:t>Segreteria: +39 06 9362600</a:t>
             </a:r>
@@ -50133,7 +50133,7 @@
                 <a:solidFill>
                   <a:srgbClr val="CFDDEC"/>
                 </a:solidFill>
-                <a:latin typeface="Calibri"/>
+                <a:latin typeface="Liberation Sans"/>
               </a:rPr>
               <a:t>Email: segreteria@protezionecivilegenzano.it</a:t>
             </a:r>
@@ -50152,7 +50152,7 @@
                 <a:solidFill>
                   <a:srgbClr val="CFDDEC"/>
                 </a:solidFill>
-                <a:latin typeface="Calibri"/>
+                <a:latin typeface="Liberation Sans"/>
               </a:rPr>
               <a:t>www.protezionecivilegenzano.it</a:t>
             </a:r>
@@ -50231,7 +50231,7 @@
                 <a:solidFill>
                   <a:srgbClr val="001A33"/>
                 </a:solidFill>
-                <a:latin typeface="Calibri"/>
+                <a:latin typeface="Liberation Sans"/>
               </a:rPr>
               <a:t>112</a:t>
             </a:r>
@@ -50243,7 +50243,7 @@
                 <a:solidFill>
                   <a:srgbClr val="001A33"/>
                 </a:solidFill>
-                <a:latin typeface="Calibri"/>
+                <a:latin typeface="Liberation Sans"/>
               </a:rPr>
               <a:t>In emergenza</a:t>
             </a:r>
@@ -50278,7 +50278,7 @@
                 <a:solidFill>
                   <a:srgbClr val="FFBE2E"/>
                 </a:solidFill>
-                <a:latin typeface="Calibri"/>
+                <a:latin typeface="Liberation Sans"/>
                 <a:hlinkClick r:id="rId3" action="ppaction://hlinksldjump"/>
               </a:rPr>
               <a:t>‹</a:t>
@@ -50443,7 +50443,7 @@
                 <a:solidFill>
                   <a:srgbClr val="003366"/>
                 </a:solidFill>
-                <a:latin typeface="Calibri"/>
+                <a:latin typeface="Liberation Sans"/>
               </a:rPr>
               <a:t>Conformità e standard di riferimento</a:t>
             </a:r>
@@ -50565,7 +50565,7 @@
                 <a:solidFill>
                   <a:srgbClr val="5A6B7B"/>
                 </a:solidFill>
-                <a:latin typeface="Calibri"/>
+                <a:latin typeface="Liberation Sans"/>
               </a:rPr>
               <a:t>Gruppo Comunale Volontari di PC · Genzano di Roma</a:t>
             </a:r>
@@ -50600,7 +50600,7 @@
                 <a:solidFill>
                   <a:srgbClr val="5A6B7B"/>
                 </a:solidFill>
-                <a:latin typeface="Calibri"/>
+                <a:latin typeface="Liberation Sans"/>
               </a:rPr>
               <a:t>6</a:t>
             </a:r>
@@ -50635,7 +50635,7 @@
                 <a:solidFill>
                   <a:srgbClr val="003366"/>
                 </a:solidFill>
-                <a:latin typeface="Calibri"/>
+                <a:latin typeface="Liberation Sans"/>
                 <a:hlinkClick r:id="rId3" action="ppaction://hlinksldjump"/>
               </a:rPr>
               <a:t>« Torna all'agenda</a:t>
@@ -50727,7 +50727,7 @@
                 <a:solidFill>
                   <a:srgbClr val="1A1A1A"/>
                 </a:solidFill>
-                <a:latin typeface="Calibri"/>
+                <a:latin typeface="Liberation Sans"/>
               </a:rPr>
               <a:t>Linee guida di design AgID e design system Bootstrap Italia / Designers Italia.</a:t>
             </a:r>
@@ -50886,7 +50886,7 @@
                 <a:solidFill>
                   <a:srgbClr val="1A1A1A"/>
                 </a:solidFill>
-                <a:latin typeface="Calibri"/>
+                <a:latin typeface="Liberation Sans"/>
               </a:rPr>
               <a:t>Accessibilità WCAG 2.2 AA; Legge Stanca (L. 4/2004) e D.Lgs. 106/2018.</a:t>
             </a:r>
@@ -51045,7 +51045,7 @@
                 <a:solidFill>
                   <a:srgbClr val="1A1A1A"/>
                 </a:solidFill>
-                <a:latin typeface="Calibri"/>
+                <a:latin typeface="Liberation Sans"/>
               </a:rPr>
               <a:t>Codice della Protezione Civile e direttive nazionali.</a:t>
             </a:r>
@@ -51204,7 +51204,7 @@
                 <a:solidFill>
                   <a:srgbClr val="1A1A1A"/>
                 </a:solidFill>
-                <a:latin typeface="Calibri"/>
+                <a:latin typeface="Liberation Sans"/>
               </a:rPr>
               <a:t>Standard internazionali ISO per la gestione delle emergenze e del rischio.</a:t>
             </a:r>
@@ -51306,7 +51306,7 @@
                 <a:solidFill>
                   <a:srgbClr val="003366"/>
                 </a:solidFill>
-                <a:latin typeface="Calibri"/>
+                <a:latin typeface="Liberation Sans"/>
               </a:rPr>
               <a:t>Fonti e standard: </a:t>
             </a:r>
@@ -51315,7 +51315,7 @@
                 <a:solidFill>
                   <a:srgbClr val="5A6B7B"/>
                 </a:solidFill>
-                <a:latin typeface="Calibri"/>
+                <a:latin typeface="Liberation Sans"/>
               </a:rPr>
               <a:t>AgID · W3C · DPC · ISO/TC 292</a:t>
             </a:r>
@@ -51350,7 +51350,7 @@
                 <a:solidFill>
                   <a:srgbClr val="003366"/>
                 </a:solidFill>
-                <a:latin typeface="Calibri"/>
+                <a:latin typeface="Liberation Sans"/>
                 <a:hlinkClick r:id="rId5" action="ppaction://hlinksldjump"/>
               </a:rPr>
               <a:t>‹</a:t>
@@ -51386,7 +51386,7 @@
                 <a:solidFill>
                   <a:srgbClr val="003366"/>
                 </a:solidFill>
-                <a:latin typeface="Calibri"/>
+                <a:latin typeface="Liberation Sans"/>
                 <a:hlinkClick r:id="rId6" action="ppaction://hlinksldjump"/>
               </a:rPr>
               <a:t>›</a:t>
@@ -51551,7 +51551,7 @@
                 <a:solidFill>
                   <a:srgbClr val="003366"/>
                 </a:solidFill>
-                <a:latin typeface="Calibri"/>
+                <a:latin typeface="Liberation Sans"/>
               </a:rPr>
               <a:t>Architettura dell'informazione</a:t>
             </a:r>
@@ -51673,7 +51673,7 @@
                 <a:solidFill>
                   <a:srgbClr val="5A6B7B"/>
                 </a:solidFill>
-                <a:latin typeface="Calibri"/>
+                <a:latin typeface="Liberation Sans"/>
               </a:rPr>
               <a:t>Gruppo Comunale Volontari di PC · Genzano di Roma</a:t>
             </a:r>
@@ -51708,7 +51708,7 @@
                 <a:solidFill>
                   <a:srgbClr val="5A6B7B"/>
                 </a:solidFill>
-                <a:latin typeface="Calibri"/>
+                <a:latin typeface="Liberation Sans"/>
               </a:rPr>
               <a:t>7</a:t>
             </a:r>
@@ -51743,7 +51743,7 @@
                 <a:solidFill>
                   <a:srgbClr val="003366"/>
                 </a:solidFill>
-                <a:latin typeface="Calibri"/>
+                <a:latin typeface="Liberation Sans"/>
                 <a:hlinkClick r:id="rId3" action="ppaction://hlinksldjump"/>
               </a:rPr>
               <a:t>« Torna all'agenda</a:t>
@@ -51835,7 +51835,7 @@
                 <a:solidFill>
                   <a:srgbClr val="1A1A1A"/>
                 </a:solidFill>
-                <a:latin typeface="Calibri"/>
+                <a:latin typeface="Liberation Sans"/>
               </a:rPr>
               <a:t>Sette aree principali: Per il Cittadino, Per le Scuole, Accessibilità e Supporti.</a:t>
             </a:r>
@@ -51994,7 +51994,7 @@
                 <a:solidFill>
                   <a:srgbClr val="1A1A1A"/>
                 </a:solidFill>
-                <a:latin typeface="Calibri"/>
+                <a:latin typeface="Liberation Sans"/>
               </a:rPr>
               <a:t>Volontariato, Risorse, Comunicazioni, Contatti.</a:t>
             </a:r>
@@ -52153,7 +52153,7 @@
                 <a:solidFill>
                   <a:srgbClr val="1A1A1A"/>
                 </a:solidFill>
-                <a:latin typeface="Calibri"/>
+                <a:latin typeface="Liberation Sans"/>
               </a:rPr>
               <a:t>Struttura piatta: ogni risorsa critica raggiungibile in pochi clic.</a:t>
             </a:r>
@@ -52312,7 +52312,7 @@
                 <a:solidFill>
                   <a:srgbClr val="1A1A1A"/>
                 </a:solidFill>
-                <a:latin typeface="Calibri"/>
+                <a:latin typeface="Liberation Sans"/>
               </a:rPr>
               <a:t>Ricerca interna, mappa del sito e codici QR per l'accesso rapido.</a:t>
             </a:r>
@@ -52415,7 +52415,7 @@
                 <a:solidFill>
                   <a:srgbClr val="003366"/>
                 </a:solidFill>
-                <a:latin typeface="Calibri"/>
+                <a:latin typeface="Liberation Sans"/>
                 <a:hlinkClick r:id="rId5" action="ppaction://hlinksldjump"/>
               </a:rPr>
               <a:t>‹</a:t>
@@ -52451,7 +52451,7 @@
                 <a:solidFill>
                   <a:srgbClr val="003366"/>
                 </a:solidFill>
-                <a:latin typeface="Calibri"/>
+                <a:latin typeface="Liberation Sans"/>
                 <a:hlinkClick r:id="rId6" action="ppaction://hlinksldjump"/>
               </a:rPr>
               <a:t>›</a:t>
@@ -52616,7 +52616,7 @@
                 <a:solidFill>
                   <a:srgbClr val="FFFFFF"/>
                 </a:solidFill>
-                <a:latin typeface="Calibri"/>
+                <a:latin typeface="Liberation Sans"/>
               </a:rPr>
               <a:t>Per il Cittadino</a:t>
             </a:r>
@@ -52650,7 +52650,7 @@
                 <a:solidFill>
                   <a:srgbClr val="FFBE2E"/>
                 </a:solidFill>
-                <a:latin typeface="Calibri"/>
+                <a:latin typeface="Liberation Sans"/>
               </a:rPr>
               <a:t>SEZIONE</a:t>
             </a:r>
@@ -52728,7 +52728,7 @@
                 <a:solidFill>
                   <a:srgbClr val="9DB0C2"/>
                 </a:solidFill>
-                <a:latin typeface="Calibri"/>
+                <a:latin typeface="Liberation Sans"/>
               </a:rPr>
               <a:t>Gruppo Comunale Volontari di PC · Genzano di Roma</a:t>
             </a:r>
@@ -52763,7 +52763,7 @@
                 <a:solidFill>
                   <a:srgbClr val="9DB0C2"/>
                 </a:solidFill>
-                <a:latin typeface="Calibri"/>
+                <a:latin typeface="Liberation Sans"/>
               </a:rPr>
               <a:t>8</a:t>
             </a:r>
@@ -52798,7 +52798,7 @@
                 <a:solidFill>
                   <a:srgbClr val="FFBE2E"/>
                 </a:solidFill>
-                <a:latin typeface="Calibri"/>
+                <a:latin typeface="Liberation Sans"/>
                 <a:hlinkClick r:id="rId3" action="ppaction://hlinksldjump"/>
               </a:rPr>
               <a:t>« Torna all'agenda</a:t>
@@ -52852,7 +52852,7 @@
                 <a:solidFill>
                   <a:srgbClr val="001A33"/>
                 </a:solidFill>
-                <a:latin typeface="Calibri"/>
+                <a:latin typeface="Liberation Sans"/>
               </a:rPr>
               <a:t>01  </a:t>
             </a:r>
@@ -52861,7 +52861,7 @@
                 <a:solidFill>
                   <a:srgbClr val="001A33"/>
                 </a:solidFill>
-                <a:latin typeface="Calibri"/>
+                <a:latin typeface="Liberation Sans"/>
               </a:rPr>
               <a:t>Per il Cittadino</a:t>
             </a:r>
@@ -52918,7 +52918,7 @@
                 <a:solidFill>
                   <a:srgbClr val="FFBE2E"/>
                 </a:solidFill>
-                <a:latin typeface="Calibri"/>
+                <a:latin typeface="Liberation Sans"/>
               </a:rPr>
               <a:t>02  </a:t>
             </a:r>
@@ -52927,7 +52927,7 @@
                 <a:solidFill>
                   <a:srgbClr val="FFFFFF"/>
                 </a:solidFill>
-                <a:latin typeface="Calibri"/>
+                <a:latin typeface="Liberation Sans"/>
               </a:rPr>
               <a:t>Per le Scuole</a:t>
             </a:r>
@@ -52984,7 +52984,7 @@
                 <a:solidFill>
                   <a:srgbClr val="FFBE2E"/>
                 </a:solidFill>
-                <a:latin typeface="Calibri"/>
+                <a:latin typeface="Liberation Sans"/>
               </a:rPr>
               <a:t>03  </a:t>
             </a:r>
@@ -52993,7 +52993,7 @@
                 <a:solidFill>
                   <a:srgbClr val="FFFFFF"/>
                 </a:solidFill>
-                <a:latin typeface="Calibri"/>
+                <a:latin typeface="Liberation Sans"/>
               </a:rPr>
               <a:t>Accessibilità e inclusione</a:t>
             </a:r>
@@ -53050,7 +53050,7 @@
                 <a:solidFill>
                   <a:srgbClr val="FFBE2E"/>
                 </a:solidFill>
-                <a:latin typeface="Calibri"/>
+                <a:latin typeface="Liberation Sans"/>
               </a:rPr>
               <a:t>04  </a:t>
             </a:r>
@@ -53059,7 +53059,7 @@
                 <a:solidFill>
                   <a:srgbClr val="FFFFFF"/>
                 </a:solidFill>
-                <a:latin typeface="Calibri"/>
+                <a:latin typeface="Liberation Sans"/>
               </a:rPr>
               <a:t>Volontariato</a:t>
             </a:r>
@@ -53116,7 +53116,7 @@
                 <a:solidFill>
                   <a:srgbClr val="FFBE2E"/>
                 </a:solidFill>
-                <a:latin typeface="Calibri"/>
+                <a:latin typeface="Liberation Sans"/>
               </a:rPr>
               <a:t>05  </a:t>
             </a:r>
@@ -53125,7 +53125,7 @@
                 <a:solidFill>
                   <a:srgbClr val="FFFFFF"/>
                 </a:solidFill>
-                <a:latin typeface="Calibri"/>
+                <a:latin typeface="Liberation Sans"/>
               </a:rPr>
               <a:t>Risorse e trasparenza</a:t>
             </a:r>
@@ -53182,7 +53182,7 @@
                 <a:solidFill>
                   <a:srgbClr val="FFBE2E"/>
                 </a:solidFill>
-                <a:latin typeface="Calibri"/>
+                <a:latin typeface="Liberation Sans"/>
               </a:rPr>
               <a:t>06  </a:t>
             </a:r>
@@ -53191,7 +53191,7 @@
                 <a:solidFill>
                   <a:srgbClr val="FFFFFF"/>
                 </a:solidFill>
-                <a:latin typeface="Calibri"/>
+                <a:latin typeface="Liberation Sans"/>
               </a:rPr>
               <a:t>Comunicazione</a:t>
             </a:r>
@@ -53248,7 +53248,7 @@
                 <a:solidFill>
                   <a:srgbClr val="FFBE2E"/>
                 </a:solidFill>
-                <a:latin typeface="Calibri"/>
+                <a:latin typeface="Liberation Sans"/>
               </a:rPr>
               <a:t>07  </a:t>
             </a:r>
@@ -53257,7 +53257,7 @@
                 <a:solidFill>
                   <a:srgbClr val="FFFFFF"/>
                 </a:solidFill>
-                <a:latin typeface="Calibri"/>
+                <a:latin typeface="Liberation Sans"/>
               </a:rPr>
               <a:t>Infrastruttura, fonti e sicurezza</a:t>
             </a:r>
@@ -53292,7 +53292,7 @@
                 <a:solidFill>
                   <a:srgbClr val="FFBE2E"/>
                 </a:solidFill>
-                <a:latin typeface="Calibri"/>
+                <a:latin typeface="Liberation Sans"/>
                 <a:hlinkClick r:id="rId10" action="ppaction://hlinksldjump"/>
               </a:rPr>
               <a:t>‹</a:t>
@@ -53328,7 +53328,7 @@
                 <a:solidFill>
                   <a:srgbClr val="FFBE2E"/>
                 </a:solidFill>
-                <a:latin typeface="Calibri"/>
+                <a:latin typeface="Liberation Sans"/>
                 <a:hlinkClick r:id="rId11" action="ppaction://hlinksldjump"/>
               </a:rPr>
               <a:t>›</a:t>
@@ -53493,7 +53493,7 @@
                 <a:solidFill>
                   <a:srgbClr val="003366"/>
                 </a:solidFill>
-                <a:latin typeface="Calibri"/>
+                <a:latin typeface="Liberation Sans"/>
               </a:rPr>
               <a:t>Cosa fare adesso e assistente guidato</a:t>
             </a:r>
@@ -53615,7 +53615,7 @@
                 <a:solidFill>
                   <a:srgbClr val="5A6B7B"/>
                 </a:solidFill>
-                <a:latin typeface="Calibri"/>
+                <a:latin typeface="Liberation Sans"/>
               </a:rPr>
               <a:t>Gruppo Comunale Volontari di PC · Genzano di Roma</a:t>
             </a:r>
@@ -53650,7 +53650,7 @@
                 <a:solidFill>
                   <a:srgbClr val="5A6B7B"/>
                 </a:solidFill>
-                <a:latin typeface="Calibri"/>
+                <a:latin typeface="Liberation Sans"/>
               </a:rPr>
               <a:t>9</a:t>
             </a:r>
@@ -53685,7 +53685,7 @@
                 <a:solidFill>
                   <a:srgbClr val="003366"/>
                 </a:solidFill>
-                <a:latin typeface="Calibri"/>
+                <a:latin typeface="Liberation Sans"/>
                 <a:hlinkClick r:id="rId3" action="ppaction://hlinksldjump"/>
               </a:rPr>
               <a:t>« Torna all'agenda</a:t>
@@ -53777,7 +53777,7 @@
                 <a:solidFill>
                   <a:srgbClr val="1A1A1A"/>
                 </a:solidFill>
-                <a:latin typeface="Calibri"/>
+                <a:latin typeface="Liberation Sans"/>
               </a:rPr>
               <a:t>Pagina d'ingresso rapida alle azioni di autoprotezione.</a:t>
             </a:r>
@@ -53936,7 +53936,7 @@
                 <a:solidFill>
                   <a:srgbClr val="1A1A1A"/>
                 </a:solidFill>
-                <a:latin typeface="Calibri"/>
+                <a:latin typeface="Liberation Sans"/>
               </a:rPr>
               <a:t>Assistente guidato a domande e risposte predefinite, lungo un percorso a scelte.</a:t>
             </a:r>
@@ -54095,7 +54095,7 @@
                 <a:solidFill>
                   <a:srgbClr val="1A1A1A"/>
                 </a:solidFill>
-                <a:latin typeface="Calibri"/>
+                <a:latin typeface="Liberation Sans"/>
               </a:rPr>
               <a:t>Indirizza al comportamento corretto in pochi passaggi.</a:t>
             </a:r>
@@ -54254,7 +54254,7 @@
                 <a:solidFill>
                   <a:srgbClr val="1A1A1A"/>
                 </a:solidFill>
-                <a:latin typeface="Calibri"/>
+                <a:latin typeface="Liberation Sans"/>
               </a:rPr>
               <a:t>Sempre il richiamo al 112 per le emergenze reali.</a:t>
             </a:r>
@@ -54357,7 +54357,7 @@
                 <a:solidFill>
                   <a:srgbClr val="003366"/>
                 </a:solidFill>
-                <a:latin typeface="Calibri"/>
+                <a:latin typeface="Liberation Sans"/>
                 <a:hlinkClick r:id="rId5" action="ppaction://hlinksldjump"/>
               </a:rPr>
               <a:t>‹</a:t>
@@ -54393,7 +54393,7 @@
                 <a:solidFill>
                   <a:srgbClr val="003366"/>
                 </a:solidFill>
-                <a:latin typeface="Calibri"/>
+                <a:latin typeface="Liberation Sans"/>
                 <a:hlinkClick r:id="rId6" action="ppaction://hlinksldjump"/>
               </a:rPr>
               <a:t>›</a:t>

--- a/static/manuali/presentazione-struttura-sito.pptx
+++ b/static/manuali/presentazione-struttura-sito.pptx
@@ -61,6 +61,7 @@
     <p:sldId id="309" r:id="rId60"/>
     <p:sldId id="310" r:id="rId61"/>
     <p:sldId id="311" r:id="rId62"/>
+    <p:sldId id="312" r:id="rId63"/>
   </p:sldIdLst>
   <p:sldSz cx="12191695" cy="6858000" type="screen4x3"/>
   <p:notesSz cx="6858000" cy="9144000"/>
@@ -35790,7 +35791,7 @@
                 </a:solidFill>
                 <a:latin typeface="Liberation Sans"/>
               </a:rPr>
-              <a:t>FAQ e Glossario</a:t>
+              <a:t>Conoscere la Protezione Civile</a:t>
             </a:r>
           </a:p>
         </p:txBody>
@@ -35996,8 +35997,8 @@
         </p:nvSpPr>
         <p:spPr>
           <a:xfrm>
-            <a:off x="777240" y="2354580"/>
-            <a:ext cx="3413759" cy="3383280"/>
+            <a:off x="777240" y="1965960"/>
+            <a:ext cx="5221224" cy="1792223"/>
           </a:xfrm>
           <a:prstGeom prst="roundRect">
             <a:avLst/>
@@ -36048,8 +36049,8 @@
         </p:nvSpPr>
         <p:spPr>
           <a:xfrm>
-            <a:off x="960120" y="3451860"/>
-            <a:ext cx="3047999" cy="2103120"/>
+            <a:off x="960120" y="3063239"/>
+            <a:ext cx="4855464" cy="512063"/>
           </a:xfrm>
           <a:prstGeom prst="rect">
             <a:avLst/>
@@ -36074,7 +36075,7 @@
                 </a:solidFill>
                 <a:latin typeface="Liberation Sans"/>
               </a:rPr>
-              <a:t>Risposte alle domande frequenti dei cittadini.</a:t>
+              <a:t>Sezione dottrinale: storia, Servizio Nazionale e le quattro fasi (previsione, prevenzione, soccorso, superamento).</a:t>
             </a:r>
           </a:p>
         </p:txBody>
@@ -36087,7 +36088,7 @@
         </p:nvSpPr>
         <p:spPr>
           <a:xfrm>
-            <a:off x="2182367" y="2619756"/>
+            <a:off x="3086100" y="2231136"/>
             <a:ext cx="603504" cy="603504"/>
           </a:xfrm>
           <a:prstGeom prst="ellipse">
@@ -36125,7 +36126,7 @@
       </p:sp>
       <p:pic>
         <p:nvPicPr>
-          <p:cNvPr id="14" name="Picture 13" descr="question-circle-fill_ffffff.png"/>
+          <p:cNvPr id="14" name="Picture 13" descr="info-circle-fill_ffffff.png"/>
           <p:cNvPicPr>
             <a:picLocks noChangeAspect="1"/>
           </p:cNvPicPr>
@@ -36139,7 +36140,7 @@
         </p:blipFill>
         <p:spPr>
           <a:xfrm>
-            <a:off x="2315138" y="2752526"/>
+            <a:off x="3218870" y="2363906"/>
             <a:ext cx="337962" cy="337962"/>
           </a:xfrm>
           <a:prstGeom prst="rect">
@@ -36155,8 +36156,8 @@
         </p:nvSpPr>
         <p:spPr>
           <a:xfrm>
-            <a:off x="4373880" y="2354580"/>
-            <a:ext cx="3413759" cy="3383280"/>
+            <a:off x="6163055" y="1965960"/>
+            <a:ext cx="5221224" cy="1792223"/>
           </a:xfrm>
           <a:prstGeom prst="roundRect">
             <a:avLst/>
@@ -36207,8 +36208,8 @@
         </p:nvSpPr>
         <p:spPr>
           <a:xfrm>
-            <a:off x="4556760" y="3451860"/>
-            <a:ext cx="3047999" cy="2103120"/>
+            <a:off x="6345936" y="3063239"/>
+            <a:ext cx="4855464" cy="512063"/>
           </a:xfrm>
           <a:prstGeom prst="rect">
             <a:avLst/>
@@ -36233,7 +36234,7 @@
                 </a:solidFill>
                 <a:latin typeface="Liberation Sans"/>
               </a:rPr>
-              <a:t>Glossario dei termini e delle sigle della Protezione Civile.</a:t>
+              <a:t>La scienza del rischio e i Centri di competenza; la dimensione internazionale del sistema.</a:t>
             </a:r>
           </a:p>
         </p:txBody>
@@ -36246,7 +36247,7 @@
         </p:nvSpPr>
         <p:spPr>
           <a:xfrm>
-            <a:off x="5779007" y="2619756"/>
+            <a:off x="8471915" y="2231136"/>
             <a:ext cx="603504" cy="603504"/>
           </a:xfrm>
           <a:prstGeom prst="ellipse">
@@ -36284,7 +36285,7 @@
       </p:sp>
       <p:pic>
         <p:nvPicPr>
-          <p:cNvPr id="18" name="Picture 17" descr="question-circle-fill_ffffff.png"/>
+          <p:cNvPr id="18" name="Picture 17" descr="info-circle-fill_ffffff.png"/>
           <p:cNvPicPr>
             <a:picLocks noChangeAspect="1"/>
           </p:cNvPicPr>
@@ -36298,7 +36299,7 @@
         </p:blipFill>
         <p:spPr>
           <a:xfrm>
-            <a:off x="5911778" y="2752526"/>
+            <a:off x="8604686" y="2363906"/>
             <a:ext cx="337962" cy="337962"/>
           </a:xfrm>
           <a:prstGeom prst="rect">
@@ -36314,8 +36315,8 @@
         </p:nvSpPr>
         <p:spPr>
           <a:xfrm>
-            <a:off x="7970520" y="2354580"/>
-            <a:ext cx="3413759" cy="3383280"/>
+            <a:off x="777240" y="3922775"/>
+            <a:ext cx="5221224" cy="1792223"/>
           </a:xfrm>
           <a:prstGeom prst="roundRect">
             <a:avLst/>
@@ -36366,8 +36367,8 @@
         </p:nvSpPr>
         <p:spPr>
           <a:xfrm>
-            <a:off x="8153399" y="3451860"/>
-            <a:ext cx="3047999" cy="2103120"/>
+            <a:off x="960120" y="5020055"/>
+            <a:ext cx="4855464" cy="512063"/>
           </a:xfrm>
           <a:prstGeom prst="rect">
             <a:avLst/>
@@ -36392,7 +36393,7 @@
                 </a:solidFill>
                 <a:latin typeface="Liberation Sans"/>
               </a:rPr>
-              <a:t>Definizioni chiare, anche a comparsa sui termini tecnici nelle pagine.</a:t>
+              <a:t>Il catalogo dei rischi e il vulcanismo dei Colli Albani (Vulcano Laziale).</a:t>
             </a:r>
           </a:p>
         </p:txBody>
@@ -36405,7 +36406,7 @@
         </p:nvSpPr>
         <p:spPr>
           <a:xfrm>
-            <a:off x="9375648" y="2619756"/>
+            <a:off x="3086100" y="4187951"/>
             <a:ext cx="603504" cy="603504"/>
           </a:xfrm>
           <a:prstGeom prst="ellipse">
@@ -36443,7 +36444,7 @@
       </p:sp>
       <p:pic>
         <p:nvPicPr>
-          <p:cNvPr id="22" name="Picture 21" descr="question-circle-fill_ffffff.png"/>
+          <p:cNvPr id="22" name="Picture 21" descr="info-circle-fill_ffffff.png"/>
           <p:cNvPicPr>
             <a:picLocks noChangeAspect="1"/>
           </p:cNvPicPr>
@@ -36457,7 +36458,7 @@
         </p:blipFill>
         <p:spPr>
           <a:xfrm>
-            <a:off x="9508418" y="2752526"/>
+            <a:off x="3218870" y="4320722"/>
             <a:ext cx="337962" cy="337962"/>
           </a:xfrm>
           <a:prstGeom prst="rect">
@@ -36467,14 +36468,66 @@
       </p:pic>
       <p:sp>
         <p:nvSpPr>
-          <p:cNvPr id="23" name="TextBox 22"/>
+          <p:cNvPr id="23" name="Rounded Rectangle 22"/>
+          <p:cNvSpPr/>
+          <p:nvPr/>
+        </p:nvSpPr>
+        <p:spPr>
+          <a:xfrm>
+            <a:off x="6163055" y="3922775"/>
+            <a:ext cx="5221224" cy="1792223"/>
+          </a:xfrm>
+          <a:prstGeom prst="roundRect">
+            <a:avLst/>
+          </a:prstGeom>
+          <a:solidFill>
+            <a:srgbClr val="F4F7FB"/>
+          </a:solidFill>
+          <a:ln w="12700">
+            <a:solidFill>
+              <a:srgbClr val="D8DEE4"/>
+            </a:solidFill>
+          </a:ln>
+          <a:effectLst>
+            <a:outerShdw blurRad="50800" dist="25400" dir="5400000" rotWithShape="0">
+              <a:srgbClr val="001A33">
+                <a:alpha val="42000"/>
+              </a:srgbClr>
+            </a:outerShdw>
+          </a:effectLst>
+        </p:spPr>
+        <p:style>
+          <a:lnRef idx="1">
+            <a:schemeClr val="accent1"/>
+          </a:lnRef>
+          <a:fillRef idx="3">
+            <a:schemeClr val="accent1"/>
+          </a:fillRef>
+          <a:effectRef idx="2">
+            <a:schemeClr val="accent1"/>
+          </a:effectRef>
+          <a:fontRef idx="minor">
+            <a:schemeClr val="lt1"/>
+          </a:fontRef>
+        </p:style>
+        <p:txBody>
+          <a:bodyPr rtlCol="0" anchor="ctr" wrap="square" lIns="109728" rIns="109728" tIns="36576" bIns="36576"/>
+          <a:lstStyle/>
+          <a:p>
+            <a:pPr algn="ctr"/>
+          </a:p>
+        </p:txBody>
+      </p:sp>
+      <p:sp>
+        <p:nvSpPr>
+          <p:cNvPr id="24" name="TextBox 23"/>
           <p:cNvSpPr txBox="1"/>
           <p:nvPr/>
         </p:nvSpPr>
         <p:spPr>
           <a:xfrm>
-            <a:off x="9857232" y="6373368"/>
-            <a:ext cx="329184" cy="365760"/>
+            <a:off x="6345936" y="5020055"/>
+            <a:ext cx="4855464" cy="512063"/>
           </a:xfrm>
           <a:prstGeom prst="rect">
             <a:avLst/>
@@ -36487,6 +36540,156 @@
           </a:bodyPr>
           <a:lstStyle/>
           <a:p>
+            <a:pPr algn="ctr">
+              <a:lnSpc>
+                <a:spcPct val="112000"/>
+              </a:lnSpc>
+            </a:pPr>
+            <a:r>
+              <a:rPr sz="1400" b="0" i="0">
+                <a:solidFill>
+                  <a:srgbClr val="1A1A1A"/>
+                </a:solidFill>
+                <a:latin typeface="Liberation Sans"/>
+              </a:rPr>
+              <a:t>Le telecomunicazioni in emergenza: capire come funziona la rete radio.</a:t>
+            </a:r>
+          </a:p>
+        </p:txBody>
+      </p:sp>
+      <p:sp>
+        <p:nvSpPr>
+          <p:cNvPr id="25" name="Oval 24"/>
+          <p:cNvSpPr/>
+          <p:nvPr/>
+        </p:nvSpPr>
+        <p:spPr>
+          <a:xfrm>
+            <a:off x="8471915" y="4187951"/>
+            <a:ext cx="603504" cy="603504"/>
+          </a:xfrm>
+          <a:prstGeom prst="ellipse">
+            <a:avLst/>
+          </a:prstGeom>
+          <a:solidFill>
+            <a:srgbClr val="075985"/>
+          </a:solidFill>
+          <a:ln>
+            <a:noFill/>
+          </a:ln>
+          <a:effectLst/>
+        </p:spPr>
+        <p:style>
+          <a:lnRef idx="1">
+            <a:schemeClr val="accent1"/>
+          </a:lnRef>
+          <a:fillRef idx="3">
+            <a:schemeClr val="accent1"/>
+          </a:fillRef>
+          <a:effectRef idx="2">
+            <a:schemeClr val="accent1"/>
+          </a:effectRef>
+          <a:fontRef idx="minor">
+            <a:schemeClr val="lt1"/>
+          </a:fontRef>
+        </p:style>
+        <p:txBody>
+          <a:bodyPr rtlCol="0" anchor="ctr" wrap="square" lIns="109728" rIns="109728" tIns="36576" bIns="36576"/>
+          <a:lstStyle/>
+          <a:p>
+            <a:pPr algn="ctr"/>
+          </a:p>
+        </p:txBody>
+      </p:sp>
+      <p:pic>
+        <p:nvPicPr>
+          <p:cNvPr id="26" name="Picture 25" descr="info-circle-fill_ffffff.png"/>
+          <p:cNvPicPr>
+            <a:picLocks noChangeAspect="1"/>
+          </p:cNvPicPr>
+          <p:nvPr/>
+        </p:nvPicPr>
+        <p:blipFill>
+          <a:blip r:embed="rId4"/>
+          <a:stretch>
+            <a:fillRect/>
+          </a:stretch>
+        </p:blipFill>
+        <p:spPr>
+          <a:xfrm>
+            <a:off x="8604686" y="4320722"/>
+            <a:ext cx="337962" cy="337962"/>
+          </a:xfrm>
+          <a:prstGeom prst="rect">
+            <a:avLst/>
+          </a:prstGeom>
+        </p:spPr>
+      </p:pic>
+      <p:sp>
+        <p:nvSpPr>
+          <p:cNvPr id="27" name="TextBox 26"/>
+          <p:cNvSpPr txBox="1"/>
+          <p:nvPr/>
+        </p:nvSpPr>
+        <p:spPr>
+          <a:xfrm>
+            <a:off x="777240" y="5806440"/>
+            <a:ext cx="10607040" cy="411480"/>
+          </a:xfrm>
+          <a:prstGeom prst="rect">
+            <a:avLst/>
+          </a:prstGeom>
+          <a:noFill/>
+        </p:spPr>
+        <p:txBody>
+          <a:bodyPr wrap="square" anchor="t" lIns="45720" rIns="45720" tIns="18288" bIns="18288">
+            <a:spAutoFit/>
+          </a:bodyPr>
+          <a:lstStyle/>
+          <a:p>
+            <a:r>
+              <a:rPr sz="1200" b="1" i="0">
+                <a:solidFill>
+                  <a:srgbClr val="003366"/>
+                </a:solidFill>
+                <a:latin typeface="Liberation Sans"/>
+              </a:rPr>
+              <a:t>Fonti e standard: </a:t>
+            </a:r>
+            <a:r>
+              <a:rPr sz="1200" b="0" i="1">
+                <a:solidFill>
+                  <a:srgbClr val="5A6B7B"/>
+                </a:solidFill>
+                <a:latin typeface="Liberation Sans"/>
+              </a:rPr>
+              <a:t>DPC · INGV · ISPRA · CNR</a:t>
+            </a:r>
+          </a:p>
+        </p:txBody>
+      </p:sp>
+      <p:sp>
+        <p:nvSpPr>
+          <p:cNvPr id="28" name="TextBox 27"/>
+          <p:cNvSpPr txBox="1"/>
+          <p:nvPr/>
+        </p:nvSpPr>
+        <p:spPr>
+          <a:xfrm>
+            <a:off x="9857232" y="6373368"/>
+            <a:ext cx="329184" cy="365760"/>
+          </a:xfrm>
+          <a:prstGeom prst="rect">
+            <a:avLst/>
+          </a:prstGeom>
+          <a:noFill/>
+        </p:spPr>
+        <p:txBody>
+          <a:bodyPr wrap="square" anchor="t" lIns="45720" rIns="45720" tIns="18288" bIns="18288">
+            <a:spAutoFit/>
+          </a:bodyPr>
+          <a:lstStyle/>
+          <a:p>
             <a:pPr algn="ctr"/>
             <a:r>
               <a:rPr sz="1500" b="1" i="0">
@@ -36503,7 +36706,7 @@
       </p:sp>
       <p:sp>
         <p:nvSpPr>
-          <p:cNvPr id="24" name="TextBox 23"/>
+          <p:cNvPr id="29" name="TextBox 28"/>
           <p:cNvSpPr txBox="1"/>
           <p:nvPr/>
         </p:nvSpPr>
@@ -36696,7 +36899,7 @@
                 </a:solidFill>
                 <a:latin typeface="Liberation Sans"/>
               </a:rPr>
-              <a:t>Normativa e Standard ISO</a:t>
+              <a:t>FAQ e Glossario</a:t>
             </a:r>
           </a:p>
         </p:txBody>
@@ -36902,7 +37105,7 @@
         </p:nvSpPr>
         <p:spPr>
           <a:xfrm>
-            <a:off x="777240" y="2148839"/>
+            <a:off x="777240" y="2354580"/>
             <a:ext cx="3413759" cy="3383280"/>
           </a:xfrm>
           <a:prstGeom prst="roundRect">
@@ -36954,7 +37157,7 @@
         </p:nvSpPr>
         <p:spPr>
           <a:xfrm>
-            <a:off x="960120" y="3246120"/>
+            <a:off x="960120" y="3451860"/>
             <a:ext cx="3047999" cy="2103120"/>
           </a:xfrm>
           <a:prstGeom prst="rect">
@@ -36980,7 +37183,7 @@
                 </a:solidFill>
                 <a:latin typeface="Liberation Sans"/>
               </a:rPr>
-              <a:t>Raccolta della normativa nazionale, regionale e comunale.</a:t>
+              <a:t>Risposte alle domande frequenti dei cittadini.</a:t>
             </a:r>
           </a:p>
         </p:txBody>
@@ -36993,7 +37196,7 @@
         </p:nvSpPr>
         <p:spPr>
           <a:xfrm>
-            <a:off x="2182367" y="2414015"/>
+            <a:off x="2182367" y="2619756"/>
             <a:ext cx="603504" cy="603504"/>
           </a:xfrm>
           <a:prstGeom prst="ellipse">
@@ -37031,7 +37234,7 @@
       </p:sp>
       <p:pic>
         <p:nvPicPr>
-          <p:cNvPr id="14" name="Picture 13" descr="journal-text_ffffff.png"/>
+          <p:cNvPr id="14" name="Picture 13" descr="question-circle-fill_ffffff.png"/>
           <p:cNvPicPr>
             <a:picLocks noChangeAspect="1"/>
           </p:cNvPicPr>
@@ -37045,7 +37248,7 @@
         </p:blipFill>
         <p:spPr>
           <a:xfrm>
-            <a:off x="2315138" y="2546786"/>
+            <a:off x="2315138" y="2752526"/>
             <a:ext cx="337962" cy="337962"/>
           </a:xfrm>
           <a:prstGeom prst="rect">
@@ -37061,7 +37264,7 @@
         </p:nvSpPr>
         <p:spPr>
           <a:xfrm>
-            <a:off x="4373880" y="2148839"/>
+            <a:off x="4373880" y="2354580"/>
             <a:ext cx="3413759" cy="3383280"/>
           </a:xfrm>
           <a:prstGeom prst="roundRect">
@@ -37113,7 +37316,7 @@
         </p:nvSpPr>
         <p:spPr>
           <a:xfrm>
-            <a:off x="4556760" y="3246120"/>
+            <a:off x="4556760" y="3451860"/>
             <a:ext cx="3047999" cy="2103120"/>
           </a:xfrm>
           <a:prstGeom prst="rect">
@@ -37139,7 +37342,7 @@
                 </a:solidFill>
                 <a:latin typeface="Liberation Sans"/>
               </a:rPr>
-              <a:t>Schede degli standard internazionali ISO rilevanti per la materia.</a:t>
+              <a:t>Glossario dei termini e delle sigle della Protezione Civile.</a:t>
             </a:r>
           </a:p>
         </p:txBody>
@@ -37152,7 +37355,7 @@
         </p:nvSpPr>
         <p:spPr>
           <a:xfrm>
-            <a:off x="5779007" y="2414015"/>
+            <a:off x="5779007" y="2619756"/>
             <a:ext cx="603504" cy="603504"/>
           </a:xfrm>
           <a:prstGeom prst="ellipse">
@@ -37190,7 +37393,7 @@
       </p:sp>
       <p:pic>
         <p:nvPicPr>
-          <p:cNvPr id="18" name="Picture 17" descr="journal-text_ffffff.png"/>
+          <p:cNvPr id="18" name="Picture 17" descr="question-circle-fill_ffffff.png"/>
           <p:cNvPicPr>
             <a:picLocks noChangeAspect="1"/>
           </p:cNvPicPr>
@@ -37204,7 +37407,7 @@
         </p:blipFill>
         <p:spPr>
           <a:xfrm>
-            <a:off x="5911778" y="2546786"/>
+            <a:off x="5911778" y="2752526"/>
             <a:ext cx="337962" cy="337962"/>
           </a:xfrm>
           <a:prstGeom prst="rect">
@@ -37220,7 +37423,7 @@
         </p:nvSpPr>
         <p:spPr>
           <a:xfrm>
-            <a:off x="7970520" y="2148839"/>
+            <a:off x="7970520" y="2354580"/>
             <a:ext cx="3413759" cy="3383280"/>
           </a:xfrm>
           <a:prstGeom prst="roundRect">
@@ -37272,7 +37475,7 @@
         </p:nvSpPr>
         <p:spPr>
           <a:xfrm>
-            <a:off x="8153399" y="3246120"/>
+            <a:off x="8153399" y="3451860"/>
             <a:ext cx="3047999" cy="2103120"/>
           </a:xfrm>
           <a:prstGeom prst="rect">
@@ -37298,7 +37501,7 @@
                 </a:solidFill>
                 <a:latin typeface="Liberation Sans"/>
               </a:rPr>
-              <a:t>Dalla legge nazionale fino al livello comunale e internazionale.</a:t>
+              <a:t>Definizioni chiare, anche a comparsa sui termini tecnici nelle pagine.</a:t>
             </a:r>
           </a:p>
         </p:txBody>
@@ -37311,7 +37514,7 @@
         </p:nvSpPr>
         <p:spPr>
           <a:xfrm>
-            <a:off x="9375648" y="2414015"/>
+            <a:off x="9375648" y="2619756"/>
             <a:ext cx="603504" cy="603504"/>
           </a:xfrm>
           <a:prstGeom prst="ellipse">
@@ -37349,7 +37552,7 @@
       </p:sp>
       <p:pic>
         <p:nvPicPr>
-          <p:cNvPr id="22" name="Picture 21" descr="journal-text_ffffff.png"/>
+          <p:cNvPr id="22" name="Picture 21" descr="question-circle-fill_ffffff.png"/>
           <p:cNvPicPr>
             <a:picLocks noChangeAspect="1"/>
           </p:cNvPicPr>
@@ -37363,7 +37566,7 @@
         </p:blipFill>
         <p:spPr>
           <a:xfrm>
-            <a:off x="9508418" y="2546786"/>
+            <a:off x="9508418" y="2752526"/>
             <a:ext cx="337962" cy="337962"/>
           </a:xfrm>
           <a:prstGeom prst="rect">
@@ -37379,8 +37582,8 @@
         </p:nvSpPr>
         <p:spPr>
           <a:xfrm>
-            <a:off x="777240" y="5806440"/>
-            <a:ext cx="10607040" cy="411480"/>
+            <a:off x="9857232" y="6373368"/>
+            <a:ext cx="329184" cy="365760"/>
           </a:xfrm>
           <a:prstGeom prst="rect">
             <a:avLst/>
@@ -37393,23 +37596,16 @@
           </a:bodyPr>
           <a:lstStyle/>
           <a:p>
-            <a:r>
-              <a:rPr sz="1200" b="1" i="0">
+            <a:pPr algn="ctr"/>
+            <a:r>
+              <a:rPr sz="1500" b="1" i="0">
                 <a:solidFill>
                   <a:srgbClr val="003366"/>
                 </a:solidFill>
                 <a:latin typeface="Liberation Sans"/>
-              </a:rPr>
-              <a:t>Fonti e standard: </a:t>
-            </a:r>
-            <a:r>
-              <a:rPr sz="1200" b="0" i="1">
-                <a:solidFill>
-                  <a:srgbClr val="5A6B7B"/>
-                </a:solidFill>
-                <a:latin typeface="Liberation Sans"/>
-              </a:rPr>
-              <a:t>Normattiva · BURL Lazio · ISO</a:t>
+                <a:hlinkClick r:id="rId5" action="ppaction://hlinksldjump"/>
+              </a:rPr>
+              <a:t>‹</a:t>
             </a:r>
           </a:p>
         </p:txBody>
@@ -37417,42 +37613,6 @@
       <p:sp>
         <p:nvSpPr>
           <p:cNvPr id="24" name="TextBox 23"/>
-          <p:cNvSpPr txBox="1"/>
-          <p:nvPr/>
-        </p:nvSpPr>
-        <p:spPr>
-          <a:xfrm>
-            <a:off x="9857232" y="6373368"/>
-            <a:ext cx="329184" cy="365760"/>
-          </a:xfrm>
-          <a:prstGeom prst="rect">
-            <a:avLst/>
-          </a:prstGeom>
-          <a:noFill/>
-        </p:spPr>
-        <p:txBody>
-          <a:bodyPr wrap="square" anchor="t" lIns="45720" rIns="45720" tIns="18288" bIns="18288">
-            <a:spAutoFit/>
-          </a:bodyPr>
-          <a:lstStyle/>
-          <a:p>
-            <a:pPr algn="ctr"/>
-            <a:r>
-              <a:rPr sz="1500" b="1" i="0">
-                <a:solidFill>
-                  <a:srgbClr val="003366"/>
-                </a:solidFill>
-                <a:latin typeface="Liberation Sans"/>
-                <a:hlinkClick r:id="rId5" action="ppaction://hlinksldjump"/>
-              </a:rPr>
-              <a:t>‹</a:t>
-            </a:r>
-          </a:p>
-        </p:txBody>
-      </p:sp>
-      <p:sp>
-        <p:nvSpPr>
-          <p:cNvPr id="25" name="TextBox 24"/>
           <p:cNvSpPr txBox="1"/>
           <p:nvPr/>
         </p:nvSpPr>
@@ -37645,7 +37805,7 @@
                 </a:solidFill>
                 <a:latin typeface="Liberation Sans"/>
               </a:rPr>
-              <a:t>Area download</a:t>
+              <a:t>Normativa e Standard ISO</a:t>
             </a:r>
           </a:p>
         </p:txBody>
@@ -37851,7 +38011,7 @@
         </p:nvSpPr>
         <p:spPr>
           <a:xfrm>
-            <a:off x="777240" y="2354580"/>
+            <a:off x="777240" y="2148839"/>
             <a:ext cx="3413759" cy="3383280"/>
           </a:xfrm>
           <a:prstGeom prst="roundRect">
@@ -37903,7 +38063,7 @@
         </p:nvSpPr>
         <p:spPr>
           <a:xfrm>
-            <a:off x="960120" y="3451860"/>
+            <a:off x="960120" y="3246120"/>
             <a:ext cx="3047999" cy="2103120"/>
           </a:xfrm>
           <a:prstGeom prst="rect">
@@ -37929,7 +38089,7 @@
                 </a:solidFill>
                 <a:latin typeface="Liberation Sans"/>
               </a:rPr>
-              <a:t>Documenti ufficiali e modulistica scaricabili.</a:t>
+              <a:t>Raccolta della normativa nazionale, regionale e comunale.</a:t>
             </a:r>
           </a:p>
         </p:txBody>
@@ -37942,7 +38102,7 @@
         </p:nvSpPr>
         <p:spPr>
           <a:xfrm>
-            <a:off x="2182367" y="2619756"/>
+            <a:off x="2182367" y="2414015"/>
             <a:ext cx="603504" cy="603504"/>
           </a:xfrm>
           <a:prstGeom prst="ellipse">
@@ -37980,7 +38140,7 @@
       </p:sp>
       <p:pic>
         <p:nvPicPr>
-          <p:cNvPr id="14" name="Picture 13" descr="download_ffffff.png"/>
+          <p:cNvPr id="14" name="Picture 13" descr="journal-text_ffffff.png"/>
           <p:cNvPicPr>
             <a:picLocks noChangeAspect="1"/>
           </p:cNvPicPr>
@@ -37994,7 +38154,7 @@
         </p:blipFill>
         <p:spPr>
           <a:xfrm>
-            <a:off x="2315138" y="2752526"/>
+            <a:off x="2315138" y="2546786"/>
             <a:ext cx="337962" cy="337962"/>
           </a:xfrm>
           <a:prstGeom prst="rect">
@@ -38010,7 +38170,7 @@
         </p:nvSpPr>
         <p:spPr>
           <a:xfrm>
-            <a:off x="4373880" y="2354580"/>
+            <a:off x="4373880" y="2148839"/>
             <a:ext cx="3413759" cy="3383280"/>
           </a:xfrm>
           <a:prstGeom prst="roundRect">
@@ -38062,7 +38222,7 @@
         </p:nvSpPr>
         <p:spPr>
           <a:xfrm>
-            <a:off x="4556760" y="3451860"/>
+            <a:off x="4556760" y="3246120"/>
             <a:ext cx="3047999" cy="2103120"/>
           </a:xfrm>
           <a:prstGeom prst="rect">
@@ -38088,7 +38248,7 @@
                 </a:solidFill>
                 <a:latin typeface="Liberation Sans"/>
               </a:rPr>
-              <a:t>Per ogni file sono indicati formato e dimensione (accessibilità).</a:t>
+              <a:t>Schede degli standard internazionali ISO rilevanti per la materia.</a:t>
             </a:r>
           </a:p>
         </p:txBody>
@@ -38101,7 +38261,7 @@
         </p:nvSpPr>
         <p:spPr>
           <a:xfrm>
-            <a:off x="5779007" y="2619756"/>
+            <a:off x="5779007" y="2414015"/>
             <a:ext cx="603504" cy="603504"/>
           </a:xfrm>
           <a:prstGeom prst="ellipse">
@@ -38139,7 +38299,7 @@
       </p:sp>
       <p:pic>
         <p:nvPicPr>
-          <p:cNvPr id="18" name="Picture 17" descr="download_ffffff.png"/>
+          <p:cNvPr id="18" name="Picture 17" descr="journal-text_ffffff.png"/>
           <p:cNvPicPr>
             <a:picLocks noChangeAspect="1"/>
           </p:cNvPicPr>
@@ -38153,7 +38313,7 @@
         </p:blipFill>
         <p:spPr>
           <a:xfrm>
-            <a:off x="5911778" y="2752526"/>
+            <a:off x="5911778" y="2546786"/>
             <a:ext cx="337962" cy="337962"/>
           </a:xfrm>
           <a:prstGeom prst="rect">
@@ -38169,7 +38329,7 @@
         </p:nvSpPr>
         <p:spPr>
           <a:xfrm>
-            <a:off x="7970520" y="2354580"/>
+            <a:off x="7970520" y="2148839"/>
             <a:ext cx="3413759" cy="3383280"/>
           </a:xfrm>
           <a:prstGeom prst="roundRect">
@@ -38221,7 +38381,7 @@
         </p:nvSpPr>
         <p:spPr>
           <a:xfrm>
-            <a:off x="8153399" y="3451860"/>
+            <a:off x="8153399" y="3246120"/>
             <a:ext cx="3047999" cy="2103120"/>
           </a:xfrm>
           <a:prstGeom prst="rect">
@@ -38247,7 +38407,7 @@
                 </a:solidFill>
                 <a:latin typeface="Liberation Sans"/>
               </a:rPr>
-              <a:t>Un punto unico per atti, piani e materiali del Gruppo.</a:t>
+              <a:t>Dalla legge nazionale fino al livello comunale e internazionale.</a:t>
             </a:r>
           </a:p>
         </p:txBody>
@@ -38260,7 +38420,7 @@
         </p:nvSpPr>
         <p:spPr>
           <a:xfrm>
-            <a:off x="9375648" y="2619756"/>
+            <a:off x="9375648" y="2414015"/>
             <a:ext cx="603504" cy="603504"/>
           </a:xfrm>
           <a:prstGeom prst="ellipse">
@@ -38298,7 +38458,7 @@
       </p:sp>
       <p:pic>
         <p:nvPicPr>
-          <p:cNvPr id="22" name="Picture 21" descr="download_ffffff.png"/>
+          <p:cNvPr id="22" name="Picture 21" descr="journal-text_ffffff.png"/>
           <p:cNvPicPr>
             <a:picLocks noChangeAspect="1"/>
           </p:cNvPicPr>
@@ -38312,7 +38472,7 @@
         </p:blipFill>
         <p:spPr>
           <a:xfrm>
-            <a:off x="9508418" y="2752526"/>
+            <a:off x="9508418" y="2546786"/>
             <a:ext cx="337962" cy="337962"/>
           </a:xfrm>
           <a:prstGeom prst="rect">
@@ -38328,8 +38488,8 @@
         </p:nvSpPr>
         <p:spPr>
           <a:xfrm>
-            <a:off x="9857232" y="6373368"/>
-            <a:ext cx="329184" cy="365760"/>
+            <a:off x="777240" y="5806440"/>
+            <a:ext cx="10607040" cy="411480"/>
           </a:xfrm>
           <a:prstGeom prst="rect">
             <a:avLst/>
@@ -38342,6 +38502,49 @@
           </a:bodyPr>
           <a:lstStyle/>
           <a:p>
+            <a:r>
+              <a:rPr sz="1200" b="1" i="0">
+                <a:solidFill>
+                  <a:srgbClr val="003366"/>
+                </a:solidFill>
+                <a:latin typeface="Liberation Sans"/>
+              </a:rPr>
+              <a:t>Fonti e standard: </a:t>
+            </a:r>
+            <a:r>
+              <a:rPr sz="1200" b="0" i="1">
+                <a:solidFill>
+                  <a:srgbClr val="5A6B7B"/>
+                </a:solidFill>
+                <a:latin typeface="Liberation Sans"/>
+              </a:rPr>
+              <a:t>Normattiva · BURL Lazio · ISO</a:t>
+            </a:r>
+          </a:p>
+        </p:txBody>
+      </p:sp>
+      <p:sp>
+        <p:nvSpPr>
+          <p:cNvPr id="24" name="TextBox 23"/>
+          <p:cNvSpPr txBox="1"/>
+          <p:nvPr/>
+        </p:nvSpPr>
+        <p:spPr>
+          <a:xfrm>
+            <a:off x="9857232" y="6373368"/>
+            <a:ext cx="329184" cy="365760"/>
+          </a:xfrm>
+          <a:prstGeom prst="rect">
+            <a:avLst/>
+          </a:prstGeom>
+          <a:noFill/>
+        </p:spPr>
+        <p:txBody>
+          <a:bodyPr wrap="square" anchor="t" lIns="45720" rIns="45720" tIns="18288" bIns="18288">
+            <a:spAutoFit/>
+          </a:bodyPr>
+          <a:lstStyle/>
+          <a:p>
             <a:pPr algn="ctr"/>
             <a:r>
               <a:rPr sz="1500" b="1" i="0">
@@ -38358,7 +38561,7 @@
       </p:sp>
       <p:sp>
         <p:nvSpPr>
-          <p:cNvPr id="24" name="TextBox 23"/>
+          <p:cNvPr id="25" name="TextBox 24"/>
           <p:cNvSpPr txBox="1"/>
           <p:nvPr/>
         </p:nvSpPr>
@@ -38551,7 +38754,7 @@
                 </a:solidFill>
                 <a:latin typeface="Liberation Sans"/>
               </a:rPr>
-              <a:t>Strumenti in tempo reale</a:t>
+              <a:t>Area download</a:t>
             </a:r>
           </a:p>
         </p:txBody>
@@ -38835,7 +39038,7 @@
                 </a:solidFill>
                 <a:latin typeface="Liberation Sans"/>
               </a:rPr>
-              <a:t>Hub dei servizi di monitoraggio del territorio.</a:t>
+              <a:t>Documenti ufficiali e modulistica scaricabili.</a:t>
             </a:r>
           </a:p>
         </p:txBody>
@@ -38886,7 +39089,7 @@
       </p:sp>
       <p:pic>
         <p:nvPicPr>
-          <p:cNvPr id="14" name="Picture 13" descr="speedometer2_ffffff.png"/>
+          <p:cNvPr id="14" name="Picture 13" descr="download_ffffff.png"/>
           <p:cNvPicPr>
             <a:picLocks noChangeAspect="1"/>
           </p:cNvPicPr>
@@ -38994,7 +39197,7 @@
                 </a:solidFill>
                 <a:latin typeface="Liberation Sans"/>
               </a:rPr>
-              <a:t>Meteo, sismico, idrogeologico, incendi, qualità dell'aria, viabilità.</a:t>
+              <a:t>Per ogni file sono indicati formato e dimensione (accessibilità).</a:t>
             </a:r>
           </a:p>
         </p:txBody>
@@ -39045,7 +39248,7 @@
       </p:sp>
       <p:pic>
         <p:nvPicPr>
-          <p:cNvPr id="18" name="Picture 17" descr="speedometer2_ffffff.png"/>
+          <p:cNvPr id="18" name="Picture 17" descr="download_ffffff.png"/>
           <p:cNvPicPr>
             <a:picLocks noChangeAspect="1"/>
           </p:cNvPicPr>
@@ -39153,7 +39356,7 @@
                 </a:solidFill>
                 <a:latin typeface="Liberation Sans"/>
               </a:rPr>
-              <a:t>Collegamenti diretti alle fonti ufficiali aggiornate.</a:t>
+              <a:t>Un punto unico per atti, piani e materiali del Gruppo.</a:t>
             </a:r>
           </a:p>
         </p:txBody>
@@ -39204,7 +39407,7 @@
       </p:sp>
       <p:pic>
         <p:nvPicPr>
-          <p:cNvPr id="22" name="Picture 21" descr="speedometer2_ffffff.png"/>
+          <p:cNvPr id="22" name="Picture 21" descr="download_ffffff.png"/>
           <p:cNvPicPr>
             <a:picLocks noChangeAspect="1"/>
           </p:cNvPicPr>
@@ -39457,7 +39660,7 @@
                 </a:solidFill>
                 <a:latin typeface="Liberation Sans"/>
               </a:rPr>
-              <a:t>Audio e podcast</a:t>
+              <a:t>Strumenti in tempo reale</a:t>
             </a:r>
           </a:p>
         </p:txBody>
@@ -39741,7 +39944,7 @@
                 </a:solidFill>
                 <a:latin typeface="Liberation Sans"/>
               </a:rPr>
-              <a:t>Contenuti ascoltabili per chi preferisce l'ascolto.</a:t>
+              <a:t>Hub dei servizi di monitoraggio del territorio.</a:t>
             </a:r>
           </a:p>
         </p:txBody>
@@ -39792,7 +39995,7 @@
       </p:sp>
       <p:pic>
         <p:nvPicPr>
-          <p:cNvPr id="14" name="Picture 13" descr="headphones_ffffff.png"/>
+          <p:cNvPr id="14" name="Picture 13" descr="speedometer2_ffffff.png"/>
           <p:cNvPicPr>
             <a:picLocks noChangeAspect="1"/>
           </p:cNvPicPr>
@@ -39900,7 +40103,7 @@
                 </a:solidFill>
                 <a:latin typeface="Liberation Sans"/>
               </a:rPr>
-              <a:t>Maggiore accessibilità all'informazione.</a:t>
+              <a:t>Meteo, sismico, idrogeologico, incendi, qualità dell'aria, viabilità.</a:t>
             </a:r>
           </a:p>
         </p:txBody>
@@ -39951,7 +40154,7 @@
       </p:sp>
       <p:pic>
         <p:nvPicPr>
-          <p:cNvPr id="18" name="Picture 17" descr="headphones_ffffff.png"/>
+          <p:cNvPr id="18" name="Picture 17" descr="speedometer2_ffffff.png"/>
           <p:cNvPicPr>
             <a:picLocks noChangeAspect="1"/>
           </p:cNvPicPr>
@@ -40059,7 +40262,7 @@
                 </a:solidFill>
                 <a:latin typeface="Liberation Sans"/>
               </a:rPr>
-              <a:t>Utili per anziani, ipovedenti e chi è in movimento.</a:t>
+              <a:t>Collegamenti diretti alle fonti ufficiali aggiornate.</a:t>
             </a:r>
           </a:p>
         </p:txBody>
@@ -40110,7 +40313,7 @@
       </p:sp>
       <p:pic>
         <p:nvPicPr>
-          <p:cNvPr id="22" name="Picture 21" descr="headphones_ffffff.png"/>
+          <p:cNvPr id="22" name="Picture 21" descr="speedometer2_ffffff.png"/>
           <p:cNvPicPr>
             <a:picLocks noChangeAspect="1"/>
           </p:cNvPicPr>
@@ -40363,7 +40566,7 @@
                 </a:solidFill>
                 <a:latin typeface="Liberation Sans"/>
               </a:rPr>
-              <a:t>Open data e stato del sito</a:t>
+              <a:t>Audio e podcast</a:t>
             </a:r>
           </a:p>
         </p:txBody>
@@ -40647,7 +40850,7 @@
                 </a:solidFill>
                 <a:latin typeface="Liberation Sans"/>
               </a:rPr>
-              <a:t>Dati aperti riutilizzabili dalla cittadinanza.</a:t>
+              <a:t>Contenuti ascoltabili per chi preferisce l'ascolto.</a:t>
             </a:r>
           </a:p>
         </p:txBody>
@@ -40698,7 +40901,7 @@
       </p:sp>
       <p:pic>
         <p:nvPicPr>
-          <p:cNvPr id="14" name="Picture 13" descr="bar-chart-fill_ffffff.png"/>
+          <p:cNvPr id="14" name="Picture 13" descr="headphones_ffffff.png"/>
           <p:cNvPicPr>
             <a:picLocks noChangeAspect="1"/>
           </p:cNvPicPr>
@@ -40806,7 +41009,7 @@
                 </a:solidFill>
                 <a:latin typeface="Liberation Sans"/>
               </a:rPr>
-              <a:t>Pagina di trasparenza sullo stato tecnico del sito.</a:t>
+              <a:t>Maggiore accessibilità all'informazione.</a:t>
             </a:r>
           </a:p>
         </p:txBody>
@@ -40857,7 +41060,7 @@
       </p:sp>
       <p:pic>
         <p:nvPicPr>
-          <p:cNvPr id="18" name="Picture 17" descr="bar-chart-fill_ffffff.png"/>
+          <p:cNvPr id="18" name="Picture 17" descr="headphones_ffffff.png"/>
           <p:cNvPicPr>
             <a:picLocks noChangeAspect="1"/>
           </p:cNvPicPr>
@@ -40965,7 +41168,7 @@
                 </a:solidFill>
                 <a:latin typeface="Liberation Sans"/>
               </a:rPr>
-              <a:t>Riuso libero, secondo il principio di trasparenza della PA.</a:t>
+              <a:t>Utili per anziani, ipovedenti e chi è in movimento.</a:t>
             </a:r>
           </a:p>
         </p:txBody>
@@ -41016,7 +41219,7 @@
       </p:sp>
       <p:pic>
         <p:nvPicPr>
-          <p:cNvPr id="22" name="Picture 21" descr="bar-chart-fill_ffffff.png"/>
+          <p:cNvPr id="22" name="Picture 21" descr="headphones_ffffff.png"/>
           <p:cNvPicPr>
             <a:picLocks noChangeAspect="1"/>
           </p:cNvPicPr>
@@ -41269,7 +41472,7 @@
                 </a:solidFill>
                 <a:latin typeface="Liberation Sans"/>
               </a:rPr>
-              <a:t>Pagine legali e trasparenza</a:t>
+              <a:t>Open data e stato del sito</a:t>
             </a:r>
           </a:p>
         </p:txBody>
@@ -41553,7 +41756,7 @@
                 </a:solidFill>
                 <a:latin typeface="Liberation Sans"/>
               </a:rPr>
-              <a:t>Privacy, note legali, dichiarazione di accessibilità, social media policy.</a:t>
+              <a:t>Dati aperti riutilizzabili dalla cittadinanza.</a:t>
             </a:r>
           </a:p>
         </p:txBody>
@@ -41604,7 +41807,7 @@
       </p:sp>
       <p:pic>
         <p:nvPicPr>
-          <p:cNvPr id="14" name="Picture 13" descr="file-earmark-text-fill_ffffff.png"/>
+          <p:cNvPr id="14" name="Picture 13" descr="bar-chart-fill_ffffff.png"/>
           <p:cNvPicPr>
             <a:picLocks noChangeAspect="1"/>
           </p:cNvPicPr>
@@ -41712,7 +41915,7 @@
                 </a:solidFill>
                 <a:latin typeface="Liberation Sans"/>
               </a:rPr>
-              <a:t>Data di revisione sempre indicata.</a:t>
+              <a:t>Pagina di trasparenza sullo stato tecnico del sito.</a:t>
             </a:r>
           </a:p>
         </p:txBody>
@@ -41763,7 +41966,7 @@
       </p:sp>
       <p:pic>
         <p:nvPicPr>
-          <p:cNvPr id="18" name="Picture 17" descr="file-earmark-text-fill_ffffff.png"/>
+          <p:cNvPr id="18" name="Picture 17" descr="bar-chart-fill_ffffff.png"/>
           <p:cNvPicPr>
             <a:picLocks noChangeAspect="1"/>
           </p:cNvPicPr>
@@ -41871,7 +42074,7 @@
                 </a:solidFill>
                 <a:latin typeface="Liberation Sans"/>
               </a:rPr>
-              <a:t>Conformità agli obblighi di trasparenza della Pubblica Amministrazione.</a:t>
+              <a:t>Riuso libero, secondo il principio di trasparenza della PA.</a:t>
             </a:r>
           </a:p>
         </p:txBody>
@@ -41922,7 +42125,7 @@
       </p:sp>
       <p:pic>
         <p:nvPicPr>
-          <p:cNvPr id="22" name="Picture 21" descr="file-earmark-text-fill_ffffff.png"/>
+          <p:cNvPr id="22" name="Picture 21" descr="bar-chart-fill_ffffff.png"/>
           <p:cNvPicPr>
             <a:picLocks noChangeAspect="1"/>
           </p:cNvPicPr>
@@ -42049,7 +42252,7 @@
             <a:avLst/>
           </a:prstGeom>
           <a:solidFill>
-            <a:srgbClr val="001A33"/>
+            <a:srgbClr val="FFFFFF"/>
           </a:solidFill>
           <a:ln>
             <a:noFill/>
@@ -42078,9 +42281,53 @@
           </a:p>
         </p:txBody>
       </p:sp>
+      <p:sp>
+        <p:nvSpPr>
+          <p:cNvPr id="3" name="Rectangle 2"/>
+          <p:cNvSpPr/>
+          <p:nvPr/>
+        </p:nvSpPr>
+        <p:spPr>
+          <a:xfrm>
+            <a:off x="0" y="0"/>
+            <a:ext cx="201168" cy="6858000"/>
+          </a:xfrm>
+          <a:prstGeom prst="rect">
+            <a:avLst/>
+          </a:prstGeom>
+          <a:solidFill>
+            <a:srgbClr val="003366"/>
+          </a:solidFill>
+          <a:ln>
+            <a:noFill/>
+          </a:ln>
+          <a:effectLst/>
+        </p:spPr>
+        <p:style>
+          <a:lnRef idx="1">
+            <a:schemeClr val="accent1"/>
+          </a:lnRef>
+          <a:fillRef idx="3">
+            <a:schemeClr val="accent1"/>
+          </a:fillRef>
+          <a:effectRef idx="2">
+            <a:schemeClr val="accent1"/>
+          </a:effectRef>
+          <a:fontRef idx="minor">
+            <a:schemeClr val="lt1"/>
+          </a:fontRef>
+        </p:style>
+        <p:txBody>
+          <a:bodyPr rtlCol="0" anchor="ctr"/>
+          <a:lstStyle/>
+          <a:p>
+            <a:pPr algn="ctr"/>
+          </a:p>
+        </p:txBody>
+      </p:sp>
       <p:pic>
         <p:nvPicPr>
-          <p:cNvPr id="3" name="Picture 2" descr="logo-pc-genzano.png"/>
+          <p:cNvPr id="4" name="Picture 3" descr="logo-pc-genzano.png"/>
           <p:cNvPicPr>
             <a:picLocks noChangeAspect="1"/>
           </p:cNvPicPr>
@@ -42094,58 +42341,14 @@
         </p:blipFill>
         <p:spPr>
           <a:xfrm>
-            <a:off x="10865815" y="502920"/>
-            <a:ext cx="868680" cy="868680"/>
+            <a:off x="11076127" y="411480"/>
+            <a:ext cx="658368" cy="658368"/>
           </a:xfrm>
           <a:prstGeom prst="rect">
             <a:avLst/>
           </a:prstGeom>
         </p:spPr>
       </p:pic>
-      <p:sp>
-        <p:nvSpPr>
-          <p:cNvPr id="4" name="Rectangle 3"/>
-          <p:cNvSpPr/>
-          <p:nvPr/>
-        </p:nvSpPr>
-        <p:spPr>
-          <a:xfrm>
-            <a:off x="914400" y="2743200"/>
-            <a:ext cx="2194560" cy="50800"/>
-          </a:xfrm>
-          <a:prstGeom prst="rect">
-            <a:avLst/>
-          </a:prstGeom>
-          <a:solidFill>
-            <a:srgbClr val="FFBE2E"/>
-          </a:solidFill>
-          <a:ln>
-            <a:noFill/>
-          </a:ln>
-          <a:effectLst/>
-        </p:spPr>
-        <p:style>
-          <a:lnRef idx="1">
-            <a:schemeClr val="accent1"/>
-          </a:lnRef>
-          <a:fillRef idx="3">
-            <a:schemeClr val="accent1"/>
-          </a:fillRef>
-          <a:effectRef idx="2">
-            <a:schemeClr val="accent1"/>
-          </a:effectRef>
-          <a:fontRef idx="minor">
-            <a:schemeClr val="lt1"/>
-          </a:fontRef>
-        </p:style>
-        <p:txBody>
-          <a:bodyPr rtlCol="0" anchor="ctr"/>
-          <a:lstStyle/>
-          <a:p>
-            <a:pPr algn="ctr"/>
-          </a:p>
-        </p:txBody>
-      </p:sp>
       <p:sp>
         <p:nvSpPr>
           <p:cNvPr id="5" name="TextBox 4"/>
@@ -42154,8 +42357,8 @@
         </p:nvSpPr>
         <p:spPr>
           <a:xfrm>
-            <a:off x="914400" y="2971800"/>
-            <a:ext cx="5029200" cy="2468880"/>
+            <a:off x="640080" y="502920"/>
+            <a:ext cx="9692640" cy="1005840"/>
           </a:xfrm>
           <a:prstGeom prst="rect">
             <a:avLst/>
@@ -42169,27 +42372,115 @@
           <a:lstStyle/>
           <a:p>
             <a:r>
-              <a:rPr sz="3200" b="1" i="0">
-                <a:solidFill>
-                  <a:srgbClr val="FFFFFF"/>
-                </a:solidFill>
-                <a:latin typeface="Liberation Sans"/>
-              </a:rPr>
-              <a:t>Comunicazione</a:t>
-            </a:r>
-          </a:p>
-        </p:txBody>
-      </p:sp>
-      <p:sp>
-        <p:nvSpPr>
-          <p:cNvPr id="6" name="TextBox 5"/>
+              <a:rPr sz="2800" b="1" i="0">
+                <a:solidFill>
+                  <a:srgbClr val="003366"/>
+                </a:solidFill>
+                <a:latin typeface="Liberation Sans"/>
+              </a:rPr>
+              <a:t>Pagine legali e trasparenza</a:t>
+            </a:r>
+          </a:p>
+        </p:txBody>
+      </p:sp>
+      <p:sp>
+        <p:nvSpPr>
+          <p:cNvPr id="6" name="Rectangle 5"/>
+          <p:cNvSpPr/>
+          <p:nvPr/>
+        </p:nvSpPr>
+        <p:spPr>
+          <a:xfrm>
+            <a:off x="685800" y="1417320"/>
+            <a:ext cx="2011680" cy="38100"/>
+          </a:xfrm>
+          <a:prstGeom prst="rect">
+            <a:avLst/>
+          </a:prstGeom>
+          <a:solidFill>
+            <a:srgbClr val="FFBE2E"/>
+          </a:solidFill>
+          <a:ln>
+            <a:noFill/>
+          </a:ln>
+          <a:effectLst/>
+        </p:spPr>
+        <p:style>
+          <a:lnRef idx="1">
+            <a:schemeClr val="accent1"/>
+          </a:lnRef>
+          <a:fillRef idx="3">
+            <a:schemeClr val="accent1"/>
+          </a:fillRef>
+          <a:effectRef idx="2">
+            <a:schemeClr val="accent1"/>
+          </a:effectRef>
+          <a:fontRef idx="minor">
+            <a:schemeClr val="lt1"/>
+          </a:fontRef>
+        </p:style>
+        <p:txBody>
+          <a:bodyPr rtlCol="0" anchor="ctr"/>
+          <a:lstStyle/>
+          <a:p>
+            <a:pPr algn="ctr"/>
+          </a:p>
+        </p:txBody>
+      </p:sp>
+      <p:sp>
+        <p:nvSpPr>
+          <p:cNvPr id="7" name="Rectangle 6"/>
+          <p:cNvSpPr/>
+          <p:nvPr/>
+        </p:nvSpPr>
+        <p:spPr>
+          <a:xfrm>
+            <a:off x="548640" y="6419088"/>
+            <a:ext cx="11091672" cy="15240"/>
+          </a:xfrm>
+          <a:prstGeom prst="rect">
+            <a:avLst/>
+          </a:prstGeom>
+          <a:solidFill>
+            <a:srgbClr val="D8DEE4"/>
+          </a:solidFill>
+          <a:ln>
+            <a:noFill/>
+          </a:ln>
+          <a:effectLst/>
+        </p:spPr>
+        <p:style>
+          <a:lnRef idx="1">
+            <a:schemeClr val="accent1"/>
+          </a:lnRef>
+          <a:fillRef idx="3">
+            <a:schemeClr val="accent1"/>
+          </a:fillRef>
+          <a:effectRef idx="2">
+            <a:schemeClr val="accent1"/>
+          </a:effectRef>
+          <a:fontRef idx="minor">
+            <a:schemeClr val="lt1"/>
+          </a:fontRef>
+        </p:style>
+        <p:txBody>
+          <a:bodyPr rtlCol="0" anchor="ctr"/>
+          <a:lstStyle/>
+          <a:p>
+            <a:pPr algn="ctr"/>
+          </a:p>
+        </p:txBody>
+      </p:sp>
+      <p:sp>
+        <p:nvSpPr>
+          <p:cNvPr id="8" name="TextBox 7"/>
           <p:cNvSpPr txBox="1"/>
           <p:nvPr/>
         </p:nvSpPr>
         <p:spPr>
           <a:xfrm>
-            <a:off x="914400" y="2194560"/>
-            <a:ext cx="5029200" cy="457200"/>
+            <a:off x="548640" y="6455664"/>
+            <a:ext cx="4114800" cy="320040"/>
           </a:xfrm>
           <a:prstGeom prst="rect">
             <a:avLst/>
@@ -42203,71 +42494,27 @@
           <a:lstStyle/>
           <a:p>
             <a:r>
-              <a:rPr sz="1300" b="1" i="0">
-                <a:solidFill>
-                  <a:srgbClr val="FFBE2E"/>
-                </a:solidFill>
-                <a:latin typeface="Liberation Sans"/>
-              </a:rPr>
-              <a:t>SEZIONE</a:t>
-            </a:r>
-          </a:p>
-        </p:txBody>
-      </p:sp>
-      <p:sp>
-        <p:nvSpPr>
-          <p:cNvPr id="7" name="Rectangle 6"/>
-          <p:cNvSpPr/>
-          <p:nvPr/>
-        </p:nvSpPr>
-        <p:spPr>
-          <a:xfrm>
-            <a:off x="548640" y="6419088"/>
-            <a:ext cx="11091672" cy="15240"/>
-          </a:xfrm>
-          <a:prstGeom prst="rect">
-            <a:avLst/>
-          </a:prstGeom>
-          <a:solidFill>
-            <a:srgbClr val="334E66"/>
-          </a:solidFill>
-          <a:ln>
-            <a:noFill/>
-          </a:ln>
-          <a:effectLst/>
-        </p:spPr>
-        <p:style>
-          <a:lnRef idx="1">
-            <a:schemeClr val="accent1"/>
-          </a:lnRef>
-          <a:fillRef idx="3">
-            <a:schemeClr val="accent1"/>
-          </a:fillRef>
-          <a:effectRef idx="2">
-            <a:schemeClr val="accent1"/>
-          </a:effectRef>
-          <a:fontRef idx="minor">
-            <a:schemeClr val="lt1"/>
-          </a:fontRef>
-        </p:style>
-        <p:txBody>
-          <a:bodyPr rtlCol="0" anchor="ctr"/>
-          <a:lstStyle/>
-          <a:p>
-            <a:pPr algn="ctr"/>
-          </a:p>
-        </p:txBody>
-      </p:sp>
-      <p:sp>
-        <p:nvSpPr>
-          <p:cNvPr id="8" name="TextBox 7"/>
+              <a:rPr sz="900" b="0" i="0">
+                <a:solidFill>
+                  <a:srgbClr val="5A6B7B"/>
+                </a:solidFill>
+                <a:latin typeface="Liberation Sans"/>
+              </a:rPr>
+              <a:t>Gruppo Comunale Volontari di PC · Genzano di Roma</a:t>
+            </a:r>
+          </a:p>
+        </p:txBody>
+      </p:sp>
+      <p:sp>
+        <p:nvSpPr>
+          <p:cNvPr id="9" name="TextBox 8"/>
           <p:cNvSpPr txBox="1"/>
           <p:nvPr/>
         </p:nvSpPr>
         <p:spPr>
           <a:xfrm>
-            <a:off x="548640" y="6455664"/>
-            <a:ext cx="4114800" cy="320040"/>
+            <a:off x="10698480" y="6455664"/>
+            <a:ext cx="914400" cy="320040"/>
           </a:xfrm>
           <a:prstGeom prst="rect">
             <a:avLst/>
@@ -42280,28 +42527,29 @@
           </a:bodyPr>
           <a:lstStyle/>
           <a:p>
-            <a:r>
-              <a:rPr sz="900" b="0" i="0">
-                <a:solidFill>
-                  <a:srgbClr val="9DB0C2"/>
-                </a:solidFill>
-                <a:latin typeface="Liberation Sans"/>
-              </a:rPr>
-              <a:t>Gruppo Comunale Volontari di PC · Genzano di Roma</a:t>
-            </a:r>
-          </a:p>
-        </p:txBody>
-      </p:sp>
-      <p:sp>
-        <p:nvSpPr>
-          <p:cNvPr id="9" name="TextBox 8"/>
+            <a:pPr algn="r"/>
+            <a:r>
+              <a:rPr sz="900" b="1" i="0">
+                <a:solidFill>
+                  <a:srgbClr val="5A6B7B"/>
+                </a:solidFill>
+                <a:latin typeface="Liberation Sans"/>
+              </a:rPr>
+              <a:t>48</a:t>
+            </a:r>
+          </a:p>
+        </p:txBody>
+      </p:sp>
+      <p:sp>
+        <p:nvSpPr>
+          <p:cNvPr id="10" name="TextBox 9"/>
           <p:cNvSpPr txBox="1"/>
           <p:nvPr/>
         </p:nvSpPr>
         <p:spPr>
           <a:xfrm>
-            <a:off x="10698480" y="6455664"/>
-            <a:ext cx="914400" cy="320040"/>
+            <a:off x="4727448" y="6428232"/>
+            <a:ext cx="2743200" cy="329184"/>
           </a:xfrm>
           <a:prstGeom prst="rect">
             <a:avLst/>
@@ -42314,29 +42562,82 @@
           </a:bodyPr>
           <a:lstStyle/>
           <a:p>
-            <a:pPr algn="r"/>
-            <a:r>
-              <a:rPr sz="900" b="1" i="0">
-                <a:solidFill>
-                  <a:srgbClr val="9DB0C2"/>
-                </a:solidFill>
-                <a:latin typeface="Liberation Sans"/>
-              </a:rPr>
-              <a:t>48</a:t>
-            </a:r>
-          </a:p>
-        </p:txBody>
-      </p:sp>
-      <p:sp>
-        <p:nvSpPr>
-          <p:cNvPr id="10" name="TextBox 9"/>
+            <a:pPr algn="ctr"/>
+            <a:r>
+              <a:rPr sz="950" b="1" i="0">
+                <a:solidFill>
+                  <a:srgbClr val="003366"/>
+                </a:solidFill>
+                <a:latin typeface="Liberation Sans"/>
+                <a:hlinkClick r:id="rId3" action="ppaction://hlinksldjump"/>
+              </a:rPr>
+              <a:t>« Torna all'agenda</a:t>
+            </a:r>
+          </a:p>
+        </p:txBody>
+      </p:sp>
+      <p:sp>
+        <p:nvSpPr>
+          <p:cNvPr id="11" name="Rounded Rectangle 10"/>
+          <p:cNvSpPr/>
+          <p:nvPr/>
+        </p:nvSpPr>
+        <p:spPr>
+          <a:xfrm>
+            <a:off x="777240" y="2354580"/>
+            <a:ext cx="3413759" cy="3383280"/>
+          </a:xfrm>
+          <a:prstGeom prst="roundRect">
+            <a:avLst/>
+          </a:prstGeom>
+          <a:solidFill>
+            <a:srgbClr val="F4F7FB"/>
+          </a:solidFill>
+          <a:ln w="12700">
+            <a:solidFill>
+              <a:srgbClr val="D8DEE4"/>
+            </a:solidFill>
+          </a:ln>
+          <a:effectLst>
+            <a:outerShdw blurRad="50800" dist="25400" dir="5400000" rotWithShape="0">
+              <a:srgbClr val="001A33">
+                <a:alpha val="42000"/>
+              </a:srgbClr>
+            </a:outerShdw>
+          </a:effectLst>
+        </p:spPr>
+        <p:style>
+          <a:lnRef idx="1">
+            <a:schemeClr val="accent1"/>
+          </a:lnRef>
+          <a:fillRef idx="3">
+            <a:schemeClr val="accent1"/>
+          </a:fillRef>
+          <a:effectRef idx="2">
+            <a:schemeClr val="accent1"/>
+          </a:effectRef>
+          <a:fontRef idx="minor">
+            <a:schemeClr val="lt1"/>
+          </a:fontRef>
+        </p:style>
+        <p:txBody>
+          <a:bodyPr rtlCol="0" anchor="ctr" wrap="square" lIns="109728" rIns="109728" tIns="36576" bIns="36576"/>
+          <a:lstStyle/>
+          <a:p>
+            <a:pPr algn="ctr"/>
+          </a:p>
+        </p:txBody>
+      </p:sp>
+      <p:sp>
+        <p:nvSpPr>
+          <p:cNvPr id="12" name="TextBox 11"/>
           <p:cNvSpPr txBox="1"/>
           <p:nvPr/>
         </p:nvSpPr>
         <p:spPr>
           <a:xfrm>
-            <a:off x="4727448" y="6428232"/>
-            <a:ext cx="2743200" cy="329184"/>
+            <a:off x="960120" y="3451860"/>
+            <a:ext cx="3047999" cy="2103120"/>
           </a:xfrm>
           <a:prstGeom prst="rect">
             <a:avLst/>
@@ -42349,366 +42650,39 @@
           </a:bodyPr>
           <a:lstStyle/>
           <a:p>
-            <a:pPr algn="ctr"/>
-            <a:r>
-              <a:rPr sz="950" b="1" i="0">
-                <a:solidFill>
-                  <a:srgbClr val="FFBE2E"/>
-                </a:solidFill>
-                <a:latin typeface="Liberation Sans"/>
-                <a:hlinkClick r:id="rId3" action="ppaction://hlinksldjump"/>
-              </a:rPr>
-              <a:t>« Torna all'agenda</a:t>
-            </a:r>
-          </a:p>
-        </p:txBody>
-      </p:sp>
-      <p:sp>
-        <p:nvSpPr>
-          <p:cNvPr id="11" name="Rounded Rectangle 10">
-            <a:hlinkClick action="ppaction://hlinksldjump" r:id="rId4"/>
-          </p:cNvPr>
-          <p:cNvSpPr/>
-          <p:nvPr/>
-        </p:nvSpPr>
-        <p:spPr>
-          <a:xfrm>
-            <a:off x="6446520" y="1481328"/>
-            <a:ext cx="4983480" cy="457200"/>
-          </a:xfrm>
-          <a:prstGeom prst="roundRect">
+            <a:pPr algn="ctr">
+              <a:lnSpc>
+                <a:spcPct val="112000"/>
+              </a:lnSpc>
+            </a:pPr>
+            <a:r>
+              <a:rPr sz="1400" b="0" i="0">
+                <a:solidFill>
+                  <a:srgbClr val="1A1A1A"/>
+                </a:solidFill>
+                <a:latin typeface="Liberation Sans"/>
+              </a:rPr>
+              <a:t>Privacy, note legali, dichiarazione di accessibilità, social media policy.</a:t>
+            </a:r>
+          </a:p>
+        </p:txBody>
+      </p:sp>
+      <p:sp>
+        <p:nvSpPr>
+          <p:cNvPr id="13" name="Oval 12"/>
+          <p:cNvSpPr/>
+          <p:nvPr/>
+        </p:nvSpPr>
+        <p:spPr>
+          <a:xfrm>
+            <a:off x="2182367" y="2619756"/>
+            <a:ext cx="603504" cy="603504"/>
+          </a:xfrm>
+          <a:prstGeom prst="ellipse">
             <a:avLst/>
           </a:prstGeom>
           <a:solidFill>
             <a:srgbClr val="003366"/>
-          </a:solidFill>
-          <a:ln w="9525">
-            <a:solidFill>
-              <a:srgbClr val="4A6A8A"/>
-            </a:solidFill>
-          </a:ln>
-          <a:effectLst/>
-        </p:spPr>
-        <p:style>
-          <a:lnRef idx="1">
-            <a:schemeClr val="accent1"/>
-          </a:lnRef>
-          <a:fillRef idx="3">
-            <a:schemeClr val="accent1"/>
-          </a:fillRef>
-          <a:effectRef idx="2">
-            <a:schemeClr val="accent1"/>
-          </a:effectRef>
-          <a:fontRef idx="minor">
-            <a:schemeClr val="lt1"/>
-          </a:fontRef>
-        </p:style>
-        <p:txBody>
-          <a:bodyPr rtlCol="0" anchor="ctr" wrap="square" lIns="146304" tIns="9144" bIns="9144"/>
-          <a:lstStyle/>
-          <a:p>
-            <a:pPr algn="l"/>
-            <a:r>
-              <a:rPr sz="1100" b="1" i="0">
-                <a:solidFill>
-                  <a:srgbClr val="FFBE2E"/>
-                </a:solidFill>
-                <a:latin typeface="Liberation Sans"/>
-              </a:rPr>
-              <a:t>01  </a:t>
-            </a:r>
-            <a:r>
-              <a:rPr sz="1100" b="0" i="0">
-                <a:solidFill>
-                  <a:srgbClr val="FFFFFF"/>
-                </a:solidFill>
-                <a:latin typeface="Liberation Sans"/>
-              </a:rPr>
-              <a:t>Per il Cittadino</a:t>
-            </a:r>
-          </a:p>
-        </p:txBody>
-      </p:sp>
-      <p:sp>
-        <p:nvSpPr>
-          <p:cNvPr id="12" name="Rounded Rectangle 11">
-            <a:hlinkClick action="ppaction://hlinksldjump" r:id="rId5"/>
-          </p:cNvPr>
-          <p:cNvSpPr/>
-          <p:nvPr/>
-        </p:nvSpPr>
-        <p:spPr>
-          <a:xfrm>
-            <a:off x="6446520" y="2029968"/>
-            <a:ext cx="4983480" cy="457200"/>
-          </a:xfrm>
-          <a:prstGeom prst="roundRect">
-            <a:avLst/>
-          </a:prstGeom>
-          <a:solidFill>
-            <a:srgbClr val="003366"/>
-          </a:solidFill>
-          <a:ln w="9525">
-            <a:solidFill>
-              <a:srgbClr val="4A6A8A"/>
-            </a:solidFill>
-          </a:ln>
-          <a:effectLst/>
-        </p:spPr>
-        <p:style>
-          <a:lnRef idx="1">
-            <a:schemeClr val="accent1"/>
-          </a:lnRef>
-          <a:fillRef idx="3">
-            <a:schemeClr val="accent1"/>
-          </a:fillRef>
-          <a:effectRef idx="2">
-            <a:schemeClr val="accent1"/>
-          </a:effectRef>
-          <a:fontRef idx="minor">
-            <a:schemeClr val="lt1"/>
-          </a:fontRef>
-        </p:style>
-        <p:txBody>
-          <a:bodyPr rtlCol="0" anchor="ctr" wrap="square" lIns="146304" tIns="9144" bIns="9144"/>
-          <a:lstStyle/>
-          <a:p>
-            <a:pPr algn="l"/>
-            <a:r>
-              <a:rPr sz="1100" b="1" i="0">
-                <a:solidFill>
-                  <a:srgbClr val="FFBE2E"/>
-                </a:solidFill>
-                <a:latin typeface="Liberation Sans"/>
-              </a:rPr>
-              <a:t>02  </a:t>
-            </a:r>
-            <a:r>
-              <a:rPr sz="1100" b="0" i="0">
-                <a:solidFill>
-                  <a:srgbClr val="FFFFFF"/>
-                </a:solidFill>
-                <a:latin typeface="Liberation Sans"/>
-              </a:rPr>
-              <a:t>Per le Scuole</a:t>
-            </a:r>
-          </a:p>
-        </p:txBody>
-      </p:sp>
-      <p:sp>
-        <p:nvSpPr>
-          <p:cNvPr id="13" name="Rounded Rectangle 12">
-            <a:hlinkClick action="ppaction://hlinksldjump" r:id="rId6"/>
-          </p:cNvPr>
-          <p:cNvSpPr/>
-          <p:nvPr/>
-        </p:nvSpPr>
-        <p:spPr>
-          <a:xfrm>
-            <a:off x="6446520" y="2578608"/>
-            <a:ext cx="4983480" cy="457200"/>
-          </a:xfrm>
-          <a:prstGeom prst="roundRect">
-            <a:avLst/>
-          </a:prstGeom>
-          <a:solidFill>
-            <a:srgbClr val="003366"/>
-          </a:solidFill>
-          <a:ln w="9525">
-            <a:solidFill>
-              <a:srgbClr val="4A6A8A"/>
-            </a:solidFill>
-          </a:ln>
-          <a:effectLst/>
-        </p:spPr>
-        <p:style>
-          <a:lnRef idx="1">
-            <a:schemeClr val="accent1"/>
-          </a:lnRef>
-          <a:fillRef idx="3">
-            <a:schemeClr val="accent1"/>
-          </a:fillRef>
-          <a:effectRef idx="2">
-            <a:schemeClr val="accent1"/>
-          </a:effectRef>
-          <a:fontRef idx="minor">
-            <a:schemeClr val="lt1"/>
-          </a:fontRef>
-        </p:style>
-        <p:txBody>
-          <a:bodyPr rtlCol="0" anchor="ctr" wrap="square" lIns="146304" tIns="9144" bIns="9144"/>
-          <a:lstStyle/>
-          <a:p>
-            <a:pPr algn="l"/>
-            <a:r>
-              <a:rPr sz="1100" b="1" i="0">
-                <a:solidFill>
-                  <a:srgbClr val="FFBE2E"/>
-                </a:solidFill>
-                <a:latin typeface="Liberation Sans"/>
-              </a:rPr>
-              <a:t>03  </a:t>
-            </a:r>
-            <a:r>
-              <a:rPr sz="1100" b="0" i="0">
-                <a:solidFill>
-                  <a:srgbClr val="FFFFFF"/>
-                </a:solidFill>
-                <a:latin typeface="Liberation Sans"/>
-              </a:rPr>
-              <a:t>Accessibilità e inclusione</a:t>
-            </a:r>
-          </a:p>
-        </p:txBody>
-      </p:sp>
-      <p:sp>
-        <p:nvSpPr>
-          <p:cNvPr id="14" name="Rounded Rectangle 13">
-            <a:hlinkClick action="ppaction://hlinksldjump" r:id="rId7"/>
-          </p:cNvPr>
-          <p:cNvSpPr/>
-          <p:nvPr/>
-        </p:nvSpPr>
-        <p:spPr>
-          <a:xfrm>
-            <a:off x="6446520" y="3127248"/>
-            <a:ext cx="4983480" cy="457200"/>
-          </a:xfrm>
-          <a:prstGeom prst="roundRect">
-            <a:avLst/>
-          </a:prstGeom>
-          <a:solidFill>
-            <a:srgbClr val="003366"/>
-          </a:solidFill>
-          <a:ln w="9525">
-            <a:solidFill>
-              <a:srgbClr val="4A6A8A"/>
-            </a:solidFill>
-          </a:ln>
-          <a:effectLst/>
-        </p:spPr>
-        <p:style>
-          <a:lnRef idx="1">
-            <a:schemeClr val="accent1"/>
-          </a:lnRef>
-          <a:fillRef idx="3">
-            <a:schemeClr val="accent1"/>
-          </a:fillRef>
-          <a:effectRef idx="2">
-            <a:schemeClr val="accent1"/>
-          </a:effectRef>
-          <a:fontRef idx="minor">
-            <a:schemeClr val="lt1"/>
-          </a:fontRef>
-        </p:style>
-        <p:txBody>
-          <a:bodyPr rtlCol="0" anchor="ctr" wrap="square" lIns="146304" tIns="9144" bIns="9144"/>
-          <a:lstStyle/>
-          <a:p>
-            <a:pPr algn="l"/>
-            <a:r>
-              <a:rPr sz="1100" b="1" i="0">
-                <a:solidFill>
-                  <a:srgbClr val="FFBE2E"/>
-                </a:solidFill>
-                <a:latin typeface="Liberation Sans"/>
-              </a:rPr>
-              <a:t>04  </a:t>
-            </a:r>
-            <a:r>
-              <a:rPr sz="1100" b="0" i="0">
-                <a:solidFill>
-                  <a:srgbClr val="FFFFFF"/>
-                </a:solidFill>
-                <a:latin typeface="Liberation Sans"/>
-              </a:rPr>
-              <a:t>Volontariato</a:t>
-            </a:r>
-          </a:p>
-        </p:txBody>
-      </p:sp>
-      <p:sp>
-        <p:nvSpPr>
-          <p:cNvPr id="15" name="Rounded Rectangle 14">
-            <a:hlinkClick action="ppaction://hlinksldjump" r:id="rId8"/>
-          </p:cNvPr>
-          <p:cNvSpPr/>
-          <p:nvPr/>
-        </p:nvSpPr>
-        <p:spPr>
-          <a:xfrm>
-            <a:off x="6446520" y="3675887"/>
-            <a:ext cx="4983480" cy="457200"/>
-          </a:xfrm>
-          <a:prstGeom prst="roundRect">
-            <a:avLst/>
-          </a:prstGeom>
-          <a:solidFill>
-            <a:srgbClr val="003366"/>
-          </a:solidFill>
-          <a:ln w="9525">
-            <a:solidFill>
-              <a:srgbClr val="4A6A8A"/>
-            </a:solidFill>
-          </a:ln>
-          <a:effectLst/>
-        </p:spPr>
-        <p:style>
-          <a:lnRef idx="1">
-            <a:schemeClr val="accent1"/>
-          </a:lnRef>
-          <a:fillRef idx="3">
-            <a:schemeClr val="accent1"/>
-          </a:fillRef>
-          <a:effectRef idx="2">
-            <a:schemeClr val="accent1"/>
-          </a:effectRef>
-          <a:fontRef idx="minor">
-            <a:schemeClr val="lt1"/>
-          </a:fontRef>
-        </p:style>
-        <p:txBody>
-          <a:bodyPr rtlCol="0" anchor="ctr" wrap="square" lIns="146304" tIns="9144" bIns="9144"/>
-          <a:lstStyle/>
-          <a:p>
-            <a:pPr algn="l"/>
-            <a:r>
-              <a:rPr sz="1100" b="1" i="0">
-                <a:solidFill>
-                  <a:srgbClr val="FFBE2E"/>
-                </a:solidFill>
-                <a:latin typeface="Liberation Sans"/>
-              </a:rPr>
-              <a:t>05  </a:t>
-            </a:r>
-            <a:r>
-              <a:rPr sz="1100" b="0" i="0">
-                <a:solidFill>
-                  <a:srgbClr val="FFFFFF"/>
-                </a:solidFill>
-                <a:latin typeface="Liberation Sans"/>
-              </a:rPr>
-              <a:t>Risorse e trasparenza</a:t>
-            </a:r>
-          </a:p>
-        </p:txBody>
-      </p:sp>
-      <p:sp>
-        <p:nvSpPr>
-          <p:cNvPr id="16" name="Rounded Rectangle 15"/>
-          <p:cNvSpPr/>
-          <p:nvPr/>
-        </p:nvSpPr>
-        <p:spPr>
-          <a:xfrm>
-            <a:off x="6446520" y="4224528"/>
-            <a:ext cx="4983480" cy="457200"/>
-          </a:xfrm>
-          <a:prstGeom prst="roundRect">
-            <a:avLst/>
-          </a:prstGeom>
-          <a:solidFill>
-            <a:srgbClr val="FFBE2E"/>
           </a:solidFill>
           <a:ln>
             <a:noFill/>
@@ -42730,107 +42704,99 @@
           </a:fontRef>
         </p:style>
         <p:txBody>
-          <a:bodyPr rtlCol="0" anchor="ctr" wrap="square" lIns="146304" tIns="9144" bIns="9144"/>
-          <a:lstStyle/>
-          <a:p>
-            <a:pPr algn="l"/>
-            <a:r>
-              <a:rPr sz="1100" b="1" i="0">
-                <a:solidFill>
-                  <a:srgbClr val="001A33"/>
-                </a:solidFill>
-                <a:latin typeface="Liberation Sans"/>
-              </a:rPr>
-              <a:t>06  </a:t>
-            </a:r>
-            <a:r>
-              <a:rPr sz="1100" b="1" i="0">
-                <a:solidFill>
-                  <a:srgbClr val="001A33"/>
-                </a:solidFill>
-                <a:latin typeface="Liberation Sans"/>
-              </a:rPr>
-              <a:t>Comunicazione</a:t>
-            </a:r>
-          </a:p>
-        </p:txBody>
-      </p:sp>
-      <p:sp>
-        <p:nvSpPr>
-          <p:cNvPr id="17" name="Rounded Rectangle 16">
-            <a:hlinkClick action="ppaction://hlinksldjump" r:id="rId9"/>
-          </p:cNvPr>
-          <p:cNvSpPr/>
-          <p:nvPr/>
-        </p:nvSpPr>
-        <p:spPr>
-          <a:xfrm>
-            <a:off x="6446520" y="4773168"/>
-            <a:ext cx="4983480" cy="457200"/>
+          <a:bodyPr rtlCol="0" anchor="ctr" wrap="square" lIns="109728" rIns="109728" tIns="36576" bIns="36576"/>
+          <a:lstStyle/>
+          <a:p>
+            <a:pPr algn="ctr"/>
+          </a:p>
+        </p:txBody>
+      </p:sp>
+      <p:pic>
+        <p:nvPicPr>
+          <p:cNvPr id="14" name="Picture 13" descr="file-earmark-text-fill_ffffff.png"/>
+          <p:cNvPicPr>
+            <a:picLocks noChangeAspect="1"/>
+          </p:cNvPicPr>
+          <p:nvPr/>
+        </p:nvPicPr>
+        <p:blipFill>
+          <a:blip r:embed="rId4"/>
+          <a:stretch>
+            <a:fillRect/>
+          </a:stretch>
+        </p:blipFill>
+        <p:spPr>
+          <a:xfrm>
+            <a:off x="2315138" y="2752526"/>
+            <a:ext cx="337962" cy="337962"/>
+          </a:xfrm>
+          <a:prstGeom prst="rect">
+            <a:avLst/>
+          </a:prstGeom>
+        </p:spPr>
+      </p:pic>
+      <p:sp>
+        <p:nvSpPr>
+          <p:cNvPr id="15" name="Rounded Rectangle 14"/>
+          <p:cNvSpPr/>
+          <p:nvPr/>
+        </p:nvSpPr>
+        <p:spPr>
+          <a:xfrm>
+            <a:off x="4373880" y="2354580"/>
+            <a:ext cx="3413759" cy="3383280"/>
           </a:xfrm>
           <a:prstGeom prst="roundRect">
             <a:avLst/>
           </a:prstGeom>
           <a:solidFill>
-            <a:srgbClr val="003366"/>
-          </a:solidFill>
-          <a:ln w="9525">
+            <a:srgbClr val="F4F7FB"/>
+          </a:solidFill>
+          <a:ln w="12700">
             <a:solidFill>
-              <a:srgbClr val="4A6A8A"/>
+              <a:srgbClr val="D8DEE4"/>
             </a:solidFill>
           </a:ln>
-          <a:effectLst/>
-        </p:spPr>
-        <p:style>
-          <a:lnRef idx="1">
-            <a:schemeClr val="accent1"/>
-          </a:lnRef>
-          <a:fillRef idx="3">
-            <a:schemeClr val="accent1"/>
-          </a:fillRef>
-          <a:effectRef idx="2">
-            <a:schemeClr val="accent1"/>
-          </a:effectRef>
-          <a:fontRef idx="minor">
-            <a:schemeClr val="lt1"/>
-          </a:fontRef>
-        </p:style>
-        <p:txBody>
-          <a:bodyPr rtlCol="0" anchor="ctr" wrap="square" lIns="146304" tIns="9144" bIns="9144"/>
-          <a:lstStyle/>
-          <a:p>
-            <a:pPr algn="l"/>
-            <a:r>
-              <a:rPr sz="1100" b="1" i="0">
-                <a:solidFill>
-                  <a:srgbClr val="FFBE2E"/>
-                </a:solidFill>
-                <a:latin typeface="Liberation Sans"/>
-              </a:rPr>
-              <a:t>07  </a:t>
-            </a:r>
-            <a:r>
-              <a:rPr sz="1100" b="0" i="0">
-                <a:solidFill>
-                  <a:srgbClr val="FFFFFF"/>
-                </a:solidFill>
-                <a:latin typeface="Liberation Sans"/>
-              </a:rPr>
-              <a:t>Infrastruttura, fonti e sicurezza</a:t>
-            </a:r>
-          </a:p>
-        </p:txBody>
-      </p:sp>
-      <p:sp>
-        <p:nvSpPr>
-          <p:cNvPr id="18" name="TextBox 17"/>
+          <a:effectLst>
+            <a:outerShdw blurRad="50800" dist="25400" dir="5400000" rotWithShape="0">
+              <a:srgbClr val="001A33">
+                <a:alpha val="42000"/>
+              </a:srgbClr>
+            </a:outerShdw>
+          </a:effectLst>
+        </p:spPr>
+        <p:style>
+          <a:lnRef idx="1">
+            <a:schemeClr val="accent1"/>
+          </a:lnRef>
+          <a:fillRef idx="3">
+            <a:schemeClr val="accent1"/>
+          </a:fillRef>
+          <a:effectRef idx="2">
+            <a:schemeClr val="accent1"/>
+          </a:effectRef>
+          <a:fontRef idx="minor">
+            <a:schemeClr val="lt1"/>
+          </a:fontRef>
+        </p:style>
+        <p:txBody>
+          <a:bodyPr rtlCol="0" anchor="ctr" wrap="square" lIns="109728" rIns="109728" tIns="36576" bIns="36576"/>
+          <a:lstStyle/>
+          <a:p>
+            <a:pPr algn="ctr"/>
+          </a:p>
+        </p:txBody>
+      </p:sp>
+      <p:sp>
+        <p:nvSpPr>
+          <p:cNvPr id="16" name="TextBox 15"/>
           <p:cNvSpPr txBox="1"/>
           <p:nvPr/>
         </p:nvSpPr>
         <p:spPr>
           <a:xfrm>
-            <a:off x="9857232" y="6373368"/>
-            <a:ext cx="329184" cy="365760"/>
+            <a:off x="4556760" y="3451860"/>
+            <a:ext cx="3047999" cy="2103120"/>
           </a:xfrm>
           <a:prstGeom prst="rect">
             <a:avLst/>
@@ -42843,30 +42809,153 @@
           </a:bodyPr>
           <a:lstStyle/>
           <a:p>
-            <a:pPr algn="ctr"/>
-            <a:r>
-              <a:rPr sz="1500" b="1" i="0">
-                <a:solidFill>
-                  <a:srgbClr val="FFBE2E"/>
-                </a:solidFill>
-                <a:latin typeface="Liberation Sans"/>
-                <a:hlinkClick r:id="rId10" action="ppaction://hlinksldjump"/>
-              </a:rPr>
-              <a:t>‹</a:t>
-            </a:r>
-          </a:p>
-        </p:txBody>
-      </p:sp>
-      <p:sp>
-        <p:nvSpPr>
-          <p:cNvPr id="19" name="TextBox 18"/>
+            <a:pPr algn="ctr">
+              <a:lnSpc>
+                <a:spcPct val="112000"/>
+              </a:lnSpc>
+            </a:pPr>
+            <a:r>
+              <a:rPr sz="1400" b="0" i="0">
+                <a:solidFill>
+                  <a:srgbClr val="1A1A1A"/>
+                </a:solidFill>
+                <a:latin typeface="Liberation Sans"/>
+              </a:rPr>
+              <a:t>Data di revisione sempre indicata.</a:t>
+            </a:r>
+          </a:p>
+        </p:txBody>
+      </p:sp>
+      <p:sp>
+        <p:nvSpPr>
+          <p:cNvPr id="17" name="Oval 16"/>
+          <p:cNvSpPr/>
+          <p:nvPr/>
+        </p:nvSpPr>
+        <p:spPr>
+          <a:xfrm>
+            <a:off x="5779007" y="2619756"/>
+            <a:ext cx="603504" cy="603504"/>
+          </a:xfrm>
+          <a:prstGeom prst="ellipse">
+            <a:avLst/>
+          </a:prstGeom>
+          <a:solidFill>
+            <a:srgbClr val="15803D"/>
+          </a:solidFill>
+          <a:ln>
+            <a:noFill/>
+          </a:ln>
+          <a:effectLst/>
+        </p:spPr>
+        <p:style>
+          <a:lnRef idx="1">
+            <a:schemeClr val="accent1"/>
+          </a:lnRef>
+          <a:fillRef idx="3">
+            <a:schemeClr val="accent1"/>
+          </a:fillRef>
+          <a:effectRef idx="2">
+            <a:schemeClr val="accent1"/>
+          </a:effectRef>
+          <a:fontRef idx="minor">
+            <a:schemeClr val="lt1"/>
+          </a:fontRef>
+        </p:style>
+        <p:txBody>
+          <a:bodyPr rtlCol="0" anchor="ctr" wrap="square" lIns="109728" rIns="109728" tIns="36576" bIns="36576"/>
+          <a:lstStyle/>
+          <a:p>
+            <a:pPr algn="ctr"/>
+          </a:p>
+        </p:txBody>
+      </p:sp>
+      <p:pic>
+        <p:nvPicPr>
+          <p:cNvPr id="18" name="Picture 17" descr="file-earmark-text-fill_ffffff.png"/>
+          <p:cNvPicPr>
+            <a:picLocks noChangeAspect="1"/>
+          </p:cNvPicPr>
+          <p:nvPr/>
+        </p:nvPicPr>
+        <p:blipFill>
+          <a:blip r:embed="rId4"/>
+          <a:stretch>
+            <a:fillRect/>
+          </a:stretch>
+        </p:blipFill>
+        <p:spPr>
+          <a:xfrm>
+            <a:off x="5911778" y="2752526"/>
+            <a:ext cx="337962" cy="337962"/>
+          </a:xfrm>
+          <a:prstGeom prst="rect">
+            <a:avLst/>
+          </a:prstGeom>
+        </p:spPr>
+      </p:pic>
+      <p:sp>
+        <p:nvSpPr>
+          <p:cNvPr id="19" name="Rounded Rectangle 18"/>
+          <p:cNvSpPr/>
+          <p:nvPr/>
+        </p:nvSpPr>
+        <p:spPr>
+          <a:xfrm>
+            <a:off x="7970520" y="2354580"/>
+            <a:ext cx="3413759" cy="3383280"/>
+          </a:xfrm>
+          <a:prstGeom prst="roundRect">
+            <a:avLst/>
+          </a:prstGeom>
+          <a:solidFill>
+            <a:srgbClr val="F4F7FB"/>
+          </a:solidFill>
+          <a:ln w="12700">
+            <a:solidFill>
+              <a:srgbClr val="D8DEE4"/>
+            </a:solidFill>
+          </a:ln>
+          <a:effectLst>
+            <a:outerShdw blurRad="50800" dist="25400" dir="5400000" rotWithShape="0">
+              <a:srgbClr val="001A33">
+                <a:alpha val="42000"/>
+              </a:srgbClr>
+            </a:outerShdw>
+          </a:effectLst>
+        </p:spPr>
+        <p:style>
+          <a:lnRef idx="1">
+            <a:schemeClr val="accent1"/>
+          </a:lnRef>
+          <a:fillRef idx="3">
+            <a:schemeClr val="accent1"/>
+          </a:fillRef>
+          <a:effectRef idx="2">
+            <a:schemeClr val="accent1"/>
+          </a:effectRef>
+          <a:fontRef idx="minor">
+            <a:schemeClr val="lt1"/>
+          </a:fontRef>
+        </p:style>
+        <p:txBody>
+          <a:bodyPr rtlCol="0" anchor="ctr" wrap="square" lIns="109728" rIns="109728" tIns="36576" bIns="36576"/>
+          <a:lstStyle/>
+          <a:p>
+            <a:pPr algn="ctr"/>
+          </a:p>
+        </p:txBody>
+      </p:sp>
+      <p:sp>
+        <p:nvSpPr>
+          <p:cNvPr id="20" name="TextBox 19"/>
           <p:cNvSpPr txBox="1"/>
           <p:nvPr/>
         </p:nvSpPr>
         <p:spPr>
           <a:xfrm>
-            <a:off x="10222992" y="6373368"/>
-            <a:ext cx="329184" cy="365760"/>
+            <a:off x="8153399" y="3451860"/>
+            <a:ext cx="3047999" cy="2103120"/>
           </a:xfrm>
           <a:prstGeom prst="rect">
             <a:avLst/>
@@ -42879,14 +42968,157 @@
           </a:bodyPr>
           <a:lstStyle/>
           <a:p>
+            <a:pPr algn="ctr">
+              <a:lnSpc>
+                <a:spcPct val="112000"/>
+              </a:lnSpc>
+            </a:pPr>
+            <a:r>
+              <a:rPr sz="1400" b="0" i="0">
+                <a:solidFill>
+                  <a:srgbClr val="1A1A1A"/>
+                </a:solidFill>
+                <a:latin typeface="Liberation Sans"/>
+              </a:rPr>
+              <a:t>Conformità agli obblighi di trasparenza della Pubblica Amministrazione.</a:t>
+            </a:r>
+          </a:p>
+        </p:txBody>
+      </p:sp>
+      <p:sp>
+        <p:nvSpPr>
+          <p:cNvPr id="21" name="Oval 20"/>
+          <p:cNvSpPr/>
+          <p:nvPr/>
+        </p:nvSpPr>
+        <p:spPr>
+          <a:xfrm>
+            <a:off x="9375648" y="2619756"/>
+            <a:ext cx="603504" cy="603504"/>
+          </a:xfrm>
+          <a:prstGeom prst="ellipse">
+            <a:avLst/>
+          </a:prstGeom>
+          <a:solidFill>
+            <a:srgbClr val="B45309"/>
+          </a:solidFill>
+          <a:ln>
+            <a:noFill/>
+          </a:ln>
+          <a:effectLst/>
+        </p:spPr>
+        <p:style>
+          <a:lnRef idx="1">
+            <a:schemeClr val="accent1"/>
+          </a:lnRef>
+          <a:fillRef idx="3">
+            <a:schemeClr val="accent1"/>
+          </a:fillRef>
+          <a:effectRef idx="2">
+            <a:schemeClr val="accent1"/>
+          </a:effectRef>
+          <a:fontRef idx="minor">
+            <a:schemeClr val="lt1"/>
+          </a:fontRef>
+        </p:style>
+        <p:txBody>
+          <a:bodyPr rtlCol="0" anchor="ctr" wrap="square" lIns="109728" rIns="109728" tIns="36576" bIns="36576"/>
+          <a:lstStyle/>
+          <a:p>
+            <a:pPr algn="ctr"/>
+          </a:p>
+        </p:txBody>
+      </p:sp>
+      <p:pic>
+        <p:nvPicPr>
+          <p:cNvPr id="22" name="Picture 21" descr="file-earmark-text-fill_ffffff.png"/>
+          <p:cNvPicPr>
+            <a:picLocks noChangeAspect="1"/>
+          </p:cNvPicPr>
+          <p:nvPr/>
+        </p:nvPicPr>
+        <p:blipFill>
+          <a:blip r:embed="rId4"/>
+          <a:stretch>
+            <a:fillRect/>
+          </a:stretch>
+        </p:blipFill>
+        <p:spPr>
+          <a:xfrm>
+            <a:off x="9508418" y="2752526"/>
+            <a:ext cx="337962" cy="337962"/>
+          </a:xfrm>
+          <a:prstGeom prst="rect">
+            <a:avLst/>
+          </a:prstGeom>
+        </p:spPr>
+      </p:pic>
+      <p:sp>
+        <p:nvSpPr>
+          <p:cNvPr id="23" name="TextBox 22"/>
+          <p:cNvSpPr txBox="1"/>
+          <p:nvPr/>
+        </p:nvSpPr>
+        <p:spPr>
+          <a:xfrm>
+            <a:off x="9857232" y="6373368"/>
+            <a:ext cx="329184" cy="365760"/>
+          </a:xfrm>
+          <a:prstGeom prst="rect">
+            <a:avLst/>
+          </a:prstGeom>
+          <a:noFill/>
+        </p:spPr>
+        <p:txBody>
+          <a:bodyPr wrap="square" anchor="t" lIns="45720" rIns="45720" tIns="18288" bIns="18288">
+            <a:spAutoFit/>
+          </a:bodyPr>
+          <a:lstStyle/>
+          <a:p>
             <a:pPr algn="ctr"/>
             <a:r>
               <a:rPr sz="1500" b="1" i="0">
                 <a:solidFill>
-                  <a:srgbClr val="FFBE2E"/>
-                </a:solidFill>
-                <a:latin typeface="Liberation Sans"/>
-                <a:hlinkClick r:id="rId11" action="ppaction://hlinksldjump"/>
+                  <a:srgbClr val="003366"/>
+                </a:solidFill>
+                <a:latin typeface="Liberation Sans"/>
+                <a:hlinkClick r:id="rId5" action="ppaction://hlinksldjump"/>
+              </a:rPr>
+              <a:t>‹</a:t>
+            </a:r>
+          </a:p>
+        </p:txBody>
+      </p:sp>
+      <p:sp>
+        <p:nvSpPr>
+          <p:cNvPr id="24" name="TextBox 23"/>
+          <p:cNvSpPr txBox="1"/>
+          <p:nvPr/>
+        </p:nvSpPr>
+        <p:spPr>
+          <a:xfrm>
+            <a:off x="10222992" y="6373368"/>
+            <a:ext cx="329184" cy="365760"/>
+          </a:xfrm>
+          <a:prstGeom prst="rect">
+            <a:avLst/>
+          </a:prstGeom>
+          <a:noFill/>
+        </p:spPr>
+        <p:txBody>
+          <a:bodyPr wrap="square" anchor="t" lIns="45720" rIns="45720" tIns="18288" bIns="18288">
+            <a:spAutoFit/>
+          </a:bodyPr>
+          <a:lstStyle/>
+          <a:p>
+            <a:pPr algn="ctr"/>
+            <a:r>
+              <a:rPr sz="1500" b="1" i="0">
+                <a:solidFill>
+                  <a:srgbClr val="003366"/>
+                </a:solidFill>
+                <a:latin typeface="Liberation Sans"/>
+                <a:hlinkClick r:id="rId6" action="ppaction://hlinksldjump"/>
               </a:rPr>
               <a:t>›</a:t>
             </a:r>
@@ -42926,7 +43158,7 @@
             <a:avLst/>
           </a:prstGeom>
           <a:solidFill>
-            <a:srgbClr val="FFFFFF"/>
+            <a:srgbClr val="001A33"/>
           </a:solidFill>
           <a:ln>
             <a:noFill/>
@@ -42955,53 +43187,9 @@
           </a:p>
         </p:txBody>
       </p:sp>
-      <p:sp>
-        <p:nvSpPr>
-          <p:cNvPr id="3" name="Rectangle 2"/>
-          <p:cNvSpPr/>
-          <p:nvPr/>
-        </p:nvSpPr>
-        <p:spPr>
-          <a:xfrm>
-            <a:off x="0" y="0"/>
-            <a:ext cx="201168" cy="6858000"/>
-          </a:xfrm>
-          <a:prstGeom prst="rect">
-            <a:avLst/>
-          </a:prstGeom>
-          <a:solidFill>
-            <a:srgbClr val="003366"/>
-          </a:solidFill>
-          <a:ln>
-            <a:noFill/>
-          </a:ln>
-          <a:effectLst/>
-        </p:spPr>
-        <p:style>
-          <a:lnRef idx="1">
-            <a:schemeClr val="accent1"/>
-          </a:lnRef>
-          <a:fillRef idx="3">
-            <a:schemeClr val="accent1"/>
-          </a:fillRef>
-          <a:effectRef idx="2">
-            <a:schemeClr val="accent1"/>
-          </a:effectRef>
-          <a:fontRef idx="minor">
-            <a:schemeClr val="lt1"/>
-          </a:fontRef>
-        </p:style>
-        <p:txBody>
-          <a:bodyPr rtlCol="0" anchor="ctr"/>
-          <a:lstStyle/>
-          <a:p>
-            <a:pPr algn="ctr"/>
-          </a:p>
-        </p:txBody>
-      </p:sp>
       <p:pic>
         <p:nvPicPr>
-          <p:cNvPr id="4" name="Picture 3" descr="logo-pc-genzano.png"/>
+          <p:cNvPr id="3" name="Picture 2" descr="logo-pc-genzano.png"/>
           <p:cNvPicPr>
             <a:picLocks noChangeAspect="1"/>
           </p:cNvPicPr>
@@ -43015,14 +43203,58 @@
         </p:blipFill>
         <p:spPr>
           <a:xfrm>
-            <a:off x="11076127" y="411480"/>
-            <a:ext cx="658368" cy="658368"/>
+            <a:off x="10865815" y="502920"/>
+            <a:ext cx="868680" cy="868680"/>
           </a:xfrm>
           <a:prstGeom prst="rect">
             <a:avLst/>
           </a:prstGeom>
         </p:spPr>
       </p:pic>
+      <p:sp>
+        <p:nvSpPr>
+          <p:cNvPr id="4" name="Rectangle 3"/>
+          <p:cNvSpPr/>
+          <p:nvPr/>
+        </p:nvSpPr>
+        <p:spPr>
+          <a:xfrm>
+            <a:off x="914400" y="2743200"/>
+            <a:ext cx="2194560" cy="50800"/>
+          </a:xfrm>
+          <a:prstGeom prst="rect">
+            <a:avLst/>
+          </a:prstGeom>
+          <a:solidFill>
+            <a:srgbClr val="FFBE2E"/>
+          </a:solidFill>
+          <a:ln>
+            <a:noFill/>
+          </a:ln>
+          <a:effectLst/>
+        </p:spPr>
+        <p:style>
+          <a:lnRef idx="1">
+            <a:schemeClr val="accent1"/>
+          </a:lnRef>
+          <a:fillRef idx="3">
+            <a:schemeClr val="accent1"/>
+          </a:fillRef>
+          <a:effectRef idx="2">
+            <a:schemeClr val="accent1"/>
+          </a:effectRef>
+          <a:fontRef idx="minor">
+            <a:schemeClr val="lt1"/>
+          </a:fontRef>
+        </p:style>
+        <p:txBody>
+          <a:bodyPr rtlCol="0" anchor="ctr"/>
+          <a:lstStyle/>
+          <a:p>
+            <a:pPr algn="ctr"/>
+          </a:p>
+        </p:txBody>
+      </p:sp>
       <p:sp>
         <p:nvSpPr>
           <p:cNvPr id="5" name="TextBox 4"/>
@@ -43031,8 +43263,8 @@
         </p:nvSpPr>
         <p:spPr>
           <a:xfrm>
-            <a:off x="640080" y="502920"/>
-            <a:ext cx="9692640" cy="1005840"/>
+            <a:off x="914400" y="2971800"/>
+            <a:ext cx="5029200" cy="2468880"/>
           </a:xfrm>
           <a:prstGeom prst="rect">
             <a:avLst/>
@@ -43046,115 +43278,27 @@
           <a:lstStyle/>
           <a:p>
             <a:r>
-              <a:rPr sz="2800" b="1" i="0">
-                <a:solidFill>
-                  <a:srgbClr val="003366"/>
-                </a:solidFill>
-                <a:latin typeface="Liberation Sans"/>
-              </a:rPr>
-              <a:t>Comunicazioni e notizie</a:t>
-            </a:r>
-          </a:p>
-        </p:txBody>
-      </p:sp>
-      <p:sp>
-        <p:nvSpPr>
-          <p:cNvPr id="6" name="Rectangle 5"/>
-          <p:cNvSpPr/>
-          <p:nvPr/>
-        </p:nvSpPr>
-        <p:spPr>
-          <a:xfrm>
-            <a:off x="685800" y="1417320"/>
-            <a:ext cx="2011680" cy="38100"/>
-          </a:xfrm>
-          <a:prstGeom prst="rect">
-            <a:avLst/>
-          </a:prstGeom>
-          <a:solidFill>
-            <a:srgbClr val="FFBE2E"/>
-          </a:solidFill>
-          <a:ln>
-            <a:noFill/>
-          </a:ln>
-          <a:effectLst/>
-        </p:spPr>
-        <p:style>
-          <a:lnRef idx="1">
-            <a:schemeClr val="accent1"/>
-          </a:lnRef>
-          <a:fillRef idx="3">
-            <a:schemeClr val="accent1"/>
-          </a:fillRef>
-          <a:effectRef idx="2">
-            <a:schemeClr val="accent1"/>
-          </a:effectRef>
-          <a:fontRef idx="minor">
-            <a:schemeClr val="lt1"/>
-          </a:fontRef>
-        </p:style>
-        <p:txBody>
-          <a:bodyPr rtlCol="0" anchor="ctr"/>
-          <a:lstStyle/>
-          <a:p>
-            <a:pPr algn="ctr"/>
-          </a:p>
-        </p:txBody>
-      </p:sp>
-      <p:sp>
-        <p:nvSpPr>
-          <p:cNvPr id="7" name="Rectangle 6"/>
-          <p:cNvSpPr/>
-          <p:nvPr/>
-        </p:nvSpPr>
-        <p:spPr>
-          <a:xfrm>
-            <a:off x="548640" y="6419088"/>
-            <a:ext cx="11091672" cy="15240"/>
-          </a:xfrm>
-          <a:prstGeom prst="rect">
-            <a:avLst/>
-          </a:prstGeom>
-          <a:solidFill>
-            <a:srgbClr val="D8DEE4"/>
-          </a:solidFill>
-          <a:ln>
-            <a:noFill/>
-          </a:ln>
-          <a:effectLst/>
-        </p:spPr>
-        <p:style>
-          <a:lnRef idx="1">
-            <a:schemeClr val="accent1"/>
-          </a:lnRef>
-          <a:fillRef idx="3">
-            <a:schemeClr val="accent1"/>
-          </a:fillRef>
-          <a:effectRef idx="2">
-            <a:schemeClr val="accent1"/>
-          </a:effectRef>
-          <a:fontRef idx="minor">
-            <a:schemeClr val="lt1"/>
-          </a:fontRef>
-        </p:style>
-        <p:txBody>
-          <a:bodyPr rtlCol="0" anchor="ctr"/>
-          <a:lstStyle/>
-          <a:p>
-            <a:pPr algn="ctr"/>
-          </a:p>
-        </p:txBody>
-      </p:sp>
-      <p:sp>
-        <p:nvSpPr>
-          <p:cNvPr id="8" name="TextBox 7"/>
+              <a:rPr sz="3200" b="1" i="0">
+                <a:solidFill>
+                  <a:srgbClr val="FFFFFF"/>
+                </a:solidFill>
+                <a:latin typeface="Liberation Sans"/>
+              </a:rPr>
+              <a:t>Comunicazione</a:t>
+            </a:r>
+          </a:p>
+        </p:txBody>
+      </p:sp>
+      <p:sp>
+        <p:nvSpPr>
+          <p:cNvPr id="6" name="TextBox 5"/>
           <p:cNvSpPr txBox="1"/>
           <p:nvPr/>
         </p:nvSpPr>
         <p:spPr>
           <a:xfrm>
-            <a:off x="548640" y="6455664"/>
-            <a:ext cx="4114800" cy="320040"/>
+            <a:off x="914400" y="2194560"/>
+            <a:ext cx="5029200" cy="457200"/>
           </a:xfrm>
           <a:prstGeom prst="rect">
             <a:avLst/>
@@ -43168,27 +43312,71 @@
           <a:lstStyle/>
           <a:p>
             <a:r>
-              <a:rPr sz="900" b="0" i="0">
-                <a:solidFill>
-                  <a:srgbClr val="5A6B7B"/>
-                </a:solidFill>
-                <a:latin typeface="Liberation Sans"/>
-              </a:rPr>
-              <a:t>Gruppo Comunale Volontari di PC · Genzano di Roma</a:t>
-            </a:r>
-          </a:p>
-        </p:txBody>
-      </p:sp>
-      <p:sp>
-        <p:nvSpPr>
-          <p:cNvPr id="9" name="TextBox 8"/>
+              <a:rPr sz="1300" b="1" i="0">
+                <a:solidFill>
+                  <a:srgbClr val="FFBE2E"/>
+                </a:solidFill>
+                <a:latin typeface="Liberation Sans"/>
+              </a:rPr>
+              <a:t>SEZIONE</a:t>
+            </a:r>
+          </a:p>
+        </p:txBody>
+      </p:sp>
+      <p:sp>
+        <p:nvSpPr>
+          <p:cNvPr id="7" name="Rectangle 6"/>
+          <p:cNvSpPr/>
+          <p:nvPr/>
+        </p:nvSpPr>
+        <p:spPr>
+          <a:xfrm>
+            <a:off x="548640" y="6419088"/>
+            <a:ext cx="11091672" cy="15240"/>
+          </a:xfrm>
+          <a:prstGeom prst="rect">
+            <a:avLst/>
+          </a:prstGeom>
+          <a:solidFill>
+            <a:srgbClr val="334E66"/>
+          </a:solidFill>
+          <a:ln>
+            <a:noFill/>
+          </a:ln>
+          <a:effectLst/>
+        </p:spPr>
+        <p:style>
+          <a:lnRef idx="1">
+            <a:schemeClr val="accent1"/>
+          </a:lnRef>
+          <a:fillRef idx="3">
+            <a:schemeClr val="accent1"/>
+          </a:fillRef>
+          <a:effectRef idx="2">
+            <a:schemeClr val="accent1"/>
+          </a:effectRef>
+          <a:fontRef idx="minor">
+            <a:schemeClr val="lt1"/>
+          </a:fontRef>
+        </p:style>
+        <p:txBody>
+          <a:bodyPr rtlCol="0" anchor="ctr"/>
+          <a:lstStyle/>
+          <a:p>
+            <a:pPr algn="ctr"/>
+          </a:p>
+        </p:txBody>
+      </p:sp>
+      <p:sp>
+        <p:nvSpPr>
+          <p:cNvPr id="8" name="TextBox 7"/>
           <p:cNvSpPr txBox="1"/>
           <p:nvPr/>
         </p:nvSpPr>
         <p:spPr>
           <a:xfrm>
-            <a:off x="10698480" y="6455664"/>
-            <a:ext cx="914400" cy="320040"/>
+            <a:off x="548640" y="6455664"/>
+            <a:ext cx="4114800" cy="320040"/>
           </a:xfrm>
           <a:prstGeom prst="rect">
             <a:avLst/>
@@ -43201,29 +43389,28 @@
           </a:bodyPr>
           <a:lstStyle/>
           <a:p>
-            <a:pPr algn="r"/>
-            <a:r>
-              <a:rPr sz="900" b="1" i="0">
-                <a:solidFill>
-                  <a:srgbClr val="5A6B7B"/>
-                </a:solidFill>
-                <a:latin typeface="Liberation Sans"/>
-              </a:rPr>
-              <a:t>49</a:t>
-            </a:r>
-          </a:p>
-        </p:txBody>
-      </p:sp>
-      <p:sp>
-        <p:nvSpPr>
-          <p:cNvPr id="10" name="TextBox 9"/>
+            <a:r>
+              <a:rPr sz="900" b="0" i="0">
+                <a:solidFill>
+                  <a:srgbClr val="9DB0C2"/>
+                </a:solidFill>
+                <a:latin typeface="Liberation Sans"/>
+              </a:rPr>
+              <a:t>Gruppo Comunale Volontari di PC · Genzano di Roma</a:t>
+            </a:r>
+          </a:p>
+        </p:txBody>
+      </p:sp>
+      <p:sp>
+        <p:nvSpPr>
+          <p:cNvPr id="9" name="TextBox 8"/>
           <p:cNvSpPr txBox="1"/>
           <p:nvPr/>
         </p:nvSpPr>
         <p:spPr>
           <a:xfrm>
-            <a:off x="4727448" y="6428232"/>
-            <a:ext cx="2743200" cy="329184"/>
+            <a:off x="10698480" y="6455664"/>
+            <a:ext cx="914400" cy="320040"/>
           </a:xfrm>
           <a:prstGeom prst="rect">
             <a:avLst/>
@@ -43236,82 +43423,29 @@
           </a:bodyPr>
           <a:lstStyle/>
           <a:p>
-            <a:pPr algn="ctr"/>
-            <a:r>
-              <a:rPr sz="950" b="1" i="0">
-                <a:solidFill>
-                  <a:srgbClr val="003366"/>
-                </a:solidFill>
-                <a:latin typeface="Liberation Sans"/>
-                <a:hlinkClick r:id="rId3" action="ppaction://hlinksldjump"/>
-              </a:rPr>
-              <a:t>« Torna all'agenda</a:t>
-            </a:r>
-          </a:p>
-        </p:txBody>
-      </p:sp>
-      <p:sp>
-        <p:nvSpPr>
-          <p:cNvPr id="11" name="Rounded Rectangle 10"/>
-          <p:cNvSpPr/>
-          <p:nvPr/>
-        </p:nvSpPr>
-        <p:spPr>
-          <a:xfrm>
-            <a:off x="777240" y="2354580"/>
-            <a:ext cx="3413759" cy="3383280"/>
-          </a:xfrm>
-          <a:prstGeom prst="roundRect">
-            <a:avLst/>
-          </a:prstGeom>
-          <a:solidFill>
-            <a:srgbClr val="F4F7FB"/>
-          </a:solidFill>
-          <a:ln w="12700">
-            <a:solidFill>
-              <a:srgbClr val="D8DEE4"/>
-            </a:solidFill>
-          </a:ln>
-          <a:effectLst>
-            <a:outerShdw blurRad="50800" dist="25400" dir="5400000" rotWithShape="0">
-              <a:srgbClr val="001A33">
-                <a:alpha val="42000"/>
-              </a:srgbClr>
-            </a:outerShdw>
-          </a:effectLst>
-        </p:spPr>
-        <p:style>
-          <a:lnRef idx="1">
-            <a:schemeClr val="accent1"/>
-          </a:lnRef>
-          <a:fillRef idx="3">
-            <a:schemeClr val="accent1"/>
-          </a:fillRef>
-          <a:effectRef idx="2">
-            <a:schemeClr val="accent1"/>
-          </a:effectRef>
-          <a:fontRef idx="minor">
-            <a:schemeClr val="lt1"/>
-          </a:fontRef>
-        </p:style>
-        <p:txBody>
-          <a:bodyPr rtlCol="0" anchor="ctr" wrap="square" lIns="109728" rIns="109728" tIns="36576" bIns="36576"/>
-          <a:lstStyle/>
-          <a:p>
-            <a:pPr algn="ctr"/>
-          </a:p>
-        </p:txBody>
-      </p:sp>
-      <p:sp>
-        <p:nvSpPr>
-          <p:cNvPr id="12" name="TextBox 11"/>
+            <a:pPr algn="r"/>
+            <a:r>
+              <a:rPr sz="900" b="1" i="0">
+                <a:solidFill>
+                  <a:srgbClr val="9DB0C2"/>
+                </a:solidFill>
+                <a:latin typeface="Liberation Sans"/>
+              </a:rPr>
+              <a:t>49</a:t>
+            </a:r>
+          </a:p>
+        </p:txBody>
+      </p:sp>
+      <p:sp>
+        <p:nvSpPr>
+          <p:cNvPr id="10" name="TextBox 9"/>
           <p:cNvSpPr txBox="1"/>
           <p:nvPr/>
         </p:nvSpPr>
         <p:spPr>
           <a:xfrm>
-            <a:off x="960120" y="3451860"/>
-            <a:ext cx="3047999" cy="2103120"/>
+            <a:off x="4727448" y="6428232"/>
+            <a:ext cx="2743200" cy="329184"/>
           </a:xfrm>
           <a:prstGeom prst="rect">
             <a:avLst/>
@@ -43324,39 +43458,366 @@
           </a:bodyPr>
           <a:lstStyle/>
           <a:p>
-            <a:pPr algn="ctr">
-              <a:lnSpc>
-                <a:spcPct val="112000"/>
-              </a:lnSpc>
-            </a:pPr>
-            <a:r>
-              <a:rPr sz="1400" b="0" i="0">
-                <a:solidFill>
-                  <a:srgbClr val="1A1A1A"/>
-                </a:solidFill>
-                <a:latin typeface="Liberation Sans"/>
-              </a:rPr>
-              <a:t>Sezione informativa costantemente aggiornata.</a:t>
-            </a:r>
-          </a:p>
-        </p:txBody>
-      </p:sp>
-      <p:sp>
-        <p:nvSpPr>
-          <p:cNvPr id="13" name="Oval 12"/>
-          <p:cNvSpPr/>
-          <p:nvPr/>
-        </p:nvSpPr>
-        <p:spPr>
-          <a:xfrm>
-            <a:off x="2182367" y="2619756"/>
-            <a:ext cx="603504" cy="603504"/>
-          </a:xfrm>
-          <a:prstGeom prst="ellipse">
+            <a:pPr algn="ctr"/>
+            <a:r>
+              <a:rPr sz="950" b="1" i="0">
+                <a:solidFill>
+                  <a:srgbClr val="FFBE2E"/>
+                </a:solidFill>
+                <a:latin typeface="Liberation Sans"/>
+                <a:hlinkClick r:id="rId3" action="ppaction://hlinksldjump"/>
+              </a:rPr>
+              <a:t>« Torna all'agenda</a:t>
+            </a:r>
+          </a:p>
+        </p:txBody>
+      </p:sp>
+      <p:sp>
+        <p:nvSpPr>
+          <p:cNvPr id="11" name="Rounded Rectangle 10">
+            <a:hlinkClick action="ppaction://hlinksldjump" r:id="rId4"/>
+          </p:cNvPr>
+          <p:cNvSpPr/>
+          <p:nvPr/>
+        </p:nvSpPr>
+        <p:spPr>
+          <a:xfrm>
+            <a:off x="6446520" y="1481328"/>
+            <a:ext cx="4983480" cy="457200"/>
+          </a:xfrm>
+          <a:prstGeom prst="roundRect">
             <a:avLst/>
           </a:prstGeom>
           <a:solidFill>
             <a:srgbClr val="003366"/>
+          </a:solidFill>
+          <a:ln w="9525">
+            <a:solidFill>
+              <a:srgbClr val="4A6A8A"/>
+            </a:solidFill>
+          </a:ln>
+          <a:effectLst/>
+        </p:spPr>
+        <p:style>
+          <a:lnRef idx="1">
+            <a:schemeClr val="accent1"/>
+          </a:lnRef>
+          <a:fillRef idx="3">
+            <a:schemeClr val="accent1"/>
+          </a:fillRef>
+          <a:effectRef idx="2">
+            <a:schemeClr val="accent1"/>
+          </a:effectRef>
+          <a:fontRef idx="minor">
+            <a:schemeClr val="lt1"/>
+          </a:fontRef>
+        </p:style>
+        <p:txBody>
+          <a:bodyPr rtlCol="0" anchor="ctr" wrap="square" lIns="146304" tIns="9144" bIns="9144"/>
+          <a:lstStyle/>
+          <a:p>
+            <a:pPr algn="l"/>
+            <a:r>
+              <a:rPr sz="1100" b="1" i="0">
+                <a:solidFill>
+                  <a:srgbClr val="FFBE2E"/>
+                </a:solidFill>
+                <a:latin typeface="Liberation Sans"/>
+              </a:rPr>
+              <a:t>01  </a:t>
+            </a:r>
+            <a:r>
+              <a:rPr sz="1100" b="0" i="0">
+                <a:solidFill>
+                  <a:srgbClr val="FFFFFF"/>
+                </a:solidFill>
+                <a:latin typeface="Liberation Sans"/>
+              </a:rPr>
+              <a:t>Per il Cittadino</a:t>
+            </a:r>
+          </a:p>
+        </p:txBody>
+      </p:sp>
+      <p:sp>
+        <p:nvSpPr>
+          <p:cNvPr id="12" name="Rounded Rectangle 11">
+            <a:hlinkClick action="ppaction://hlinksldjump" r:id="rId5"/>
+          </p:cNvPr>
+          <p:cNvSpPr/>
+          <p:nvPr/>
+        </p:nvSpPr>
+        <p:spPr>
+          <a:xfrm>
+            <a:off x="6446520" y="2029968"/>
+            <a:ext cx="4983480" cy="457200"/>
+          </a:xfrm>
+          <a:prstGeom prst="roundRect">
+            <a:avLst/>
+          </a:prstGeom>
+          <a:solidFill>
+            <a:srgbClr val="003366"/>
+          </a:solidFill>
+          <a:ln w="9525">
+            <a:solidFill>
+              <a:srgbClr val="4A6A8A"/>
+            </a:solidFill>
+          </a:ln>
+          <a:effectLst/>
+        </p:spPr>
+        <p:style>
+          <a:lnRef idx="1">
+            <a:schemeClr val="accent1"/>
+          </a:lnRef>
+          <a:fillRef idx="3">
+            <a:schemeClr val="accent1"/>
+          </a:fillRef>
+          <a:effectRef idx="2">
+            <a:schemeClr val="accent1"/>
+          </a:effectRef>
+          <a:fontRef idx="minor">
+            <a:schemeClr val="lt1"/>
+          </a:fontRef>
+        </p:style>
+        <p:txBody>
+          <a:bodyPr rtlCol="0" anchor="ctr" wrap="square" lIns="146304" tIns="9144" bIns="9144"/>
+          <a:lstStyle/>
+          <a:p>
+            <a:pPr algn="l"/>
+            <a:r>
+              <a:rPr sz="1100" b="1" i="0">
+                <a:solidFill>
+                  <a:srgbClr val="FFBE2E"/>
+                </a:solidFill>
+                <a:latin typeface="Liberation Sans"/>
+              </a:rPr>
+              <a:t>02  </a:t>
+            </a:r>
+            <a:r>
+              <a:rPr sz="1100" b="0" i="0">
+                <a:solidFill>
+                  <a:srgbClr val="FFFFFF"/>
+                </a:solidFill>
+                <a:latin typeface="Liberation Sans"/>
+              </a:rPr>
+              <a:t>Per le Scuole</a:t>
+            </a:r>
+          </a:p>
+        </p:txBody>
+      </p:sp>
+      <p:sp>
+        <p:nvSpPr>
+          <p:cNvPr id="13" name="Rounded Rectangle 12">
+            <a:hlinkClick action="ppaction://hlinksldjump" r:id="rId6"/>
+          </p:cNvPr>
+          <p:cNvSpPr/>
+          <p:nvPr/>
+        </p:nvSpPr>
+        <p:spPr>
+          <a:xfrm>
+            <a:off x="6446520" y="2578608"/>
+            <a:ext cx="4983480" cy="457200"/>
+          </a:xfrm>
+          <a:prstGeom prst="roundRect">
+            <a:avLst/>
+          </a:prstGeom>
+          <a:solidFill>
+            <a:srgbClr val="003366"/>
+          </a:solidFill>
+          <a:ln w="9525">
+            <a:solidFill>
+              <a:srgbClr val="4A6A8A"/>
+            </a:solidFill>
+          </a:ln>
+          <a:effectLst/>
+        </p:spPr>
+        <p:style>
+          <a:lnRef idx="1">
+            <a:schemeClr val="accent1"/>
+          </a:lnRef>
+          <a:fillRef idx="3">
+            <a:schemeClr val="accent1"/>
+          </a:fillRef>
+          <a:effectRef idx="2">
+            <a:schemeClr val="accent1"/>
+          </a:effectRef>
+          <a:fontRef idx="minor">
+            <a:schemeClr val="lt1"/>
+          </a:fontRef>
+        </p:style>
+        <p:txBody>
+          <a:bodyPr rtlCol="0" anchor="ctr" wrap="square" lIns="146304" tIns="9144" bIns="9144"/>
+          <a:lstStyle/>
+          <a:p>
+            <a:pPr algn="l"/>
+            <a:r>
+              <a:rPr sz="1100" b="1" i="0">
+                <a:solidFill>
+                  <a:srgbClr val="FFBE2E"/>
+                </a:solidFill>
+                <a:latin typeface="Liberation Sans"/>
+              </a:rPr>
+              <a:t>03  </a:t>
+            </a:r>
+            <a:r>
+              <a:rPr sz="1100" b="0" i="0">
+                <a:solidFill>
+                  <a:srgbClr val="FFFFFF"/>
+                </a:solidFill>
+                <a:latin typeface="Liberation Sans"/>
+              </a:rPr>
+              <a:t>Accessibilità e inclusione</a:t>
+            </a:r>
+          </a:p>
+        </p:txBody>
+      </p:sp>
+      <p:sp>
+        <p:nvSpPr>
+          <p:cNvPr id="14" name="Rounded Rectangle 13">
+            <a:hlinkClick action="ppaction://hlinksldjump" r:id="rId7"/>
+          </p:cNvPr>
+          <p:cNvSpPr/>
+          <p:nvPr/>
+        </p:nvSpPr>
+        <p:spPr>
+          <a:xfrm>
+            <a:off x="6446520" y="3127248"/>
+            <a:ext cx="4983480" cy="457200"/>
+          </a:xfrm>
+          <a:prstGeom prst="roundRect">
+            <a:avLst/>
+          </a:prstGeom>
+          <a:solidFill>
+            <a:srgbClr val="003366"/>
+          </a:solidFill>
+          <a:ln w="9525">
+            <a:solidFill>
+              <a:srgbClr val="4A6A8A"/>
+            </a:solidFill>
+          </a:ln>
+          <a:effectLst/>
+        </p:spPr>
+        <p:style>
+          <a:lnRef idx="1">
+            <a:schemeClr val="accent1"/>
+          </a:lnRef>
+          <a:fillRef idx="3">
+            <a:schemeClr val="accent1"/>
+          </a:fillRef>
+          <a:effectRef idx="2">
+            <a:schemeClr val="accent1"/>
+          </a:effectRef>
+          <a:fontRef idx="minor">
+            <a:schemeClr val="lt1"/>
+          </a:fontRef>
+        </p:style>
+        <p:txBody>
+          <a:bodyPr rtlCol="0" anchor="ctr" wrap="square" lIns="146304" tIns="9144" bIns="9144"/>
+          <a:lstStyle/>
+          <a:p>
+            <a:pPr algn="l"/>
+            <a:r>
+              <a:rPr sz="1100" b="1" i="0">
+                <a:solidFill>
+                  <a:srgbClr val="FFBE2E"/>
+                </a:solidFill>
+                <a:latin typeface="Liberation Sans"/>
+              </a:rPr>
+              <a:t>04  </a:t>
+            </a:r>
+            <a:r>
+              <a:rPr sz="1100" b="0" i="0">
+                <a:solidFill>
+                  <a:srgbClr val="FFFFFF"/>
+                </a:solidFill>
+                <a:latin typeface="Liberation Sans"/>
+              </a:rPr>
+              <a:t>Volontariato</a:t>
+            </a:r>
+          </a:p>
+        </p:txBody>
+      </p:sp>
+      <p:sp>
+        <p:nvSpPr>
+          <p:cNvPr id="15" name="Rounded Rectangle 14">
+            <a:hlinkClick action="ppaction://hlinksldjump" r:id="rId8"/>
+          </p:cNvPr>
+          <p:cNvSpPr/>
+          <p:nvPr/>
+        </p:nvSpPr>
+        <p:spPr>
+          <a:xfrm>
+            <a:off x="6446520" y="3675887"/>
+            <a:ext cx="4983480" cy="457200"/>
+          </a:xfrm>
+          <a:prstGeom prst="roundRect">
+            <a:avLst/>
+          </a:prstGeom>
+          <a:solidFill>
+            <a:srgbClr val="003366"/>
+          </a:solidFill>
+          <a:ln w="9525">
+            <a:solidFill>
+              <a:srgbClr val="4A6A8A"/>
+            </a:solidFill>
+          </a:ln>
+          <a:effectLst/>
+        </p:spPr>
+        <p:style>
+          <a:lnRef idx="1">
+            <a:schemeClr val="accent1"/>
+          </a:lnRef>
+          <a:fillRef idx="3">
+            <a:schemeClr val="accent1"/>
+          </a:fillRef>
+          <a:effectRef idx="2">
+            <a:schemeClr val="accent1"/>
+          </a:effectRef>
+          <a:fontRef idx="minor">
+            <a:schemeClr val="lt1"/>
+          </a:fontRef>
+        </p:style>
+        <p:txBody>
+          <a:bodyPr rtlCol="0" anchor="ctr" wrap="square" lIns="146304" tIns="9144" bIns="9144"/>
+          <a:lstStyle/>
+          <a:p>
+            <a:pPr algn="l"/>
+            <a:r>
+              <a:rPr sz="1100" b="1" i="0">
+                <a:solidFill>
+                  <a:srgbClr val="FFBE2E"/>
+                </a:solidFill>
+                <a:latin typeface="Liberation Sans"/>
+              </a:rPr>
+              <a:t>05  </a:t>
+            </a:r>
+            <a:r>
+              <a:rPr sz="1100" b="0" i="0">
+                <a:solidFill>
+                  <a:srgbClr val="FFFFFF"/>
+                </a:solidFill>
+                <a:latin typeface="Liberation Sans"/>
+              </a:rPr>
+              <a:t>Risorse e trasparenza</a:t>
+            </a:r>
+          </a:p>
+        </p:txBody>
+      </p:sp>
+      <p:sp>
+        <p:nvSpPr>
+          <p:cNvPr id="16" name="Rounded Rectangle 15"/>
+          <p:cNvSpPr/>
+          <p:nvPr/>
+        </p:nvSpPr>
+        <p:spPr>
+          <a:xfrm>
+            <a:off x="6446520" y="4224528"/>
+            <a:ext cx="4983480" cy="457200"/>
+          </a:xfrm>
+          <a:prstGeom prst="roundRect">
+            <a:avLst/>
+          </a:prstGeom>
+          <a:solidFill>
+            <a:srgbClr val="FFBE2E"/>
           </a:solidFill>
           <a:ln>
             <a:noFill/>
@@ -43378,99 +43839,107 @@
           </a:fontRef>
         </p:style>
         <p:txBody>
-          <a:bodyPr rtlCol="0" anchor="ctr" wrap="square" lIns="109728" rIns="109728" tIns="36576" bIns="36576"/>
-          <a:lstStyle/>
-          <a:p>
-            <a:pPr algn="ctr"/>
-          </a:p>
-        </p:txBody>
-      </p:sp>
-      <p:pic>
-        <p:nvPicPr>
-          <p:cNvPr id="14" name="Picture 13" descr="megaphone-fill_ffffff.png"/>
-          <p:cNvPicPr>
-            <a:picLocks noChangeAspect="1"/>
-          </p:cNvPicPr>
-          <p:nvPr/>
-        </p:nvPicPr>
-        <p:blipFill>
-          <a:blip r:embed="rId4"/>
-          <a:stretch>
-            <a:fillRect/>
-          </a:stretch>
-        </p:blipFill>
-        <p:spPr>
-          <a:xfrm>
-            <a:off x="2315138" y="2752526"/>
-            <a:ext cx="337962" cy="337962"/>
-          </a:xfrm>
-          <a:prstGeom prst="rect">
-            <a:avLst/>
-          </a:prstGeom>
-        </p:spPr>
-      </p:pic>
-      <p:sp>
-        <p:nvSpPr>
-          <p:cNvPr id="15" name="Rounded Rectangle 14"/>
-          <p:cNvSpPr/>
-          <p:nvPr/>
-        </p:nvSpPr>
-        <p:spPr>
-          <a:xfrm>
-            <a:off x="4373880" y="2354580"/>
-            <a:ext cx="3413759" cy="3383280"/>
+          <a:bodyPr rtlCol="0" anchor="ctr" wrap="square" lIns="146304" tIns="9144" bIns="9144"/>
+          <a:lstStyle/>
+          <a:p>
+            <a:pPr algn="l"/>
+            <a:r>
+              <a:rPr sz="1100" b="1" i="0">
+                <a:solidFill>
+                  <a:srgbClr val="001A33"/>
+                </a:solidFill>
+                <a:latin typeface="Liberation Sans"/>
+              </a:rPr>
+              <a:t>06  </a:t>
+            </a:r>
+            <a:r>
+              <a:rPr sz="1100" b="1" i="0">
+                <a:solidFill>
+                  <a:srgbClr val="001A33"/>
+                </a:solidFill>
+                <a:latin typeface="Liberation Sans"/>
+              </a:rPr>
+              <a:t>Comunicazione</a:t>
+            </a:r>
+          </a:p>
+        </p:txBody>
+      </p:sp>
+      <p:sp>
+        <p:nvSpPr>
+          <p:cNvPr id="17" name="Rounded Rectangle 16">
+            <a:hlinkClick action="ppaction://hlinksldjump" r:id="rId9"/>
+          </p:cNvPr>
+          <p:cNvSpPr/>
+          <p:nvPr/>
+        </p:nvSpPr>
+        <p:spPr>
+          <a:xfrm>
+            <a:off x="6446520" y="4773168"/>
+            <a:ext cx="4983480" cy="457200"/>
           </a:xfrm>
           <a:prstGeom prst="roundRect">
             <a:avLst/>
           </a:prstGeom>
           <a:solidFill>
-            <a:srgbClr val="F4F7FB"/>
-          </a:solidFill>
-          <a:ln w="12700">
+            <a:srgbClr val="003366"/>
+          </a:solidFill>
+          <a:ln w="9525">
             <a:solidFill>
-              <a:srgbClr val="D8DEE4"/>
+              <a:srgbClr val="4A6A8A"/>
             </a:solidFill>
           </a:ln>
-          <a:effectLst>
-            <a:outerShdw blurRad="50800" dist="25400" dir="5400000" rotWithShape="0">
-              <a:srgbClr val="001A33">
-                <a:alpha val="42000"/>
-              </a:srgbClr>
-            </a:outerShdw>
-          </a:effectLst>
-        </p:spPr>
-        <p:style>
-          <a:lnRef idx="1">
-            <a:schemeClr val="accent1"/>
-          </a:lnRef>
-          <a:fillRef idx="3">
-            <a:schemeClr val="accent1"/>
-          </a:fillRef>
-          <a:effectRef idx="2">
-            <a:schemeClr val="accent1"/>
-          </a:effectRef>
-          <a:fontRef idx="minor">
-            <a:schemeClr val="lt1"/>
-          </a:fontRef>
-        </p:style>
-        <p:txBody>
-          <a:bodyPr rtlCol="0" anchor="ctr" wrap="square" lIns="109728" rIns="109728" tIns="36576" bIns="36576"/>
-          <a:lstStyle/>
-          <a:p>
-            <a:pPr algn="ctr"/>
-          </a:p>
-        </p:txBody>
-      </p:sp>
-      <p:sp>
-        <p:nvSpPr>
-          <p:cNvPr id="16" name="TextBox 15"/>
+          <a:effectLst/>
+        </p:spPr>
+        <p:style>
+          <a:lnRef idx="1">
+            <a:schemeClr val="accent1"/>
+          </a:lnRef>
+          <a:fillRef idx="3">
+            <a:schemeClr val="accent1"/>
+          </a:fillRef>
+          <a:effectRef idx="2">
+            <a:schemeClr val="accent1"/>
+          </a:effectRef>
+          <a:fontRef idx="minor">
+            <a:schemeClr val="lt1"/>
+          </a:fontRef>
+        </p:style>
+        <p:txBody>
+          <a:bodyPr rtlCol="0" anchor="ctr" wrap="square" lIns="146304" tIns="9144" bIns="9144"/>
+          <a:lstStyle/>
+          <a:p>
+            <a:pPr algn="l"/>
+            <a:r>
+              <a:rPr sz="1100" b="1" i="0">
+                <a:solidFill>
+                  <a:srgbClr val="FFBE2E"/>
+                </a:solidFill>
+                <a:latin typeface="Liberation Sans"/>
+              </a:rPr>
+              <a:t>07  </a:t>
+            </a:r>
+            <a:r>
+              <a:rPr sz="1100" b="0" i="0">
+                <a:solidFill>
+                  <a:srgbClr val="FFFFFF"/>
+                </a:solidFill>
+                <a:latin typeface="Liberation Sans"/>
+              </a:rPr>
+              <a:t>Infrastruttura, fonti e sicurezza</a:t>
+            </a:r>
+          </a:p>
+        </p:txBody>
+      </p:sp>
+      <p:sp>
+        <p:nvSpPr>
+          <p:cNvPr id="18" name="TextBox 17"/>
           <p:cNvSpPr txBox="1"/>
           <p:nvPr/>
         </p:nvSpPr>
         <p:spPr>
           <a:xfrm>
-            <a:off x="4556760" y="3451860"/>
-            <a:ext cx="3047999" cy="2103120"/>
+            <a:off x="9857232" y="6373368"/>
+            <a:ext cx="329184" cy="365760"/>
           </a:xfrm>
           <a:prstGeom prst="rect">
             <a:avLst/>
@@ -43483,153 +43952,30 @@
           </a:bodyPr>
           <a:lstStyle/>
           <a:p>
-            <a:pPr algn="ctr">
-              <a:lnSpc>
-                <a:spcPct val="112000"/>
-              </a:lnSpc>
-            </a:pPr>
-            <a:r>
-              <a:rPr sz="1400" b="0" i="0">
-                <a:solidFill>
-                  <a:srgbClr val="1A1A1A"/>
-                </a:solidFill>
-                <a:latin typeface="Liberation Sans"/>
-              </a:rPr>
-              <a:t>Distinzione chiara tra informazione, prevenzione, allerta ed emergenza.</a:t>
-            </a:r>
-          </a:p>
-        </p:txBody>
-      </p:sp>
-      <p:sp>
-        <p:nvSpPr>
-          <p:cNvPr id="17" name="Oval 16"/>
-          <p:cNvSpPr/>
-          <p:nvPr/>
-        </p:nvSpPr>
-        <p:spPr>
-          <a:xfrm>
-            <a:off x="5779007" y="2619756"/>
-            <a:ext cx="603504" cy="603504"/>
-          </a:xfrm>
-          <a:prstGeom prst="ellipse">
-            <a:avLst/>
-          </a:prstGeom>
-          <a:solidFill>
-            <a:srgbClr val="15803D"/>
-          </a:solidFill>
-          <a:ln>
-            <a:noFill/>
-          </a:ln>
-          <a:effectLst/>
-        </p:spPr>
-        <p:style>
-          <a:lnRef idx="1">
-            <a:schemeClr val="accent1"/>
-          </a:lnRef>
-          <a:fillRef idx="3">
-            <a:schemeClr val="accent1"/>
-          </a:fillRef>
-          <a:effectRef idx="2">
-            <a:schemeClr val="accent1"/>
-          </a:effectRef>
-          <a:fontRef idx="minor">
-            <a:schemeClr val="lt1"/>
-          </a:fontRef>
-        </p:style>
-        <p:txBody>
-          <a:bodyPr rtlCol="0" anchor="ctr" wrap="square" lIns="109728" rIns="109728" tIns="36576" bIns="36576"/>
-          <a:lstStyle/>
-          <a:p>
-            <a:pPr algn="ctr"/>
-          </a:p>
-        </p:txBody>
-      </p:sp>
-      <p:pic>
-        <p:nvPicPr>
-          <p:cNvPr id="18" name="Picture 17" descr="megaphone-fill_ffffff.png"/>
-          <p:cNvPicPr>
-            <a:picLocks noChangeAspect="1"/>
-          </p:cNvPicPr>
-          <p:nvPr/>
-        </p:nvPicPr>
-        <p:blipFill>
-          <a:blip r:embed="rId4"/>
-          <a:stretch>
-            <a:fillRect/>
-          </a:stretch>
-        </p:blipFill>
-        <p:spPr>
-          <a:xfrm>
-            <a:off x="5911778" y="2752526"/>
-            <a:ext cx="337962" cy="337962"/>
-          </a:xfrm>
-          <a:prstGeom prst="rect">
-            <a:avLst/>
-          </a:prstGeom>
-        </p:spPr>
-      </p:pic>
-      <p:sp>
-        <p:nvSpPr>
-          <p:cNvPr id="19" name="Rounded Rectangle 18"/>
-          <p:cNvSpPr/>
-          <p:nvPr/>
-        </p:nvSpPr>
-        <p:spPr>
-          <a:xfrm>
-            <a:off x="7970520" y="2354580"/>
-            <a:ext cx="3413759" cy="3383280"/>
-          </a:xfrm>
-          <a:prstGeom prst="roundRect">
-            <a:avLst/>
-          </a:prstGeom>
-          <a:solidFill>
-            <a:srgbClr val="F4F7FB"/>
-          </a:solidFill>
-          <a:ln w="12700">
-            <a:solidFill>
-              <a:srgbClr val="D8DEE4"/>
-            </a:solidFill>
-          </a:ln>
-          <a:effectLst>
-            <a:outerShdw blurRad="50800" dist="25400" dir="5400000" rotWithShape="0">
-              <a:srgbClr val="001A33">
-                <a:alpha val="42000"/>
-              </a:srgbClr>
-            </a:outerShdw>
-          </a:effectLst>
-        </p:spPr>
-        <p:style>
-          <a:lnRef idx="1">
-            <a:schemeClr val="accent1"/>
-          </a:lnRef>
-          <a:fillRef idx="3">
-            <a:schemeClr val="accent1"/>
-          </a:fillRef>
-          <a:effectRef idx="2">
-            <a:schemeClr val="accent1"/>
-          </a:effectRef>
-          <a:fontRef idx="minor">
-            <a:schemeClr val="lt1"/>
-          </a:fontRef>
-        </p:style>
-        <p:txBody>
-          <a:bodyPr rtlCol="0" anchor="ctr" wrap="square" lIns="109728" rIns="109728" tIns="36576" bIns="36576"/>
-          <a:lstStyle/>
-          <a:p>
-            <a:pPr algn="ctr"/>
-          </a:p>
-        </p:txBody>
-      </p:sp>
-      <p:sp>
-        <p:nvSpPr>
-          <p:cNvPr id="20" name="TextBox 19"/>
+            <a:pPr algn="ctr"/>
+            <a:r>
+              <a:rPr sz="1500" b="1" i="0">
+                <a:solidFill>
+                  <a:srgbClr val="FFBE2E"/>
+                </a:solidFill>
+                <a:latin typeface="Liberation Sans"/>
+                <a:hlinkClick r:id="rId10" action="ppaction://hlinksldjump"/>
+              </a:rPr>
+              <a:t>‹</a:t>
+            </a:r>
+          </a:p>
+        </p:txBody>
+      </p:sp>
+      <p:sp>
+        <p:nvSpPr>
+          <p:cNvPr id="19" name="TextBox 18"/>
           <p:cNvSpPr txBox="1"/>
           <p:nvPr/>
         </p:nvSpPr>
         <p:spPr>
           <a:xfrm>
-            <a:off x="8153399" y="3451860"/>
-            <a:ext cx="3047999" cy="2103120"/>
+            <a:off x="10222992" y="6373368"/>
+            <a:ext cx="329184" cy="365760"/>
           </a:xfrm>
           <a:prstGeom prst="rect">
             <a:avLst/>
@@ -43642,157 +43988,14 @@
           </a:bodyPr>
           <a:lstStyle/>
           <a:p>
-            <a:pPr algn="ctr">
-              <a:lnSpc>
-                <a:spcPct val="112000"/>
-              </a:lnSpc>
-            </a:pPr>
-            <a:r>
-              <a:rPr sz="1400" b="0" i="0">
-                <a:solidFill>
-                  <a:srgbClr val="1A1A1A"/>
-                </a:solidFill>
-                <a:latin typeface="Liberation Sans"/>
-              </a:rPr>
-              <a:t>Ogni avviso rimanda alla fonte ufficiale di riferimento.</a:t>
-            </a:r>
-          </a:p>
-        </p:txBody>
-      </p:sp>
-      <p:sp>
-        <p:nvSpPr>
-          <p:cNvPr id="21" name="Oval 20"/>
-          <p:cNvSpPr/>
-          <p:nvPr/>
-        </p:nvSpPr>
-        <p:spPr>
-          <a:xfrm>
-            <a:off x="9375648" y="2619756"/>
-            <a:ext cx="603504" cy="603504"/>
-          </a:xfrm>
-          <a:prstGeom prst="ellipse">
-            <a:avLst/>
-          </a:prstGeom>
-          <a:solidFill>
-            <a:srgbClr val="B45309"/>
-          </a:solidFill>
-          <a:ln>
-            <a:noFill/>
-          </a:ln>
-          <a:effectLst/>
-        </p:spPr>
-        <p:style>
-          <a:lnRef idx="1">
-            <a:schemeClr val="accent1"/>
-          </a:lnRef>
-          <a:fillRef idx="3">
-            <a:schemeClr val="accent1"/>
-          </a:fillRef>
-          <a:effectRef idx="2">
-            <a:schemeClr val="accent1"/>
-          </a:effectRef>
-          <a:fontRef idx="minor">
-            <a:schemeClr val="lt1"/>
-          </a:fontRef>
-        </p:style>
-        <p:txBody>
-          <a:bodyPr rtlCol="0" anchor="ctr" wrap="square" lIns="109728" rIns="109728" tIns="36576" bIns="36576"/>
-          <a:lstStyle/>
-          <a:p>
-            <a:pPr algn="ctr"/>
-          </a:p>
-        </p:txBody>
-      </p:sp>
-      <p:pic>
-        <p:nvPicPr>
-          <p:cNvPr id="22" name="Picture 21" descr="megaphone-fill_ffffff.png"/>
-          <p:cNvPicPr>
-            <a:picLocks noChangeAspect="1"/>
-          </p:cNvPicPr>
-          <p:nvPr/>
-        </p:nvPicPr>
-        <p:blipFill>
-          <a:blip r:embed="rId4"/>
-          <a:stretch>
-            <a:fillRect/>
-          </a:stretch>
-        </p:blipFill>
-        <p:spPr>
-          <a:xfrm>
-            <a:off x="9508418" y="2752526"/>
-            <a:ext cx="337962" cy="337962"/>
-          </a:xfrm>
-          <a:prstGeom prst="rect">
-            <a:avLst/>
-          </a:prstGeom>
-        </p:spPr>
-      </p:pic>
-      <p:sp>
-        <p:nvSpPr>
-          <p:cNvPr id="23" name="TextBox 22"/>
-          <p:cNvSpPr txBox="1"/>
-          <p:nvPr/>
-        </p:nvSpPr>
-        <p:spPr>
-          <a:xfrm>
-            <a:off x="9857232" y="6373368"/>
-            <a:ext cx="329184" cy="365760"/>
-          </a:xfrm>
-          <a:prstGeom prst="rect">
-            <a:avLst/>
-          </a:prstGeom>
-          <a:noFill/>
-        </p:spPr>
-        <p:txBody>
-          <a:bodyPr wrap="square" anchor="t" lIns="45720" rIns="45720" tIns="18288" bIns="18288">
-            <a:spAutoFit/>
-          </a:bodyPr>
-          <a:lstStyle/>
-          <a:p>
             <a:pPr algn="ctr"/>
             <a:r>
               <a:rPr sz="1500" b="1" i="0">
                 <a:solidFill>
-                  <a:srgbClr val="003366"/>
-                </a:solidFill>
-                <a:latin typeface="Liberation Sans"/>
-                <a:hlinkClick r:id="rId5" action="ppaction://hlinksldjump"/>
-              </a:rPr>
-              <a:t>‹</a:t>
-            </a:r>
-          </a:p>
-        </p:txBody>
-      </p:sp>
-      <p:sp>
-        <p:nvSpPr>
-          <p:cNvPr id="24" name="TextBox 23"/>
-          <p:cNvSpPr txBox="1"/>
-          <p:nvPr/>
-        </p:nvSpPr>
-        <p:spPr>
-          <a:xfrm>
-            <a:off x="10222992" y="6373368"/>
-            <a:ext cx="329184" cy="365760"/>
-          </a:xfrm>
-          <a:prstGeom prst="rect">
-            <a:avLst/>
-          </a:prstGeom>
-          <a:noFill/>
-        </p:spPr>
-        <p:txBody>
-          <a:bodyPr wrap="square" anchor="t" lIns="45720" rIns="45720" tIns="18288" bIns="18288">
-            <a:spAutoFit/>
-          </a:bodyPr>
-          <a:lstStyle/>
-          <a:p>
-            <a:pPr algn="ctr"/>
-            <a:r>
-              <a:rPr sz="1500" b="1" i="0">
-                <a:solidFill>
-                  <a:srgbClr val="003366"/>
-                </a:solidFill>
-                <a:latin typeface="Liberation Sans"/>
-                <a:hlinkClick r:id="rId6" action="ppaction://hlinksldjump"/>
+                  <a:srgbClr val="FFBE2E"/>
+                </a:solidFill>
+                <a:latin typeface="Liberation Sans"/>
+                <a:hlinkClick r:id="rId11" action="ppaction://hlinksldjump"/>
               </a:rPr>
               <a:t>›</a:t>
             </a:r>
@@ -45023,7 +45226,7 @@
                 </a:solidFill>
                 <a:latin typeface="Liberation Sans"/>
               </a:rPr>
-              <a:t>Comunicazione di crisi e social</a:t>
+              <a:t>Comunicazioni e notizie</a:t>
             </a:r>
           </a:p>
         </p:txBody>
@@ -45229,7 +45432,7 @@
         </p:nvSpPr>
         <p:spPr>
           <a:xfrm>
-            <a:off x="777240" y="2148839"/>
+            <a:off x="777240" y="2354580"/>
             <a:ext cx="3413759" cy="3383280"/>
           </a:xfrm>
           <a:prstGeom prst="roundRect">
@@ -45281,7 +45484,7 @@
         </p:nvSpPr>
         <p:spPr>
           <a:xfrm>
-            <a:off x="960120" y="3246120"/>
+            <a:off x="960120" y="3451860"/>
             <a:ext cx="3047999" cy="2103120"/>
           </a:xfrm>
           <a:prstGeom prst="rect">
@@ -45307,7 +45510,7 @@
                 </a:solidFill>
                 <a:latin typeface="Liberation Sans"/>
               </a:rPr>
-              <a:t>Social media policy pubblica.</a:t>
+              <a:t>Sezione informativa costantemente aggiornata.</a:t>
             </a:r>
           </a:p>
         </p:txBody>
@@ -45320,7 +45523,7 @@
         </p:nvSpPr>
         <p:spPr>
           <a:xfrm>
-            <a:off x="2182367" y="2414015"/>
+            <a:off x="2182367" y="2619756"/>
             <a:ext cx="603504" cy="603504"/>
           </a:xfrm>
           <a:prstGeom prst="ellipse">
@@ -45358,7 +45561,7 @@
       </p:sp>
       <p:pic>
         <p:nvPicPr>
-          <p:cNvPr id="14" name="Picture 13" descr="broadcast_ffffff.png"/>
+          <p:cNvPr id="14" name="Picture 13" descr="megaphone-fill_ffffff.png"/>
           <p:cNvPicPr>
             <a:picLocks noChangeAspect="1"/>
           </p:cNvPicPr>
@@ -45372,7 +45575,7 @@
         </p:blipFill>
         <p:spPr>
           <a:xfrm>
-            <a:off x="2315138" y="2546786"/>
+            <a:off x="2315138" y="2752526"/>
             <a:ext cx="337962" cy="337962"/>
           </a:xfrm>
           <a:prstGeom prst="rect">
@@ -45388,7 +45591,7 @@
         </p:nvSpPr>
         <p:spPr>
           <a:xfrm>
-            <a:off x="4373880" y="2148839"/>
+            <a:off x="4373880" y="2354580"/>
             <a:ext cx="3413759" cy="3383280"/>
           </a:xfrm>
           <a:prstGeom prst="roundRect">
@@ -45440,7 +45643,7 @@
         </p:nvSpPr>
         <p:spPr>
           <a:xfrm>
-            <a:off x="4556760" y="3246120"/>
+            <a:off x="4556760" y="3451860"/>
             <a:ext cx="3047999" cy="2103120"/>
           </a:xfrm>
           <a:prstGeom prst="rect">
@@ -45466,7 +45669,7 @@
                 </a:solidFill>
                 <a:latin typeface="Liberation Sans"/>
               </a:rPr>
-              <a:t>Struttura dei messaggi secondo standard internazionali.</a:t>
+              <a:t>Distinzione chiara tra informazione, prevenzione, allerta ed emergenza.</a:t>
             </a:r>
           </a:p>
         </p:txBody>
@@ -45479,7 +45682,7 @@
         </p:nvSpPr>
         <p:spPr>
           <a:xfrm>
-            <a:off x="5779007" y="2414015"/>
+            <a:off x="5779007" y="2619756"/>
             <a:ext cx="603504" cy="603504"/>
           </a:xfrm>
           <a:prstGeom prst="ellipse">
@@ -45517,7 +45720,7 @@
       </p:sp>
       <p:pic>
         <p:nvPicPr>
-          <p:cNvPr id="18" name="Picture 17" descr="broadcast_ffffff.png"/>
+          <p:cNvPr id="18" name="Picture 17" descr="megaphone-fill_ffffff.png"/>
           <p:cNvPicPr>
             <a:picLocks noChangeAspect="1"/>
           </p:cNvPicPr>
@@ -45531,7 +45734,7 @@
         </p:blipFill>
         <p:spPr>
           <a:xfrm>
-            <a:off x="5911778" y="2546786"/>
+            <a:off x="5911778" y="2752526"/>
             <a:ext cx="337962" cy="337962"/>
           </a:xfrm>
           <a:prstGeom prst="rect">
@@ -45547,7 +45750,7 @@
         </p:nvSpPr>
         <p:spPr>
           <a:xfrm>
-            <a:off x="7970520" y="2148839"/>
+            <a:off x="7970520" y="2354580"/>
             <a:ext cx="3413759" cy="3383280"/>
           </a:xfrm>
           <a:prstGeom prst="roundRect">
@@ -45599,7 +45802,7 @@
         </p:nvSpPr>
         <p:spPr>
           <a:xfrm>
-            <a:off x="8153399" y="3246120"/>
+            <a:off x="8153399" y="3451860"/>
             <a:ext cx="3047999" cy="2103120"/>
           </a:xfrm>
           <a:prstGeom prst="rect">
@@ -45625,7 +45828,7 @@
                 </a:solidFill>
                 <a:latin typeface="Liberation Sans"/>
               </a:rPr>
-              <a:t>Contrasto alla disinformazione con fonti ufficiali.</a:t>
+              <a:t>Ogni avviso rimanda alla fonte ufficiale di riferimento.</a:t>
             </a:r>
           </a:p>
         </p:txBody>
@@ -45638,7 +45841,7 @@
         </p:nvSpPr>
         <p:spPr>
           <a:xfrm>
-            <a:off x="9375648" y="2414015"/>
+            <a:off x="9375648" y="2619756"/>
             <a:ext cx="603504" cy="603504"/>
           </a:xfrm>
           <a:prstGeom prst="ellipse">
@@ -45676,7 +45879,7 @@
       </p:sp>
       <p:pic>
         <p:nvPicPr>
-          <p:cNvPr id="22" name="Picture 21" descr="broadcast_ffffff.png"/>
+          <p:cNvPr id="22" name="Picture 21" descr="megaphone-fill_ffffff.png"/>
           <p:cNvPicPr>
             <a:picLocks noChangeAspect="1"/>
           </p:cNvPicPr>
@@ -45690,7 +45893,7 @@
         </p:blipFill>
         <p:spPr>
           <a:xfrm>
-            <a:off x="9508418" y="2546786"/>
+            <a:off x="9508418" y="2752526"/>
             <a:ext cx="337962" cy="337962"/>
           </a:xfrm>
           <a:prstGeom prst="rect">
@@ -45706,8 +45909,8 @@
         </p:nvSpPr>
         <p:spPr>
           <a:xfrm>
-            <a:off x="777240" y="5806440"/>
-            <a:ext cx="10607040" cy="411480"/>
+            <a:off x="9857232" y="6373368"/>
+            <a:ext cx="329184" cy="365760"/>
           </a:xfrm>
           <a:prstGeom prst="rect">
             <a:avLst/>
@@ -45720,23 +45923,16 @@
           </a:bodyPr>
           <a:lstStyle/>
           <a:p>
-            <a:r>
-              <a:rPr sz="1200" b="1" i="0">
+            <a:pPr algn="ctr"/>
+            <a:r>
+              <a:rPr sz="1500" b="1" i="0">
                 <a:solidFill>
                   <a:srgbClr val="003366"/>
                 </a:solidFill>
                 <a:latin typeface="Liberation Sans"/>
-              </a:rPr>
-              <a:t>Fonti e standard: </a:t>
-            </a:r>
-            <a:r>
-              <a:rPr sz="1200" b="0" i="1">
-                <a:solidFill>
-                  <a:srgbClr val="5A6B7B"/>
-                </a:solidFill>
-                <a:latin typeface="Liberation Sans"/>
-              </a:rPr>
-              <a:t>ISO 22329 · CWA CEN/CENELEC · EENA (112)</a:t>
+                <a:hlinkClick r:id="rId5" action="ppaction://hlinksldjump"/>
+              </a:rPr>
+              <a:t>‹</a:t>
             </a:r>
           </a:p>
         </p:txBody>
@@ -45744,42 +45940,6 @@
       <p:sp>
         <p:nvSpPr>
           <p:cNvPr id="24" name="TextBox 23"/>
-          <p:cNvSpPr txBox="1"/>
-          <p:nvPr/>
-        </p:nvSpPr>
-        <p:spPr>
-          <a:xfrm>
-            <a:off x="9857232" y="6373368"/>
-            <a:ext cx="329184" cy="365760"/>
-          </a:xfrm>
-          <a:prstGeom prst="rect">
-            <a:avLst/>
-          </a:prstGeom>
-          <a:noFill/>
-        </p:spPr>
-        <p:txBody>
-          <a:bodyPr wrap="square" anchor="t" lIns="45720" rIns="45720" tIns="18288" bIns="18288">
-            <a:spAutoFit/>
-          </a:bodyPr>
-          <a:lstStyle/>
-          <a:p>
-            <a:pPr algn="ctr"/>
-            <a:r>
-              <a:rPr sz="1500" b="1" i="0">
-                <a:solidFill>
-                  <a:srgbClr val="003366"/>
-                </a:solidFill>
-                <a:latin typeface="Liberation Sans"/>
-                <a:hlinkClick r:id="rId5" action="ppaction://hlinksldjump"/>
-              </a:rPr>
-              <a:t>‹</a:t>
-            </a:r>
-          </a:p>
-        </p:txBody>
-      </p:sp>
-      <p:sp>
-        <p:nvSpPr>
-          <p:cNvPr id="25" name="TextBox 24"/>
           <p:cNvSpPr txBox="1"/>
           <p:nvPr/>
         </p:nvSpPr>
@@ -45972,7 +46132,7 @@
                 </a:solidFill>
                 <a:latin typeface="Liberation Sans"/>
               </a:rPr>
-              <a:t>Canali di aggiornamento</a:t>
+              <a:t>Comunicazione di crisi e social</a:t>
             </a:r>
           </a:p>
         </p:txBody>
@@ -46178,7 +46338,7 @@
         </p:nvSpPr>
         <p:spPr>
           <a:xfrm>
-            <a:off x="777240" y="2354580"/>
+            <a:off x="777240" y="2148839"/>
             <a:ext cx="3413759" cy="3383280"/>
           </a:xfrm>
           <a:prstGeom prst="roundRect">
@@ -46230,7 +46390,7 @@
         </p:nvSpPr>
         <p:spPr>
           <a:xfrm>
-            <a:off x="960120" y="3451860"/>
+            <a:off x="960120" y="3246120"/>
             <a:ext cx="3047999" cy="2103120"/>
           </a:xfrm>
           <a:prstGeom prst="rect">
@@ -46256,7 +46416,7 @@
                 </a:solidFill>
                 <a:latin typeface="Liberation Sans"/>
               </a:rPr>
-              <a:t>Feed RSS per ogni sezione.</a:t>
+              <a:t>Social media policy pubblica.</a:t>
             </a:r>
           </a:p>
         </p:txBody>
@@ -46269,7 +46429,7 @@
         </p:nvSpPr>
         <p:spPr>
           <a:xfrm>
-            <a:off x="2182367" y="2619756"/>
+            <a:off x="2182367" y="2414015"/>
             <a:ext cx="603504" cy="603504"/>
           </a:xfrm>
           <a:prstGeom prst="ellipse">
@@ -46307,7 +46467,7 @@
       </p:sp>
       <p:pic>
         <p:nvPicPr>
-          <p:cNvPr id="14" name="Picture 13" descr="rss-fill_ffffff.png"/>
+          <p:cNvPr id="14" name="Picture 13" descr="broadcast_ffffff.png"/>
           <p:cNvPicPr>
             <a:picLocks noChangeAspect="1"/>
           </p:cNvPicPr>
@@ -46321,7 +46481,7 @@
         </p:blipFill>
         <p:spPr>
           <a:xfrm>
-            <a:off x="2315138" y="2752526"/>
+            <a:off x="2315138" y="2546786"/>
             <a:ext cx="337962" cy="337962"/>
           </a:xfrm>
           <a:prstGeom prst="rect">
@@ -46337,7 +46497,7 @@
         </p:nvSpPr>
         <p:spPr>
           <a:xfrm>
-            <a:off x="4373880" y="2354580"/>
+            <a:off x="4373880" y="2148839"/>
             <a:ext cx="3413759" cy="3383280"/>
           </a:xfrm>
           <a:prstGeom prst="roundRect">
@@ -46389,7 +46549,7 @@
         </p:nvSpPr>
         <p:spPr>
           <a:xfrm>
-            <a:off x="4556760" y="3451860"/>
+            <a:off x="4556760" y="3246120"/>
             <a:ext cx="3047999" cy="2103120"/>
           </a:xfrm>
           <a:prstGeom prst="rect">
@@ -46415,7 +46575,7 @@
                 </a:solidFill>
                 <a:latin typeface="Liberation Sans"/>
               </a:rPr>
-              <a:t>Codici QR sugli articoli per l'accesso rapido.</a:t>
+              <a:t>Struttura dei messaggi secondo standard internazionali.</a:t>
             </a:r>
           </a:p>
         </p:txBody>
@@ -46428,7 +46588,7 @@
         </p:nvSpPr>
         <p:spPr>
           <a:xfrm>
-            <a:off x="5779007" y="2619756"/>
+            <a:off x="5779007" y="2414015"/>
             <a:ext cx="603504" cy="603504"/>
           </a:xfrm>
           <a:prstGeom prst="ellipse">
@@ -46466,7 +46626,7 @@
       </p:sp>
       <p:pic>
         <p:nvPicPr>
-          <p:cNvPr id="18" name="Picture 17" descr="rss-fill_ffffff.png"/>
+          <p:cNvPr id="18" name="Picture 17" descr="broadcast_ffffff.png"/>
           <p:cNvPicPr>
             <a:picLocks noChangeAspect="1"/>
           </p:cNvPicPr>
@@ -46480,7 +46640,7 @@
         </p:blipFill>
         <p:spPr>
           <a:xfrm>
-            <a:off x="5911778" y="2752526"/>
+            <a:off x="5911778" y="2546786"/>
             <a:ext cx="337962" cy="337962"/>
           </a:xfrm>
           <a:prstGeom prst="rect">
@@ -46496,7 +46656,7 @@
         </p:nvSpPr>
         <p:spPr>
           <a:xfrm>
-            <a:off x="7970520" y="2354580"/>
+            <a:off x="7970520" y="2148839"/>
             <a:ext cx="3413759" cy="3383280"/>
           </a:xfrm>
           <a:prstGeom prst="roundRect">
@@ -46548,7 +46708,7 @@
         </p:nvSpPr>
         <p:spPr>
           <a:xfrm>
-            <a:off x="8153399" y="3451860"/>
+            <a:off x="8153399" y="3246120"/>
             <a:ext cx="3047999" cy="2103120"/>
           </a:xfrm>
           <a:prstGeom prst="rect">
@@ -46574,7 +46734,7 @@
                 </a:solidFill>
                 <a:latin typeface="Liberation Sans"/>
               </a:rPr>
-              <a:t>Condivisione semplice e senza tracciamento.</a:t>
+              <a:t>Contrasto alla disinformazione con fonti ufficiali.</a:t>
             </a:r>
           </a:p>
         </p:txBody>
@@ -46587,7 +46747,7 @@
         </p:nvSpPr>
         <p:spPr>
           <a:xfrm>
-            <a:off x="9375648" y="2619756"/>
+            <a:off x="9375648" y="2414015"/>
             <a:ext cx="603504" cy="603504"/>
           </a:xfrm>
           <a:prstGeom prst="ellipse">
@@ -46625,7 +46785,7 @@
       </p:sp>
       <p:pic>
         <p:nvPicPr>
-          <p:cNvPr id="22" name="Picture 21" descr="rss-fill_ffffff.png"/>
+          <p:cNvPr id="22" name="Picture 21" descr="broadcast_ffffff.png"/>
           <p:cNvPicPr>
             <a:picLocks noChangeAspect="1"/>
           </p:cNvPicPr>
@@ -46639,7 +46799,7 @@
         </p:blipFill>
         <p:spPr>
           <a:xfrm>
-            <a:off x="9508418" y="2752526"/>
+            <a:off x="9508418" y="2546786"/>
             <a:ext cx="337962" cy="337962"/>
           </a:xfrm>
           <a:prstGeom prst="rect">
@@ -46655,8 +46815,8 @@
         </p:nvSpPr>
         <p:spPr>
           <a:xfrm>
-            <a:off x="9857232" y="6373368"/>
-            <a:ext cx="329184" cy="365760"/>
+            <a:off x="777240" y="5806440"/>
+            <a:ext cx="10607040" cy="411480"/>
           </a:xfrm>
           <a:prstGeom prst="rect">
             <a:avLst/>
@@ -46669,6 +46829,49 @@
           </a:bodyPr>
           <a:lstStyle/>
           <a:p>
+            <a:r>
+              <a:rPr sz="1200" b="1" i="0">
+                <a:solidFill>
+                  <a:srgbClr val="003366"/>
+                </a:solidFill>
+                <a:latin typeface="Liberation Sans"/>
+              </a:rPr>
+              <a:t>Fonti e standard: </a:t>
+            </a:r>
+            <a:r>
+              <a:rPr sz="1200" b="0" i="1">
+                <a:solidFill>
+                  <a:srgbClr val="5A6B7B"/>
+                </a:solidFill>
+                <a:latin typeface="Liberation Sans"/>
+              </a:rPr>
+              <a:t>ISO 22329 · CWA CEN/CENELEC · EENA (112)</a:t>
+            </a:r>
+          </a:p>
+        </p:txBody>
+      </p:sp>
+      <p:sp>
+        <p:nvSpPr>
+          <p:cNvPr id="24" name="TextBox 23"/>
+          <p:cNvSpPr txBox="1"/>
+          <p:nvPr/>
+        </p:nvSpPr>
+        <p:spPr>
+          <a:xfrm>
+            <a:off x="9857232" y="6373368"/>
+            <a:ext cx="329184" cy="365760"/>
+          </a:xfrm>
+          <a:prstGeom prst="rect">
+            <a:avLst/>
+          </a:prstGeom>
+          <a:noFill/>
+        </p:spPr>
+        <p:txBody>
+          <a:bodyPr wrap="square" anchor="t" lIns="45720" rIns="45720" tIns="18288" bIns="18288">
+            <a:spAutoFit/>
+          </a:bodyPr>
+          <a:lstStyle/>
+          <a:p>
             <a:pPr algn="ctr"/>
             <a:r>
               <a:rPr sz="1500" b="1" i="0">
@@ -46685,7 +46888,7 @@
       </p:sp>
       <p:sp>
         <p:nvSpPr>
-          <p:cNvPr id="24" name="TextBox 23"/>
+          <p:cNvPr id="25" name="TextBox 24"/>
           <p:cNvSpPr txBox="1"/>
           <p:nvPr/>
         </p:nvSpPr>
@@ -46752,7 +46955,7 @@
             <a:avLst/>
           </a:prstGeom>
           <a:solidFill>
-            <a:srgbClr val="001A33"/>
+            <a:srgbClr val="FFFFFF"/>
           </a:solidFill>
           <a:ln>
             <a:noFill/>
@@ -46781,9 +46984,53 @@
           </a:p>
         </p:txBody>
       </p:sp>
+      <p:sp>
+        <p:nvSpPr>
+          <p:cNvPr id="3" name="Rectangle 2"/>
+          <p:cNvSpPr/>
+          <p:nvPr/>
+        </p:nvSpPr>
+        <p:spPr>
+          <a:xfrm>
+            <a:off x="0" y="0"/>
+            <a:ext cx="201168" cy="6858000"/>
+          </a:xfrm>
+          <a:prstGeom prst="rect">
+            <a:avLst/>
+          </a:prstGeom>
+          <a:solidFill>
+            <a:srgbClr val="003366"/>
+          </a:solidFill>
+          <a:ln>
+            <a:noFill/>
+          </a:ln>
+          <a:effectLst/>
+        </p:spPr>
+        <p:style>
+          <a:lnRef idx="1">
+            <a:schemeClr val="accent1"/>
+          </a:lnRef>
+          <a:fillRef idx="3">
+            <a:schemeClr val="accent1"/>
+          </a:fillRef>
+          <a:effectRef idx="2">
+            <a:schemeClr val="accent1"/>
+          </a:effectRef>
+          <a:fontRef idx="minor">
+            <a:schemeClr val="lt1"/>
+          </a:fontRef>
+        </p:style>
+        <p:txBody>
+          <a:bodyPr rtlCol="0" anchor="ctr"/>
+          <a:lstStyle/>
+          <a:p>
+            <a:pPr algn="ctr"/>
+          </a:p>
+        </p:txBody>
+      </p:sp>
       <p:pic>
         <p:nvPicPr>
-          <p:cNvPr id="3" name="Picture 2" descr="logo-pc-genzano.png"/>
+          <p:cNvPr id="4" name="Picture 3" descr="logo-pc-genzano.png"/>
           <p:cNvPicPr>
             <a:picLocks noChangeAspect="1"/>
           </p:cNvPicPr>
@@ -46797,58 +47044,14 @@
         </p:blipFill>
         <p:spPr>
           <a:xfrm>
-            <a:off x="10865815" y="502920"/>
-            <a:ext cx="868680" cy="868680"/>
+            <a:off x="11076127" y="411480"/>
+            <a:ext cx="658368" cy="658368"/>
           </a:xfrm>
           <a:prstGeom prst="rect">
             <a:avLst/>
           </a:prstGeom>
         </p:spPr>
       </p:pic>
-      <p:sp>
-        <p:nvSpPr>
-          <p:cNvPr id="4" name="Rectangle 3"/>
-          <p:cNvSpPr/>
-          <p:nvPr/>
-        </p:nvSpPr>
-        <p:spPr>
-          <a:xfrm>
-            <a:off x="914400" y="2743200"/>
-            <a:ext cx="2194560" cy="50800"/>
-          </a:xfrm>
-          <a:prstGeom prst="rect">
-            <a:avLst/>
-          </a:prstGeom>
-          <a:solidFill>
-            <a:srgbClr val="FFBE2E"/>
-          </a:solidFill>
-          <a:ln>
-            <a:noFill/>
-          </a:ln>
-          <a:effectLst/>
-        </p:spPr>
-        <p:style>
-          <a:lnRef idx="1">
-            <a:schemeClr val="accent1"/>
-          </a:lnRef>
-          <a:fillRef idx="3">
-            <a:schemeClr val="accent1"/>
-          </a:fillRef>
-          <a:effectRef idx="2">
-            <a:schemeClr val="accent1"/>
-          </a:effectRef>
-          <a:fontRef idx="minor">
-            <a:schemeClr val="lt1"/>
-          </a:fontRef>
-        </p:style>
-        <p:txBody>
-          <a:bodyPr rtlCol="0" anchor="ctr"/>
-          <a:lstStyle/>
-          <a:p>
-            <a:pPr algn="ctr"/>
-          </a:p>
-        </p:txBody>
-      </p:sp>
       <p:sp>
         <p:nvSpPr>
           <p:cNvPr id="5" name="TextBox 4"/>
@@ -46857,8 +47060,8 @@
         </p:nvSpPr>
         <p:spPr>
           <a:xfrm>
-            <a:off x="914400" y="2971800"/>
-            <a:ext cx="5029200" cy="2468880"/>
+            <a:off x="640080" y="502920"/>
+            <a:ext cx="9692640" cy="1005840"/>
           </a:xfrm>
           <a:prstGeom prst="rect">
             <a:avLst/>
@@ -46872,27 +47075,115 @@
           <a:lstStyle/>
           <a:p>
             <a:r>
-              <a:rPr sz="3200" b="1" i="0">
-                <a:solidFill>
-                  <a:srgbClr val="FFFFFF"/>
-                </a:solidFill>
-                <a:latin typeface="Liberation Sans"/>
-              </a:rPr>
-              <a:t>Infrastruttura, fonti e sicurezza</a:t>
-            </a:r>
-          </a:p>
-        </p:txBody>
-      </p:sp>
-      <p:sp>
-        <p:nvSpPr>
-          <p:cNvPr id="6" name="TextBox 5"/>
+              <a:rPr sz="2800" b="1" i="0">
+                <a:solidFill>
+                  <a:srgbClr val="003366"/>
+                </a:solidFill>
+                <a:latin typeface="Liberation Sans"/>
+              </a:rPr>
+              <a:t>Canali di aggiornamento</a:t>
+            </a:r>
+          </a:p>
+        </p:txBody>
+      </p:sp>
+      <p:sp>
+        <p:nvSpPr>
+          <p:cNvPr id="6" name="Rectangle 5"/>
+          <p:cNvSpPr/>
+          <p:nvPr/>
+        </p:nvSpPr>
+        <p:spPr>
+          <a:xfrm>
+            <a:off x="685800" y="1417320"/>
+            <a:ext cx="2011680" cy="38100"/>
+          </a:xfrm>
+          <a:prstGeom prst="rect">
+            <a:avLst/>
+          </a:prstGeom>
+          <a:solidFill>
+            <a:srgbClr val="FFBE2E"/>
+          </a:solidFill>
+          <a:ln>
+            <a:noFill/>
+          </a:ln>
+          <a:effectLst/>
+        </p:spPr>
+        <p:style>
+          <a:lnRef idx="1">
+            <a:schemeClr val="accent1"/>
+          </a:lnRef>
+          <a:fillRef idx="3">
+            <a:schemeClr val="accent1"/>
+          </a:fillRef>
+          <a:effectRef idx="2">
+            <a:schemeClr val="accent1"/>
+          </a:effectRef>
+          <a:fontRef idx="minor">
+            <a:schemeClr val="lt1"/>
+          </a:fontRef>
+        </p:style>
+        <p:txBody>
+          <a:bodyPr rtlCol="0" anchor="ctr"/>
+          <a:lstStyle/>
+          <a:p>
+            <a:pPr algn="ctr"/>
+          </a:p>
+        </p:txBody>
+      </p:sp>
+      <p:sp>
+        <p:nvSpPr>
+          <p:cNvPr id="7" name="Rectangle 6"/>
+          <p:cNvSpPr/>
+          <p:nvPr/>
+        </p:nvSpPr>
+        <p:spPr>
+          <a:xfrm>
+            <a:off x="548640" y="6419088"/>
+            <a:ext cx="11091672" cy="15240"/>
+          </a:xfrm>
+          <a:prstGeom prst="rect">
+            <a:avLst/>
+          </a:prstGeom>
+          <a:solidFill>
+            <a:srgbClr val="D8DEE4"/>
+          </a:solidFill>
+          <a:ln>
+            <a:noFill/>
+          </a:ln>
+          <a:effectLst/>
+        </p:spPr>
+        <p:style>
+          <a:lnRef idx="1">
+            <a:schemeClr val="accent1"/>
+          </a:lnRef>
+          <a:fillRef idx="3">
+            <a:schemeClr val="accent1"/>
+          </a:fillRef>
+          <a:effectRef idx="2">
+            <a:schemeClr val="accent1"/>
+          </a:effectRef>
+          <a:fontRef idx="minor">
+            <a:schemeClr val="lt1"/>
+          </a:fontRef>
+        </p:style>
+        <p:txBody>
+          <a:bodyPr rtlCol="0" anchor="ctr"/>
+          <a:lstStyle/>
+          <a:p>
+            <a:pPr algn="ctr"/>
+          </a:p>
+        </p:txBody>
+      </p:sp>
+      <p:sp>
+        <p:nvSpPr>
+          <p:cNvPr id="8" name="TextBox 7"/>
           <p:cNvSpPr txBox="1"/>
           <p:nvPr/>
         </p:nvSpPr>
         <p:spPr>
           <a:xfrm>
-            <a:off x="914400" y="2194560"/>
-            <a:ext cx="5029200" cy="457200"/>
+            <a:off x="548640" y="6455664"/>
+            <a:ext cx="4114800" cy="320040"/>
           </a:xfrm>
           <a:prstGeom prst="rect">
             <a:avLst/>
@@ -46906,71 +47197,27 @@
           <a:lstStyle/>
           <a:p>
             <a:r>
-              <a:rPr sz="1300" b="1" i="0">
-                <a:solidFill>
-                  <a:srgbClr val="FFBE2E"/>
-                </a:solidFill>
-                <a:latin typeface="Liberation Sans"/>
-              </a:rPr>
-              <a:t>SEZIONE</a:t>
-            </a:r>
-          </a:p>
-        </p:txBody>
-      </p:sp>
-      <p:sp>
-        <p:nvSpPr>
-          <p:cNvPr id="7" name="Rectangle 6"/>
-          <p:cNvSpPr/>
-          <p:nvPr/>
-        </p:nvSpPr>
-        <p:spPr>
-          <a:xfrm>
-            <a:off x="548640" y="6419088"/>
-            <a:ext cx="11091672" cy="15240"/>
-          </a:xfrm>
-          <a:prstGeom prst="rect">
-            <a:avLst/>
-          </a:prstGeom>
-          <a:solidFill>
-            <a:srgbClr val="334E66"/>
-          </a:solidFill>
-          <a:ln>
-            <a:noFill/>
-          </a:ln>
-          <a:effectLst/>
-        </p:spPr>
-        <p:style>
-          <a:lnRef idx="1">
-            <a:schemeClr val="accent1"/>
-          </a:lnRef>
-          <a:fillRef idx="3">
-            <a:schemeClr val="accent1"/>
-          </a:fillRef>
-          <a:effectRef idx="2">
-            <a:schemeClr val="accent1"/>
-          </a:effectRef>
-          <a:fontRef idx="minor">
-            <a:schemeClr val="lt1"/>
-          </a:fontRef>
-        </p:style>
-        <p:txBody>
-          <a:bodyPr rtlCol="0" anchor="ctr"/>
-          <a:lstStyle/>
-          <a:p>
-            <a:pPr algn="ctr"/>
-          </a:p>
-        </p:txBody>
-      </p:sp>
-      <p:sp>
-        <p:nvSpPr>
-          <p:cNvPr id="8" name="TextBox 7"/>
+              <a:rPr sz="900" b="0" i="0">
+                <a:solidFill>
+                  <a:srgbClr val="5A6B7B"/>
+                </a:solidFill>
+                <a:latin typeface="Liberation Sans"/>
+              </a:rPr>
+              <a:t>Gruppo Comunale Volontari di PC · Genzano di Roma</a:t>
+            </a:r>
+          </a:p>
+        </p:txBody>
+      </p:sp>
+      <p:sp>
+        <p:nvSpPr>
+          <p:cNvPr id="9" name="TextBox 8"/>
           <p:cNvSpPr txBox="1"/>
           <p:nvPr/>
         </p:nvSpPr>
         <p:spPr>
           <a:xfrm>
-            <a:off x="548640" y="6455664"/>
-            <a:ext cx="4114800" cy="320040"/>
+            <a:off x="10698480" y="6455664"/>
+            <a:ext cx="914400" cy="320040"/>
           </a:xfrm>
           <a:prstGeom prst="rect">
             <a:avLst/>
@@ -46983,28 +47230,29 @@
           </a:bodyPr>
           <a:lstStyle/>
           <a:p>
-            <a:r>
-              <a:rPr sz="900" b="0" i="0">
-                <a:solidFill>
-                  <a:srgbClr val="9DB0C2"/>
-                </a:solidFill>
-                <a:latin typeface="Liberation Sans"/>
-              </a:rPr>
-              <a:t>Gruppo Comunale Volontari di PC · Genzano di Roma</a:t>
-            </a:r>
-          </a:p>
-        </p:txBody>
-      </p:sp>
-      <p:sp>
-        <p:nvSpPr>
-          <p:cNvPr id="9" name="TextBox 8"/>
+            <a:pPr algn="r"/>
+            <a:r>
+              <a:rPr sz="900" b="1" i="0">
+                <a:solidFill>
+                  <a:srgbClr val="5A6B7B"/>
+                </a:solidFill>
+                <a:latin typeface="Liberation Sans"/>
+              </a:rPr>
+              <a:t>52</a:t>
+            </a:r>
+          </a:p>
+        </p:txBody>
+      </p:sp>
+      <p:sp>
+        <p:nvSpPr>
+          <p:cNvPr id="10" name="TextBox 9"/>
           <p:cNvSpPr txBox="1"/>
           <p:nvPr/>
         </p:nvSpPr>
         <p:spPr>
           <a:xfrm>
-            <a:off x="10698480" y="6455664"/>
-            <a:ext cx="914400" cy="320040"/>
+            <a:off x="4727448" y="6428232"/>
+            <a:ext cx="2743200" cy="329184"/>
           </a:xfrm>
           <a:prstGeom prst="rect">
             <a:avLst/>
@@ -47017,29 +47265,82 @@
           </a:bodyPr>
           <a:lstStyle/>
           <a:p>
-            <a:pPr algn="r"/>
-            <a:r>
-              <a:rPr sz="900" b="1" i="0">
-                <a:solidFill>
-                  <a:srgbClr val="9DB0C2"/>
-                </a:solidFill>
-                <a:latin typeface="Liberation Sans"/>
-              </a:rPr>
-              <a:t>52</a:t>
-            </a:r>
-          </a:p>
-        </p:txBody>
-      </p:sp>
-      <p:sp>
-        <p:nvSpPr>
-          <p:cNvPr id="10" name="TextBox 9"/>
+            <a:pPr algn="ctr"/>
+            <a:r>
+              <a:rPr sz="950" b="1" i="0">
+                <a:solidFill>
+                  <a:srgbClr val="003366"/>
+                </a:solidFill>
+                <a:latin typeface="Liberation Sans"/>
+                <a:hlinkClick r:id="rId3" action="ppaction://hlinksldjump"/>
+              </a:rPr>
+              <a:t>« Torna all'agenda</a:t>
+            </a:r>
+          </a:p>
+        </p:txBody>
+      </p:sp>
+      <p:sp>
+        <p:nvSpPr>
+          <p:cNvPr id="11" name="Rounded Rectangle 10"/>
+          <p:cNvSpPr/>
+          <p:nvPr/>
+        </p:nvSpPr>
+        <p:spPr>
+          <a:xfrm>
+            <a:off x="777240" y="2354580"/>
+            <a:ext cx="3413759" cy="3383280"/>
+          </a:xfrm>
+          <a:prstGeom prst="roundRect">
+            <a:avLst/>
+          </a:prstGeom>
+          <a:solidFill>
+            <a:srgbClr val="F4F7FB"/>
+          </a:solidFill>
+          <a:ln w="12700">
+            <a:solidFill>
+              <a:srgbClr val="D8DEE4"/>
+            </a:solidFill>
+          </a:ln>
+          <a:effectLst>
+            <a:outerShdw blurRad="50800" dist="25400" dir="5400000" rotWithShape="0">
+              <a:srgbClr val="001A33">
+                <a:alpha val="42000"/>
+              </a:srgbClr>
+            </a:outerShdw>
+          </a:effectLst>
+        </p:spPr>
+        <p:style>
+          <a:lnRef idx="1">
+            <a:schemeClr val="accent1"/>
+          </a:lnRef>
+          <a:fillRef idx="3">
+            <a:schemeClr val="accent1"/>
+          </a:fillRef>
+          <a:effectRef idx="2">
+            <a:schemeClr val="accent1"/>
+          </a:effectRef>
+          <a:fontRef idx="minor">
+            <a:schemeClr val="lt1"/>
+          </a:fontRef>
+        </p:style>
+        <p:txBody>
+          <a:bodyPr rtlCol="0" anchor="ctr" wrap="square" lIns="109728" rIns="109728" tIns="36576" bIns="36576"/>
+          <a:lstStyle/>
+          <a:p>
+            <a:pPr algn="ctr"/>
+          </a:p>
+        </p:txBody>
+      </p:sp>
+      <p:sp>
+        <p:nvSpPr>
+          <p:cNvPr id="12" name="TextBox 11"/>
           <p:cNvSpPr txBox="1"/>
           <p:nvPr/>
         </p:nvSpPr>
         <p:spPr>
           <a:xfrm>
-            <a:off x="4727448" y="6428232"/>
-            <a:ext cx="2743200" cy="329184"/>
+            <a:off x="960120" y="3451860"/>
+            <a:ext cx="3047999" cy="2103120"/>
           </a:xfrm>
           <a:prstGeom prst="rect">
             <a:avLst/>
@@ -47052,432 +47353,39 @@
           </a:bodyPr>
           <a:lstStyle/>
           <a:p>
-            <a:pPr algn="ctr"/>
-            <a:r>
-              <a:rPr sz="950" b="1" i="0">
-                <a:solidFill>
-                  <a:srgbClr val="FFBE2E"/>
-                </a:solidFill>
-                <a:latin typeface="Liberation Sans"/>
-                <a:hlinkClick r:id="rId3" action="ppaction://hlinksldjump"/>
-              </a:rPr>
-              <a:t>« Torna all'agenda</a:t>
-            </a:r>
-          </a:p>
-        </p:txBody>
-      </p:sp>
-      <p:sp>
-        <p:nvSpPr>
-          <p:cNvPr id="11" name="Rounded Rectangle 10">
-            <a:hlinkClick action="ppaction://hlinksldjump" r:id="rId4"/>
-          </p:cNvPr>
-          <p:cNvSpPr/>
-          <p:nvPr/>
-        </p:nvSpPr>
-        <p:spPr>
-          <a:xfrm>
-            <a:off x="6446520" y="1481328"/>
-            <a:ext cx="4983480" cy="457200"/>
-          </a:xfrm>
-          <a:prstGeom prst="roundRect">
+            <a:pPr algn="ctr">
+              <a:lnSpc>
+                <a:spcPct val="112000"/>
+              </a:lnSpc>
+            </a:pPr>
+            <a:r>
+              <a:rPr sz="1400" b="0" i="0">
+                <a:solidFill>
+                  <a:srgbClr val="1A1A1A"/>
+                </a:solidFill>
+                <a:latin typeface="Liberation Sans"/>
+              </a:rPr>
+              <a:t>Feed RSS per ogni sezione.</a:t>
+            </a:r>
+          </a:p>
+        </p:txBody>
+      </p:sp>
+      <p:sp>
+        <p:nvSpPr>
+          <p:cNvPr id="13" name="Oval 12"/>
+          <p:cNvSpPr/>
+          <p:nvPr/>
+        </p:nvSpPr>
+        <p:spPr>
+          <a:xfrm>
+            <a:off x="2182367" y="2619756"/>
+            <a:ext cx="603504" cy="603504"/>
+          </a:xfrm>
+          <a:prstGeom prst="ellipse">
             <a:avLst/>
           </a:prstGeom>
           <a:solidFill>
             <a:srgbClr val="003366"/>
-          </a:solidFill>
-          <a:ln w="9525">
-            <a:solidFill>
-              <a:srgbClr val="4A6A8A"/>
-            </a:solidFill>
-          </a:ln>
-          <a:effectLst/>
-        </p:spPr>
-        <p:style>
-          <a:lnRef idx="1">
-            <a:schemeClr val="accent1"/>
-          </a:lnRef>
-          <a:fillRef idx="3">
-            <a:schemeClr val="accent1"/>
-          </a:fillRef>
-          <a:effectRef idx="2">
-            <a:schemeClr val="accent1"/>
-          </a:effectRef>
-          <a:fontRef idx="minor">
-            <a:schemeClr val="lt1"/>
-          </a:fontRef>
-        </p:style>
-        <p:txBody>
-          <a:bodyPr rtlCol="0" anchor="ctr" wrap="square" lIns="146304" tIns="9144" bIns="9144"/>
-          <a:lstStyle/>
-          <a:p>
-            <a:pPr algn="l"/>
-            <a:r>
-              <a:rPr sz="1100" b="1" i="0">
-                <a:solidFill>
-                  <a:srgbClr val="FFBE2E"/>
-                </a:solidFill>
-                <a:latin typeface="Liberation Sans"/>
-              </a:rPr>
-              <a:t>01  </a:t>
-            </a:r>
-            <a:r>
-              <a:rPr sz="1100" b="0" i="0">
-                <a:solidFill>
-                  <a:srgbClr val="FFFFFF"/>
-                </a:solidFill>
-                <a:latin typeface="Liberation Sans"/>
-              </a:rPr>
-              <a:t>Per il Cittadino</a:t>
-            </a:r>
-          </a:p>
-        </p:txBody>
-      </p:sp>
-      <p:sp>
-        <p:nvSpPr>
-          <p:cNvPr id="12" name="Rounded Rectangle 11">
-            <a:hlinkClick action="ppaction://hlinksldjump" r:id="rId5"/>
-          </p:cNvPr>
-          <p:cNvSpPr/>
-          <p:nvPr/>
-        </p:nvSpPr>
-        <p:spPr>
-          <a:xfrm>
-            <a:off x="6446520" y="2029968"/>
-            <a:ext cx="4983480" cy="457200"/>
-          </a:xfrm>
-          <a:prstGeom prst="roundRect">
-            <a:avLst/>
-          </a:prstGeom>
-          <a:solidFill>
-            <a:srgbClr val="003366"/>
-          </a:solidFill>
-          <a:ln w="9525">
-            <a:solidFill>
-              <a:srgbClr val="4A6A8A"/>
-            </a:solidFill>
-          </a:ln>
-          <a:effectLst/>
-        </p:spPr>
-        <p:style>
-          <a:lnRef idx="1">
-            <a:schemeClr val="accent1"/>
-          </a:lnRef>
-          <a:fillRef idx="3">
-            <a:schemeClr val="accent1"/>
-          </a:fillRef>
-          <a:effectRef idx="2">
-            <a:schemeClr val="accent1"/>
-          </a:effectRef>
-          <a:fontRef idx="minor">
-            <a:schemeClr val="lt1"/>
-          </a:fontRef>
-        </p:style>
-        <p:txBody>
-          <a:bodyPr rtlCol="0" anchor="ctr" wrap="square" lIns="146304" tIns="9144" bIns="9144"/>
-          <a:lstStyle/>
-          <a:p>
-            <a:pPr algn="l"/>
-            <a:r>
-              <a:rPr sz="1100" b="1" i="0">
-                <a:solidFill>
-                  <a:srgbClr val="FFBE2E"/>
-                </a:solidFill>
-                <a:latin typeface="Liberation Sans"/>
-              </a:rPr>
-              <a:t>02  </a:t>
-            </a:r>
-            <a:r>
-              <a:rPr sz="1100" b="0" i="0">
-                <a:solidFill>
-                  <a:srgbClr val="FFFFFF"/>
-                </a:solidFill>
-                <a:latin typeface="Liberation Sans"/>
-              </a:rPr>
-              <a:t>Per le Scuole</a:t>
-            </a:r>
-          </a:p>
-        </p:txBody>
-      </p:sp>
-      <p:sp>
-        <p:nvSpPr>
-          <p:cNvPr id="13" name="Rounded Rectangle 12">
-            <a:hlinkClick action="ppaction://hlinksldjump" r:id="rId6"/>
-          </p:cNvPr>
-          <p:cNvSpPr/>
-          <p:nvPr/>
-        </p:nvSpPr>
-        <p:spPr>
-          <a:xfrm>
-            <a:off x="6446520" y="2578608"/>
-            <a:ext cx="4983480" cy="457200"/>
-          </a:xfrm>
-          <a:prstGeom prst="roundRect">
-            <a:avLst/>
-          </a:prstGeom>
-          <a:solidFill>
-            <a:srgbClr val="003366"/>
-          </a:solidFill>
-          <a:ln w="9525">
-            <a:solidFill>
-              <a:srgbClr val="4A6A8A"/>
-            </a:solidFill>
-          </a:ln>
-          <a:effectLst/>
-        </p:spPr>
-        <p:style>
-          <a:lnRef idx="1">
-            <a:schemeClr val="accent1"/>
-          </a:lnRef>
-          <a:fillRef idx="3">
-            <a:schemeClr val="accent1"/>
-          </a:fillRef>
-          <a:effectRef idx="2">
-            <a:schemeClr val="accent1"/>
-          </a:effectRef>
-          <a:fontRef idx="minor">
-            <a:schemeClr val="lt1"/>
-          </a:fontRef>
-        </p:style>
-        <p:txBody>
-          <a:bodyPr rtlCol="0" anchor="ctr" wrap="square" lIns="146304" tIns="9144" bIns="9144"/>
-          <a:lstStyle/>
-          <a:p>
-            <a:pPr algn="l"/>
-            <a:r>
-              <a:rPr sz="1100" b="1" i="0">
-                <a:solidFill>
-                  <a:srgbClr val="FFBE2E"/>
-                </a:solidFill>
-                <a:latin typeface="Liberation Sans"/>
-              </a:rPr>
-              <a:t>03  </a:t>
-            </a:r>
-            <a:r>
-              <a:rPr sz="1100" b="0" i="0">
-                <a:solidFill>
-                  <a:srgbClr val="FFFFFF"/>
-                </a:solidFill>
-                <a:latin typeface="Liberation Sans"/>
-              </a:rPr>
-              <a:t>Accessibilità e inclusione</a:t>
-            </a:r>
-          </a:p>
-        </p:txBody>
-      </p:sp>
-      <p:sp>
-        <p:nvSpPr>
-          <p:cNvPr id="14" name="Rounded Rectangle 13">
-            <a:hlinkClick action="ppaction://hlinksldjump" r:id="rId7"/>
-          </p:cNvPr>
-          <p:cNvSpPr/>
-          <p:nvPr/>
-        </p:nvSpPr>
-        <p:spPr>
-          <a:xfrm>
-            <a:off x="6446520" y="3127248"/>
-            <a:ext cx="4983480" cy="457200"/>
-          </a:xfrm>
-          <a:prstGeom prst="roundRect">
-            <a:avLst/>
-          </a:prstGeom>
-          <a:solidFill>
-            <a:srgbClr val="003366"/>
-          </a:solidFill>
-          <a:ln w="9525">
-            <a:solidFill>
-              <a:srgbClr val="4A6A8A"/>
-            </a:solidFill>
-          </a:ln>
-          <a:effectLst/>
-        </p:spPr>
-        <p:style>
-          <a:lnRef idx="1">
-            <a:schemeClr val="accent1"/>
-          </a:lnRef>
-          <a:fillRef idx="3">
-            <a:schemeClr val="accent1"/>
-          </a:fillRef>
-          <a:effectRef idx="2">
-            <a:schemeClr val="accent1"/>
-          </a:effectRef>
-          <a:fontRef idx="minor">
-            <a:schemeClr val="lt1"/>
-          </a:fontRef>
-        </p:style>
-        <p:txBody>
-          <a:bodyPr rtlCol="0" anchor="ctr" wrap="square" lIns="146304" tIns="9144" bIns="9144"/>
-          <a:lstStyle/>
-          <a:p>
-            <a:pPr algn="l"/>
-            <a:r>
-              <a:rPr sz="1100" b="1" i="0">
-                <a:solidFill>
-                  <a:srgbClr val="FFBE2E"/>
-                </a:solidFill>
-                <a:latin typeface="Liberation Sans"/>
-              </a:rPr>
-              <a:t>04  </a:t>
-            </a:r>
-            <a:r>
-              <a:rPr sz="1100" b="0" i="0">
-                <a:solidFill>
-                  <a:srgbClr val="FFFFFF"/>
-                </a:solidFill>
-                <a:latin typeface="Liberation Sans"/>
-              </a:rPr>
-              <a:t>Volontariato</a:t>
-            </a:r>
-          </a:p>
-        </p:txBody>
-      </p:sp>
-      <p:sp>
-        <p:nvSpPr>
-          <p:cNvPr id="15" name="Rounded Rectangle 14">
-            <a:hlinkClick action="ppaction://hlinksldjump" r:id="rId8"/>
-          </p:cNvPr>
-          <p:cNvSpPr/>
-          <p:nvPr/>
-        </p:nvSpPr>
-        <p:spPr>
-          <a:xfrm>
-            <a:off x="6446520" y="3675887"/>
-            <a:ext cx="4983480" cy="457200"/>
-          </a:xfrm>
-          <a:prstGeom prst="roundRect">
-            <a:avLst/>
-          </a:prstGeom>
-          <a:solidFill>
-            <a:srgbClr val="003366"/>
-          </a:solidFill>
-          <a:ln w="9525">
-            <a:solidFill>
-              <a:srgbClr val="4A6A8A"/>
-            </a:solidFill>
-          </a:ln>
-          <a:effectLst/>
-        </p:spPr>
-        <p:style>
-          <a:lnRef idx="1">
-            <a:schemeClr val="accent1"/>
-          </a:lnRef>
-          <a:fillRef idx="3">
-            <a:schemeClr val="accent1"/>
-          </a:fillRef>
-          <a:effectRef idx="2">
-            <a:schemeClr val="accent1"/>
-          </a:effectRef>
-          <a:fontRef idx="minor">
-            <a:schemeClr val="lt1"/>
-          </a:fontRef>
-        </p:style>
-        <p:txBody>
-          <a:bodyPr rtlCol="0" anchor="ctr" wrap="square" lIns="146304" tIns="9144" bIns="9144"/>
-          <a:lstStyle/>
-          <a:p>
-            <a:pPr algn="l"/>
-            <a:r>
-              <a:rPr sz="1100" b="1" i="0">
-                <a:solidFill>
-                  <a:srgbClr val="FFBE2E"/>
-                </a:solidFill>
-                <a:latin typeface="Liberation Sans"/>
-              </a:rPr>
-              <a:t>05  </a:t>
-            </a:r>
-            <a:r>
-              <a:rPr sz="1100" b="0" i="0">
-                <a:solidFill>
-                  <a:srgbClr val="FFFFFF"/>
-                </a:solidFill>
-                <a:latin typeface="Liberation Sans"/>
-              </a:rPr>
-              <a:t>Risorse e trasparenza</a:t>
-            </a:r>
-          </a:p>
-        </p:txBody>
-      </p:sp>
-      <p:sp>
-        <p:nvSpPr>
-          <p:cNvPr id="16" name="Rounded Rectangle 15">
-            <a:hlinkClick action="ppaction://hlinksldjump" r:id="rId9"/>
-          </p:cNvPr>
-          <p:cNvSpPr/>
-          <p:nvPr/>
-        </p:nvSpPr>
-        <p:spPr>
-          <a:xfrm>
-            <a:off x="6446520" y="4224528"/>
-            <a:ext cx="4983480" cy="457200"/>
-          </a:xfrm>
-          <a:prstGeom prst="roundRect">
-            <a:avLst/>
-          </a:prstGeom>
-          <a:solidFill>
-            <a:srgbClr val="003366"/>
-          </a:solidFill>
-          <a:ln w="9525">
-            <a:solidFill>
-              <a:srgbClr val="4A6A8A"/>
-            </a:solidFill>
-          </a:ln>
-          <a:effectLst/>
-        </p:spPr>
-        <p:style>
-          <a:lnRef idx="1">
-            <a:schemeClr val="accent1"/>
-          </a:lnRef>
-          <a:fillRef idx="3">
-            <a:schemeClr val="accent1"/>
-          </a:fillRef>
-          <a:effectRef idx="2">
-            <a:schemeClr val="accent1"/>
-          </a:effectRef>
-          <a:fontRef idx="minor">
-            <a:schemeClr val="lt1"/>
-          </a:fontRef>
-        </p:style>
-        <p:txBody>
-          <a:bodyPr rtlCol="0" anchor="ctr" wrap="square" lIns="146304" tIns="9144" bIns="9144"/>
-          <a:lstStyle/>
-          <a:p>
-            <a:pPr algn="l"/>
-            <a:r>
-              <a:rPr sz="1100" b="1" i="0">
-                <a:solidFill>
-                  <a:srgbClr val="FFBE2E"/>
-                </a:solidFill>
-                <a:latin typeface="Liberation Sans"/>
-              </a:rPr>
-              <a:t>06  </a:t>
-            </a:r>
-            <a:r>
-              <a:rPr sz="1100" b="0" i="0">
-                <a:solidFill>
-                  <a:srgbClr val="FFFFFF"/>
-                </a:solidFill>
-                <a:latin typeface="Liberation Sans"/>
-              </a:rPr>
-              <a:t>Comunicazione</a:t>
-            </a:r>
-          </a:p>
-        </p:txBody>
-      </p:sp>
-      <p:sp>
-        <p:nvSpPr>
-          <p:cNvPr id="17" name="Rounded Rectangle 16"/>
-          <p:cNvSpPr/>
-          <p:nvPr/>
-        </p:nvSpPr>
-        <p:spPr>
-          <a:xfrm>
-            <a:off x="6446520" y="4773168"/>
-            <a:ext cx="4983480" cy="457200"/>
-          </a:xfrm>
-          <a:prstGeom prst="roundRect">
-            <a:avLst/>
-          </a:prstGeom>
-          <a:solidFill>
-            <a:srgbClr val="FFBE2E"/>
           </a:solidFill>
           <a:ln>
             <a:noFill/>
@@ -47499,41 +47407,99 @@
           </a:fontRef>
         </p:style>
         <p:txBody>
-          <a:bodyPr rtlCol="0" anchor="ctr" wrap="square" lIns="146304" tIns="9144" bIns="9144"/>
-          <a:lstStyle/>
-          <a:p>
-            <a:pPr algn="l"/>
-            <a:r>
-              <a:rPr sz="1100" b="1" i="0">
-                <a:solidFill>
-                  <a:srgbClr val="001A33"/>
-                </a:solidFill>
-                <a:latin typeface="Liberation Sans"/>
-              </a:rPr>
-              <a:t>07  </a:t>
-            </a:r>
-            <a:r>
-              <a:rPr sz="1100" b="1" i="0">
-                <a:solidFill>
-                  <a:srgbClr val="001A33"/>
-                </a:solidFill>
-                <a:latin typeface="Liberation Sans"/>
-              </a:rPr>
-              <a:t>Infrastruttura, fonti e sicurezza</a:t>
-            </a:r>
-          </a:p>
-        </p:txBody>
-      </p:sp>
-      <p:sp>
-        <p:nvSpPr>
-          <p:cNvPr id="18" name="TextBox 17"/>
+          <a:bodyPr rtlCol="0" anchor="ctr" wrap="square" lIns="109728" rIns="109728" tIns="36576" bIns="36576"/>
+          <a:lstStyle/>
+          <a:p>
+            <a:pPr algn="ctr"/>
+          </a:p>
+        </p:txBody>
+      </p:sp>
+      <p:pic>
+        <p:nvPicPr>
+          <p:cNvPr id="14" name="Picture 13" descr="rss-fill_ffffff.png"/>
+          <p:cNvPicPr>
+            <a:picLocks noChangeAspect="1"/>
+          </p:cNvPicPr>
+          <p:nvPr/>
+        </p:nvPicPr>
+        <p:blipFill>
+          <a:blip r:embed="rId4"/>
+          <a:stretch>
+            <a:fillRect/>
+          </a:stretch>
+        </p:blipFill>
+        <p:spPr>
+          <a:xfrm>
+            <a:off x="2315138" y="2752526"/>
+            <a:ext cx="337962" cy="337962"/>
+          </a:xfrm>
+          <a:prstGeom prst="rect">
+            <a:avLst/>
+          </a:prstGeom>
+        </p:spPr>
+      </p:pic>
+      <p:sp>
+        <p:nvSpPr>
+          <p:cNvPr id="15" name="Rounded Rectangle 14"/>
+          <p:cNvSpPr/>
+          <p:nvPr/>
+        </p:nvSpPr>
+        <p:spPr>
+          <a:xfrm>
+            <a:off x="4373880" y="2354580"/>
+            <a:ext cx="3413759" cy="3383280"/>
+          </a:xfrm>
+          <a:prstGeom prst="roundRect">
+            <a:avLst/>
+          </a:prstGeom>
+          <a:solidFill>
+            <a:srgbClr val="F4F7FB"/>
+          </a:solidFill>
+          <a:ln w="12700">
+            <a:solidFill>
+              <a:srgbClr val="D8DEE4"/>
+            </a:solidFill>
+          </a:ln>
+          <a:effectLst>
+            <a:outerShdw blurRad="50800" dist="25400" dir="5400000" rotWithShape="0">
+              <a:srgbClr val="001A33">
+                <a:alpha val="42000"/>
+              </a:srgbClr>
+            </a:outerShdw>
+          </a:effectLst>
+        </p:spPr>
+        <p:style>
+          <a:lnRef idx="1">
+            <a:schemeClr val="accent1"/>
+          </a:lnRef>
+          <a:fillRef idx="3">
+            <a:schemeClr val="accent1"/>
+          </a:fillRef>
+          <a:effectRef idx="2">
+            <a:schemeClr val="accent1"/>
+          </a:effectRef>
+          <a:fontRef idx="minor">
+            <a:schemeClr val="lt1"/>
+          </a:fontRef>
+        </p:style>
+        <p:txBody>
+          <a:bodyPr rtlCol="0" anchor="ctr" wrap="square" lIns="109728" rIns="109728" tIns="36576" bIns="36576"/>
+          <a:lstStyle/>
+          <a:p>
+            <a:pPr algn="ctr"/>
+          </a:p>
+        </p:txBody>
+      </p:sp>
+      <p:sp>
+        <p:nvSpPr>
+          <p:cNvPr id="16" name="TextBox 15"/>
           <p:cNvSpPr txBox="1"/>
           <p:nvPr/>
         </p:nvSpPr>
         <p:spPr>
           <a:xfrm>
-            <a:off x="9857232" y="6373368"/>
-            <a:ext cx="329184" cy="365760"/>
+            <a:off x="4556760" y="3451860"/>
+            <a:ext cx="3047999" cy="2103120"/>
           </a:xfrm>
           <a:prstGeom prst="rect">
             <a:avLst/>
@@ -47546,30 +47512,153 @@
           </a:bodyPr>
           <a:lstStyle/>
           <a:p>
-            <a:pPr algn="ctr"/>
-            <a:r>
-              <a:rPr sz="1500" b="1" i="0">
-                <a:solidFill>
-                  <a:srgbClr val="FFBE2E"/>
-                </a:solidFill>
-                <a:latin typeface="Liberation Sans"/>
-                <a:hlinkClick r:id="rId10" action="ppaction://hlinksldjump"/>
-              </a:rPr>
-              <a:t>‹</a:t>
-            </a:r>
-          </a:p>
-        </p:txBody>
-      </p:sp>
-      <p:sp>
-        <p:nvSpPr>
-          <p:cNvPr id="19" name="TextBox 18"/>
+            <a:pPr algn="ctr">
+              <a:lnSpc>
+                <a:spcPct val="112000"/>
+              </a:lnSpc>
+            </a:pPr>
+            <a:r>
+              <a:rPr sz="1400" b="0" i="0">
+                <a:solidFill>
+                  <a:srgbClr val="1A1A1A"/>
+                </a:solidFill>
+                <a:latin typeface="Liberation Sans"/>
+              </a:rPr>
+              <a:t>Codici QR sugli articoli per l'accesso rapido.</a:t>
+            </a:r>
+          </a:p>
+        </p:txBody>
+      </p:sp>
+      <p:sp>
+        <p:nvSpPr>
+          <p:cNvPr id="17" name="Oval 16"/>
+          <p:cNvSpPr/>
+          <p:nvPr/>
+        </p:nvSpPr>
+        <p:spPr>
+          <a:xfrm>
+            <a:off x="5779007" y="2619756"/>
+            <a:ext cx="603504" cy="603504"/>
+          </a:xfrm>
+          <a:prstGeom prst="ellipse">
+            <a:avLst/>
+          </a:prstGeom>
+          <a:solidFill>
+            <a:srgbClr val="15803D"/>
+          </a:solidFill>
+          <a:ln>
+            <a:noFill/>
+          </a:ln>
+          <a:effectLst/>
+        </p:spPr>
+        <p:style>
+          <a:lnRef idx="1">
+            <a:schemeClr val="accent1"/>
+          </a:lnRef>
+          <a:fillRef idx="3">
+            <a:schemeClr val="accent1"/>
+          </a:fillRef>
+          <a:effectRef idx="2">
+            <a:schemeClr val="accent1"/>
+          </a:effectRef>
+          <a:fontRef idx="minor">
+            <a:schemeClr val="lt1"/>
+          </a:fontRef>
+        </p:style>
+        <p:txBody>
+          <a:bodyPr rtlCol="0" anchor="ctr" wrap="square" lIns="109728" rIns="109728" tIns="36576" bIns="36576"/>
+          <a:lstStyle/>
+          <a:p>
+            <a:pPr algn="ctr"/>
+          </a:p>
+        </p:txBody>
+      </p:sp>
+      <p:pic>
+        <p:nvPicPr>
+          <p:cNvPr id="18" name="Picture 17" descr="rss-fill_ffffff.png"/>
+          <p:cNvPicPr>
+            <a:picLocks noChangeAspect="1"/>
+          </p:cNvPicPr>
+          <p:nvPr/>
+        </p:nvPicPr>
+        <p:blipFill>
+          <a:blip r:embed="rId4"/>
+          <a:stretch>
+            <a:fillRect/>
+          </a:stretch>
+        </p:blipFill>
+        <p:spPr>
+          <a:xfrm>
+            <a:off x="5911778" y="2752526"/>
+            <a:ext cx="337962" cy="337962"/>
+          </a:xfrm>
+          <a:prstGeom prst="rect">
+            <a:avLst/>
+          </a:prstGeom>
+        </p:spPr>
+      </p:pic>
+      <p:sp>
+        <p:nvSpPr>
+          <p:cNvPr id="19" name="Rounded Rectangle 18"/>
+          <p:cNvSpPr/>
+          <p:nvPr/>
+        </p:nvSpPr>
+        <p:spPr>
+          <a:xfrm>
+            <a:off x="7970520" y="2354580"/>
+            <a:ext cx="3413759" cy="3383280"/>
+          </a:xfrm>
+          <a:prstGeom prst="roundRect">
+            <a:avLst/>
+          </a:prstGeom>
+          <a:solidFill>
+            <a:srgbClr val="F4F7FB"/>
+          </a:solidFill>
+          <a:ln w="12700">
+            <a:solidFill>
+              <a:srgbClr val="D8DEE4"/>
+            </a:solidFill>
+          </a:ln>
+          <a:effectLst>
+            <a:outerShdw blurRad="50800" dist="25400" dir="5400000" rotWithShape="0">
+              <a:srgbClr val="001A33">
+                <a:alpha val="42000"/>
+              </a:srgbClr>
+            </a:outerShdw>
+          </a:effectLst>
+        </p:spPr>
+        <p:style>
+          <a:lnRef idx="1">
+            <a:schemeClr val="accent1"/>
+          </a:lnRef>
+          <a:fillRef idx="3">
+            <a:schemeClr val="accent1"/>
+          </a:fillRef>
+          <a:effectRef idx="2">
+            <a:schemeClr val="accent1"/>
+          </a:effectRef>
+          <a:fontRef idx="minor">
+            <a:schemeClr val="lt1"/>
+          </a:fontRef>
+        </p:style>
+        <p:txBody>
+          <a:bodyPr rtlCol="0" anchor="ctr" wrap="square" lIns="109728" rIns="109728" tIns="36576" bIns="36576"/>
+          <a:lstStyle/>
+          <a:p>
+            <a:pPr algn="ctr"/>
+          </a:p>
+        </p:txBody>
+      </p:sp>
+      <p:sp>
+        <p:nvSpPr>
+          <p:cNvPr id="20" name="TextBox 19"/>
           <p:cNvSpPr txBox="1"/>
           <p:nvPr/>
         </p:nvSpPr>
         <p:spPr>
           <a:xfrm>
-            <a:off x="10222992" y="6373368"/>
-            <a:ext cx="329184" cy="365760"/>
+            <a:off x="8153399" y="3451860"/>
+            <a:ext cx="3047999" cy="2103120"/>
           </a:xfrm>
           <a:prstGeom prst="rect">
             <a:avLst/>
@@ -47582,14 +47671,157 @@
           </a:bodyPr>
           <a:lstStyle/>
           <a:p>
+            <a:pPr algn="ctr">
+              <a:lnSpc>
+                <a:spcPct val="112000"/>
+              </a:lnSpc>
+            </a:pPr>
+            <a:r>
+              <a:rPr sz="1400" b="0" i="0">
+                <a:solidFill>
+                  <a:srgbClr val="1A1A1A"/>
+                </a:solidFill>
+                <a:latin typeface="Liberation Sans"/>
+              </a:rPr>
+              <a:t>Condivisione semplice e senza tracciamento.</a:t>
+            </a:r>
+          </a:p>
+        </p:txBody>
+      </p:sp>
+      <p:sp>
+        <p:nvSpPr>
+          <p:cNvPr id="21" name="Oval 20"/>
+          <p:cNvSpPr/>
+          <p:nvPr/>
+        </p:nvSpPr>
+        <p:spPr>
+          <a:xfrm>
+            <a:off x="9375648" y="2619756"/>
+            <a:ext cx="603504" cy="603504"/>
+          </a:xfrm>
+          <a:prstGeom prst="ellipse">
+            <a:avLst/>
+          </a:prstGeom>
+          <a:solidFill>
+            <a:srgbClr val="B45309"/>
+          </a:solidFill>
+          <a:ln>
+            <a:noFill/>
+          </a:ln>
+          <a:effectLst/>
+        </p:spPr>
+        <p:style>
+          <a:lnRef idx="1">
+            <a:schemeClr val="accent1"/>
+          </a:lnRef>
+          <a:fillRef idx="3">
+            <a:schemeClr val="accent1"/>
+          </a:fillRef>
+          <a:effectRef idx="2">
+            <a:schemeClr val="accent1"/>
+          </a:effectRef>
+          <a:fontRef idx="minor">
+            <a:schemeClr val="lt1"/>
+          </a:fontRef>
+        </p:style>
+        <p:txBody>
+          <a:bodyPr rtlCol="0" anchor="ctr" wrap="square" lIns="109728" rIns="109728" tIns="36576" bIns="36576"/>
+          <a:lstStyle/>
+          <a:p>
+            <a:pPr algn="ctr"/>
+          </a:p>
+        </p:txBody>
+      </p:sp>
+      <p:pic>
+        <p:nvPicPr>
+          <p:cNvPr id="22" name="Picture 21" descr="rss-fill_ffffff.png"/>
+          <p:cNvPicPr>
+            <a:picLocks noChangeAspect="1"/>
+          </p:cNvPicPr>
+          <p:nvPr/>
+        </p:nvPicPr>
+        <p:blipFill>
+          <a:blip r:embed="rId4"/>
+          <a:stretch>
+            <a:fillRect/>
+          </a:stretch>
+        </p:blipFill>
+        <p:spPr>
+          <a:xfrm>
+            <a:off x="9508418" y="2752526"/>
+            <a:ext cx="337962" cy="337962"/>
+          </a:xfrm>
+          <a:prstGeom prst="rect">
+            <a:avLst/>
+          </a:prstGeom>
+        </p:spPr>
+      </p:pic>
+      <p:sp>
+        <p:nvSpPr>
+          <p:cNvPr id="23" name="TextBox 22"/>
+          <p:cNvSpPr txBox="1"/>
+          <p:nvPr/>
+        </p:nvSpPr>
+        <p:spPr>
+          <a:xfrm>
+            <a:off x="9857232" y="6373368"/>
+            <a:ext cx="329184" cy="365760"/>
+          </a:xfrm>
+          <a:prstGeom prst="rect">
+            <a:avLst/>
+          </a:prstGeom>
+          <a:noFill/>
+        </p:spPr>
+        <p:txBody>
+          <a:bodyPr wrap="square" anchor="t" lIns="45720" rIns="45720" tIns="18288" bIns="18288">
+            <a:spAutoFit/>
+          </a:bodyPr>
+          <a:lstStyle/>
+          <a:p>
             <a:pPr algn="ctr"/>
             <a:r>
               <a:rPr sz="1500" b="1" i="0">
                 <a:solidFill>
-                  <a:srgbClr val="FFBE2E"/>
-                </a:solidFill>
-                <a:latin typeface="Liberation Sans"/>
-                <a:hlinkClick r:id="rId11" action="ppaction://hlinksldjump"/>
+                  <a:srgbClr val="003366"/>
+                </a:solidFill>
+                <a:latin typeface="Liberation Sans"/>
+                <a:hlinkClick r:id="rId5" action="ppaction://hlinksldjump"/>
+              </a:rPr>
+              <a:t>‹</a:t>
+            </a:r>
+          </a:p>
+        </p:txBody>
+      </p:sp>
+      <p:sp>
+        <p:nvSpPr>
+          <p:cNvPr id="24" name="TextBox 23"/>
+          <p:cNvSpPr txBox="1"/>
+          <p:nvPr/>
+        </p:nvSpPr>
+        <p:spPr>
+          <a:xfrm>
+            <a:off x="10222992" y="6373368"/>
+            <a:ext cx="329184" cy="365760"/>
+          </a:xfrm>
+          <a:prstGeom prst="rect">
+            <a:avLst/>
+          </a:prstGeom>
+          <a:noFill/>
+        </p:spPr>
+        <p:txBody>
+          <a:bodyPr wrap="square" anchor="t" lIns="45720" rIns="45720" tIns="18288" bIns="18288">
+            <a:spAutoFit/>
+          </a:bodyPr>
+          <a:lstStyle/>
+          <a:p>
+            <a:pPr algn="ctr"/>
+            <a:r>
+              <a:rPr sz="1500" b="1" i="0">
+                <a:solidFill>
+                  <a:srgbClr val="003366"/>
+                </a:solidFill>
+                <a:latin typeface="Liberation Sans"/>
+                <a:hlinkClick r:id="rId6" action="ppaction://hlinksldjump"/>
               </a:rPr>
               <a:t>›</a:t>
             </a:r>
@@ -47629,7 +47861,7 @@
             <a:avLst/>
           </a:prstGeom>
           <a:solidFill>
-            <a:srgbClr val="FFFFFF"/>
+            <a:srgbClr val="001A33"/>
           </a:solidFill>
           <a:ln>
             <a:noFill/>
@@ -47658,53 +47890,9 @@
           </a:p>
         </p:txBody>
       </p:sp>
-      <p:sp>
-        <p:nvSpPr>
-          <p:cNvPr id="3" name="Rectangle 2"/>
-          <p:cNvSpPr/>
-          <p:nvPr/>
-        </p:nvSpPr>
-        <p:spPr>
-          <a:xfrm>
-            <a:off x="0" y="0"/>
-            <a:ext cx="201168" cy="6858000"/>
-          </a:xfrm>
-          <a:prstGeom prst="rect">
-            <a:avLst/>
-          </a:prstGeom>
-          <a:solidFill>
-            <a:srgbClr val="003366"/>
-          </a:solidFill>
-          <a:ln>
-            <a:noFill/>
-          </a:ln>
-          <a:effectLst/>
-        </p:spPr>
-        <p:style>
-          <a:lnRef idx="1">
-            <a:schemeClr val="accent1"/>
-          </a:lnRef>
-          <a:fillRef idx="3">
-            <a:schemeClr val="accent1"/>
-          </a:fillRef>
-          <a:effectRef idx="2">
-            <a:schemeClr val="accent1"/>
-          </a:effectRef>
-          <a:fontRef idx="minor">
-            <a:schemeClr val="lt1"/>
-          </a:fontRef>
-        </p:style>
-        <p:txBody>
-          <a:bodyPr rtlCol="0" anchor="ctr"/>
-          <a:lstStyle/>
-          <a:p>
-            <a:pPr algn="ctr"/>
-          </a:p>
-        </p:txBody>
-      </p:sp>
       <p:pic>
         <p:nvPicPr>
-          <p:cNvPr id="4" name="Picture 3" descr="logo-pc-genzano.png"/>
+          <p:cNvPr id="3" name="Picture 2" descr="logo-pc-genzano.png"/>
           <p:cNvPicPr>
             <a:picLocks noChangeAspect="1"/>
           </p:cNvPicPr>
@@ -47718,14 +47906,58 @@
         </p:blipFill>
         <p:spPr>
           <a:xfrm>
-            <a:off x="11076127" y="411480"/>
-            <a:ext cx="658368" cy="658368"/>
+            <a:off x="10865815" y="502920"/>
+            <a:ext cx="868680" cy="868680"/>
           </a:xfrm>
           <a:prstGeom prst="rect">
             <a:avLst/>
           </a:prstGeom>
         </p:spPr>
       </p:pic>
+      <p:sp>
+        <p:nvSpPr>
+          <p:cNvPr id="4" name="Rectangle 3"/>
+          <p:cNvSpPr/>
+          <p:nvPr/>
+        </p:nvSpPr>
+        <p:spPr>
+          <a:xfrm>
+            <a:off x="914400" y="2743200"/>
+            <a:ext cx="2194560" cy="50800"/>
+          </a:xfrm>
+          <a:prstGeom prst="rect">
+            <a:avLst/>
+          </a:prstGeom>
+          <a:solidFill>
+            <a:srgbClr val="FFBE2E"/>
+          </a:solidFill>
+          <a:ln>
+            <a:noFill/>
+          </a:ln>
+          <a:effectLst/>
+        </p:spPr>
+        <p:style>
+          <a:lnRef idx="1">
+            <a:schemeClr val="accent1"/>
+          </a:lnRef>
+          <a:fillRef idx="3">
+            <a:schemeClr val="accent1"/>
+          </a:fillRef>
+          <a:effectRef idx="2">
+            <a:schemeClr val="accent1"/>
+          </a:effectRef>
+          <a:fontRef idx="minor">
+            <a:schemeClr val="lt1"/>
+          </a:fontRef>
+        </p:style>
+        <p:txBody>
+          <a:bodyPr rtlCol="0" anchor="ctr"/>
+          <a:lstStyle/>
+          <a:p>
+            <a:pPr algn="ctr"/>
+          </a:p>
+        </p:txBody>
+      </p:sp>
       <p:sp>
         <p:nvSpPr>
           <p:cNvPr id="5" name="TextBox 4"/>
@@ -47734,8 +47966,8 @@
         </p:nvSpPr>
         <p:spPr>
           <a:xfrm>
-            <a:off x="640080" y="502920"/>
-            <a:ext cx="9692640" cy="1005840"/>
+            <a:off x="914400" y="2971800"/>
+            <a:ext cx="5029200" cy="2468880"/>
           </a:xfrm>
           <a:prstGeom prst="rect">
             <a:avLst/>
@@ -47749,115 +47981,27 @@
           <a:lstStyle/>
           <a:p>
             <a:r>
-              <a:rPr sz="2800" b="1" i="0">
-                <a:solidFill>
-                  <a:srgbClr val="003366"/>
-                </a:solidFill>
-                <a:latin typeface="Liberation Sans"/>
-              </a:rPr>
-              <a:t>Infrastruttura, sicurezza e prestazioni</a:t>
-            </a:r>
-          </a:p>
-        </p:txBody>
-      </p:sp>
-      <p:sp>
-        <p:nvSpPr>
-          <p:cNvPr id="6" name="Rectangle 5"/>
-          <p:cNvSpPr/>
-          <p:nvPr/>
-        </p:nvSpPr>
-        <p:spPr>
-          <a:xfrm>
-            <a:off x="685800" y="1417320"/>
-            <a:ext cx="2011680" cy="38100"/>
-          </a:xfrm>
-          <a:prstGeom prst="rect">
-            <a:avLst/>
-          </a:prstGeom>
-          <a:solidFill>
-            <a:srgbClr val="FFBE2E"/>
-          </a:solidFill>
-          <a:ln>
-            <a:noFill/>
-          </a:ln>
-          <a:effectLst/>
-        </p:spPr>
-        <p:style>
-          <a:lnRef idx="1">
-            <a:schemeClr val="accent1"/>
-          </a:lnRef>
-          <a:fillRef idx="3">
-            <a:schemeClr val="accent1"/>
-          </a:fillRef>
-          <a:effectRef idx="2">
-            <a:schemeClr val="accent1"/>
-          </a:effectRef>
-          <a:fontRef idx="minor">
-            <a:schemeClr val="lt1"/>
-          </a:fontRef>
-        </p:style>
-        <p:txBody>
-          <a:bodyPr rtlCol="0" anchor="ctr"/>
-          <a:lstStyle/>
-          <a:p>
-            <a:pPr algn="ctr"/>
-          </a:p>
-        </p:txBody>
-      </p:sp>
-      <p:sp>
-        <p:nvSpPr>
-          <p:cNvPr id="7" name="Rectangle 6"/>
-          <p:cNvSpPr/>
-          <p:nvPr/>
-        </p:nvSpPr>
-        <p:spPr>
-          <a:xfrm>
-            <a:off x="548640" y="6419088"/>
-            <a:ext cx="11091672" cy="15240"/>
-          </a:xfrm>
-          <a:prstGeom prst="rect">
-            <a:avLst/>
-          </a:prstGeom>
-          <a:solidFill>
-            <a:srgbClr val="D8DEE4"/>
-          </a:solidFill>
-          <a:ln>
-            <a:noFill/>
-          </a:ln>
-          <a:effectLst/>
-        </p:spPr>
-        <p:style>
-          <a:lnRef idx="1">
-            <a:schemeClr val="accent1"/>
-          </a:lnRef>
-          <a:fillRef idx="3">
-            <a:schemeClr val="accent1"/>
-          </a:fillRef>
-          <a:effectRef idx="2">
-            <a:schemeClr val="accent1"/>
-          </a:effectRef>
-          <a:fontRef idx="minor">
-            <a:schemeClr val="lt1"/>
-          </a:fontRef>
-        </p:style>
-        <p:txBody>
-          <a:bodyPr rtlCol="0" anchor="ctr"/>
-          <a:lstStyle/>
-          <a:p>
-            <a:pPr algn="ctr"/>
-          </a:p>
-        </p:txBody>
-      </p:sp>
-      <p:sp>
-        <p:nvSpPr>
-          <p:cNvPr id="8" name="TextBox 7"/>
+              <a:rPr sz="3200" b="1" i="0">
+                <a:solidFill>
+                  <a:srgbClr val="FFFFFF"/>
+                </a:solidFill>
+                <a:latin typeface="Liberation Sans"/>
+              </a:rPr>
+              <a:t>Infrastruttura, fonti e sicurezza</a:t>
+            </a:r>
+          </a:p>
+        </p:txBody>
+      </p:sp>
+      <p:sp>
+        <p:nvSpPr>
+          <p:cNvPr id="6" name="TextBox 5"/>
           <p:cNvSpPr txBox="1"/>
           <p:nvPr/>
         </p:nvSpPr>
         <p:spPr>
           <a:xfrm>
-            <a:off x="548640" y="6455664"/>
-            <a:ext cx="4114800" cy="320040"/>
+            <a:off x="914400" y="2194560"/>
+            <a:ext cx="5029200" cy="457200"/>
           </a:xfrm>
           <a:prstGeom prst="rect">
             <a:avLst/>
@@ -47871,27 +48015,71 @@
           <a:lstStyle/>
           <a:p>
             <a:r>
-              <a:rPr sz="900" b="0" i="0">
-                <a:solidFill>
-                  <a:srgbClr val="5A6B7B"/>
-                </a:solidFill>
-                <a:latin typeface="Liberation Sans"/>
-              </a:rPr>
-              <a:t>Gruppo Comunale Volontari di PC · Genzano di Roma</a:t>
-            </a:r>
-          </a:p>
-        </p:txBody>
-      </p:sp>
-      <p:sp>
-        <p:nvSpPr>
-          <p:cNvPr id="9" name="TextBox 8"/>
+              <a:rPr sz="1300" b="1" i="0">
+                <a:solidFill>
+                  <a:srgbClr val="FFBE2E"/>
+                </a:solidFill>
+                <a:latin typeface="Liberation Sans"/>
+              </a:rPr>
+              <a:t>SEZIONE</a:t>
+            </a:r>
+          </a:p>
+        </p:txBody>
+      </p:sp>
+      <p:sp>
+        <p:nvSpPr>
+          <p:cNvPr id="7" name="Rectangle 6"/>
+          <p:cNvSpPr/>
+          <p:nvPr/>
+        </p:nvSpPr>
+        <p:spPr>
+          <a:xfrm>
+            <a:off x="548640" y="6419088"/>
+            <a:ext cx="11091672" cy="15240"/>
+          </a:xfrm>
+          <a:prstGeom prst="rect">
+            <a:avLst/>
+          </a:prstGeom>
+          <a:solidFill>
+            <a:srgbClr val="334E66"/>
+          </a:solidFill>
+          <a:ln>
+            <a:noFill/>
+          </a:ln>
+          <a:effectLst/>
+        </p:spPr>
+        <p:style>
+          <a:lnRef idx="1">
+            <a:schemeClr val="accent1"/>
+          </a:lnRef>
+          <a:fillRef idx="3">
+            <a:schemeClr val="accent1"/>
+          </a:fillRef>
+          <a:effectRef idx="2">
+            <a:schemeClr val="accent1"/>
+          </a:effectRef>
+          <a:fontRef idx="minor">
+            <a:schemeClr val="lt1"/>
+          </a:fontRef>
+        </p:style>
+        <p:txBody>
+          <a:bodyPr rtlCol="0" anchor="ctr"/>
+          <a:lstStyle/>
+          <a:p>
+            <a:pPr algn="ctr"/>
+          </a:p>
+        </p:txBody>
+      </p:sp>
+      <p:sp>
+        <p:nvSpPr>
+          <p:cNvPr id="8" name="TextBox 7"/>
           <p:cNvSpPr txBox="1"/>
           <p:nvPr/>
         </p:nvSpPr>
         <p:spPr>
           <a:xfrm>
-            <a:off x="10698480" y="6455664"/>
-            <a:ext cx="914400" cy="320040"/>
+            <a:off x="548640" y="6455664"/>
+            <a:ext cx="4114800" cy="320040"/>
           </a:xfrm>
           <a:prstGeom prst="rect">
             <a:avLst/>
@@ -47904,29 +48092,28 @@
           </a:bodyPr>
           <a:lstStyle/>
           <a:p>
-            <a:pPr algn="r"/>
-            <a:r>
-              <a:rPr sz="900" b="1" i="0">
-                <a:solidFill>
-                  <a:srgbClr val="5A6B7B"/>
-                </a:solidFill>
-                <a:latin typeface="Liberation Sans"/>
-              </a:rPr>
-              <a:t>53</a:t>
-            </a:r>
-          </a:p>
-        </p:txBody>
-      </p:sp>
-      <p:sp>
-        <p:nvSpPr>
-          <p:cNvPr id="10" name="TextBox 9"/>
+            <a:r>
+              <a:rPr sz="900" b="0" i="0">
+                <a:solidFill>
+                  <a:srgbClr val="9DB0C2"/>
+                </a:solidFill>
+                <a:latin typeface="Liberation Sans"/>
+              </a:rPr>
+              <a:t>Gruppo Comunale Volontari di PC · Genzano di Roma</a:t>
+            </a:r>
+          </a:p>
+        </p:txBody>
+      </p:sp>
+      <p:sp>
+        <p:nvSpPr>
+          <p:cNvPr id="9" name="TextBox 8"/>
           <p:cNvSpPr txBox="1"/>
           <p:nvPr/>
         </p:nvSpPr>
         <p:spPr>
           <a:xfrm>
-            <a:off x="4727448" y="6428232"/>
-            <a:ext cx="2743200" cy="329184"/>
+            <a:off x="10698480" y="6455664"/>
+            <a:ext cx="914400" cy="320040"/>
           </a:xfrm>
           <a:prstGeom prst="rect">
             <a:avLst/>
@@ -47939,82 +48126,29 @@
           </a:bodyPr>
           <a:lstStyle/>
           <a:p>
-            <a:pPr algn="ctr"/>
-            <a:r>
-              <a:rPr sz="950" b="1" i="0">
-                <a:solidFill>
-                  <a:srgbClr val="003366"/>
-                </a:solidFill>
-                <a:latin typeface="Liberation Sans"/>
-                <a:hlinkClick r:id="rId3" action="ppaction://hlinksldjump"/>
-              </a:rPr>
-              <a:t>« Torna all'agenda</a:t>
-            </a:r>
-          </a:p>
-        </p:txBody>
-      </p:sp>
-      <p:sp>
-        <p:nvSpPr>
-          <p:cNvPr id="11" name="Rounded Rectangle 10"/>
-          <p:cNvSpPr/>
-          <p:nvPr/>
-        </p:nvSpPr>
-        <p:spPr>
-          <a:xfrm>
-            <a:off x="777240" y="1965960"/>
-            <a:ext cx="5221224" cy="1997964"/>
-          </a:xfrm>
-          <a:prstGeom prst="roundRect">
-            <a:avLst/>
-          </a:prstGeom>
-          <a:solidFill>
-            <a:srgbClr val="F4F7FB"/>
-          </a:solidFill>
-          <a:ln w="12700">
-            <a:solidFill>
-              <a:srgbClr val="D8DEE4"/>
-            </a:solidFill>
-          </a:ln>
-          <a:effectLst>
-            <a:outerShdw blurRad="50800" dist="25400" dir="5400000" rotWithShape="0">
-              <a:srgbClr val="001A33">
-                <a:alpha val="42000"/>
-              </a:srgbClr>
-            </a:outerShdw>
-          </a:effectLst>
-        </p:spPr>
-        <p:style>
-          <a:lnRef idx="1">
-            <a:schemeClr val="accent1"/>
-          </a:lnRef>
-          <a:fillRef idx="3">
-            <a:schemeClr val="accent1"/>
-          </a:fillRef>
-          <a:effectRef idx="2">
-            <a:schemeClr val="accent1"/>
-          </a:effectRef>
-          <a:fontRef idx="minor">
-            <a:schemeClr val="lt1"/>
-          </a:fontRef>
-        </p:style>
-        <p:txBody>
-          <a:bodyPr rtlCol="0" anchor="ctr" wrap="square" lIns="109728" rIns="109728" tIns="36576" bIns="36576"/>
-          <a:lstStyle/>
-          <a:p>
-            <a:pPr algn="ctr"/>
-          </a:p>
-        </p:txBody>
-      </p:sp>
-      <p:sp>
-        <p:nvSpPr>
-          <p:cNvPr id="12" name="TextBox 11"/>
+            <a:pPr algn="r"/>
+            <a:r>
+              <a:rPr sz="900" b="1" i="0">
+                <a:solidFill>
+                  <a:srgbClr val="9DB0C2"/>
+                </a:solidFill>
+                <a:latin typeface="Liberation Sans"/>
+              </a:rPr>
+              <a:t>53</a:t>
+            </a:r>
+          </a:p>
+        </p:txBody>
+      </p:sp>
+      <p:sp>
+        <p:nvSpPr>
+          <p:cNvPr id="10" name="TextBox 9"/>
           <p:cNvSpPr txBox="1"/>
           <p:nvPr/>
         </p:nvSpPr>
         <p:spPr>
           <a:xfrm>
-            <a:off x="960120" y="3063239"/>
-            <a:ext cx="4855464" cy="717804"/>
+            <a:off x="4727448" y="6428232"/>
+            <a:ext cx="2743200" cy="329184"/>
           </a:xfrm>
           <a:prstGeom prst="rect">
             <a:avLst/>
@@ -48027,39 +48161,432 @@
           </a:bodyPr>
           <a:lstStyle/>
           <a:p>
-            <a:pPr algn="ctr">
-              <a:lnSpc>
-                <a:spcPct val="112000"/>
-              </a:lnSpc>
-            </a:pPr>
-            <a:r>
-              <a:rPr sz="1400" b="0" i="0">
-                <a:solidFill>
-                  <a:srgbClr val="1A1A1A"/>
-                </a:solidFill>
-                <a:latin typeface="Liberation Sans"/>
-              </a:rPr>
-              <a:t>Sito statico ad alte prestazioni, servito in HTTPS.</a:t>
-            </a:r>
-          </a:p>
-        </p:txBody>
-      </p:sp>
-      <p:sp>
-        <p:nvSpPr>
-          <p:cNvPr id="13" name="Oval 12"/>
-          <p:cNvSpPr/>
-          <p:nvPr/>
-        </p:nvSpPr>
-        <p:spPr>
-          <a:xfrm>
-            <a:off x="3086100" y="2231136"/>
-            <a:ext cx="603504" cy="603504"/>
-          </a:xfrm>
-          <a:prstGeom prst="ellipse">
+            <a:pPr algn="ctr"/>
+            <a:r>
+              <a:rPr sz="950" b="1" i="0">
+                <a:solidFill>
+                  <a:srgbClr val="FFBE2E"/>
+                </a:solidFill>
+                <a:latin typeface="Liberation Sans"/>
+                <a:hlinkClick r:id="rId3" action="ppaction://hlinksldjump"/>
+              </a:rPr>
+              <a:t>« Torna all'agenda</a:t>
+            </a:r>
+          </a:p>
+        </p:txBody>
+      </p:sp>
+      <p:sp>
+        <p:nvSpPr>
+          <p:cNvPr id="11" name="Rounded Rectangle 10">
+            <a:hlinkClick action="ppaction://hlinksldjump" r:id="rId4"/>
+          </p:cNvPr>
+          <p:cNvSpPr/>
+          <p:nvPr/>
+        </p:nvSpPr>
+        <p:spPr>
+          <a:xfrm>
+            <a:off x="6446520" y="1481328"/>
+            <a:ext cx="4983480" cy="457200"/>
+          </a:xfrm>
+          <a:prstGeom prst="roundRect">
             <a:avLst/>
           </a:prstGeom>
           <a:solidFill>
             <a:srgbClr val="003366"/>
+          </a:solidFill>
+          <a:ln w="9525">
+            <a:solidFill>
+              <a:srgbClr val="4A6A8A"/>
+            </a:solidFill>
+          </a:ln>
+          <a:effectLst/>
+        </p:spPr>
+        <p:style>
+          <a:lnRef idx="1">
+            <a:schemeClr val="accent1"/>
+          </a:lnRef>
+          <a:fillRef idx="3">
+            <a:schemeClr val="accent1"/>
+          </a:fillRef>
+          <a:effectRef idx="2">
+            <a:schemeClr val="accent1"/>
+          </a:effectRef>
+          <a:fontRef idx="minor">
+            <a:schemeClr val="lt1"/>
+          </a:fontRef>
+        </p:style>
+        <p:txBody>
+          <a:bodyPr rtlCol="0" anchor="ctr" wrap="square" lIns="146304" tIns="9144" bIns="9144"/>
+          <a:lstStyle/>
+          <a:p>
+            <a:pPr algn="l"/>
+            <a:r>
+              <a:rPr sz="1100" b="1" i="0">
+                <a:solidFill>
+                  <a:srgbClr val="FFBE2E"/>
+                </a:solidFill>
+                <a:latin typeface="Liberation Sans"/>
+              </a:rPr>
+              <a:t>01  </a:t>
+            </a:r>
+            <a:r>
+              <a:rPr sz="1100" b="0" i="0">
+                <a:solidFill>
+                  <a:srgbClr val="FFFFFF"/>
+                </a:solidFill>
+                <a:latin typeface="Liberation Sans"/>
+              </a:rPr>
+              <a:t>Per il Cittadino</a:t>
+            </a:r>
+          </a:p>
+        </p:txBody>
+      </p:sp>
+      <p:sp>
+        <p:nvSpPr>
+          <p:cNvPr id="12" name="Rounded Rectangle 11">
+            <a:hlinkClick action="ppaction://hlinksldjump" r:id="rId5"/>
+          </p:cNvPr>
+          <p:cNvSpPr/>
+          <p:nvPr/>
+        </p:nvSpPr>
+        <p:spPr>
+          <a:xfrm>
+            <a:off x="6446520" y="2029968"/>
+            <a:ext cx="4983480" cy="457200"/>
+          </a:xfrm>
+          <a:prstGeom prst="roundRect">
+            <a:avLst/>
+          </a:prstGeom>
+          <a:solidFill>
+            <a:srgbClr val="003366"/>
+          </a:solidFill>
+          <a:ln w="9525">
+            <a:solidFill>
+              <a:srgbClr val="4A6A8A"/>
+            </a:solidFill>
+          </a:ln>
+          <a:effectLst/>
+        </p:spPr>
+        <p:style>
+          <a:lnRef idx="1">
+            <a:schemeClr val="accent1"/>
+          </a:lnRef>
+          <a:fillRef idx="3">
+            <a:schemeClr val="accent1"/>
+          </a:fillRef>
+          <a:effectRef idx="2">
+            <a:schemeClr val="accent1"/>
+          </a:effectRef>
+          <a:fontRef idx="minor">
+            <a:schemeClr val="lt1"/>
+          </a:fontRef>
+        </p:style>
+        <p:txBody>
+          <a:bodyPr rtlCol="0" anchor="ctr" wrap="square" lIns="146304" tIns="9144" bIns="9144"/>
+          <a:lstStyle/>
+          <a:p>
+            <a:pPr algn="l"/>
+            <a:r>
+              <a:rPr sz="1100" b="1" i="0">
+                <a:solidFill>
+                  <a:srgbClr val="FFBE2E"/>
+                </a:solidFill>
+                <a:latin typeface="Liberation Sans"/>
+              </a:rPr>
+              <a:t>02  </a:t>
+            </a:r>
+            <a:r>
+              <a:rPr sz="1100" b="0" i="0">
+                <a:solidFill>
+                  <a:srgbClr val="FFFFFF"/>
+                </a:solidFill>
+                <a:latin typeface="Liberation Sans"/>
+              </a:rPr>
+              <a:t>Per le Scuole</a:t>
+            </a:r>
+          </a:p>
+        </p:txBody>
+      </p:sp>
+      <p:sp>
+        <p:nvSpPr>
+          <p:cNvPr id="13" name="Rounded Rectangle 12">
+            <a:hlinkClick action="ppaction://hlinksldjump" r:id="rId6"/>
+          </p:cNvPr>
+          <p:cNvSpPr/>
+          <p:nvPr/>
+        </p:nvSpPr>
+        <p:spPr>
+          <a:xfrm>
+            <a:off x="6446520" y="2578608"/>
+            <a:ext cx="4983480" cy="457200"/>
+          </a:xfrm>
+          <a:prstGeom prst="roundRect">
+            <a:avLst/>
+          </a:prstGeom>
+          <a:solidFill>
+            <a:srgbClr val="003366"/>
+          </a:solidFill>
+          <a:ln w="9525">
+            <a:solidFill>
+              <a:srgbClr val="4A6A8A"/>
+            </a:solidFill>
+          </a:ln>
+          <a:effectLst/>
+        </p:spPr>
+        <p:style>
+          <a:lnRef idx="1">
+            <a:schemeClr val="accent1"/>
+          </a:lnRef>
+          <a:fillRef idx="3">
+            <a:schemeClr val="accent1"/>
+          </a:fillRef>
+          <a:effectRef idx="2">
+            <a:schemeClr val="accent1"/>
+          </a:effectRef>
+          <a:fontRef idx="minor">
+            <a:schemeClr val="lt1"/>
+          </a:fontRef>
+        </p:style>
+        <p:txBody>
+          <a:bodyPr rtlCol="0" anchor="ctr" wrap="square" lIns="146304" tIns="9144" bIns="9144"/>
+          <a:lstStyle/>
+          <a:p>
+            <a:pPr algn="l"/>
+            <a:r>
+              <a:rPr sz="1100" b="1" i="0">
+                <a:solidFill>
+                  <a:srgbClr val="FFBE2E"/>
+                </a:solidFill>
+                <a:latin typeface="Liberation Sans"/>
+              </a:rPr>
+              <a:t>03  </a:t>
+            </a:r>
+            <a:r>
+              <a:rPr sz="1100" b="0" i="0">
+                <a:solidFill>
+                  <a:srgbClr val="FFFFFF"/>
+                </a:solidFill>
+                <a:latin typeface="Liberation Sans"/>
+              </a:rPr>
+              <a:t>Accessibilità e inclusione</a:t>
+            </a:r>
+          </a:p>
+        </p:txBody>
+      </p:sp>
+      <p:sp>
+        <p:nvSpPr>
+          <p:cNvPr id="14" name="Rounded Rectangle 13">
+            <a:hlinkClick action="ppaction://hlinksldjump" r:id="rId7"/>
+          </p:cNvPr>
+          <p:cNvSpPr/>
+          <p:nvPr/>
+        </p:nvSpPr>
+        <p:spPr>
+          <a:xfrm>
+            <a:off x="6446520" y="3127248"/>
+            <a:ext cx="4983480" cy="457200"/>
+          </a:xfrm>
+          <a:prstGeom prst="roundRect">
+            <a:avLst/>
+          </a:prstGeom>
+          <a:solidFill>
+            <a:srgbClr val="003366"/>
+          </a:solidFill>
+          <a:ln w="9525">
+            <a:solidFill>
+              <a:srgbClr val="4A6A8A"/>
+            </a:solidFill>
+          </a:ln>
+          <a:effectLst/>
+        </p:spPr>
+        <p:style>
+          <a:lnRef idx="1">
+            <a:schemeClr val="accent1"/>
+          </a:lnRef>
+          <a:fillRef idx="3">
+            <a:schemeClr val="accent1"/>
+          </a:fillRef>
+          <a:effectRef idx="2">
+            <a:schemeClr val="accent1"/>
+          </a:effectRef>
+          <a:fontRef idx="minor">
+            <a:schemeClr val="lt1"/>
+          </a:fontRef>
+        </p:style>
+        <p:txBody>
+          <a:bodyPr rtlCol="0" anchor="ctr" wrap="square" lIns="146304" tIns="9144" bIns="9144"/>
+          <a:lstStyle/>
+          <a:p>
+            <a:pPr algn="l"/>
+            <a:r>
+              <a:rPr sz="1100" b="1" i="0">
+                <a:solidFill>
+                  <a:srgbClr val="FFBE2E"/>
+                </a:solidFill>
+                <a:latin typeface="Liberation Sans"/>
+              </a:rPr>
+              <a:t>04  </a:t>
+            </a:r>
+            <a:r>
+              <a:rPr sz="1100" b="0" i="0">
+                <a:solidFill>
+                  <a:srgbClr val="FFFFFF"/>
+                </a:solidFill>
+                <a:latin typeface="Liberation Sans"/>
+              </a:rPr>
+              <a:t>Volontariato</a:t>
+            </a:r>
+          </a:p>
+        </p:txBody>
+      </p:sp>
+      <p:sp>
+        <p:nvSpPr>
+          <p:cNvPr id="15" name="Rounded Rectangle 14">
+            <a:hlinkClick action="ppaction://hlinksldjump" r:id="rId8"/>
+          </p:cNvPr>
+          <p:cNvSpPr/>
+          <p:nvPr/>
+        </p:nvSpPr>
+        <p:spPr>
+          <a:xfrm>
+            <a:off x="6446520" y="3675887"/>
+            <a:ext cx="4983480" cy="457200"/>
+          </a:xfrm>
+          <a:prstGeom prst="roundRect">
+            <a:avLst/>
+          </a:prstGeom>
+          <a:solidFill>
+            <a:srgbClr val="003366"/>
+          </a:solidFill>
+          <a:ln w="9525">
+            <a:solidFill>
+              <a:srgbClr val="4A6A8A"/>
+            </a:solidFill>
+          </a:ln>
+          <a:effectLst/>
+        </p:spPr>
+        <p:style>
+          <a:lnRef idx="1">
+            <a:schemeClr val="accent1"/>
+          </a:lnRef>
+          <a:fillRef idx="3">
+            <a:schemeClr val="accent1"/>
+          </a:fillRef>
+          <a:effectRef idx="2">
+            <a:schemeClr val="accent1"/>
+          </a:effectRef>
+          <a:fontRef idx="minor">
+            <a:schemeClr val="lt1"/>
+          </a:fontRef>
+        </p:style>
+        <p:txBody>
+          <a:bodyPr rtlCol="0" anchor="ctr" wrap="square" lIns="146304" tIns="9144" bIns="9144"/>
+          <a:lstStyle/>
+          <a:p>
+            <a:pPr algn="l"/>
+            <a:r>
+              <a:rPr sz="1100" b="1" i="0">
+                <a:solidFill>
+                  <a:srgbClr val="FFBE2E"/>
+                </a:solidFill>
+                <a:latin typeface="Liberation Sans"/>
+              </a:rPr>
+              <a:t>05  </a:t>
+            </a:r>
+            <a:r>
+              <a:rPr sz="1100" b="0" i="0">
+                <a:solidFill>
+                  <a:srgbClr val="FFFFFF"/>
+                </a:solidFill>
+                <a:latin typeface="Liberation Sans"/>
+              </a:rPr>
+              <a:t>Risorse e trasparenza</a:t>
+            </a:r>
+          </a:p>
+        </p:txBody>
+      </p:sp>
+      <p:sp>
+        <p:nvSpPr>
+          <p:cNvPr id="16" name="Rounded Rectangle 15">
+            <a:hlinkClick action="ppaction://hlinksldjump" r:id="rId9"/>
+          </p:cNvPr>
+          <p:cNvSpPr/>
+          <p:nvPr/>
+        </p:nvSpPr>
+        <p:spPr>
+          <a:xfrm>
+            <a:off x="6446520" y="4224528"/>
+            <a:ext cx="4983480" cy="457200"/>
+          </a:xfrm>
+          <a:prstGeom prst="roundRect">
+            <a:avLst/>
+          </a:prstGeom>
+          <a:solidFill>
+            <a:srgbClr val="003366"/>
+          </a:solidFill>
+          <a:ln w="9525">
+            <a:solidFill>
+              <a:srgbClr val="4A6A8A"/>
+            </a:solidFill>
+          </a:ln>
+          <a:effectLst/>
+        </p:spPr>
+        <p:style>
+          <a:lnRef idx="1">
+            <a:schemeClr val="accent1"/>
+          </a:lnRef>
+          <a:fillRef idx="3">
+            <a:schemeClr val="accent1"/>
+          </a:fillRef>
+          <a:effectRef idx="2">
+            <a:schemeClr val="accent1"/>
+          </a:effectRef>
+          <a:fontRef idx="minor">
+            <a:schemeClr val="lt1"/>
+          </a:fontRef>
+        </p:style>
+        <p:txBody>
+          <a:bodyPr rtlCol="0" anchor="ctr" wrap="square" lIns="146304" tIns="9144" bIns="9144"/>
+          <a:lstStyle/>
+          <a:p>
+            <a:pPr algn="l"/>
+            <a:r>
+              <a:rPr sz="1100" b="1" i="0">
+                <a:solidFill>
+                  <a:srgbClr val="FFBE2E"/>
+                </a:solidFill>
+                <a:latin typeface="Liberation Sans"/>
+              </a:rPr>
+              <a:t>06  </a:t>
+            </a:r>
+            <a:r>
+              <a:rPr sz="1100" b="0" i="0">
+                <a:solidFill>
+                  <a:srgbClr val="FFFFFF"/>
+                </a:solidFill>
+                <a:latin typeface="Liberation Sans"/>
+              </a:rPr>
+              <a:t>Comunicazione</a:t>
+            </a:r>
+          </a:p>
+        </p:txBody>
+      </p:sp>
+      <p:sp>
+        <p:nvSpPr>
+          <p:cNvPr id="17" name="Rounded Rectangle 16"/>
+          <p:cNvSpPr/>
+          <p:nvPr/>
+        </p:nvSpPr>
+        <p:spPr>
+          <a:xfrm>
+            <a:off x="6446520" y="4773168"/>
+            <a:ext cx="4983480" cy="457200"/>
+          </a:xfrm>
+          <a:prstGeom prst="roundRect">
+            <a:avLst/>
+          </a:prstGeom>
+          <a:solidFill>
+            <a:srgbClr val="FFBE2E"/>
           </a:solidFill>
           <a:ln>
             <a:noFill/>
@@ -48081,99 +48608,41 @@
           </a:fontRef>
         </p:style>
         <p:txBody>
-          <a:bodyPr rtlCol="0" anchor="ctr" wrap="square" lIns="109728" rIns="109728" tIns="36576" bIns="36576"/>
-          <a:lstStyle/>
-          <a:p>
-            <a:pPr algn="ctr"/>
-          </a:p>
-        </p:txBody>
-      </p:sp>
-      <p:pic>
-        <p:nvPicPr>
-          <p:cNvPr id="14" name="Picture 13" descr="hdd-network-fill_ffffff.png"/>
-          <p:cNvPicPr>
-            <a:picLocks noChangeAspect="1"/>
-          </p:cNvPicPr>
-          <p:nvPr/>
-        </p:nvPicPr>
-        <p:blipFill>
-          <a:blip r:embed="rId4"/>
-          <a:stretch>
-            <a:fillRect/>
-          </a:stretch>
-        </p:blipFill>
-        <p:spPr>
-          <a:xfrm>
-            <a:off x="3218870" y="2363906"/>
-            <a:ext cx="337962" cy="337962"/>
-          </a:xfrm>
-          <a:prstGeom prst="rect">
-            <a:avLst/>
-          </a:prstGeom>
-        </p:spPr>
-      </p:pic>
-      <p:sp>
-        <p:nvSpPr>
-          <p:cNvPr id="15" name="Rounded Rectangle 14"/>
-          <p:cNvSpPr/>
-          <p:nvPr/>
-        </p:nvSpPr>
-        <p:spPr>
-          <a:xfrm>
-            <a:off x="6163055" y="1965960"/>
-            <a:ext cx="5221224" cy="1997964"/>
-          </a:xfrm>
-          <a:prstGeom prst="roundRect">
-            <a:avLst/>
-          </a:prstGeom>
-          <a:solidFill>
-            <a:srgbClr val="F4F7FB"/>
-          </a:solidFill>
-          <a:ln w="12700">
-            <a:solidFill>
-              <a:srgbClr val="D8DEE4"/>
-            </a:solidFill>
-          </a:ln>
-          <a:effectLst>
-            <a:outerShdw blurRad="50800" dist="25400" dir="5400000" rotWithShape="0">
-              <a:srgbClr val="001A33">
-                <a:alpha val="42000"/>
-              </a:srgbClr>
-            </a:outerShdw>
-          </a:effectLst>
-        </p:spPr>
-        <p:style>
-          <a:lnRef idx="1">
-            <a:schemeClr val="accent1"/>
-          </a:lnRef>
-          <a:fillRef idx="3">
-            <a:schemeClr val="accent1"/>
-          </a:fillRef>
-          <a:effectRef idx="2">
-            <a:schemeClr val="accent1"/>
-          </a:effectRef>
-          <a:fontRef idx="minor">
-            <a:schemeClr val="lt1"/>
-          </a:fontRef>
-        </p:style>
-        <p:txBody>
-          <a:bodyPr rtlCol="0" anchor="ctr" wrap="square" lIns="109728" rIns="109728" tIns="36576" bIns="36576"/>
-          <a:lstStyle/>
-          <a:p>
-            <a:pPr algn="ctr"/>
-          </a:p>
-        </p:txBody>
-      </p:sp>
-      <p:sp>
-        <p:nvSpPr>
-          <p:cNvPr id="16" name="TextBox 15"/>
+          <a:bodyPr rtlCol="0" anchor="ctr" wrap="square" lIns="146304" tIns="9144" bIns="9144"/>
+          <a:lstStyle/>
+          <a:p>
+            <a:pPr algn="l"/>
+            <a:r>
+              <a:rPr sz="1100" b="1" i="0">
+                <a:solidFill>
+                  <a:srgbClr val="001A33"/>
+                </a:solidFill>
+                <a:latin typeface="Liberation Sans"/>
+              </a:rPr>
+              <a:t>07  </a:t>
+            </a:r>
+            <a:r>
+              <a:rPr sz="1100" b="1" i="0">
+                <a:solidFill>
+                  <a:srgbClr val="001A33"/>
+                </a:solidFill>
+                <a:latin typeface="Liberation Sans"/>
+              </a:rPr>
+              <a:t>Infrastruttura, fonti e sicurezza</a:t>
+            </a:r>
+          </a:p>
+        </p:txBody>
+      </p:sp>
+      <p:sp>
+        <p:nvSpPr>
+          <p:cNvPr id="18" name="TextBox 17"/>
           <p:cNvSpPr txBox="1"/>
           <p:nvPr/>
         </p:nvSpPr>
         <p:spPr>
           <a:xfrm>
-            <a:off x="6345936" y="3063239"/>
-            <a:ext cx="4855464" cy="717804"/>
+            <a:off x="9857232" y="6373368"/>
+            <a:ext cx="329184" cy="365760"/>
           </a:xfrm>
           <a:prstGeom prst="rect">
             <a:avLst/>
@@ -48186,153 +48655,30 @@
           </a:bodyPr>
           <a:lstStyle/>
           <a:p>
-            <a:pPr algn="ctr">
-              <a:lnSpc>
-                <a:spcPct val="112000"/>
-              </a:lnSpc>
-            </a:pPr>
-            <a:r>
-              <a:rPr sz="1400" b="0" i="0">
-                <a:solidFill>
-                  <a:srgbClr val="1A1A1A"/>
-                </a:solidFill>
-                <a:latin typeface="Liberation Sans"/>
-              </a:rPr>
-              <a:t>Nessun cookie di profilazione: approccio privacy-first.</a:t>
-            </a:r>
-          </a:p>
-        </p:txBody>
-      </p:sp>
-      <p:sp>
-        <p:nvSpPr>
-          <p:cNvPr id="17" name="Oval 16"/>
-          <p:cNvSpPr/>
-          <p:nvPr/>
-        </p:nvSpPr>
-        <p:spPr>
-          <a:xfrm>
-            <a:off x="8471915" y="2231136"/>
-            <a:ext cx="603504" cy="603504"/>
-          </a:xfrm>
-          <a:prstGeom prst="ellipse">
-            <a:avLst/>
-          </a:prstGeom>
-          <a:solidFill>
-            <a:srgbClr val="15803D"/>
-          </a:solidFill>
-          <a:ln>
-            <a:noFill/>
-          </a:ln>
-          <a:effectLst/>
-        </p:spPr>
-        <p:style>
-          <a:lnRef idx="1">
-            <a:schemeClr val="accent1"/>
-          </a:lnRef>
-          <a:fillRef idx="3">
-            <a:schemeClr val="accent1"/>
-          </a:fillRef>
-          <a:effectRef idx="2">
-            <a:schemeClr val="accent1"/>
-          </a:effectRef>
-          <a:fontRef idx="minor">
-            <a:schemeClr val="lt1"/>
-          </a:fontRef>
-        </p:style>
-        <p:txBody>
-          <a:bodyPr rtlCol="0" anchor="ctr" wrap="square" lIns="109728" rIns="109728" tIns="36576" bIns="36576"/>
-          <a:lstStyle/>
-          <a:p>
-            <a:pPr algn="ctr"/>
-          </a:p>
-        </p:txBody>
-      </p:sp>
-      <p:pic>
-        <p:nvPicPr>
-          <p:cNvPr id="18" name="Picture 17" descr="hdd-network-fill_ffffff.png"/>
-          <p:cNvPicPr>
-            <a:picLocks noChangeAspect="1"/>
-          </p:cNvPicPr>
-          <p:nvPr/>
-        </p:nvPicPr>
-        <p:blipFill>
-          <a:blip r:embed="rId4"/>
-          <a:stretch>
-            <a:fillRect/>
-          </a:stretch>
-        </p:blipFill>
-        <p:spPr>
-          <a:xfrm>
-            <a:off x="8604686" y="2363906"/>
-            <a:ext cx="337962" cy="337962"/>
-          </a:xfrm>
-          <a:prstGeom prst="rect">
-            <a:avLst/>
-          </a:prstGeom>
-        </p:spPr>
-      </p:pic>
-      <p:sp>
-        <p:nvSpPr>
-          <p:cNvPr id="19" name="Rounded Rectangle 18"/>
-          <p:cNvSpPr/>
-          <p:nvPr/>
-        </p:nvSpPr>
-        <p:spPr>
-          <a:xfrm>
-            <a:off x="777240" y="4128516"/>
-            <a:ext cx="5221224" cy="1997964"/>
-          </a:xfrm>
-          <a:prstGeom prst="roundRect">
-            <a:avLst/>
-          </a:prstGeom>
-          <a:solidFill>
-            <a:srgbClr val="F4F7FB"/>
-          </a:solidFill>
-          <a:ln w="12700">
-            <a:solidFill>
-              <a:srgbClr val="D8DEE4"/>
-            </a:solidFill>
-          </a:ln>
-          <a:effectLst>
-            <a:outerShdw blurRad="50800" dist="25400" dir="5400000" rotWithShape="0">
-              <a:srgbClr val="001A33">
-                <a:alpha val="42000"/>
-              </a:srgbClr>
-            </a:outerShdw>
-          </a:effectLst>
-        </p:spPr>
-        <p:style>
-          <a:lnRef idx="1">
-            <a:schemeClr val="accent1"/>
-          </a:lnRef>
-          <a:fillRef idx="3">
-            <a:schemeClr val="accent1"/>
-          </a:fillRef>
-          <a:effectRef idx="2">
-            <a:schemeClr val="accent1"/>
-          </a:effectRef>
-          <a:fontRef idx="minor">
-            <a:schemeClr val="lt1"/>
-          </a:fontRef>
-        </p:style>
-        <p:txBody>
-          <a:bodyPr rtlCol="0" anchor="ctr" wrap="square" lIns="109728" rIns="109728" tIns="36576" bIns="36576"/>
-          <a:lstStyle/>
-          <a:p>
-            <a:pPr algn="ctr"/>
-          </a:p>
-        </p:txBody>
-      </p:sp>
-      <p:sp>
-        <p:nvSpPr>
-          <p:cNvPr id="20" name="TextBox 19"/>
+            <a:pPr algn="ctr"/>
+            <a:r>
+              <a:rPr sz="1500" b="1" i="0">
+                <a:solidFill>
+                  <a:srgbClr val="FFBE2E"/>
+                </a:solidFill>
+                <a:latin typeface="Liberation Sans"/>
+                <a:hlinkClick r:id="rId10" action="ppaction://hlinksldjump"/>
+              </a:rPr>
+              <a:t>‹</a:t>
+            </a:r>
+          </a:p>
+        </p:txBody>
+      </p:sp>
+      <p:sp>
+        <p:nvSpPr>
+          <p:cNvPr id="19" name="TextBox 18"/>
           <p:cNvSpPr txBox="1"/>
           <p:nvPr/>
         </p:nvSpPr>
         <p:spPr>
           <a:xfrm>
-            <a:off x="960120" y="5225796"/>
-            <a:ext cx="4855464" cy="717804"/>
+            <a:off x="10222992" y="6373368"/>
+            <a:ext cx="329184" cy="365760"/>
           </a:xfrm>
           <a:prstGeom prst="rect">
             <a:avLst/>
@@ -48345,316 +48691,14 @@
           </a:bodyPr>
           <a:lstStyle/>
           <a:p>
-            <a:pPr algn="ctr">
-              <a:lnSpc>
-                <a:spcPct val="112000"/>
-              </a:lnSpc>
-            </a:pPr>
-            <a:r>
-              <a:rPr sz="1400" b="0" i="0">
-                <a:solidFill>
-                  <a:srgbClr val="1A1A1A"/>
-                </a:solidFill>
-                <a:latin typeface="Liberation Sans"/>
-              </a:rPr>
-              <a:t>Pubblicazione su doppio ambiente per la continuità del servizio.</a:t>
-            </a:r>
-          </a:p>
-        </p:txBody>
-      </p:sp>
-      <p:sp>
-        <p:nvSpPr>
-          <p:cNvPr id="21" name="Oval 20"/>
-          <p:cNvSpPr/>
-          <p:nvPr/>
-        </p:nvSpPr>
-        <p:spPr>
-          <a:xfrm>
-            <a:off x="3086100" y="4393692"/>
-            <a:ext cx="603504" cy="603504"/>
-          </a:xfrm>
-          <a:prstGeom prst="ellipse">
-            <a:avLst/>
-          </a:prstGeom>
-          <a:solidFill>
-            <a:srgbClr val="B45309"/>
-          </a:solidFill>
-          <a:ln>
-            <a:noFill/>
-          </a:ln>
-          <a:effectLst/>
-        </p:spPr>
-        <p:style>
-          <a:lnRef idx="1">
-            <a:schemeClr val="accent1"/>
-          </a:lnRef>
-          <a:fillRef idx="3">
-            <a:schemeClr val="accent1"/>
-          </a:fillRef>
-          <a:effectRef idx="2">
-            <a:schemeClr val="accent1"/>
-          </a:effectRef>
-          <a:fontRef idx="minor">
-            <a:schemeClr val="lt1"/>
-          </a:fontRef>
-        </p:style>
-        <p:txBody>
-          <a:bodyPr rtlCol="0" anchor="ctr" wrap="square" lIns="109728" rIns="109728" tIns="36576" bIns="36576"/>
-          <a:lstStyle/>
-          <a:p>
-            <a:pPr algn="ctr"/>
-          </a:p>
-        </p:txBody>
-      </p:sp>
-      <p:pic>
-        <p:nvPicPr>
-          <p:cNvPr id="22" name="Picture 21" descr="hdd-network-fill_ffffff.png"/>
-          <p:cNvPicPr>
-            <a:picLocks noChangeAspect="1"/>
-          </p:cNvPicPr>
-          <p:nvPr/>
-        </p:nvPicPr>
-        <p:blipFill>
-          <a:blip r:embed="rId4"/>
-          <a:stretch>
-            <a:fillRect/>
-          </a:stretch>
-        </p:blipFill>
-        <p:spPr>
-          <a:xfrm>
-            <a:off x="3218870" y="4526462"/>
-            <a:ext cx="337962" cy="337962"/>
-          </a:xfrm>
-          <a:prstGeom prst="rect">
-            <a:avLst/>
-          </a:prstGeom>
-        </p:spPr>
-      </p:pic>
-      <p:sp>
-        <p:nvSpPr>
-          <p:cNvPr id="23" name="Rounded Rectangle 22"/>
-          <p:cNvSpPr/>
-          <p:nvPr/>
-        </p:nvSpPr>
-        <p:spPr>
-          <a:xfrm>
-            <a:off x="6163055" y="4128516"/>
-            <a:ext cx="5221224" cy="1997964"/>
-          </a:xfrm>
-          <a:prstGeom prst="roundRect">
-            <a:avLst/>
-          </a:prstGeom>
-          <a:solidFill>
-            <a:srgbClr val="F4F7FB"/>
-          </a:solidFill>
-          <a:ln w="12700">
-            <a:solidFill>
-              <a:srgbClr val="D8DEE4"/>
-            </a:solidFill>
-          </a:ln>
-          <a:effectLst>
-            <a:outerShdw blurRad="50800" dist="25400" dir="5400000" rotWithShape="0">
-              <a:srgbClr val="001A33">
-                <a:alpha val="42000"/>
-              </a:srgbClr>
-            </a:outerShdw>
-          </a:effectLst>
-        </p:spPr>
-        <p:style>
-          <a:lnRef idx="1">
-            <a:schemeClr val="accent1"/>
-          </a:lnRef>
-          <a:fillRef idx="3">
-            <a:schemeClr val="accent1"/>
-          </a:fillRef>
-          <a:effectRef idx="2">
-            <a:schemeClr val="accent1"/>
-          </a:effectRef>
-          <a:fontRef idx="minor">
-            <a:schemeClr val="lt1"/>
-          </a:fontRef>
-        </p:style>
-        <p:txBody>
-          <a:bodyPr rtlCol="0" anchor="ctr" wrap="square" lIns="109728" rIns="109728" tIns="36576" bIns="36576"/>
-          <a:lstStyle/>
-          <a:p>
-            <a:pPr algn="ctr"/>
-          </a:p>
-        </p:txBody>
-      </p:sp>
-      <p:sp>
-        <p:nvSpPr>
-          <p:cNvPr id="24" name="TextBox 23"/>
-          <p:cNvSpPr txBox="1"/>
-          <p:nvPr/>
-        </p:nvSpPr>
-        <p:spPr>
-          <a:xfrm>
-            <a:off x="6345936" y="5225796"/>
-            <a:ext cx="4855464" cy="717804"/>
-          </a:xfrm>
-          <a:prstGeom prst="rect">
-            <a:avLst/>
-          </a:prstGeom>
-          <a:noFill/>
-        </p:spPr>
-        <p:txBody>
-          <a:bodyPr wrap="square" anchor="t" lIns="45720" rIns="45720" tIns="18288" bIns="18288">
-            <a:spAutoFit/>
-          </a:bodyPr>
-          <a:lstStyle/>
-          <a:p>
-            <a:pPr algn="ctr">
-              <a:lnSpc>
-                <a:spcPct val="112000"/>
-              </a:lnSpc>
-            </a:pPr>
-            <a:r>
-              <a:rPr sz="1400" b="0" i="0">
-                <a:solidFill>
-                  <a:srgbClr val="1A1A1A"/>
-                </a:solidFill>
-                <a:latin typeface="Liberation Sans"/>
-              </a:rPr>
-              <a:t>Contenuti documentabili anche in caso di audit esterno.</a:t>
-            </a:r>
-          </a:p>
-        </p:txBody>
-      </p:sp>
-      <p:sp>
-        <p:nvSpPr>
-          <p:cNvPr id="25" name="Oval 24"/>
-          <p:cNvSpPr/>
-          <p:nvPr/>
-        </p:nvSpPr>
-        <p:spPr>
-          <a:xfrm>
-            <a:off x="8471915" y="4393692"/>
-            <a:ext cx="603504" cy="603504"/>
-          </a:xfrm>
-          <a:prstGeom prst="ellipse">
-            <a:avLst/>
-          </a:prstGeom>
-          <a:solidFill>
-            <a:srgbClr val="075985"/>
-          </a:solidFill>
-          <a:ln>
-            <a:noFill/>
-          </a:ln>
-          <a:effectLst/>
-        </p:spPr>
-        <p:style>
-          <a:lnRef idx="1">
-            <a:schemeClr val="accent1"/>
-          </a:lnRef>
-          <a:fillRef idx="3">
-            <a:schemeClr val="accent1"/>
-          </a:fillRef>
-          <a:effectRef idx="2">
-            <a:schemeClr val="accent1"/>
-          </a:effectRef>
-          <a:fontRef idx="minor">
-            <a:schemeClr val="lt1"/>
-          </a:fontRef>
-        </p:style>
-        <p:txBody>
-          <a:bodyPr rtlCol="0" anchor="ctr" wrap="square" lIns="109728" rIns="109728" tIns="36576" bIns="36576"/>
-          <a:lstStyle/>
-          <a:p>
-            <a:pPr algn="ctr"/>
-          </a:p>
-        </p:txBody>
-      </p:sp>
-      <p:pic>
-        <p:nvPicPr>
-          <p:cNvPr id="26" name="Picture 25" descr="hdd-network-fill_ffffff.png"/>
-          <p:cNvPicPr>
-            <a:picLocks noChangeAspect="1"/>
-          </p:cNvPicPr>
-          <p:nvPr/>
-        </p:nvPicPr>
-        <p:blipFill>
-          <a:blip r:embed="rId4"/>
-          <a:stretch>
-            <a:fillRect/>
-          </a:stretch>
-        </p:blipFill>
-        <p:spPr>
-          <a:xfrm>
-            <a:off x="8604686" y="4526462"/>
-            <a:ext cx="337962" cy="337962"/>
-          </a:xfrm>
-          <a:prstGeom prst="rect">
-            <a:avLst/>
-          </a:prstGeom>
-        </p:spPr>
-      </p:pic>
-      <p:sp>
-        <p:nvSpPr>
-          <p:cNvPr id="27" name="TextBox 26"/>
-          <p:cNvSpPr txBox="1"/>
-          <p:nvPr/>
-        </p:nvSpPr>
-        <p:spPr>
-          <a:xfrm>
-            <a:off x="9857232" y="6373368"/>
-            <a:ext cx="329184" cy="365760"/>
-          </a:xfrm>
-          <a:prstGeom prst="rect">
-            <a:avLst/>
-          </a:prstGeom>
-          <a:noFill/>
-        </p:spPr>
-        <p:txBody>
-          <a:bodyPr wrap="square" anchor="t" lIns="45720" rIns="45720" tIns="18288" bIns="18288">
-            <a:spAutoFit/>
-          </a:bodyPr>
-          <a:lstStyle/>
-          <a:p>
             <a:pPr algn="ctr"/>
             <a:r>
               <a:rPr sz="1500" b="1" i="0">
                 <a:solidFill>
-                  <a:srgbClr val="003366"/>
-                </a:solidFill>
-                <a:latin typeface="Liberation Sans"/>
-                <a:hlinkClick r:id="rId5" action="ppaction://hlinksldjump"/>
-              </a:rPr>
-              <a:t>‹</a:t>
-            </a:r>
-          </a:p>
-        </p:txBody>
-      </p:sp>
-      <p:sp>
-        <p:nvSpPr>
-          <p:cNvPr id="28" name="TextBox 27"/>
-          <p:cNvSpPr txBox="1"/>
-          <p:nvPr/>
-        </p:nvSpPr>
-        <p:spPr>
-          <a:xfrm>
-            <a:off x="10222992" y="6373368"/>
-            <a:ext cx="329184" cy="365760"/>
-          </a:xfrm>
-          <a:prstGeom prst="rect">
-            <a:avLst/>
-          </a:prstGeom>
-          <a:noFill/>
-        </p:spPr>
-        <p:txBody>
-          <a:bodyPr wrap="square" anchor="t" lIns="45720" rIns="45720" tIns="18288" bIns="18288">
-            <a:spAutoFit/>
-          </a:bodyPr>
-          <a:lstStyle/>
-          <a:p>
-            <a:pPr algn="ctr"/>
-            <a:r>
-              <a:rPr sz="1500" b="1" i="0">
-                <a:solidFill>
-                  <a:srgbClr val="003366"/>
-                </a:solidFill>
-                <a:latin typeface="Liberation Sans"/>
-                <a:hlinkClick r:id="rId6" action="ppaction://hlinksldjump"/>
+                  <a:srgbClr val="FFBE2E"/>
+                </a:solidFill>
+                <a:latin typeface="Liberation Sans"/>
+                <a:hlinkClick r:id="rId11" action="ppaction://hlinksldjump"/>
               </a:rPr>
               <a:t>›</a:t>
             </a:r>
@@ -48820,7 +48864,7 @@
                 </a:solidFill>
                 <a:latin typeface="Liberation Sans"/>
               </a:rPr>
-              <a:t>Fonti e dati di riferimento</a:t>
+              <a:t>Infrastruttura, sicurezza e prestazioni</a:t>
             </a:r>
           </a:p>
         </p:txBody>
@@ -49104,7 +49148,7 @@
                 </a:solidFill>
                 <a:latin typeface="Liberation Sans"/>
               </a:rPr>
-              <a:t>Istituzioni: DPC, INGV, ISPRA, CNR, ItaliaMeteo, EUMETSAT, Copernicus, ARPA Lazio, ASL Roma 6.</a:t>
+              <a:t>Sito statico ad alte prestazioni, servito in HTTPS.</a:t>
             </a:r>
           </a:p>
         </p:txBody>
@@ -49155,7 +49199,7 @@
       </p:sp>
       <p:pic>
         <p:nvPicPr>
-          <p:cNvPr id="14" name="Picture 13" descr="bookmark-check-fill_ffffff.png"/>
+          <p:cNvPr id="14" name="Picture 13" descr="hdd-network-fill_ffffff.png"/>
           <p:cNvPicPr>
             <a:picLocks noChangeAspect="1"/>
           </p:cNvPicPr>
@@ -49263,7 +49307,7 @@
                 </a:solidFill>
                 <a:latin typeface="Liberation Sans"/>
               </a:rPr>
-              <a:t>Standard: WCAG 2.2; ISO 22320, 22324, 22329, 31000, 7010, 14090.</a:t>
+              <a:t>Nessun cookie di profilazione: approccio privacy-first.</a:t>
             </a:r>
           </a:p>
         </p:txBody>
@@ -49314,7 +49358,7 @@
       </p:sp>
       <p:pic>
         <p:nvPicPr>
-          <p:cNvPr id="18" name="Picture 17" descr="bookmark-check-fill_ffffff.png"/>
+          <p:cNvPr id="18" name="Picture 17" descr="hdd-network-fill_ffffff.png"/>
           <p:cNvPicPr>
             <a:picLocks noChangeAspect="1"/>
           </p:cNvPicPr>
@@ -49422,7 +49466,7 @@
                 </a:solidFill>
                 <a:latin typeface="Liberation Sans"/>
               </a:rPr>
-              <a:t>Normativa: D.Lgs. 1/2018, Direttiva PCM 30/4/2021, Circolare DPC 6/8/2018, Legge Stanca.</a:t>
+              <a:t>Pubblicazione su doppio ambiente per la continuità del servizio.</a:t>
             </a:r>
           </a:p>
         </p:txBody>
@@ -49473,7 +49517,7 @@
       </p:sp>
       <p:pic>
         <p:nvPicPr>
-          <p:cNvPr id="22" name="Picture 21" descr="bookmark-check-fill_ffffff.png"/>
+          <p:cNvPr id="22" name="Picture 21" descr="hdd-network-fill_ffffff.png"/>
           <p:cNvPicPr>
             <a:picLocks noChangeAspect="1"/>
           </p:cNvPicPr>
@@ -49581,7 +49625,7 @@
                 </a:solidFill>
                 <a:latin typeface="Liberation Sans"/>
               </a:rPr>
-              <a:t>Design e linguaggio: AgID, Designers Italia, Bootstrap Italia.</a:t>
+              <a:t>Contenuti documentabili anche in caso di audit esterno.</a:t>
             </a:r>
           </a:p>
         </p:txBody>
@@ -49632,7 +49676,7 @@
       </p:sp>
       <p:pic>
         <p:nvPicPr>
-          <p:cNvPr id="26" name="Picture 25" descr="bookmark-check-fill_ffffff.png"/>
+          <p:cNvPr id="26" name="Picture 25" descr="hdd-network-fill_ffffff.png"/>
           <p:cNvPicPr>
             <a:picLocks noChangeAspect="1"/>
           </p:cNvPicPr>
@@ -49885,7 +49929,7 @@
                 </a:solidFill>
                 <a:latin typeface="Liberation Sans"/>
               </a:rPr>
-              <a:t>Punti di forza in sintesi</a:t>
+              <a:t>Fonti e dati di riferimento</a:t>
             </a:r>
           </a:p>
         </p:txBody>
@@ -50169,7 +50213,7 @@
                 </a:solidFill>
                 <a:latin typeface="Liberation Sans"/>
               </a:rPr>
-              <a:t>Accessibilità reale e multicanale: vista, udito, lingua, cognizione.</a:t>
+              <a:t>Istituzioni: DPC, INGV, ISPRA, CNR, ItaliaMeteo, EUMETSAT, Copernicus, ARPA Lazio, ASL Roma 6.</a:t>
             </a:r>
           </a:p>
         </p:txBody>
@@ -50220,7 +50264,7 @@
       </p:sp>
       <p:pic>
         <p:nvPicPr>
-          <p:cNvPr id="14" name="Picture 13" descr="stars_ffffff.png"/>
+          <p:cNvPr id="14" name="Picture 13" descr="bookmark-check-fill_ffffff.png"/>
           <p:cNvPicPr>
             <a:picLocks noChangeAspect="1"/>
           </p:cNvPicPr>
@@ -50328,7 +50372,7 @@
                 </a:solidFill>
                 <a:latin typeface="Liberation Sans"/>
               </a:rPr>
-              <a:t>Dati sempre verificati e con fonte dichiarata.</a:t>
+              <a:t>Standard: WCAG 2.2; ISO 22320, 22324, 22329, 31000, 7010, 14090.</a:t>
             </a:r>
           </a:p>
         </p:txBody>
@@ -50379,7 +50423,7 @@
       </p:sp>
       <p:pic>
         <p:nvPicPr>
-          <p:cNvPr id="18" name="Picture 17" descr="stars_ffffff.png"/>
+          <p:cNvPr id="18" name="Picture 17" descr="bookmark-check-fill_ffffff.png"/>
           <p:cNvPicPr>
             <a:picLocks noChangeAspect="1"/>
           </p:cNvPicPr>
@@ -50487,7 +50531,7 @@
                 </a:solidFill>
                 <a:latin typeface="Liberation Sans"/>
               </a:rPr>
-              <a:t>Coerenza con le prassi ufficiali della Pubblica Amministrazione.</a:t>
+              <a:t>Normativa: D.Lgs. 1/2018, Direttiva PCM 30/4/2021, Circolare DPC 6/8/2018, Legge Stanca.</a:t>
             </a:r>
           </a:p>
         </p:txBody>
@@ -50538,7 +50582,7 @@
       </p:sp>
       <p:pic>
         <p:nvPicPr>
-          <p:cNvPr id="22" name="Picture 21" descr="stars_ffffff.png"/>
+          <p:cNvPr id="22" name="Picture 21" descr="bookmark-check-fill_ffffff.png"/>
           <p:cNvPicPr>
             <a:picLocks noChangeAspect="1"/>
           </p:cNvPicPr>
@@ -50646,7 +50690,7 @@
                 </a:solidFill>
                 <a:latin typeface="Liberation Sans"/>
               </a:rPr>
-              <a:t>Uno strumento di servizio pubblico, sobrio e affidabile.</a:t>
+              <a:t>Design e linguaggio: AgID, Designers Italia, Bootstrap Italia.</a:t>
             </a:r>
           </a:p>
         </p:txBody>
@@ -50697,7 +50741,7 @@
       </p:sp>
       <p:pic>
         <p:nvPicPr>
-          <p:cNvPr id="26" name="Picture 25" descr="stars_ffffff.png"/>
+          <p:cNvPr id="26" name="Picture 25" descr="bookmark-check-fill_ffffff.png"/>
           <p:cNvPicPr>
             <a:picLocks noChangeAspect="1"/>
           </p:cNvPicPr>
@@ -50800,6 +50844,1071 @@
 </file>
 
 <file path=ppt/slides/slide56.xml><?xml version="1.0" encoding="utf-8"?>
+<p:sld xmlns:a="http://schemas.openxmlformats.org/drawingml/2006/main" xmlns:p="http://schemas.openxmlformats.org/presentationml/2006/main" xmlns:r="http://schemas.openxmlformats.org/officeDocument/2006/relationships">
+  <p:cSld>
+    <p:spTree>
+      <p:nvGrpSpPr>
+        <p:cNvPr id="1" name=""/>
+        <p:cNvGrpSpPr/>
+        <p:nvPr/>
+      </p:nvGrpSpPr>
+      <p:grpSpPr/>
+      <p:sp>
+        <p:nvSpPr>
+          <p:cNvPr id="2" name="Rectangle 1"/>
+          <p:cNvSpPr/>
+          <p:nvPr/>
+        </p:nvSpPr>
+        <p:spPr>
+          <a:xfrm>
+            <a:off x="0" y="0"/>
+            <a:ext cx="12191695" cy="6858000"/>
+          </a:xfrm>
+          <a:prstGeom prst="rect">
+            <a:avLst/>
+          </a:prstGeom>
+          <a:solidFill>
+            <a:srgbClr val="FFFFFF"/>
+          </a:solidFill>
+          <a:ln>
+            <a:noFill/>
+          </a:ln>
+          <a:effectLst/>
+        </p:spPr>
+        <p:style>
+          <a:lnRef idx="1">
+            <a:schemeClr val="accent1"/>
+          </a:lnRef>
+          <a:fillRef idx="3">
+            <a:schemeClr val="accent1"/>
+          </a:fillRef>
+          <a:effectRef idx="2">
+            <a:schemeClr val="accent1"/>
+          </a:effectRef>
+          <a:fontRef idx="minor">
+            <a:schemeClr val="lt1"/>
+          </a:fontRef>
+        </p:style>
+        <p:txBody>
+          <a:bodyPr rtlCol="0" anchor="ctr"/>
+          <a:lstStyle/>
+          <a:p>
+            <a:pPr algn="ctr"/>
+          </a:p>
+        </p:txBody>
+      </p:sp>
+      <p:sp>
+        <p:nvSpPr>
+          <p:cNvPr id="3" name="Rectangle 2"/>
+          <p:cNvSpPr/>
+          <p:nvPr/>
+        </p:nvSpPr>
+        <p:spPr>
+          <a:xfrm>
+            <a:off x="0" y="0"/>
+            <a:ext cx="201168" cy="6858000"/>
+          </a:xfrm>
+          <a:prstGeom prst="rect">
+            <a:avLst/>
+          </a:prstGeom>
+          <a:solidFill>
+            <a:srgbClr val="003366"/>
+          </a:solidFill>
+          <a:ln>
+            <a:noFill/>
+          </a:ln>
+          <a:effectLst/>
+        </p:spPr>
+        <p:style>
+          <a:lnRef idx="1">
+            <a:schemeClr val="accent1"/>
+          </a:lnRef>
+          <a:fillRef idx="3">
+            <a:schemeClr val="accent1"/>
+          </a:fillRef>
+          <a:effectRef idx="2">
+            <a:schemeClr val="accent1"/>
+          </a:effectRef>
+          <a:fontRef idx="minor">
+            <a:schemeClr val="lt1"/>
+          </a:fontRef>
+        </p:style>
+        <p:txBody>
+          <a:bodyPr rtlCol="0" anchor="ctr"/>
+          <a:lstStyle/>
+          <a:p>
+            <a:pPr algn="ctr"/>
+          </a:p>
+        </p:txBody>
+      </p:sp>
+      <p:pic>
+        <p:nvPicPr>
+          <p:cNvPr id="4" name="Picture 3" descr="logo-pc-genzano.png"/>
+          <p:cNvPicPr>
+            <a:picLocks noChangeAspect="1"/>
+          </p:cNvPicPr>
+          <p:nvPr/>
+        </p:nvPicPr>
+        <p:blipFill>
+          <a:blip r:embed="rId2"/>
+          <a:stretch>
+            <a:fillRect/>
+          </a:stretch>
+        </p:blipFill>
+        <p:spPr>
+          <a:xfrm>
+            <a:off x="11076127" y="411480"/>
+            <a:ext cx="658368" cy="658368"/>
+          </a:xfrm>
+          <a:prstGeom prst="rect">
+            <a:avLst/>
+          </a:prstGeom>
+        </p:spPr>
+      </p:pic>
+      <p:sp>
+        <p:nvSpPr>
+          <p:cNvPr id="5" name="TextBox 4"/>
+          <p:cNvSpPr txBox="1"/>
+          <p:nvPr/>
+        </p:nvSpPr>
+        <p:spPr>
+          <a:xfrm>
+            <a:off x="640080" y="502920"/>
+            <a:ext cx="9692640" cy="1005840"/>
+          </a:xfrm>
+          <a:prstGeom prst="rect">
+            <a:avLst/>
+          </a:prstGeom>
+          <a:noFill/>
+        </p:spPr>
+        <p:txBody>
+          <a:bodyPr wrap="square" anchor="t" lIns="45720" rIns="45720" tIns="18288" bIns="18288">
+            <a:spAutoFit/>
+          </a:bodyPr>
+          <a:lstStyle/>
+          <a:p>
+            <a:r>
+              <a:rPr sz="2800" b="1" i="0">
+                <a:solidFill>
+                  <a:srgbClr val="003366"/>
+                </a:solidFill>
+                <a:latin typeface="Liberation Sans"/>
+              </a:rPr>
+              <a:t>Punti di forza in sintesi</a:t>
+            </a:r>
+          </a:p>
+        </p:txBody>
+      </p:sp>
+      <p:sp>
+        <p:nvSpPr>
+          <p:cNvPr id="6" name="Rectangle 5"/>
+          <p:cNvSpPr/>
+          <p:nvPr/>
+        </p:nvSpPr>
+        <p:spPr>
+          <a:xfrm>
+            <a:off x="685800" y="1417320"/>
+            <a:ext cx="2011680" cy="38100"/>
+          </a:xfrm>
+          <a:prstGeom prst="rect">
+            <a:avLst/>
+          </a:prstGeom>
+          <a:solidFill>
+            <a:srgbClr val="FFBE2E"/>
+          </a:solidFill>
+          <a:ln>
+            <a:noFill/>
+          </a:ln>
+          <a:effectLst/>
+        </p:spPr>
+        <p:style>
+          <a:lnRef idx="1">
+            <a:schemeClr val="accent1"/>
+          </a:lnRef>
+          <a:fillRef idx="3">
+            <a:schemeClr val="accent1"/>
+          </a:fillRef>
+          <a:effectRef idx="2">
+            <a:schemeClr val="accent1"/>
+          </a:effectRef>
+          <a:fontRef idx="minor">
+            <a:schemeClr val="lt1"/>
+          </a:fontRef>
+        </p:style>
+        <p:txBody>
+          <a:bodyPr rtlCol="0" anchor="ctr"/>
+          <a:lstStyle/>
+          <a:p>
+            <a:pPr algn="ctr"/>
+          </a:p>
+        </p:txBody>
+      </p:sp>
+      <p:sp>
+        <p:nvSpPr>
+          <p:cNvPr id="7" name="Rectangle 6"/>
+          <p:cNvSpPr/>
+          <p:nvPr/>
+        </p:nvSpPr>
+        <p:spPr>
+          <a:xfrm>
+            <a:off x="548640" y="6419088"/>
+            <a:ext cx="11091672" cy="15240"/>
+          </a:xfrm>
+          <a:prstGeom prst="rect">
+            <a:avLst/>
+          </a:prstGeom>
+          <a:solidFill>
+            <a:srgbClr val="D8DEE4"/>
+          </a:solidFill>
+          <a:ln>
+            <a:noFill/>
+          </a:ln>
+          <a:effectLst/>
+        </p:spPr>
+        <p:style>
+          <a:lnRef idx="1">
+            <a:schemeClr val="accent1"/>
+          </a:lnRef>
+          <a:fillRef idx="3">
+            <a:schemeClr val="accent1"/>
+          </a:fillRef>
+          <a:effectRef idx="2">
+            <a:schemeClr val="accent1"/>
+          </a:effectRef>
+          <a:fontRef idx="minor">
+            <a:schemeClr val="lt1"/>
+          </a:fontRef>
+        </p:style>
+        <p:txBody>
+          <a:bodyPr rtlCol="0" anchor="ctr"/>
+          <a:lstStyle/>
+          <a:p>
+            <a:pPr algn="ctr"/>
+          </a:p>
+        </p:txBody>
+      </p:sp>
+      <p:sp>
+        <p:nvSpPr>
+          <p:cNvPr id="8" name="TextBox 7"/>
+          <p:cNvSpPr txBox="1"/>
+          <p:nvPr/>
+        </p:nvSpPr>
+        <p:spPr>
+          <a:xfrm>
+            <a:off x="548640" y="6455664"/>
+            <a:ext cx="4114800" cy="320040"/>
+          </a:xfrm>
+          <a:prstGeom prst="rect">
+            <a:avLst/>
+          </a:prstGeom>
+          <a:noFill/>
+        </p:spPr>
+        <p:txBody>
+          <a:bodyPr wrap="square" anchor="t" lIns="45720" rIns="45720" tIns="18288" bIns="18288">
+            <a:spAutoFit/>
+          </a:bodyPr>
+          <a:lstStyle/>
+          <a:p>
+            <a:r>
+              <a:rPr sz="900" b="0" i="0">
+                <a:solidFill>
+                  <a:srgbClr val="5A6B7B"/>
+                </a:solidFill>
+                <a:latin typeface="Liberation Sans"/>
+              </a:rPr>
+              <a:t>Gruppo Comunale Volontari di PC · Genzano di Roma</a:t>
+            </a:r>
+          </a:p>
+        </p:txBody>
+      </p:sp>
+      <p:sp>
+        <p:nvSpPr>
+          <p:cNvPr id="9" name="TextBox 8"/>
+          <p:cNvSpPr txBox="1"/>
+          <p:nvPr/>
+        </p:nvSpPr>
+        <p:spPr>
+          <a:xfrm>
+            <a:off x="10698480" y="6455664"/>
+            <a:ext cx="914400" cy="320040"/>
+          </a:xfrm>
+          <a:prstGeom prst="rect">
+            <a:avLst/>
+          </a:prstGeom>
+          <a:noFill/>
+        </p:spPr>
+        <p:txBody>
+          <a:bodyPr wrap="square" anchor="t" lIns="45720" rIns="45720" tIns="18288" bIns="18288">
+            <a:spAutoFit/>
+          </a:bodyPr>
+          <a:lstStyle/>
+          <a:p>
+            <a:pPr algn="r"/>
+            <a:r>
+              <a:rPr sz="900" b="1" i="0">
+                <a:solidFill>
+                  <a:srgbClr val="5A6B7B"/>
+                </a:solidFill>
+                <a:latin typeface="Liberation Sans"/>
+              </a:rPr>
+              <a:t>56</a:t>
+            </a:r>
+          </a:p>
+        </p:txBody>
+      </p:sp>
+      <p:sp>
+        <p:nvSpPr>
+          <p:cNvPr id="10" name="TextBox 9"/>
+          <p:cNvSpPr txBox="1"/>
+          <p:nvPr/>
+        </p:nvSpPr>
+        <p:spPr>
+          <a:xfrm>
+            <a:off x="4727448" y="6428232"/>
+            <a:ext cx="2743200" cy="329184"/>
+          </a:xfrm>
+          <a:prstGeom prst="rect">
+            <a:avLst/>
+          </a:prstGeom>
+          <a:noFill/>
+        </p:spPr>
+        <p:txBody>
+          <a:bodyPr wrap="square" anchor="t" lIns="45720" rIns="45720" tIns="18288" bIns="18288">
+            <a:spAutoFit/>
+          </a:bodyPr>
+          <a:lstStyle/>
+          <a:p>
+            <a:pPr algn="ctr"/>
+            <a:r>
+              <a:rPr sz="950" b="1" i="0">
+                <a:solidFill>
+                  <a:srgbClr val="003366"/>
+                </a:solidFill>
+                <a:latin typeface="Liberation Sans"/>
+                <a:hlinkClick r:id="rId3" action="ppaction://hlinksldjump"/>
+              </a:rPr>
+              <a:t>« Torna all'agenda</a:t>
+            </a:r>
+          </a:p>
+        </p:txBody>
+      </p:sp>
+      <p:sp>
+        <p:nvSpPr>
+          <p:cNvPr id="11" name="Rounded Rectangle 10"/>
+          <p:cNvSpPr/>
+          <p:nvPr/>
+        </p:nvSpPr>
+        <p:spPr>
+          <a:xfrm>
+            <a:off x="777240" y="1965960"/>
+            <a:ext cx="5221224" cy="1997964"/>
+          </a:xfrm>
+          <a:prstGeom prst="roundRect">
+            <a:avLst/>
+          </a:prstGeom>
+          <a:solidFill>
+            <a:srgbClr val="F4F7FB"/>
+          </a:solidFill>
+          <a:ln w="12700">
+            <a:solidFill>
+              <a:srgbClr val="D8DEE4"/>
+            </a:solidFill>
+          </a:ln>
+          <a:effectLst>
+            <a:outerShdw blurRad="50800" dist="25400" dir="5400000" rotWithShape="0">
+              <a:srgbClr val="001A33">
+                <a:alpha val="42000"/>
+              </a:srgbClr>
+            </a:outerShdw>
+          </a:effectLst>
+        </p:spPr>
+        <p:style>
+          <a:lnRef idx="1">
+            <a:schemeClr val="accent1"/>
+          </a:lnRef>
+          <a:fillRef idx="3">
+            <a:schemeClr val="accent1"/>
+          </a:fillRef>
+          <a:effectRef idx="2">
+            <a:schemeClr val="accent1"/>
+          </a:effectRef>
+          <a:fontRef idx="minor">
+            <a:schemeClr val="lt1"/>
+          </a:fontRef>
+        </p:style>
+        <p:txBody>
+          <a:bodyPr rtlCol="0" anchor="ctr" wrap="square" lIns="109728" rIns="109728" tIns="36576" bIns="36576"/>
+          <a:lstStyle/>
+          <a:p>
+            <a:pPr algn="ctr"/>
+          </a:p>
+        </p:txBody>
+      </p:sp>
+      <p:sp>
+        <p:nvSpPr>
+          <p:cNvPr id="12" name="TextBox 11"/>
+          <p:cNvSpPr txBox="1"/>
+          <p:nvPr/>
+        </p:nvSpPr>
+        <p:spPr>
+          <a:xfrm>
+            <a:off x="960120" y="3063239"/>
+            <a:ext cx="4855464" cy="717804"/>
+          </a:xfrm>
+          <a:prstGeom prst="rect">
+            <a:avLst/>
+          </a:prstGeom>
+          <a:noFill/>
+        </p:spPr>
+        <p:txBody>
+          <a:bodyPr wrap="square" anchor="t" lIns="45720" rIns="45720" tIns="18288" bIns="18288">
+            <a:spAutoFit/>
+          </a:bodyPr>
+          <a:lstStyle/>
+          <a:p>
+            <a:pPr algn="ctr">
+              <a:lnSpc>
+                <a:spcPct val="112000"/>
+              </a:lnSpc>
+            </a:pPr>
+            <a:r>
+              <a:rPr sz="1400" b="0" i="0">
+                <a:solidFill>
+                  <a:srgbClr val="1A1A1A"/>
+                </a:solidFill>
+                <a:latin typeface="Liberation Sans"/>
+              </a:rPr>
+              <a:t>Accessibilità reale e multicanale: vista, udito, lingua, cognizione.</a:t>
+            </a:r>
+          </a:p>
+        </p:txBody>
+      </p:sp>
+      <p:sp>
+        <p:nvSpPr>
+          <p:cNvPr id="13" name="Oval 12"/>
+          <p:cNvSpPr/>
+          <p:nvPr/>
+        </p:nvSpPr>
+        <p:spPr>
+          <a:xfrm>
+            <a:off x="3086100" y="2231136"/>
+            <a:ext cx="603504" cy="603504"/>
+          </a:xfrm>
+          <a:prstGeom prst="ellipse">
+            <a:avLst/>
+          </a:prstGeom>
+          <a:solidFill>
+            <a:srgbClr val="003366"/>
+          </a:solidFill>
+          <a:ln>
+            <a:noFill/>
+          </a:ln>
+          <a:effectLst/>
+        </p:spPr>
+        <p:style>
+          <a:lnRef idx="1">
+            <a:schemeClr val="accent1"/>
+          </a:lnRef>
+          <a:fillRef idx="3">
+            <a:schemeClr val="accent1"/>
+          </a:fillRef>
+          <a:effectRef idx="2">
+            <a:schemeClr val="accent1"/>
+          </a:effectRef>
+          <a:fontRef idx="minor">
+            <a:schemeClr val="lt1"/>
+          </a:fontRef>
+        </p:style>
+        <p:txBody>
+          <a:bodyPr rtlCol="0" anchor="ctr" wrap="square" lIns="109728" rIns="109728" tIns="36576" bIns="36576"/>
+          <a:lstStyle/>
+          <a:p>
+            <a:pPr algn="ctr"/>
+          </a:p>
+        </p:txBody>
+      </p:sp>
+      <p:pic>
+        <p:nvPicPr>
+          <p:cNvPr id="14" name="Picture 13" descr="stars_ffffff.png"/>
+          <p:cNvPicPr>
+            <a:picLocks noChangeAspect="1"/>
+          </p:cNvPicPr>
+          <p:nvPr/>
+        </p:nvPicPr>
+        <p:blipFill>
+          <a:blip r:embed="rId4"/>
+          <a:stretch>
+            <a:fillRect/>
+          </a:stretch>
+        </p:blipFill>
+        <p:spPr>
+          <a:xfrm>
+            <a:off x="3218870" y="2363906"/>
+            <a:ext cx="337962" cy="337962"/>
+          </a:xfrm>
+          <a:prstGeom prst="rect">
+            <a:avLst/>
+          </a:prstGeom>
+        </p:spPr>
+      </p:pic>
+      <p:sp>
+        <p:nvSpPr>
+          <p:cNvPr id="15" name="Rounded Rectangle 14"/>
+          <p:cNvSpPr/>
+          <p:nvPr/>
+        </p:nvSpPr>
+        <p:spPr>
+          <a:xfrm>
+            <a:off x="6163055" y="1965960"/>
+            <a:ext cx="5221224" cy="1997964"/>
+          </a:xfrm>
+          <a:prstGeom prst="roundRect">
+            <a:avLst/>
+          </a:prstGeom>
+          <a:solidFill>
+            <a:srgbClr val="F4F7FB"/>
+          </a:solidFill>
+          <a:ln w="12700">
+            <a:solidFill>
+              <a:srgbClr val="D8DEE4"/>
+            </a:solidFill>
+          </a:ln>
+          <a:effectLst>
+            <a:outerShdw blurRad="50800" dist="25400" dir="5400000" rotWithShape="0">
+              <a:srgbClr val="001A33">
+                <a:alpha val="42000"/>
+              </a:srgbClr>
+            </a:outerShdw>
+          </a:effectLst>
+        </p:spPr>
+        <p:style>
+          <a:lnRef idx="1">
+            <a:schemeClr val="accent1"/>
+          </a:lnRef>
+          <a:fillRef idx="3">
+            <a:schemeClr val="accent1"/>
+          </a:fillRef>
+          <a:effectRef idx="2">
+            <a:schemeClr val="accent1"/>
+          </a:effectRef>
+          <a:fontRef idx="minor">
+            <a:schemeClr val="lt1"/>
+          </a:fontRef>
+        </p:style>
+        <p:txBody>
+          <a:bodyPr rtlCol="0" anchor="ctr" wrap="square" lIns="109728" rIns="109728" tIns="36576" bIns="36576"/>
+          <a:lstStyle/>
+          <a:p>
+            <a:pPr algn="ctr"/>
+          </a:p>
+        </p:txBody>
+      </p:sp>
+      <p:sp>
+        <p:nvSpPr>
+          <p:cNvPr id="16" name="TextBox 15"/>
+          <p:cNvSpPr txBox="1"/>
+          <p:nvPr/>
+        </p:nvSpPr>
+        <p:spPr>
+          <a:xfrm>
+            <a:off x="6345936" y="3063239"/>
+            <a:ext cx="4855464" cy="717804"/>
+          </a:xfrm>
+          <a:prstGeom prst="rect">
+            <a:avLst/>
+          </a:prstGeom>
+          <a:noFill/>
+        </p:spPr>
+        <p:txBody>
+          <a:bodyPr wrap="square" anchor="t" lIns="45720" rIns="45720" tIns="18288" bIns="18288">
+            <a:spAutoFit/>
+          </a:bodyPr>
+          <a:lstStyle/>
+          <a:p>
+            <a:pPr algn="ctr">
+              <a:lnSpc>
+                <a:spcPct val="112000"/>
+              </a:lnSpc>
+            </a:pPr>
+            <a:r>
+              <a:rPr sz="1400" b="0" i="0">
+                <a:solidFill>
+                  <a:srgbClr val="1A1A1A"/>
+                </a:solidFill>
+                <a:latin typeface="Liberation Sans"/>
+              </a:rPr>
+              <a:t>Dati sempre verificati e con fonte dichiarata.</a:t>
+            </a:r>
+          </a:p>
+        </p:txBody>
+      </p:sp>
+      <p:sp>
+        <p:nvSpPr>
+          <p:cNvPr id="17" name="Oval 16"/>
+          <p:cNvSpPr/>
+          <p:nvPr/>
+        </p:nvSpPr>
+        <p:spPr>
+          <a:xfrm>
+            <a:off x="8471915" y="2231136"/>
+            <a:ext cx="603504" cy="603504"/>
+          </a:xfrm>
+          <a:prstGeom prst="ellipse">
+            <a:avLst/>
+          </a:prstGeom>
+          <a:solidFill>
+            <a:srgbClr val="15803D"/>
+          </a:solidFill>
+          <a:ln>
+            <a:noFill/>
+          </a:ln>
+          <a:effectLst/>
+        </p:spPr>
+        <p:style>
+          <a:lnRef idx="1">
+            <a:schemeClr val="accent1"/>
+          </a:lnRef>
+          <a:fillRef idx="3">
+            <a:schemeClr val="accent1"/>
+          </a:fillRef>
+          <a:effectRef idx="2">
+            <a:schemeClr val="accent1"/>
+          </a:effectRef>
+          <a:fontRef idx="minor">
+            <a:schemeClr val="lt1"/>
+          </a:fontRef>
+        </p:style>
+        <p:txBody>
+          <a:bodyPr rtlCol="0" anchor="ctr" wrap="square" lIns="109728" rIns="109728" tIns="36576" bIns="36576"/>
+          <a:lstStyle/>
+          <a:p>
+            <a:pPr algn="ctr"/>
+          </a:p>
+        </p:txBody>
+      </p:sp>
+      <p:pic>
+        <p:nvPicPr>
+          <p:cNvPr id="18" name="Picture 17" descr="stars_ffffff.png"/>
+          <p:cNvPicPr>
+            <a:picLocks noChangeAspect="1"/>
+          </p:cNvPicPr>
+          <p:nvPr/>
+        </p:nvPicPr>
+        <p:blipFill>
+          <a:blip r:embed="rId4"/>
+          <a:stretch>
+            <a:fillRect/>
+          </a:stretch>
+        </p:blipFill>
+        <p:spPr>
+          <a:xfrm>
+            <a:off x="8604686" y="2363906"/>
+            <a:ext cx="337962" cy="337962"/>
+          </a:xfrm>
+          <a:prstGeom prst="rect">
+            <a:avLst/>
+          </a:prstGeom>
+        </p:spPr>
+      </p:pic>
+      <p:sp>
+        <p:nvSpPr>
+          <p:cNvPr id="19" name="Rounded Rectangle 18"/>
+          <p:cNvSpPr/>
+          <p:nvPr/>
+        </p:nvSpPr>
+        <p:spPr>
+          <a:xfrm>
+            <a:off x="777240" y="4128516"/>
+            <a:ext cx="5221224" cy="1997964"/>
+          </a:xfrm>
+          <a:prstGeom prst="roundRect">
+            <a:avLst/>
+          </a:prstGeom>
+          <a:solidFill>
+            <a:srgbClr val="F4F7FB"/>
+          </a:solidFill>
+          <a:ln w="12700">
+            <a:solidFill>
+              <a:srgbClr val="D8DEE4"/>
+            </a:solidFill>
+          </a:ln>
+          <a:effectLst>
+            <a:outerShdw blurRad="50800" dist="25400" dir="5400000" rotWithShape="0">
+              <a:srgbClr val="001A33">
+                <a:alpha val="42000"/>
+              </a:srgbClr>
+            </a:outerShdw>
+          </a:effectLst>
+        </p:spPr>
+        <p:style>
+          <a:lnRef idx="1">
+            <a:schemeClr val="accent1"/>
+          </a:lnRef>
+          <a:fillRef idx="3">
+            <a:schemeClr val="accent1"/>
+          </a:fillRef>
+          <a:effectRef idx="2">
+            <a:schemeClr val="accent1"/>
+          </a:effectRef>
+          <a:fontRef idx="minor">
+            <a:schemeClr val="lt1"/>
+          </a:fontRef>
+        </p:style>
+        <p:txBody>
+          <a:bodyPr rtlCol="0" anchor="ctr" wrap="square" lIns="109728" rIns="109728" tIns="36576" bIns="36576"/>
+          <a:lstStyle/>
+          <a:p>
+            <a:pPr algn="ctr"/>
+          </a:p>
+        </p:txBody>
+      </p:sp>
+      <p:sp>
+        <p:nvSpPr>
+          <p:cNvPr id="20" name="TextBox 19"/>
+          <p:cNvSpPr txBox="1"/>
+          <p:nvPr/>
+        </p:nvSpPr>
+        <p:spPr>
+          <a:xfrm>
+            <a:off x="960120" y="5225796"/>
+            <a:ext cx="4855464" cy="717804"/>
+          </a:xfrm>
+          <a:prstGeom prst="rect">
+            <a:avLst/>
+          </a:prstGeom>
+          <a:noFill/>
+        </p:spPr>
+        <p:txBody>
+          <a:bodyPr wrap="square" anchor="t" lIns="45720" rIns="45720" tIns="18288" bIns="18288">
+            <a:spAutoFit/>
+          </a:bodyPr>
+          <a:lstStyle/>
+          <a:p>
+            <a:pPr algn="ctr">
+              <a:lnSpc>
+                <a:spcPct val="112000"/>
+              </a:lnSpc>
+            </a:pPr>
+            <a:r>
+              <a:rPr sz="1400" b="0" i="0">
+                <a:solidFill>
+                  <a:srgbClr val="1A1A1A"/>
+                </a:solidFill>
+                <a:latin typeface="Liberation Sans"/>
+              </a:rPr>
+              <a:t>Coerenza con le prassi ufficiali della Pubblica Amministrazione.</a:t>
+            </a:r>
+          </a:p>
+        </p:txBody>
+      </p:sp>
+      <p:sp>
+        <p:nvSpPr>
+          <p:cNvPr id="21" name="Oval 20"/>
+          <p:cNvSpPr/>
+          <p:nvPr/>
+        </p:nvSpPr>
+        <p:spPr>
+          <a:xfrm>
+            <a:off x="3086100" y="4393692"/>
+            <a:ext cx="603504" cy="603504"/>
+          </a:xfrm>
+          <a:prstGeom prst="ellipse">
+            <a:avLst/>
+          </a:prstGeom>
+          <a:solidFill>
+            <a:srgbClr val="B45309"/>
+          </a:solidFill>
+          <a:ln>
+            <a:noFill/>
+          </a:ln>
+          <a:effectLst/>
+        </p:spPr>
+        <p:style>
+          <a:lnRef idx="1">
+            <a:schemeClr val="accent1"/>
+          </a:lnRef>
+          <a:fillRef idx="3">
+            <a:schemeClr val="accent1"/>
+          </a:fillRef>
+          <a:effectRef idx="2">
+            <a:schemeClr val="accent1"/>
+          </a:effectRef>
+          <a:fontRef idx="minor">
+            <a:schemeClr val="lt1"/>
+          </a:fontRef>
+        </p:style>
+        <p:txBody>
+          <a:bodyPr rtlCol="0" anchor="ctr" wrap="square" lIns="109728" rIns="109728" tIns="36576" bIns="36576"/>
+          <a:lstStyle/>
+          <a:p>
+            <a:pPr algn="ctr"/>
+          </a:p>
+        </p:txBody>
+      </p:sp>
+      <p:pic>
+        <p:nvPicPr>
+          <p:cNvPr id="22" name="Picture 21" descr="stars_ffffff.png"/>
+          <p:cNvPicPr>
+            <a:picLocks noChangeAspect="1"/>
+          </p:cNvPicPr>
+          <p:nvPr/>
+        </p:nvPicPr>
+        <p:blipFill>
+          <a:blip r:embed="rId4"/>
+          <a:stretch>
+            <a:fillRect/>
+          </a:stretch>
+        </p:blipFill>
+        <p:spPr>
+          <a:xfrm>
+            <a:off x="3218870" y="4526462"/>
+            <a:ext cx="337962" cy="337962"/>
+          </a:xfrm>
+          <a:prstGeom prst="rect">
+            <a:avLst/>
+          </a:prstGeom>
+        </p:spPr>
+      </p:pic>
+      <p:sp>
+        <p:nvSpPr>
+          <p:cNvPr id="23" name="Rounded Rectangle 22"/>
+          <p:cNvSpPr/>
+          <p:nvPr/>
+        </p:nvSpPr>
+        <p:spPr>
+          <a:xfrm>
+            <a:off x="6163055" y="4128516"/>
+            <a:ext cx="5221224" cy="1997964"/>
+          </a:xfrm>
+          <a:prstGeom prst="roundRect">
+            <a:avLst/>
+          </a:prstGeom>
+          <a:solidFill>
+            <a:srgbClr val="F4F7FB"/>
+          </a:solidFill>
+          <a:ln w="12700">
+            <a:solidFill>
+              <a:srgbClr val="D8DEE4"/>
+            </a:solidFill>
+          </a:ln>
+          <a:effectLst>
+            <a:outerShdw blurRad="50800" dist="25400" dir="5400000" rotWithShape="0">
+              <a:srgbClr val="001A33">
+                <a:alpha val="42000"/>
+              </a:srgbClr>
+            </a:outerShdw>
+          </a:effectLst>
+        </p:spPr>
+        <p:style>
+          <a:lnRef idx="1">
+            <a:schemeClr val="accent1"/>
+          </a:lnRef>
+          <a:fillRef idx="3">
+            <a:schemeClr val="accent1"/>
+          </a:fillRef>
+          <a:effectRef idx="2">
+            <a:schemeClr val="accent1"/>
+          </a:effectRef>
+          <a:fontRef idx="minor">
+            <a:schemeClr val="lt1"/>
+          </a:fontRef>
+        </p:style>
+        <p:txBody>
+          <a:bodyPr rtlCol="0" anchor="ctr" wrap="square" lIns="109728" rIns="109728" tIns="36576" bIns="36576"/>
+          <a:lstStyle/>
+          <a:p>
+            <a:pPr algn="ctr"/>
+          </a:p>
+        </p:txBody>
+      </p:sp>
+      <p:sp>
+        <p:nvSpPr>
+          <p:cNvPr id="24" name="TextBox 23"/>
+          <p:cNvSpPr txBox="1"/>
+          <p:nvPr/>
+        </p:nvSpPr>
+        <p:spPr>
+          <a:xfrm>
+            <a:off x="6345936" y="5225796"/>
+            <a:ext cx="4855464" cy="717804"/>
+          </a:xfrm>
+          <a:prstGeom prst="rect">
+            <a:avLst/>
+          </a:prstGeom>
+          <a:noFill/>
+        </p:spPr>
+        <p:txBody>
+          <a:bodyPr wrap="square" anchor="t" lIns="45720" rIns="45720" tIns="18288" bIns="18288">
+            <a:spAutoFit/>
+          </a:bodyPr>
+          <a:lstStyle/>
+          <a:p>
+            <a:pPr algn="ctr">
+              <a:lnSpc>
+                <a:spcPct val="112000"/>
+              </a:lnSpc>
+            </a:pPr>
+            <a:r>
+              <a:rPr sz="1400" b="0" i="0">
+                <a:solidFill>
+                  <a:srgbClr val="1A1A1A"/>
+                </a:solidFill>
+                <a:latin typeface="Liberation Sans"/>
+              </a:rPr>
+              <a:t>Uno strumento di servizio pubblico, sobrio e affidabile.</a:t>
+            </a:r>
+          </a:p>
+        </p:txBody>
+      </p:sp>
+      <p:sp>
+        <p:nvSpPr>
+          <p:cNvPr id="25" name="Oval 24"/>
+          <p:cNvSpPr/>
+          <p:nvPr/>
+        </p:nvSpPr>
+        <p:spPr>
+          <a:xfrm>
+            <a:off x="8471915" y="4393692"/>
+            <a:ext cx="603504" cy="603504"/>
+          </a:xfrm>
+          <a:prstGeom prst="ellipse">
+            <a:avLst/>
+          </a:prstGeom>
+          <a:solidFill>
+            <a:srgbClr val="075985"/>
+          </a:solidFill>
+          <a:ln>
+            <a:noFill/>
+          </a:ln>
+          <a:effectLst/>
+        </p:spPr>
+        <p:style>
+          <a:lnRef idx="1">
+            <a:schemeClr val="accent1"/>
+          </a:lnRef>
+          <a:fillRef idx="3">
+            <a:schemeClr val="accent1"/>
+          </a:fillRef>
+          <a:effectRef idx="2">
+            <a:schemeClr val="accent1"/>
+          </a:effectRef>
+          <a:fontRef idx="minor">
+            <a:schemeClr val="lt1"/>
+          </a:fontRef>
+        </p:style>
+        <p:txBody>
+          <a:bodyPr rtlCol="0" anchor="ctr" wrap="square" lIns="109728" rIns="109728" tIns="36576" bIns="36576"/>
+          <a:lstStyle/>
+          <a:p>
+            <a:pPr algn="ctr"/>
+          </a:p>
+        </p:txBody>
+      </p:sp>
+      <p:pic>
+        <p:nvPicPr>
+          <p:cNvPr id="26" name="Picture 25" descr="stars_ffffff.png"/>
+          <p:cNvPicPr>
+            <a:picLocks noChangeAspect="1"/>
+          </p:cNvPicPr>
+          <p:nvPr/>
+        </p:nvPicPr>
+        <p:blipFill>
+          <a:blip r:embed="rId4"/>
+          <a:stretch>
+            <a:fillRect/>
+          </a:stretch>
+        </p:blipFill>
+        <p:spPr>
+          <a:xfrm>
+            <a:off x="8604686" y="4526462"/>
+            <a:ext cx="337962" cy="337962"/>
+          </a:xfrm>
+          <a:prstGeom prst="rect">
+            <a:avLst/>
+          </a:prstGeom>
+        </p:spPr>
+      </p:pic>
+      <p:sp>
+        <p:nvSpPr>
+          <p:cNvPr id="27" name="TextBox 26"/>
+          <p:cNvSpPr txBox="1"/>
+          <p:nvPr/>
+        </p:nvSpPr>
+        <p:spPr>
+          <a:xfrm>
+            <a:off x="9857232" y="6373368"/>
+            <a:ext cx="329184" cy="365760"/>
+          </a:xfrm>
+          <a:prstGeom prst="rect">
+            <a:avLst/>
+          </a:prstGeom>
+          <a:noFill/>
+        </p:spPr>
+        <p:txBody>
+          <a:bodyPr wrap="square" anchor="t" lIns="45720" rIns="45720" tIns="18288" bIns="18288">
+            <a:spAutoFit/>
+          </a:bodyPr>
+          <a:lstStyle/>
+          <a:p>
+            <a:pPr algn="ctr"/>
+            <a:r>
+              <a:rPr sz="1500" b="1" i="0">
+                <a:solidFill>
+                  <a:srgbClr val="003366"/>
+                </a:solidFill>
+                <a:latin typeface="Liberation Sans"/>
+                <a:hlinkClick r:id="rId5" action="ppaction://hlinksldjump"/>
+              </a:rPr>
+              <a:t>‹</a:t>
+            </a:r>
+          </a:p>
+        </p:txBody>
+      </p:sp>
+      <p:sp>
+        <p:nvSpPr>
+          <p:cNvPr id="28" name="TextBox 27"/>
+          <p:cNvSpPr txBox="1"/>
+          <p:nvPr/>
+        </p:nvSpPr>
+        <p:spPr>
+          <a:xfrm>
+            <a:off x="10222992" y="6373368"/>
+            <a:ext cx="329184" cy="365760"/>
+          </a:xfrm>
+          <a:prstGeom prst="rect">
+            <a:avLst/>
+          </a:prstGeom>
+          <a:noFill/>
+        </p:spPr>
+        <p:txBody>
+          <a:bodyPr wrap="square" anchor="t" lIns="45720" rIns="45720" tIns="18288" bIns="18288">
+            <a:spAutoFit/>
+          </a:bodyPr>
+          <a:lstStyle/>
+          <a:p>
+            <a:pPr algn="ctr"/>
+            <a:r>
+              <a:rPr sz="1500" b="1" i="0">
+                <a:solidFill>
+                  <a:srgbClr val="003366"/>
+                </a:solidFill>
+                <a:latin typeface="Liberation Sans"/>
+                <a:hlinkClick r:id="rId6" action="ppaction://hlinksldjump"/>
+              </a:rPr>
+              <a:t>›</a:t>
+            </a:r>
+          </a:p>
+        </p:txBody>
+      </p:sp>
+    </p:spTree>
+  </p:cSld>
+  <p:clrMapOvr>
+    <a:masterClrMapping/>
+  </p:clrMapOvr>
+</p:sld>
+</file>
+
+<file path=ppt/slides/slide57.xml><?xml version="1.0" encoding="utf-8"?>
 <p:sld xmlns:a="http://schemas.openxmlformats.org/drawingml/2006/main" xmlns:p="http://schemas.openxmlformats.org/presentationml/2006/main" xmlns:r="http://schemas.openxmlformats.org/officeDocument/2006/relationships">
   <p:cSld>
     <p:spTree>

--- a/static/manuali/presentazione-struttura-sito.pptx
+++ b/static/manuali/presentazione-struttura-sito.pptx
@@ -6323,7 +6323,7 @@
                 </a:solidFill>
                 <a:latin typeface="Liberation Sans"/>
               </a:rPr>
-              <a:t>Fonti: INGV · DPC · ItaliaMeteo · EUMETSAT · ECMWF · Copernicus · ARPA Lazio. Codici colore: Centro Funzionale Regionale del Lazio (ISO 22324).</a:t>
+              <a:t>Fonti: INGV · DPC · ItaliaMeteo · CIMA · EUMETSAT · ECMWF · Copernicus · ARPA Lazio. Codici colore: Centro Funzionale Regionale del Lazio (ISO 22324).</a:t>
             </a:r>
           </a:p>
         </p:txBody>
@@ -8591,7 +8591,7 @@
                 </a:solidFill>
                 <a:latin typeface="Liberation Sans"/>
               </a:rPr>
-              <a:t>Fonti: DPC «Io non rischio» · INGV · ISPRA · CNR.</a:t>
+              <a:t>Fonti: DPC «Io non rischio» · INGV · ISPRA · CNR-IRPI · ReLUIS.</a:t>
             </a:r>
           </a:p>
         </p:txBody>
@@ -36663,7 +36663,7 @@
                 </a:solidFill>
                 <a:latin typeface="Liberation Sans"/>
               </a:rPr>
-              <a:t>DPC · INGV · ISPRA · CNR</a:t>
+              <a:t>DPC · INGV · ISPRA · CNR-IRPI · CIMA · CMCC · ISS</a:t>
             </a:r>
           </a:p>
         </p:txBody>
